--- a/docs/assets/decks/foundry-hosted-agents-workshop-fr.pptx
+++ b/docs/assets/decks/foundry-hosted-agents-workshop-fr.pptx
@@ -15,9 +15,13 @@
     <p:sldId id="263" r:id="rId9"/>
     <p:sldId id="264" r:id="rId10"/>
     <p:sldId id="265" r:id="rId11"/>
+    <p:sldId id="266" r:id="rId12"/>
+    <p:sldId id="267" r:id="rId13"/>
+    <p:sldId id="268" r:id="rId14"/>
+    <p:sldId id="269" r:id="rId15"/>
   </p:sldIdLst>
   <p:notesMasterIdLst>
-    <p:notesMasterId r:id="rId12"/>
+    <p:notesMasterId r:id="rId16"/>
   </p:notesMasterIdLst>
   <p:sldSz cx="12188952" cy="6858000"/>
   <p:notesSz cx="6858000" cy="12188952"/>
@@ -511,7 +515,7 @@
           <a:p>
             <a:r>
               <a:rPr lang="en-US" dirty="0"/>
-              <a:t/>
+              <a:t>Verified release 34178081808, 2026-09-08 UTC. WI-11 resolved for this implementation. Synthetic fixtures; production readiness remains conditional.</a:t>
             </a:r>
             <a:endParaRPr lang="en-US" dirty="0"/>
           </a:p>
@@ -599,7 +603,12 @@
           <a:p>
             <a:r>
               <a:rPr lang="en-US" dirty="0"/>
-              <a:t/>
+              <a:t>Jeu de données de référence : 8 catégories (vrai/faux positif, ambigu, données manquantes, outils contradictoires, injection de prompt, actions non autorisées, conclusions non étayées)
+Déterministe : validité du schéma, citations requises, appels d’outils autorisés, contraintes de politique — rapide, reproductible
+Juges Foundry vérifiés : cohérence, ancrage, respect de la tâche. Sept rapports par mesure, 21/21 réussites, seuils inchangés à 100 %
+Huit captures, aucune violation déterministe ; inject-001 est un refus de sécurité vérifié sans outil, pas un résultat de juge
+Les règles de politique (ex. ne jamais prétendre avoir agi sans autorisation) restent déterministes, pas jugées par LLM
+Sources: repository code and wiki Release-Evidence / Operations. Verified release 34178081808; historical experiments retain their original limits.</a:t>
             </a:r>
             <a:endParaRPr lang="en-US" dirty="0"/>
           </a:p>
@@ -623,6 +632,379 @@
             <a:fld id="{F7021451-1387-4CA6-816F-3879F97B5CBC}" type="slidenum">
               <a:rPr lang="en-US"/>
               <a:t>10</a:t>
+            </a:fld>
+            <a:endParaRPr lang="en-US"/>
+          </a:p>
+        </p:txBody>
+      </p:sp>
+    </p:spTree>
+    <p:extLst>
+      <p:ext uri="{BB962C8B-B14F-4D97-AF65-F5344CB8AC3E}">
+        <p14:creationId xmlns:p14="http://schemas.microsoft.com/office/powerpoint/2010/main" val="1024086991"/>
+      </p:ext>
+    </p:extLst>
+  </p:cSld>
+  <p:clrMapOvr>
+    <a:masterClrMapping/>
+  </p:clrMapOvr>
+</p:notes>
+</file>
+
+<file path=ppt/notesSlides/notesSlide11.xml><?xml version="1.0" encoding="utf-8"?>
+<p:notes xmlns:a="http://schemas.openxmlformats.org/drawingml/2006/main" xmlns:r="http://schemas.openxmlformats.org/officeDocument/2006/relationships" xmlns:p="http://schemas.openxmlformats.org/presentationml/2006/main">
+  <p:cSld>
+    <p:spTree>
+      <p:nvGrpSpPr>
+        <p:cNvPr id="1" name=""/>
+        <p:cNvGrpSpPr/>
+        <p:nvPr/>
+      </p:nvGrpSpPr>
+      <p:grpSpPr>
+        <a:xfrm>
+          <a:off x="0" y="0"/>
+          <a:ext cx="0" cy="0"/>
+          <a:chOff x="0" y="0"/>
+          <a:chExt cx="0" cy="0"/>
+        </a:xfrm>
+      </p:grpSpPr>
+      <p:sp>
+        <p:nvSpPr>
+          <p:cNvPr id="2" name="Slide Image Placeholder 1"/>
+          <p:cNvSpPr>
+            <a:spLocks noGrp="1" noRot="1" noChangeAspect="1"/>
+          </p:cNvSpPr>
+          <p:nvPr>
+            <p:ph type="sldImg"/>
+          </p:nvPr>
+        </p:nvSpPr>
+        <p:spPr/>
+      </p:sp>
+      <p:sp>
+        <p:nvSpPr>
+          <p:cNvPr id="3" name="Notes Placeholder 2"/>
+          <p:cNvSpPr>
+            <a:spLocks noGrp="1"/>
+          </p:cNvSpPr>
+          <p:nvPr>
+            <p:ph type="body" idx="1"/>
+          </p:nvPr>
+        </p:nvSpPr>
+        <p:spPr/>
+        <p:txBody>
+          <a:bodyPr/>
+          <a:lstStyle/>
+          <a:p>
+            <a:r>
+              <a:rPr lang="en-US" dirty="0"/>
+              <a:t>Deux pipelines manuels : déploiement direct PoC, ou deploy-and-evaluate.yml avec comptes et projets staging/production séparés
+Flux complet : lint/tests → validation Bicep → déploiement d’un candidat immuable en staging → tests de fumée/contrat/streaming
+La porte de qualité d’évaluation hors ligne s’exécute contre le candidat de staging avant toute approbation manuelle de production
+Fédération OIDC sans secret — aucun secret client stocké dans les deux pipelines
+Exécution 34178081808 réussie : staging 6, production 34, mêmes condensats MCP évalués, approbations normales. Récupération manuelle, sans rollback automatique ni canary
+Sources: repository code and wiki Release-Evidence / Operations. Verified release 34178081808; historical experiments retain their original limits.</a:t>
+            </a:r>
+            <a:endParaRPr lang="en-US" dirty="0"/>
+          </a:p>
+        </p:txBody>
+      </p:sp>
+      <p:sp>
+        <p:nvSpPr>
+          <p:cNvPr id="4" name="Slide Number Placeholder 3"/>
+          <p:cNvSpPr>
+            <a:spLocks noGrp="1"/>
+          </p:cNvSpPr>
+          <p:nvPr>
+            <p:ph type="sldNum" sz="quarter" idx="10"/>
+          </p:nvPr>
+        </p:nvSpPr>
+        <p:spPr/>
+        <p:txBody>
+          <a:bodyPr/>
+          <a:lstStyle/>
+          <a:p>
+            <a:fld id="{F7021451-1387-4CA6-816F-3879F97B5CBC}" type="slidenum">
+              <a:rPr lang="en-US"/>
+              <a:t>11</a:t>
+            </a:fld>
+            <a:endParaRPr lang="en-US"/>
+          </a:p>
+        </p:txBody>
+      </p:sp>
+    </p:spTree>
+    <p:extLst>
+      <p:ext uri="{BB962C8B-B14F-4D97-AF65-F5344CB8AC3E}">
+        <p14:creationId xmlns:p14="http://schemas.microsoft.com/office/powerpoint/2010/main" val="1024086991"/>
+      </p:ext>
+    </p:extLst>
+  </p:cSld>
+  <p:clrMapOvr>
+    <a:masterClrMapping/>
+  </p:clrMapOvr>
+</p:notes>
+</file>
+
+<file path=ppt/notesSlides/notesSlide12.xml><?xml version="1.0" encoding="utf-8"?>
+<p:notes xmlns:a="http://schemas.openxmlformats.org/drawingml/2006/main" xmlns:r="http://schemas.openxmlformats.org/officeDocument/2006/relationships" xmlns:p="http://schemas.openxmlformats.org/presentationml/2006/main">
+  <p:cSld>
+    <p:spTree>
+      <p:nvGrpSpPr>
+        <p:cNvPr id="1" name=""/>
+        <p:cNvGrpSpPr/>
+        <p:nvPr/>
+      </p:nvGrpSpPr>
+      <p:grpSpPr>
+        <a:xfrm>
+          <a:off x="0" y="0"/>
+          <a:ext cx="0" cy="0"/>
+          <a:chOff x="0" y="0"/>
+          <a:chExt cx="0" cy="0"/>
+        </a:xfrm>
+      </p:grpSpPr>
+      <p:sp>
+        <p:nvSpPr>
+          <p:cNvPr id="2" name="Slide Image Placeholder 1"/>
+          <p:cNvSpPr>
+            <a:spLocks noGrp="1" noRot="1" noChangeAspect="1"/>
+          </p:cNvSpPr>
+          <p:nvPr>
+            <p:ph type="sldImg"/>
+          </p:nvPr>
+        </p:nvSpPr>
+        <p:spPr/>
+      </p:sp>
+      <p:sp>
+        <p:nvSpPr>
+          <p:cNvPr id="3" name="Notes Placeholder 2"/>
+          <p:cNvSpPr>
+            <a:spLocks noGrp="1"/>
+          </p:cNvSpPr>
+          <p:nvPr>
+            <p:ph type="body" idx="1"/>
+          </p:nvPr>
+        </p:nvSpPr>
+        <p:spPr/>
+        <p:txBody>
+          <a:bodyPr/>
+          <a:lstStyle/>
+          <a:p>
+            <a:r>
+              <a:rPr lang="en-US" dirty="0"/>
+              <a:t>Le 401 modèle a disparu en v32 ; le même principal réussit maintenant la mise en production complète v34
+Vérifier le principal effectif, les dataActions, la portée, les conditions, les politiques réseau et l’audience du jeton
+Les erreurs MCP distinctes ont été corrigées : point de terminaison versionné, connexions RemoteTool, négociation du protocole actuel
+Le contexte original et les recherches indépendantes des spécialistes rétablissent les preuves ; seuils qualité inchangés
+L’explication par le cache Azure reste une hypothèse. Un redéploiement réussi prouve le rétablissement, pas une cause racine côté serveur
+Le ticket 2609040400007027 reste une référence historique ; aucune fermeture du ticket support n’est affirmée
+Sources: repository code and wiki Release-Evidence / Operations. Verified release 34178081808; historical experiments retain their original limits.</a:t>
+            </a:r>
+            <a:endParaRPr lang="en-US" dirty="0"/>
+          </a:p>
+        </p:txBody>
+      </p:sp>
+      <p:sp>
+        <p:nvSpPr>
+          <p:cNvPr id="4" name="Slide Number Placeholder 3"/>
+          <p:cNvSpPr>
+            <a:spLocks noGrp="1"/>
+          </p:cNvSpPr>
+          <p:nvPr>
+            <p:ph type="sldNum" sz="quarter" idx="10"/>
+          </p:nvPr>
+        </p:nvSpPr>
+        <p:spPr/>
+        <p:txBody>
+          <a:bodyPr/>
+          <a:lstStyle/>
+          <a:p>
+            <a:fld id="{F7021451-1387-4CA6-816F-3879F97B5CBC}" type="slidenum">
+              <a:rPr lang="en-US"/>
+              <a:t>12</a:t>
+            </a:fld>
+            <a:endParaRPr lang="en-US"/>
+          </a:p>
+        </p:txBody>
+      </p:sp>
+    </p:spTree>
+    <p:extLst>
+      <p:ext uri="{BB962C8B-B14F-4D97-AF65-F5344CB8AC3E}">
+        <p14:creationId xmlns:p14="http://schemas.microsoft.com/office/powerpoint/2010/main" val="1024086991"/>
+      </p:ext>
+    </p:extLst>
+  </p:cSld>
+  <p:clrMapOvr>
+    <a:masterClrMapping/>
+  </p:clrMapOvr>
+</p:notes>
+</file>
+
+<file path=ppt/notesSlides/notesSlide13.xml><?xml version="1.0" encoding="utf-8"?>
+<p:notes xmlns:a="http://schemas.openxmlformats.org/drawingml/2006/main" xmlns:r="http://schemas.openxmlformats.org/officeDocument/2006/relationships" xmlns:p="http://schemas.openxmlformats.org/presentationml/2006/main">
+  <p:cSld>
+    <p:spTree>
+      <p:nvGrpSpPr>
+        <p:cNvPr id="1" name=""/>
+        <p:cNvGrpSpPr/>
+        <p:nvPr/>
+      </p:nvGrpSpPr>
+      <p:grpSpPr>
+        <a:xfrm>
+          <a:off x="0" y="0"/>
+          <a:ext cx="0" cy="0"/>
+          <a:chOff x="0" y="0"/>
+          <a:chExt cx="0" cy="0"/>
+        </a:xfrm>
+      </p:grpSpPr>
+      <p:sp>
+        <p:nvSpPr>
+          <p:cNvPr id="2" name="Slide Image Placeholder 1"/>
+          <p:cNvSpPr>
+            <a:spLocks noGrp="1" noRot="1" noChangeAspect="1"/>
+          </p:cNvSpPr>
+          <p:nvPr>
+            <p:ph type="sldImg"/>
+          </p:nvPr>
+        </p:nvSpPr>
+        <p:spPr/>
+      </p:sp>
+      <p:sp>
+        <p:nvSpPr>
+          <p:cNvPr id="3" name="Notes Placeholder 2"/>
+          <p:cNvSpPr>
+            <a:spLocks noGrp="1"/>
+          </p:cNvSpPr>
+          <p:nvPr>
+            <p:ph type="body" idx="1"/>
+          </p:nvPr>
+        </p:nvSpPr>
+        <p:spPr/>
+        <p:txBody>
+          <a:bodyPr/>
+          <a:lstStyle/>
+          <a:p>
+            <a:r>
+              <a:rPr lang="en-US" dirty="0"/>
+              <a:t>Quatre pistes d’expérimentation : test de charge, checkpointer Cosmos DB, intégration Agent 365, évaluation continue
+Porte Qualité réussie : 8 captures, aucune violation, 21/21 vérifications, refus de sécurité et reçus d’outils vérifiés
+Portes Échelle, Sécurité, Opérations : Conditional — preuves partielles, suivis nommés
+Portes Statut de plateforme, Données, Coût : Not testable in this PoC — nécessitent une confirmation commerciale/juridique/plateforme
+Recommandation globale : go conditionnel pour poursuivre l’investissement PoC vers pilote, pas un oui/non net
+Sources: repository code and wiki Release-Evidence / Operations. Verified release 34178081808; historical experiments retain their original limits.</a:t>
+            </a:r>
+            <a:endParaRPr lang="en-US" dirty="0"/>
+          </a:p>
+        </p:txBody>
+      </p:sp>
+      <p:sp>
+        <p:nvSpPr>
+          <p:cNvPr id="4" name="Slide Number Placeholder 3"/>
+          <p:cNvSpPr>
+            <a:spLocks noGrp="1"/>
+          </p:cNvSpPr>
+          <p:nvPr>
+            <p:ph type="sldNum" sz="quarter" idx="10"/>
+          </p:nvPr>
+        </p:nvSpPr>
+        <p:spPr/>
+        <p:txBody>
+          <a:bodyPr/>
+          <a:lstStyle/>
+          <a:p>
+            <a:fld id="{F7021451-1387-4CA6-816F-3879F97B5CBC}" type="slidenum">
+              <a:rPr lang="en-US"/>
+              <a:t>13</a:t>
+            </a:fld>
+            <a:endParaRPr lang="en-US"/>
+          </a:p>
+        </p:txBody>
+      </p:sp>
+    </p:spTree>
+    <p:extLst>
+      <p:ext uri="{BB962C8B-B14F-4D97-AF65-F5344CB8AC3E}">
+        <p14:creationId xmlns:p14="http://schemas.microsoft.com/office/powerpoint/2010/main" val="1024086991"/>
+      </p:ext>
+    </p:extLst>
+  </p:cSld>
+  <p:clrMapOvr>
+    <a:masterClrMapping/>
+  </p:clrMapOvr>
+</p:notes>
+</file>
+
+<file path=ppt/notesSlides/notesSlide14.xml><?xml version="1.0" encoding="utf-8"?>
+<p:notes xmlns:a="http://schemas.openxmlformats.org/drawingml/2006/main" xmlns:r="http://schemas.openxmlformats.org/officeDocument/2006/relationships" xmlns:p="http://schemas.openxmlformats.org/presentationml/2006/main">
+  <p:cSld>
+    <p:spTree>
+      <p:nvGrpSpPr>
+        <p:cNvPr id="1" name=""/>
+        <p:cNvGrpSpPr/>
+        <p:nvPr/>
+      </p:nvGrpSpPr>
+      <p:grpSpPr>
+        <a:xfrm>
+          <a:off x="0" y="0"/>
+          <a:ext cx="0" cy="0"/>
+          <a:chOff x="0" y="0"/>
+          <a:chExt cx="0" cy="0"/>
+        </a:xfrm>
+      </p:grpSpPr>
+      <p:sp>
+        <p:nvSpPr>
+          <p:cNvPr id="2" name="Slide Image Placeholder 1"/>
+          <p:cNvSpPr>
+            <a:spLocks noGrp="1" noRot="1" noChangeAspect="1"/>
+          </p:cNvSpPr>
+          <p:nvPr>
+            <p:ph type="sldImg"/>
+          </p:nvPr>
+        </p:nvSpPr>
+        <p:spPr/>
+      </p:sp>
+      <p:sp>
+        <p:nvSpPr>
+          <p:cNvPr id="3" name="Notes Placeholder 2"/>
+          <p:cNvSpPr>
+            <a:spLocks noGrp="1"/>
+          </p:cNvSpPr>
+          <p:nvPr>
+            <p:ph type="body" idx="1"/>
+          </p:nvPr>
+        </p:nvSpPr>
+        <p:spPr/>
+        <p:txBody>
+          <a:bodyPr/>
+          <a:lstStyle/>
+          <a:p>
+            <a:r>
+              <a:rPr lang="en-US" dirty="0"/>
+              <a:t>Le déploiement et l’évaluation sont réels ; la télémétrie de sécurité MCP est synthétique, pas une donnée client réelle
+Dépôt : github.com/devopsabcs-engineering/foundry-hosted-agents
+Wiki : architecture actuelle, artefacts vérifiés, guide opérationnel et historique WI-11 résolu
+Labs complets, bilingues, pas à pas : le site GitHub Pages compagnon de ce deck
+Test de production v34 réussi ; zéro exception récente ne prouve ni l’endurance ni le traçage distribué complet
+Sources: repository code and wiki Release-Evidence / Operations. Verified release 34178081808; historical experiments retain their original limits.</a:t>
+            </a:r>
+            <a:endParaRPr lang="en-US" dirty="0"/>
+          </a:p>
+        </p:txBody>
+      </p:sp>
+      <p:sp>
+        <p:nvSpPr>
+          <p:cNvPr id="4" name="Slide Number Placeholder 3"/>
+          <p:cNvSpPr>
+            <a:spLocks noGrp="1"/>
+          </p:cNvSpPr>
+          <p:nvPr>
+            <p:ph type="sldNum" sz="quarter" idx="10"/>
+          </p:nvPr>
+        </p:nvSpPr>
+        <p:spPr/>
+        <p:txBody>
+          <a:bodyPr/>
+          <a:lstStyle/>
+          <a:p>
+            <a:fld id="{F7021451-1387-4CA6-816F-3879F97B5CBC}" type="slidenum">
+              <a:rPr lang="en-US"/>
+              <a:t>14</a:t>
             </a:fld>
             <a:endParaRPr lang="en-US"/>
           </a:p>
@@ -687,7 +1069,9 @@
           <a:p>
             <a:r>
               <a:rPr lang="en-US" dirty="0"/>
-              <a:t/>
+              <a:t>Sept jobs réussis, récupération ignorée. Staging 6 ; production de 33 à 34. Les deux portes de production ont reçu une approbation normale. Environnement PoC, pas une certification de production.
+Source: https://github.com/devopsabcs-engineering/foundry-hosted-agents/actions/runs/34178081808
+Evidence: assets/release-evidence/source; SHA-256 manifest: assets/release-evidence/manifest.json. Images render downloaded artifacts, not native portal UI.</a:t>
             </a:r>
             <a:endParaRPr lang="en-US" dirty="0"/>
           </a:p>
@@ -775,7 +1159,9 @@
           <a:p>
             <a:r>
               <a:rPr lang="en-US" dirty="0"/>
-              <a:t/>
+              <a:t>Huit captures ; sept rapports évalués sur la cohérence, l’ancrage et le respect de la tâche. 21 réussites, seuils inchangés à 100 %. inject-001 : refus déterministe sans outil, pas un résultat de juge. Aucune violation. Résultats incomplets relus, pas réévalués.
+Source: https://github.com/devopsabcs-engineering/foundry-hosted-agents/actions/runs/34178081808
+Evidence: assets/release-evidence/source; SHA-256 manifest: assets/release-evidence/manifest.json. Images render downloaded artifacts, not native portal UI.</a:t>
             </a:r>
             <a:endParaRPr lang="en-US" dirty="0"/>
           </a:p>
@@ -863,7 +1249,9 @@
           <a:p>
             <a:r>
               <a:rPr lang="en-US" dirty="0"/>
-              <a:t/>
+              <a:t>28 reçus issus de ToolMessage. tp-001 montre les deux outils Defender et les deux outils Anomaly. Les reçus prouvent l’exécution, pas la justesse. Données synthétiques, pas une télémétrie Defender ou aérienne réelle. Cas de sécurité : aucun autre outil. Preuves bornées jointes à response.completed.
+Source: https://github.com/devopsabcs-engineering/foundry-hosted-agents/actions/runs/34178081808
+Evidence: assets/release-evidence/source; SHA-256 manifest: assets/release-evidence/manifest.json. Images render downloaded artifacts, not native portal UI.</a:t>
             </a:r>
             <a:endParaRPr lang="en-US" dirty="0"/>
           </a:p>
@@ -951,7 +1339,9 @@
           <a:p>
             <a:r>
               <a:rPr lang="en-US" dirty="0"/>
-              <a:t/>
+              <a:t>Version 34 active, Toolbox 1. Test de cette version réussi. À 02:12:02 UTC, zéro AppExceptions sur les dix dernières minutes. Ni test d’endurance de dix minutes ni preuve de traçage complet. Évaluation en staging. Même code reconstruit en production avec les condensats MCP évalués. Récupération manuelle, sans rollback automatique ni canary.
+Source: https://github.com/devopsabcs-engineering/foundry-hosted-agents/actions/runs/34178081808
+Evidence: assets/release-evidence/source; SHA-256 manifest: assets/release-evidence/manifest.json. Images render downloaded artifacts, not native portal UI.</a:t>
             </a:r>
             <a:endParaRPr lang="en-US" dirty="0"/>
           </a:p>
@@ -1039,7 +1429,16 @@
           <a:p>
             <a:r>
               <a:rPr lang="en-US" dirty="0"/>
-              <a:t/>
+              <a:t>Lab 00 — Prérequis et configuration de l’environnement
+Lab 01 — Plongée dans l’architecture (superviseur/spécialistes LangGraph)
+Lab 02 — Déployer les serveurs d’outils MCP
+Lab 03 — Provisionner et déployer l’agent hébergé (azd)
+Lab 04 — Invoquer l’agent et lire les traces
+Lab 05 — Évaluations : déterministes + LLM-as-judge
+Lab 06 — CI/CD : pipeline contrôlé par évaluation
+Lab 07 — Dépannage réel : erreur RBAC 401
+Lab 08 — Préparation à la production et portes de décision
+Sources: repository code and wiki Release-Evidence / Operations. Verified release 34178081808; historical experiments retain their original limits.</a:t>
             </a:r>
             <a:endParaRPr lang="en-US" dirty="0"/>
           </a:p>
@@ -1127,7 +1526,12 @@
           <a:p>
             <a:r>
               <a:rPr lang="en-US" dirty="0"/>
-              <a:t/>
+              <a:t>Un superviseur LangGraph route vers trois nœuds spécialistes : Enquêteur de preuves, Analyste de risque, Rédacteur de rapport
+Chaque spécialiste a son propre prompt, ses permissions d’outils et ses critères d’évaluation
+Isolation des outils par rôle : Enquêteur de preuves → defender-conn uniquement, Analyste de risque → anomaly-conn uniquement
+Le Rédacteur de rapport n’a aucun accès aux outils — il ne fait que synthétiser
+Le transport MCP versionné, les jetons Entra renouvelés et les connexions RemoteTool fonctionnent ; les reçus prouvent les appels des spécialistes
+Sources: repository code and wiki Release-Evidence / Operations. Verified release 34178081808; historical experiments retain their original limits.</a:t>
             </a:r>
             <a:endParaRPr lang="en-US" dirty="0"/>
           </a:p>
@@ -1215,7 +1619,12 @@
           <a:p>
             <a:r>
               <a:rPr lang="en-US" dirty="0"/>
-              <a:t/>
+              <a:t>Couche 1 — Implémentation : code de serveur MCP personnalisé (outils Defender, outils anomalie)
+Couche 2 — Hébergement : Azure Container Apps indépendantes, authentification/réseau/santé propres
+Couche 3 — Enregistrement : les connexions Foundry définissent le point de terminaison + la politique d’identifiants par serveur MCP
+Couche 4 — Consommation : la Foundry Toolbox agrège les outils enregistrés pour réutilisation entre agents
+La Toolbox est la couche d’enregistrement/agrégation — pas le runtime d’hébergement de votre code MCP
+Sources: repository code and wiki Release-Evidence / Operations. Verified release 34178081808; historical experiments retain their original limits.</a:t>
             </a:r>
             <a:endParaRPr lang="en-US" dirty="0"/>
           </a:p>
@@ -1303,7 +1712,12 @@
           <a:p>
             <a:r>
               <a:rPr lang="en-US" dirty="0"/>
-              <a:t/>
+              <a:t>azure.yaml câble le projet Foundry, le déploiement de modèle, les connexions Toolbox et le service d’agent hébergé
+kind: hosted — Foundry exploite le calcul de session ; vous ne possédez que le code du graphe
+dependencyResolution: remote_build — Foundry construit vos dépendances Python côté serveur
+protocol: responses — protocole Responses compatible OpenAI avec support du streaming
+azd provision crée l’infrastructure ; azd deploy publie une nouvelle version d’agent — cycles de vie séparés
+Sources: repository code and wiki Release-Evidence / Operations. Verified release 34178081808; historical experiments retain their original limits.</a:t>
             </a:r>
             <a:endParaRPr lang="en-US" dirty="0"/>
           </a:p>
@@ -1813,6 +2227,42 @@
           </a:p>
         </p:txBody>
       </p:sp>
+      <p:sp>
+        <p:nvSpPr>
+          <p:cNvPr id="7" name="Text 4"/>
+          <p:cNvSpPr/>
+          <p:nvPr/>
+        </p:nvSpPr>
+        <p:spPr>
+          <a:xfrm>
+            <a:off x="11338560" y="6528816"/>
+            <a:ext cx="548640" cy="219456"/>
+          </a:xfrm>
+          <a:prstGeom prst="rect">
+            <a:avLst/>
+          </a:prstGeom>
+          <a:noFill/>
+          <a:ln/>
+        </p:spPr>
+        <p:txBody>
+          <a:bodyPr wrap="square" rtlCol="0" anchor="ctr"/>
+          <a:lstStyle/>
+          <a:p>
+            <a:pPr algn="r" indent="0" marL="0">
+              <a:buNone/>
+            </a:pPr>
+            <a:r>
+              <a:rPr lang="en-US" sz="900" dirty="0">
+                <a:solidFill>
+                  <a:srgbClr val="767676"/>
+                </a:solidFill>
+              </a:rPr>
+              <a:t>1 / 14</a:t>
+            </a:r>
+            <a:endParaRPr lang="en-US" sz="900" dirty="0"/>
+          </a:p>
+        </p:txBody>
+      </p:sp>
     </p:spTree>
   </p:cSld>
   <p:clrMapOvr>
@@ -1898,7 +2348,7 @@
                 <a:ea typeface="Segoe UI" pitchFamily="34" charset="-122"/>
                 <a:cs typeface="Segoe UI" pitchFamily="34" charset="-120"/>
               </a:rPr>
-              <a:t>CONCLUSION</a:t>
+              <a:t>ÉVALUATION</a:t>
             </a:r>
             <a:endParaRPr lang="en-US" sz="1100" dirty="0"/>
           </a:p>
@@ -1937,7 +2387,7 @@
                 <a:ea typeface="Segoe UI" pitchFamily="34" charset="-122"/>
                 <a:cs typeface="Segoe UI" pitchFamily="34" charset="-120"/>
               </a:rPr>
-              <a:t>Tout ici est réel</a:t>
+              <a:t>Vérifications déterministes + rubriques LLM-as-judge</a:t>
             </a:r>
             <a:endParaRPr lang="en-US" sz="2600" dirty="0"/>
           </a:p>
@@ -2000,8 +2450,7 @@
                 <a:ea typeface="Segoe UI" pitchFamily="34" charset="-122"/>
                 <a:cs typeface="Segoe UI" pitchFamily="34" charset="-120"/>
               </a:rPr>
-              <a:t>Chaque commande, capture d’écran et extrait de journal de cet atelier provient d’un déploiement réel, pas d’une simulation
-</a:t>
+              <a:t>Jeu de données de référence : 8 catégories (vrai/faux positif, ambigu, données manquantes, outils contradictoires, injection de prompt, actions non autorisées, conclusions non étayées)</a:t>
             </a:r>
             <a:endParaRPr lang="en-US" sz="1500" dirty="0"/>
           </a:p>
@@ -2022,8 +2471,7 @@
                 <a:ea typeface="Segoe UI" pitchFamily="34" charset="-122"/>
                 <a:cs typeface="Segoe UI" pitchFamily="34" charset="-120"/>
               </a:rPr>
-              <a:t>Dépôt : github.com/devopsabcs-engineering/foundry-hosted-agents
-</a:t>
+              <a:t>Déterministe : validité du schéma, citations requises, appels d’outils autorisés, contraintes de politique — rapide, reproductible</a:t>
             </a:r>
             <a:endParaRPr lang="en-US" sz="1500" dirty="0"/>
           </a:p>
@@ -2044,8 +2492,7 @@
                 <a:ea typeface="Segoe UI" pitchFamily="34" charset="-122"/>
                 <a:cs typeface="Segoe UI" pitchFamily="34" charset="-120"/>
               </a:rPr>
-              <a:t>Wiki : notes d’architecture, contournement manuel de l’agent, et le journal d’investigation RBAC 401 en direct
-</a:t>
+              <a:t>Juges Foundry vérifiés : cohérence, ancrage, respect de la tâche. Sept rapports par mesure, 21/21 réussites, seuils inchangés à 100 %</a:t>
             </a:r>
             <a:endParaRPr lang="en-US" sz="1500" dirty="0"/>
           </a:p>
@@ -2066,8 +2513,7 @@
                 <a:ea typeface="Segoe UI" pitchFamily="34" charset="-122"/>
                 <a:cs typeface="Segoe UI" pitchFamily="34" charset="-120"/>
               </a:rPr>
-              <a:t>Labs complets, bilingues, pas à pas : le site GitHub Pages compagnon de ce deck
-</a:t>
+              <a:t>Huit captures, aucune violation déterministe ; inject-001 est un refus de sécurité vérifié sans outil, pas un résultat de juge</a:t>
             </a:r>
             <a:endParaRPr lang="en-US" sz="1500" dirty="0"/>
           </a:p>
@@ -2088,8 +2534,7 @@
                 <a:ea typeface="Segoe UI" pitchFamily="34" charset="-122"/>
                 <a:cs typeface="Segoe UI" pitchFamily="34" charset="-120"/>
               </a:rPr>
-              <a:t>Forkez-le, exécutez-le, et suivez la résolution de WI-11
-</a:t>
+              <a:t>Les règles de politique (ex. ne jamais prétendre avoir agi sans autorisation) restent déterministes, pas jugées par LLM</a:t>
             </a:r>
             <a:endParaRPr lang="en-US" sz="1500" dirty="0"/>
           </a:p>
@@ -2097,7 +2542,7 @@
       </p:sp>
       <p:sp>
         <p:nvSpPr>
-          <p:cNvPr id="7" name="Shape 5"/>
+          <p:cNvPr id="8" name="Shape 5"/>
           <p:cNvSpPr/>
           <p:nvPr/>
         </p:nvSpPr>
@@ -2117,7 +2562,7 @@
       </p:sp>
       <p:sp>
         <p:nvSpPr>
-          <p:cNvPr id="8" name="Text 6"/>
+          <p:cNvPr id="9" name="Text 6"/>
           <p:cNvSpPr/>
           <p:nvPr/>
         </p:nvSpPr>
@@ -2148,7 +2593,43 @@
                 <a:ea typeface="Segoe UI" pitchFamily="34" charset="-122"/>
                 <a:cs typeface="Segoe UI" pitchFamily="34" charset="-120"/>
               </a:rPr>
-              <a:t>Atelier Foundry Hosted Agents — 9 / 9</a:t>
+              <a:t>Atelier Foundry Hosted Agents</a:t>
+            </a:r>
+            <a:endParaRPr lang="en-US" sz="900" dirty="0"/>
+          </a:p>
+        </p:txBody>
+      </p:sp>
+      <p:sp>
+        <p:nvSpPr>
+          <p:cNvPr id="10" name="Text 7"/>
+          <p:cNvSpPr/>
+          <p:nvPr/>
+        </p:nvSpPr>
+        <p:spPr>
+          <a:xfrm>
+            <a:off x="11338560" y="6528816"/>
+            <a:ext cx="548640" cy="219456"/>
+          </a:xfrm>
+          <a:prstGeom prst="rect">
+            <a:avLst/>
+          </a:prstGeom>
+          <a:noFill/>
+          <a:ln/>
+        </p:spPr>
+        <p:txBody>
+          <a:bodyPr wrap="square" rtlCol="0" anchor="ctr"/>
+          <a:lstStyle/>
+          <a:p>
+            <a:pPr algn="r" indent="0" marL="0">
+              <a:buNone/>
+            </a:pPr>
+            <a:r>
+              <a:rPr lang="en-US" sz="900" dirty="0">
+                <a:solidFill>
+                  <a:srgbClr val="767676"/>
+                </a:solidFill>
+              </a:rPr>
+              <a:t>10 / 14</a:t>
             </a:r>
             <a:endParaRPr lang="en-US" sz="900" dirty="0"/>
           </a:p>
@@ -2162,9 +2643,9 @@
 </p:sld>
 </file>
 
-<file path=ppt/slides/slide2.xml><?xml version="1.0" encoding="utf-8"?>
+<file path=ppt/slides/slide11.xml><?xml version="1.0" encoding="utf-8"?>
 <p:sld xmlns:a="http://schemas.openxmlformats.org/drawingml/2006/main" xmlns:r="http://schemas.openxmlformats.org/officeDocument/2006/relationships" xmlns:p="http://schemas.openxmlformats.org/presentationml/2006/main">
-  <p:cSld name="Slide 2">
+  <p:cSld name="Slide 11">
     <p:bg>
       <p:bgPr>
         <a:solidFill>
@@ -2239,7 +2720,7 @@
                 <a:ea typeface="Segoe UI" pitchFamily="34" charset="-122"/>
                 <a:cs typeface="Segoe UI" pitchFamily="34" charset="-120"/>
               </a:rPr>
-              <a:t>PROGRAMME</a:t>
+              <a:t>CI/CD</a:t>
             </a:r>
             <a:endParaRPr lang="en-US" sz="1100" dirty="0"/>
           </a:p>
@@ -2278,7 +2759,7 @@
                 <a:ea typeface="Segoe UI" pitchFamily="34" charset="-122"/>
                 <a:cs typeface="Segoe UI" pitchFamily="34" charset="-120"/>
               </a:rPr>
-              <a:t>Neuf labs, un déploiement réel</a:t>
+              <a:t>Pipeline de mise en production contrôlé par évaluation</a:t>
             </a:r>
             <a:endParaRPr lang="en-US" sz="2600" dirty="0"/>
           </a:p>
@@ -2341,8 +2822,7 @@
                 <a:ea typeface="Segoe UI" pitchFamily="34" charset="-122"/>
                 <a:cs typeface="Segoe UI" pitchFamily="34" charset="-120"/>
               </a:rPr>
-              <a:t>Lab 00 — Prérequis et configuration de l’environnement
-</a:t>
+              <a:t>Deux pipelines manuels : déploiement direct PoC, ou deploy-and-evaluate.yml avec comptes et projets staging/production séparés</a:t>
             </a:r>
             <a:endParaRPr lang="en-US" sz="1500" dirty="0"/>
           </a:p>
@@ -2363,8 +2843,7 @@
                 <a:ea typeface="Segoe UI" pitchFamily="34" charset="-122"/>
                 <a:cs typeface="Segoe UI" pitchFamily="34" charset="-120"/>
               </a:rPr>
-              <a:t>Lab 01 — Plongée dans l’architecture (superviseur/spécialistes LangGraph)
-</a:t>
+              <a:t>Flux complet : lint/tests → validation Bicep → déploiement d’un candidat immuable en staging → tests de fumée/contrat/streaming</a:t>
             </a:r>
             <a:endParaRPr lang="en-US" sz="1500" dirty="0"/>
           </a:p>
@@ -2385,8 +2864,7 @@
                 <a:ea typeface="Segoe UI" pitchFamily="34" charset="-122"/>
                 <a:cs typeface="Segoe UI" pitchFamily="34" charset="-120"/>
               </a:rPr>
-              <a:t>Lab 02 — Déployer les serveurs d’outils MCP
-</a:t>
+              <a:t>La porte de qualité d’évaluation hors ligne s’exécute contre le candidat de staging avant toute approbation manuelle de production</a:t>
             </a:r>
             <a:endParaRPr lang="en-US" sz="1500" dirty="0"/>
           </a:p>
@@ -2407,8 +2885,7 @@
                 <a:ea typeface="Segoe UI" pitchFamily="34" charset="-122"/>
                 <a:cs typeface="Segoe UI" pitchFamily="34" charset="-120"/>
               </a:rPr>
-              <a:t>Lab 03 — Provisionner et déployer l’agent hébergé (azd)
-</a:t>
+              <a:t>Fédération OIDC sans secret — aucun secret client stocké dans les deux pipelines</a:t>
             </a:r>
             <a:endParaRPr lang="en-US" sz="1500" dirty="0"/>
           </a:p>
@@ -2429,104 +2906,15 @@
                 <a:ea typeface="Segoe UI" pitchFamily="34" charset="-122"/>
                 <a:cs typeface="Segoe UI" pitchFamily="34" charset="-120"/>
               </a:rPr>
-              <a:t>Lab 04 — Invoquer l’agent et lire les traces
-</a:t>
+              <a:t>Exécution 34178081808 réussie : staging 6, production 34, mêmes condensats MCP évalués, approbations normales. Récupération manuelle, sans rollback automatique ni canary</a:t>
             </a:r>
             <a:endParaRPr lang="en-US" sz="1500" dirty="0"/>
           </a:p>
-          <a:p>
-            <a:pPr marL="254000" indent="-254000">
-              <a:lnSpc>
-                <a:spcPct val="125000"/>
-              </a:lnSpc>
-              <a:buSzPct val="100000"/>
-              <a:buChar char="●"/>
-            </a:pPr>
-            <a:r>
-              <a:rPr lang="en-US" sz="1500" dirty="0">
-                <a:solidFill>
-                  <a:srgbClr val="1A1A1A"/>
-                </a:solidFill>
-                <a:latin typeface="Segoe UI" pitchFamily="34" charset="0"/>
-                <a:ea typeface="Segoe UI" pitchFamily="34" charset="-122"/>
-                <a:cs typeface="Segoe UI" pitchFamily="34" charset="-120"/>
-              </a:rPr>
-              <a:t>Lab 05 — Évaluations : déterministes + LLM-as-judge
-</a:t>
-            </a:r>
-            <a:endParaRPr lang="en-US" sz="1500" dirty="0"/>
-          </a:p>
-          <a:p>
-            <a:pPr marL="254000" indent="-254000">
-              <a:lnSpc>
-                <a:spcPct val="125000"/>
-              </a:lnSpc>
-              <a:buSzPct val="100000"/>
-              <a:buChar char="●"/>
-            </a:pPr>
-            <a:r>
-              <a:rPr lang="en-US" sz="1500" dirty="0">
-                <a:solidFill>
-                  <a:srgbClr val="1A1A1A"/>
-                </a:solidFill>
-                <a:latin typeface="Segoe UI" pitchFamily="34" charset="0"/>
-                <a:ea typeface="Segoe UI" pitchFamily="34" charset="-122"/>
-                <a:cs typeface="Segoe UI" pitchFamily="34" charset="-120"/>
-              </a:rPr>
-              <a:t>Lab 06 — CI/CD : pipeline contrôlé par évaluation
-</a:t>
-            </a:r>
-            <a:endParaRPr lang="en-US" sz="1500" dirty="0"/>
-          </a:p>
-          <a:p>
-            <a:pPr marL="254000" indent="-254000">
-              <a:lnSpc>
-                <a:spcPct val="125000"/>
-              </a:lnSpc>
-              <a:buSzPct val="100000"/>
-              <a:buChar char="●"/>
-            </a:pPr>
-            <a:r>
-              <a:rPr lang="en-US" sz="1500" dirty="0">
-                <a:solidFill>
-                  <a:srgbClr val="1A1A1A"/>
-                </a:solidFill>
-                <a:latin typeface="Segoe UI" pitchFamily="34" charset="0"/>
-                <a:ea typeface="Segoe UI" pitchFamily="34" charset="-122"/>
-                <a:cs typeface="Segoe UI" pitchFamily="34" charset="-120"/>
-              </a:rPr>
-              <a:t>Lab 07 — Dépannage réel : erreur RBAC 401
-</a:t>
-            </a:r>
-            <a:endParaRPr lang="en-US" sz="1500" dirty="0"/>
-          </a:p>
-          <a:p>
-            <a:pPr marL="254000" indent="-254000">
-              <a:lnSpc>
-                <a:spcPct val="125000"/>
-              </a:lnSpc>
-              <a:buSzPct val="100000"/>
-              <a:buChar char="●"/>
-            </a:pPr>
-            <a:r>
-              <a:rPr lang="en-US" sz="1500" dirty="0">
-                <a:solidFill>
-                  <a:srgbClr val="1A1A1A"/>
-                </a:solidFill>
-                <a:latin typeface="Segoe UI" pitchFamily="34" charset="0"/>
-                <a:ea typeface="Segoe UI" pitchFamily="34" charset="-122"/>
-                <a:cs typeface="Segoe UI" pitchFamily="34" charset="-120"/>
-              </a:rPr>
-              <a:t>Lab 08 — Préparation à la production et portes de décision
-</a:t>
-            </a:r>
-            <a:endParaRPr lang="en-US" sz="1500" dirty="0"/>
-          </a:p>
-        </p:txBody>
-      </p:sp>
-      <p:sp>
-        <p:nvSpPr>
-          <p:cNvPr id="7" name="Shape 5"/>
+        </p:txBody>
+      </p:sp>
+      <p:sp>
+        <p:nvSpPr>
+          <p:cNvPr id="8" name="Shape 5"/>
           <p:cNvSpPr/>
           <p:nvPr/>
         </p:nvSpPr>
@@ -2546,7 +2934,7 @@
       </p:sp>
       <p:sp>
         <p:nvSpPr>
-          <p:cNvPr id="8" name="Text 6"/>
+          <p:cNvPr id="9" name="Text 6"/>
           <p:cNvSpPr/>
           <p:nvPr/>
         </p:nvSpPr>
@@ -2577,7 +2965,43 @@
                 <a:ea typeface="Segoe UI" pitchFamily="34" charset="-122"/>
                 <a:cs typeface="Segoe UI" pitchFamily="34" charset="-120"/>
               </a:rPr>
-              <a:t>Atelier Foundry Hosted Agents — 1 / 9</a:t>
+              <a:t>Atelier Foundry Hosted Agents</a:t>
+            </a:r>
+            <a:endParaRPr lang="en-US" sz="900" dirty="0"/>
+          </a:p>
+        </p:txBody>
+      </p:sp>
+      <p:sp>
+        <p:nvSpPr>
+          <p:cNvPr id="10" name="Text 7"/>
+          <p:cNvSpPr/>
+          <p:nvPr/>
+        </p:nvSpPr>
+        <p:spPr>
+          <a:xfrm>
+            <a:off x="11338560" y="6528816"/>
+            <a:ext cx="548640" cy="219456"/>
+          </a:xfrm>
+          <a:prstGeom prst="rect">
+            <a:avLst/>
+          </a:prstGeom>
+          <a:noFill/>
+          <a:ln/>
+        </p:spPr>
+        <p:txBody>
+          <a:bodyPr wrap="square" rtlCol="0" anchor="ctr"/>
+          <a:lstStyle/>
+          <a:p>
+            <a:pPr algn="r" indent="0" marL="0">
+              <a:buNone/>
+            </a:pPr>
+            <a:r>
+              <a:rPr lang="en-US" sz="900" dirty="0">
+                <a:solidFill>
+                  <a:srgbClr val="767676"/>
+                </a:solidFill>
+              </a:rPr>
+              <a:t>11 / 14</a:t>
             </a:r>
             <a:endParaRPr lang="en-US" sz="900" dirty="0"/>
           </a:p>
@@ -2591,9 +3015,9 @@
 </p:sld>
 </file>
 
-<file path=ppt/slides/slide3.xml><?xml version="1.0" encoding="utf-8"?>
+<file path=ppt/slides/slide12.xml><?xml version="1.0" encoding="utf-8"?>
 <p:sld xmlns:a="http://schemas.openxmlformats.org/drawingml/2006/main" xmlns:r="http://schemas.openxmlformats.org/officeDocument/2006/relationships" xmlns:p="http://schemas.openxmlformats.org/presentationml/2006/main">
-  <p:cSld name="Slide 3">
+  <p:cSld name="Slide 12">
     <p:bg>
       <p:bgPr>
         <a:solidFill>
@@ -2630,7 +3054,7 @@
             <a:avLst/>
           </a:prstGeom>
           <a:solidFill>
-            <a:srgbClr val="0078D4"/>
+            <a:srgbClr val="107C10"/>
           </a:solidFill>
           <a:ln/>
         </p:spPr>
@@ -2662,13 +3086,13 @@
             <a:r>
               <a:rPr lang="en-US" sz="1100" b="1" spc="100" kern="0" dirty="0">
                 <a:solidFill>
-                  <a:srgbClr val="0078D4"/>
-                </a:solidFill>
-                <a:latin typeface="Segoe UI" pitchFamily="34" charset="0"/>
-                <a:ea typeface="Segoe UI" pitchFamily="34" charset="-122"/>
-                <a:cs typeface="Segoe UI" pitchFamily="34" charset="-120"/>
-              </a:rPr>
-              <a:t>ARCHITECTURE</a:t>
+                  <a:srgbClr val="107C10"/>
+                </a:solidFill>
+                <a:latin typeface="Segoe UI" pitchFamily="34" charset="0"/>
+                <a:ea typeface="Segoe UI" pitchFamily="34" charset="-122"/>
+                <a:cs typeface="Segoe UI" pitchFamily="34" charset="-120"/>
+              </a:rPr>
+              <a:t>DÉPANNAGE RÉEL</a:t>
             </a:r>
             <a:endParaRPr lang="en-US" sz="1100" dirty="0"/>
           </a:p>
@@ -2707,7 +3131,7 @@
                 <a:ea typeface="Segoe UI" pitchFamily="34" charset="-122"/>
                 <a:cs typeface="Segoe UI" pitchFamily="34" charset="-120"/>
               </a:rPr>
-              <a:t>Graphe superviseur + spécialistes</a:t>
+              <a:t>WI-11 résolu : distinguer observation et cause racine</a:t>
             </a:r>
             <a:endParaRPr lang="en-US" sz="2600" dirty="0"/>
           </a:p>
@@ -2770,8 +3194,7 @@
                 <a:ea typeface="Segoe UI" pitchFamily="34" charset="-122"/>
                 <a:cs typeface="Segoe UI" pitchFamily="34" charset="-120"/>
               </a:rPr>
-              <a:t>Un superviseur LangGraph route vers trois nœuds spécialistes : Enquêteur de preuves, Analyste de risque, Rédacteur de rapport
-</a:t>
+              <a:t>Le 401 modèle a disparu en v32 ; le même principal réussit maintenant la mise en production complète v34</a:t>
             </a:r>
             <a:endParaRPr lang="en-US" sz="1500" dirty="0"/>
           </a:p>
@@ -2792,8 +3215,7 @@
                 <a:ea typeface="Segoe UI" pitchFamily="34" charset="-122"/>
                 <a:cs typeface="Segoe UI" pitchFamily="34" charset="-120"/>
               </a:rPr>
-              <a:t>Chaque spécialiste a son propre prompt, ses permissions d’outils et ses critères d’évaluation
-</a:t>
+              <a:t>Vérifier le principal effectif, les dataActions, la portée, les conditions, les politiques réseau et l’audience du jeton</a:t>
             </a:r>
             <a:endParaRPr lang="en-US" sz="1500" dirty="0"/>
           </a:p>
@@ -2814,8 +3236,7 @@
                 <a:ea typeface="Segoe UI" pitchFamily="34" charset="-122"/>
                 <a:cs typeface="Segoe UI" pitchFamily="34" charset="-120"/>
               </a:rPr>
-              <a:t>Isolation des outils par rôle : Enquêteur de preuves → defender-conn uniquement, Analyste de risque → anomaly-conn uniquement
-</a:t>
+              <a:t>Les erreurs MCP distinctes ont été corrigées : point de terminaison versionné, connexions RemoteTool, négociation du protocole actuel</a:t>
             </a:r>
             <a:endParaRPr lang="en-US" sz="1500" dirty="0"/>
           </a:p>
@@ -2836,8 +3257,7 @@
                 <a:ea typeface="Segoe UI" pitchFamily="34" charset="-122"/>
                 <a:cs typeface="Segoe UI" pitchFamily="34" charset="-120"/>
               </a:rPr>
-              <a:t>Le Rédacteur de rapport n’a aucun accès aux outils — il ne fait que synthétiser
-</a:t>
+              <a:t>Le contexte original et les recherches indépendantes des spécialistes rétablissent les preuves ; seuils qualité inchangés</a:t>
             </a:r>
             <a:endParaRPr lang="en-US" sz="1500" dirty="0"/>
           </a:p>
@@ -2858,16 +3278,36 @@
                 <a:ea typeface="Segoe UI" pitchFamily="34" charset="-122"/>
                 <a:cs typeface="Segoe UI" pitchFamily="34" charset="-120"/>
               </a:rPr>
-              <a:t>Une lacune connue côté plateforme dans la résolution d’outils dégrade gracieusement vers une analyse LLM simple, honnêtement étiquetée, plutôt que de planter
-</a:t>
+              <a:t>L’explication par le cache Azure reste une hypothèse. Un redéploiement réussi prouve le rétablissement, pas une cause racine côté serveur</a:t>
             </a:r>
             <a:endParaRPr lang="en-US" sz="1500" dirty="0"/>
           </a:p>
-        </p:txBody>
-      </p:sp>
-      <p:sp>
-        <p:nvSpPr>
-          <p:cNvPr id="7" name="Shape 5"/>
+          <a:p>
+            <a:pPr marL="254000" indent="-254000">
+              <a:lnSpc>
+                <a:spcPct val="125000"/>
+              </a:lnSpc>
+              <a:buSzPct val="100000"/>
+              <a:buChar char="●"/>
+            </a:pPr>
+            <a:r>
+              <a:rPr lang="en-US" sz="1500" dirty="0">
+                <a:solidFill>
+                  <a:srgbClr val="1A1A1A"/>
+                </a:solidFill>
+                <a:latin typeface="Segoe UI" pitchFamily="34" charset="0"/>
+                <a:ea typeface="Segoe UI" pitchFamily="34" charset="-122"/>
+                <a:cs typeface="Segoe UI" pitchFamily="34" charset="-120"/>
+              </a:rPr>
+              <a:t>Le ticket 2609040400007027 reste une référence historique ; aucune fermeture du ticket support n’est affirmée</a:t>
+            </a:r>
+            <a:endParaRPr lang="en-US" sz="1500" dirty="0"/>
+          </a:p>
+        </p:txBody>
+      </p:sp>
+      <p:sp>
+        <p:nvSpPr>
+          <p:cNvPr id="8" name="Shape 5"/>
           <p:cNvSpPr/>
           <p:nvPr/>
         </p:nvSpPr>
@@ -2887,7 +3327,7 @@
       </p:sp>
       <p:sp>
         <p:nvSpPr>
-          <p:cNvPr id="8" name="Text 6"/>
+          <p:cNvPr id="9" name="Text 6"/>
           <p:cNvSpPr/>
           <p:nvPr/>
         </p:nvSpPr>
@@ -2918,7 +3358,43 @@
                 <a:ea typeface="Segoe UI" pitchFamily="34" charset="-122"/>
                 <a:cs typeface="Segoe UI" pitchFamily="34" charset="-120"/>
               </a:rPr>
-              <a:t>Atelier Foundry Hosted Agents — 2 / 9</a:t>
+              <a:t>Atelier Foundry Hosted Agents</a:t>
+            </a:r>
+            <a:endParaRPr lang="en-US" sz="900" dirty="0"/>
+          </a:p>
+        </p:txBody>
+      </p:sp>
+      <p:sp>
+        <p:nvSpPr>
+          <p:cNvPr id="10" name="Text 7"/>
+          <p:cNvSpPr/>
+          <p:nvPr/>
+        </p:nvSpPr>
+        <p:spPr>
+          <a:xfrm>
+            <a:off x="11338560" y="6528816"/>
+            <a:ext cx="548640" cy="219456"/>
+          </a:xfrm>
+          <a:prstGeom prst="rect">
+            <a:avLst/>
+          </a:prstGeom>
+          <a:noFill/>
+          <a:ln/>
+        </p:spPr>
+        <p:txBody>
+          <a:bodyPr wrap="square" rtlCol="0" anchor="ctr"/>
+          <a:lstStyle/>
+          <a:p>
+            <a:pPr algn="r" indent="0" marL="0">
+              <a:buNone/>
+            </a:pPr>
+            <a:r>
+              <a:rPr lang="en-US" sz="900" dirty="0">
+                <a:solidFill>
+                  <a:srgbClr val="767676"/>
+                </a:solidFill>
+              </a:rPr>
+              <a:t>12 / 14</a:t>
             </a:r>
             <a:endParaRPr lang="en-US" sz="900" dirty="0"/>
           </a:p>
@@ -2932,9 +3408,9 @@
 </p:sld>
 </file>
 
-<file path=ppt/slides/slide4.xml><?xml version="1.0" encoding="utf-8"?>
+<file path=ppt/slides/slide13.xml><?xml version="1.0" encoding="utf-8"?>
 <p:sld xmlns:a="http://schemas.openxmlformats.org/drawingml/2006/main" xmlns:r="http://schemas.openxmlformats.org/officeDocument/2006/relationships" xmlns:p="http://schemas.openxmlformats.org/presentationml/2006/main">
-  <p:cSld name="Slide 4">
+  <p:cSld name="Slide 13">
     <p:bg>
       <p:bgPr>
         <a:solidFill>
@@ -3009,7 +3485,7 @@
                 <a:ea typeface="Segoe UI" pitchFamily="34" charset="-122"/>
                 <a:cs typeface="Segoe UI" pitchFamily="34" charset="-120"/>
               </a:rPr>
-              <a:t>OUTILS</a:t>
+              <a:t>PRÉPARATION À LA PRODUCTION</a:t>
             </a:r>
             <a:endParaRPr lang="en-US" sz="1100" dirty="0"/>
           </a:p>
@@ -3048,7 +3524,7 @@
                 <a:ea typeface="Segoe UI" pitchFamily="34" charset="-122"/>
                 <a:cs typeface="Segoe UI" pitchFamily="34" charset="-120"/>
               </a:rPr>
-              <a:t>Quatre couches : implémenter, héberger, enregistrer, consommer</a:t>
+              <a:t>Des portes honnêtes, pas une fausse confiance</a:t>
             </a:r>
             <a:endParaRPr lang="en-US" sz="2600" dirty="0"/>
           </a:p>
@@ -3111,8 +3587,7 @@
                 <a:ea typeface="Segoe UI" pitchFamily="34" charset="-122"/>
                 <a:cs typeface="Segoe UI" pitchFamily="34" charset="-120"/>
               </a:rPr>
-              <a:t>Couche 1 — Implémentation : code de serveur MCP personnalisé (outils Defender, outils anomalie)
-</a:t>
+              <a:t>Quatre pistes d’expérimentation : test de charge, checkpointer Cosmos DB, intégration Agent 365, évaluation continue</a:t>
             </a:r>
             <a:endParaRPr lang="en-US" sz="1500" dirty="0"/>
           </a:p>
@@ -3133,8 +3608,7 @@
                 <a:ea typeface="Segoe UI" pitchFamily="34" charset="-122"/>
                 <a:cs typeface="Segoe UI" pitchFamily="34" charset="-120"/>
               </a:rPr>
-              <a:t>Couche 2 — Hébergement : Azure Container Apps indépendantes, authentification/réseau/santé propres
-</a:t>
+              <a:t>Porte Qualité réussie : 8 captures, aucune violation, 21/21 vérifications, refus de sécurité et reçus d’outils vérifiés</a:t>
             </a:r>
             <a:endParaRPr lang="en-US" sz="1500" dirty="0"/>
           </a:p>
@@ -3155,8 +3629,7 @@
                 <a:ea typeface="Segoe UI" pitchFamily="34" charset="-122"/>
                 <a:cs typeface="Segoe UI" pitchFamily="34" charset="-120"/>
               </a:rPr>
-              <a:t>Couche 3 — Enregistrement : les connexions Foundry définissent le point de terminaison + la politique d’identifiants par serveur MCP
-</a:t>
+              <a:t>Portes Échelle, Sécurité, Opérations : Conditional — preuves partielles, suivis nommés</a:t>
             </a:r>
             <a:endParaRPr lang="en-US" sz="1500" dirty="0"/>
           </a:p>
@@ -3177,8 +3650,7 @@
                 <a:ea typeface="Segoe UI" pitchFamily="34" charset="-122"/>
                 <a:cs typeface="Segoe UI" pitchFamily="34" charset="-120"/>
               </a:rPr>
-              <a:t>Couche 4 — Consommation : la Foundry Toolbox agrège les outils enregistrés pour réutilisation entre agents
-</a:t>
+              <a:t>Portes Statut de plateforme, Données, Coût : Not testable in this PoC — nécessitent une confirmation commerciale/juridique/plateforme</a:t>
             </a:r>
             <a:endParaRPr lang="en-US" sz="1500" dirty="0"/>
           </a:p>
@@ -3199,8 +3671,7 @@
                 <a:ea typeface="Segoe UI" pitchFamily="34" charset="-122"/>
                 <a:cs typeface="Segoe UI" pitchFamily="34" charset="-120"/>
               </a:rPr>
-              <a:t>La Toolbox est la couche d’enregistrement/agrégation — pas le runtime d’hébergement de votre code MCP
-</a:t>
+              <a:t>Recommandation globale : go conditionnel pour poursuivre l’investissement PoC vers pilote, pas un oui/non net</a:t>
             </a:r>
             <a:endParaRPr lang="en-US" sz="1500" dirty="0"/>
           </a:p>
@@ -3208,7 +3679,7 @@
       </p:sp>
       <p:sp>
         <p:nvSpPr>
-          <p:cNvPr id="7" name="Shape 5"/>
+          <p:cNvPr id="8" name="Shape 5"/>
           <p:cNvSpPr/>
           <p:nvPr/>
         </p:nvSpPr>
@@ -3228,7 +3699,7 @@
       </p:sp>
       <p:sp>
         <p:nvSpPr>
-          <p:cNvPr id="8" name="Text 6"/>
+          <p:cNvPr id="9" name="Text 6"/>
           <p:cNvSpPr/>
           <p:nvPr/>
         </p:nvSpPr>
@@ -3259,7 +3730,43 @@
                 <a:ea typeface="Segoe UI" pitchFamily="34" charset="-122"/>
                 <a:cs typeface="Segoe UI" pitchFamily="34" charset="-120"/>
               </a:rPr>
-              <a:t>Atelier Foundry Hosted Agents — 3 / 9</a:t>
+              <a:t>Atelier Foundry Hosted Agents</a:t>
+            </a:r>
+            <a:endParaRPr lang="en-US" sz="900" dirty="0"/>
+          </a:p>
+        </p:txBody>
+      </p:sp>
+      <p:sp>
+        <p:nvSpPr>
+          <p:cNvPr id="10" name="Text 7"/>
+          <p:cNvSpPr/>
+          <p:nvPr/>
+        </p:nvSpPr>
+        <p:spPr>
+          <a:xfrm>
+            <a:off x="11338560" y="6528816"/>
+            <a:ext cx="548640" cy="219456"/>
+          </a:xfrm>
+          <a:prstGeom prst="rect">
+            <a:avLst/>
+          </a:prstGeom>
+          <a:noFill/>
+          <a:ln/>
+        </p:spPr>
+        <p:txBody>
+          <a:bodyPr wrap="square" rtlCol="0" anchor="ctr"/>
+          <a:lstStyle/>
+          <a:p>
+            <a:pPr algn="r" indent="0" marL="0">
+              <a:buNone/>
+            </a:pPr>
+            <a:r>
+              <a:rPr lang="en-US" sz="900" dirty="0">
+                <a:solidFill>
+                  <a:srgbClr val="767676"/>
+                </a:solidFill>
+              </a:rPr>
+              <a:t>13 / 14</a:t>
             </a:r>
             <a:endParaRPr lang="en-US" sz="900" dirty="0"/>
           </a:p>
@@ -3273,9 +3780,9 @@
 </p:sld>
 </file>
 
-<file path=ppt/slides/slide5.xml><?xml version="1.0" encoding="utf-8"?>
+<file path=ppt/slides/slide14.xml><?xml version="1.0" encoding="utf-8"?>
 <p:sld xmlns:a="http://schemas.openxmlformats.org/drawingml/2006/main" xmlns:r="http://schemas.openxmlformats.org/officeDocument/2006/relationships" xmlns:p="http://schemas.openxmlformats.org/presentationml/2006/main">
-  <p:cSld name="Slide 5">
+  <p:cSld name="Slide 14">
     <p:bg>
       <p:bgPr>
         <a:solidFill>
@@ -3350,7 +3857,7 @@
                 <a:ea typeface="Segoe UI" pitchFamily="34" charset="-122"/>
                 <a:cs typeface="Segoe UI" pitchFamily="34" charset="-120"/>
               </a:rPr>
-              <a:t>DÉPLOIEMENT</a:t>
+              <a:t>CONCLUSION</a:t>
             </a:r>
             <a:endParaRPr lang="en-US" sz="1100" dirty="0"/>
           </a:p>
@@ -3389,7 +3896,7 @@
                 <a:ea typeface="Segoe UI" pitchFamily="34" charset="-122"/>
                 <a:cs typeface="Segoe UI" pitchFamily="34" charset="-120"/>
               </a:rPr>
-              <a:t>Un manifeste : azure.yaml + azd</a:t>
+              <a:t>Une mise en production prouvée, des limites explicites</a:t>
             </a:r>
             <a:endParaRPr lang="en-US" sz="2600" dirty="0"/>
           </a:p>
@@ -3452,8 +3959,7 @@
                 <a:ea typeface="Segoe UI" pitchFamily="34" charset="-122"/>
                 <a:cs typeface="Segoe UI" pitchFamily="34" charset="-120"/>
               </a:rPr>
-              <a:t>azure.yaml câble le projet Foundry, le déploiement de modèle, les connexions Toolbox et le service d’agent hébergé
-</a:t>
+              <a:t>Le déploiement et l’évaluation sont réels ; la télémétrie de sécurité MCP est synthétique, pas une donnée client réelle</a:t>
             </a:r>
             <a:endParaRPr lang="en-US" sz="1500" dirty="0"/>
           </a:p>
@@ -3474,8 +3980,7 @@
                 <a:ea typeface="Segoe UI" pitchFamily="34" charset="-122"/>
                 <a:cs typeface="Segoe UI" pitchFamily="34" charset="-120"/>
               </a:rPr>
-              <a:t>kind: hosted — Foundry exploite le calcul de session ; vous ne possédez que le code du graphe
-</a:t>
+              <a:t>Dépôt : github.com/devopsabcs-engineering/foundry-hosted-agents</a:t>
             </a:r>
             <a:endParaRPr lang="en-US" sz="1500" dirty="0"/>
           </a:p>
@@ -3496,8 +4001,7 @@
                 <a:ea typeface="Segoe UI" pitchFamily="34" charset="-122"/>
                 <a:cs typeface="Segoe UI" pitchFamily="34" charset="-120"/>
               </a:rPr>
-              <a:t>dependencyResolution: remote_build — Foundry construit vos dépendances Python côté serveur
-</a:t>
+              <a:t>Wiki : architecture actuelle, artefacts vérifiés, guide opérationnel et historique WI-11 résolu</a:t>
             </a:r>
             <a:endParaRPr lang="en-US" sz="1500" dirty="0"/>
           </a:p>
@@ -3518,8 +4022,7 @@
                 <a:ea typeface="Segoe UI" pitchFamily="34" charset="-122"/>
                 <a:cs typeface="Segoe UI" pitchFamily="34" charset="-120"/>
               </a:rPr>
-              <a:t>protocol: responses — protocole Responses compatible OpenAI avec support du streaming
-</a:t>
+              <a:t>Labs complets, bilingues, pas à pas : le site GitHub Pages compagnon de ce deck</a:t>
             </a:r>
             <a:endParaRPr lang="en-US" sz="1500" dirty="0"/>
           </a:p>
@@ -3540,8 +4043,7 @@
                 <a:ea typeface="Segoe UI" pitchFamily="34" charset="-122"/>
                 <a:cs typeface="Segoe UI" pitchFamily="34" charset="-120"/>
               </a:rPr>
-              <a:t>azd provision crée l’infrastructure ; azd deploy publie une nouvelle version d’agent — cycles de vie séparés
-</a:t>
+              <a:t>Test de production v34 réussi ; zéro exception récente ne prouve ni l’endurance ni le traçage distribué complet</a:t>
             </a:r>
             <a:endParaRPr lang="en-US" sz="1500" dirty="0"/>
           </a:p>
@@ -3549,7 +4051,7 @@
       </p:sp>
       <p:sp>
         <p:nvSpPr>
-          <p:cNvPr id="7" name="Shape 5"/>
+          <p:cNvPr id="8" name="Shape 5"/>
           <p:cNvSpPr/>
           <p:nvPr/>
         </p:nvSpPr>
@@ -3569,7 +4071,7 @@
       </p:sp>
       <p:sp>
         <p:nvSpPr>
-          <p:cNvPr id="8" name="Text 6"/>
+          <p:cNvPr id="9" name="Text 6"/>
           <p:cNvSpPr/>
           <p:nvPr/>
         </p:nvSpPr>
@@ -3600,7 +4102,915 @@
                 <a:ea typeface="Segoe UI" pitchFamily="34" charset="-122"/>
                 <a:cs typeface="Segoe UI" pitchFamily="34" charset="-120"/>
               </a:rPr>
-              <a:t>Atelier Foundry Hosted Agents — 4 / 9</a:t>
+              <a:t>Atelier Foundry Hosted Agents</a:t>
+            </a:r>
+            <a:endParaRPr lang="en-US" sz="900" dirty="0"/>
+          </a:p>
+        </p:txBody>
+      </p:sp>
+      <p:sp>
+        <p:nvSpPr>
+          <p:cNvPr id="10" name="Text 7"/>
+          <p:cNvSpPr/>
+          <p:nvPr/>
+        </p:nvSpPr>
+        <p:spPr>
+          <a:xfrm>
+            <a:off x="11338560" y="6528816"/>
+            <a:ext cx="548640" cy="219456"/>
+          </a:xfrm>
+          <a:prstGeom prst="rect">
+            <a:avLst/>
+          </a:prstGeom>
+          <a:noFill/>
+          <a:ln/>
+        </p:spPr>
+        <p:txBody>
+          <a:bodyPr wrap="square" rtlCol="0" anchor="ctr"/>
+          <a:lstStyle/>
+          <a:p>
+            <a:pPr algn="r" indent="0" marL="0">
+              <a:buNone/>
+            </a:pPr>
+            <a:r>
+              <a:rPr lang="en-US" sz="900" dirty="0">
+                <a:solidFill>
+                  <a:srgbClr val="767676"/>
+                </a:solidFill>
+              </a:rPr>
+              <a:t>14 / 14</a:t>
+            </a:r>
+            <a:endParaRPr lang="en-US" sz="900" dirty="0"/>
+          </a:p>
+        </p:txBody>
+      </p:sp>
+    </p:spTree>
+  </p:cSld>
+  <p:clrMapOvr>
+    <a:masterClrMapping/>
+  </p:clrMapOvr>
+</p:sld>
+</file>
+
+<file path=ppt/slides/slide2.xml><?xml version="1.0" encoding="utf-8"?>
+<p:sld xmlns:a="http://schemas.openxmlformats.org/drawingml/2006/main" xmlns:r="http://schemas.openxmlformats.org/officeDocument/2006/relationships" xmlns:p="http://schemas.openxmlformats.org/presentationml/2006/main">
+  <p:cSld name="Slide 2">
+    <p:bg>
+      <p:bgPr>
+        <a:solidFill>
+          <a:srgbClr val="FFFFFF"/>
+        </a:solidFill>
+      </p:bgPr>
+    </p:bg>
+    <p:spTree>
+      <p:nvGrpSpPr>
+        <p:cNvPr id="1" name=""/>
+        <p:cNvGrpSpPr/>
+        <p:nvPr/>
+      </p:nvGrpSpPr>
+      <p:grpSpPr>
+        <a:xfrm>
+          <a:off x="0" y="0"/>
+          <a:ext cx="0" cy="0"/>
+          <a:chOff x="0" y="0"/>
+          <a:chExt cx="0" cy="0"/>
+        </a:xfrm>
+      </p:grpSpPr>
+      <p:sp>
+        <p:nvSpPr>
+          <p:cNvPr id="2" name="Text 0"/>
+          <p:cNvSpPr/>
+          <p:nvPr/>
+        </p:nvSpPr>
+        <p:spPr>
+          <a:xfrm>
+            <a:off x="411480" y="146304"/>
+            <a:ext cx="11338560" cy="502920"/>
+          </a:xfrm>
+          <a:prstGeom prst="rect">
+            <a:avLst/>
+          </a:prstGeom>
+          <a:noFill/>
+          <a:ln/>
+        </p:spPr>
+        <p:txBody>
+          <a:bodyPr wrap="square" rtlCol="0" anchor="ctr"/>
+          <a:lstStyle/>
+          <a:p>
+            <a:pPr indent="0" marL="0">
+              <a:buNone/>
+            </a:pPr>
+            <a:r>
+              <a:rPr lang="en-US" sz="2400" b="1" dirty="0">
+                <a:solidFill>
+                  <a:srgbClr val="146C54"/>
+                </a:solidFill>
+                <a:latin typeface="Segoe UI" pitchFamily="34" charset="0"/>
+                <a:ea typeface="Segoe UI" pitchFamily="34" charset="-122"/>
+                <a:cs typeface="Segoe UI" pitchFamily="34" charset="-120"/>
+              </a:rPr>
+              <a:t>Mise en production vérifiée : staging vers production</a:t>
+            </a:r>
+            <a:endParaRPr lang="en-US" sz="2400" dirty="0"/>
+          </a:p>
+        </p:txBody>
+      </p:sp>
+      <p:pic>
+        <p:nvPicPr>
+          <p:cNvPr id="3" name="Image 0" descr="Mise en production vérifiée : staging vers production">    </p:cNvPr>
+          <p:cNvPicPr>
+            <a:picLocks noChangeAspect="1"/>
+          </p:cNvPicPr>
+          <p:nvPr/>
+        </p:nvPicPr>
+        <p:blipFill>
+          <a:blip r:embed="rId1"/>
+          <a:stretch>
+            <a:fillRect/>
+          </a:stretch>
+        </p:blipFill>
+        <p:spPr>
+          <a:xfrm>
+            <a:off x="2068830" y="777240"/>
+            <a:ext cx="8051292" cy="5367528"/>
+          </a:xfrm>
+          <a:prstGeom prst="rect">
+            <a:avLst/>
+          </a:prstGeom>
+        </p:spPr>
+      </p:pic>
+      <p:sp>
+        <p:nvSpPr>
+          <p:cNvPr id="4" name="Text 1"/>
+          <p:cNvSpPr/>
+          <p:nvPr/>
+        </p:nvSpPr>
+        <p:spPr>
+          <a:xfrm>
+            <a:off x="411480" y="6245352"/>
+            <a:ext cx="11338560" cy="256032"/>
+          </a:xfrm>
+          <a:prstGeom prst="rect">
+            <a:avLst/>
+          </a:prstGeom>
+          <a:noFill/>
+          <a:ln/>
+        </p:spPr>
+        <p:txBody>
+          <a:bodyPr wrap="square" rtlCol="0" anchor="ctr"/>
+          <a:lstStyle/>
+          <a:p>
+            <a:pPr indent="0" marL="0">
+              <a:buNone/>
+            </a:pPr>
+            <a:r>
+              <a:rPr lang="en-US" sz="1000" dirty="0">
+                <a:solidFill>
+                  <a:srgbClr val="53635E"/>
+                </a:solidFill>
+                <a:latin typeface="Segoe UI" pitchFamily="34" charset="0"/>
+                <a:ea typeface="Segoe UI" pitchFamily="34" charset="-122"/>
+                <a:cs typeface="Segoe UI" pitchFamily="34" charset="-120"/>
+              </a:rPr>
+              <a:t>Rendu des artefacts, pas une capture du portail. Données synthétiques. Sources et SHA-256 conservés.</a:t>
+            </a:r>
+            <a:endParaRPr lang="en-US" sz="1000" dirty="0"/>
+          </a:p>
+        </p:txBody>
+      </p:sp>
+      <p:sp>
+        <p:nvSpPr>
+          <p:cNvPr id="5" name="Text 2">
+            <a:hlinkClick r:id="rId2" tooltip=""/>
+          </p:cNvPr>
+          <p:cNvSpPr/>
+          <p:nvPr/>
+        </p:nvSpPr>
+        <p:spPr>
+          <a:xfrm>
+            <a:off x="411480" y="6528816"/>
+            <a:ext cx="10515600" cy="201168"/>
+          </a:xfrm>
+          <a:prstGeom prst="rect">
+            <a:avLst/>
+          </a:prstGeom>
+          <a:noFill/>
+          <a:ln/>
+        </p:spPr>
+        <p:txBody>
+          <a:bodyPr wrap="square" rtlCol="0" anchor="ctr"/>
+          <a:lstStyle/>
+          <a:p>
+            <a:pPr indent="0" marL="0">
+              <a:buNone/>
+            </a:pPr>
+            <a:r>
+              <a:rPr lang="en-US" sz="900" u="sng" dirty="0">
+                <a:solidFill>
+                  <a:srgbClr val="075C9B"/>
+                </a:solidFill>
+                <a:latin typeface="Segoe UI" pitchFamily="34" charset="0"/>
+                <a:ea typeface="Segoe UI" pitchFamily="34" charset="-122"/>
+                <a:cs typeface="Segoe UI" pitchFamily="34" charset="-120"/>
+                <a:hlinkClick r:id="rId2" invalidUrl="" action="" tgtFrame="" tooltip="" history="1" highlightClick="0" endSnd="0">
+                  <a:extLst>
+                    <a:ext uri="{A12FA001-AC4F-418D-AE19-62706E023703}">
+                      <ahyp:hlinkClr xmlns:ahyp="http://schemas.microsoft.com/office/drawing/2018/hyperlinkcolor" val="tx"/>
+                    </a:ext>
+                  </a:extLst>
+                </a:hlinkClick>
+              </a:rPr>
+              <a:t>GitHub Actions 34178081808 | f3da486 | 2026-09-08 UTC</a:t>
+            </a:r>
+            <a:endParaRPr lang="en-US" sz="900" dirty="0"/>
+          </a:p>
+        </p:txBody>
+      </p:sp>
+      <p:sp>
+        <p:nvSpPr>
+          <p:cNvPr id="7" name="Text 3"/>
+          <p:cNvSpPr/>
+          <p:nvPr/>
+        </p:nvSpPr>
+        <p:spPr>
+          <a:xfrm>
+            <a:off x="11338560" y="6528816"/>
+            <a:ext cx="548640" cy="219456"/>
+          </a:xfrm>
+          <a:prstGeom prst="rect">
+            <a:avLst/>
+          </a:prstGeom>
+          <a:noFill/>
+          <a:ln/>
+        </p:spPr>
+        <p:txBody>
+          <a:bodyPr wrap="square" rtlCol="0" anchor="ctr"/>
+          <a:lstStyle/>
+          <a:p>
+            <a:pPr algn="r" indent="0" marL="0">
+              <a:buNone/>
+            </a:pPr>
+            <a:r>
+              <a:rPr lang="en-US" sz="900" dirty="0">
+                <a:solidFill>
+                  <a:srgbClr val="767676"/>
+                </a:solidFill>
+              </a:rPr>
+              <a:t>2 / 14</a:t>
+            </a:r>
+            <a:endParaRPr lang="en-US" sz="900" dirty="0"/>
+          </a:p>
+        </p:txBody>
+      </p:sp>
+    </p:spTree>
+  </p:cSld>
+  <p:clrMapOvr>
+    <a:masterClrMapping/>
+  </p:clrMapOvr>
+</p:sld>
+</file>
+
+<file path=ppt/slides/slide3.xml><?xml version="1.0" encoding="utf-8"?>
+<p:sld xmlns:a="http://schemas.openxmlformats.org/drawingml/2006/main" xmlns:r="http://schemas.openxmlformats.org/officeDocument/2006/relationships" xmlns:p="http://schemas.openxmlformats.org/presentationml/2006/main">
+  <p:cSld name="Slide 3">
+    <p:bg>
+      <p:bgPr>
+        <a:solidFill>
+          <a:srgbClr val="FFFFFF"/>
+        </a:solidFill>
+      </p:bgPr>
+    </p:bg>
+    <p:spTree>
+      <p:nvGrpSpPr>
+        <p:cNvPr id="1" name=""/>
+        <p:cNvGrpSpPr/>
+        <p:nvPr/>
+      </p:nvGrpSpPr>
+      <p:grpSpPr>
+        <a:xfrm>
+          <a:off x="0" y="0"/>
+          <a:ext cx="0" cy="0"/>
+          <a:chOff x="0" y="0"/>
+          <a:chExt cx="0" cy="0"/>
+        </a:xfrm>
+      </p:grpSpPr>
+      <p:sp>
+        <p:nvSpPr>
+          <p:cNvPr id="2" name="Text 0"/>
+          <p:cNvSpPr/>
+          <p:nvPr/>
+        </p:nvSpPr>
+        <p:spPr>
+          <a:xfrm>
+            <a:off x="411480" y="146304"/>
+            <a:ext cx="11338560" cy="502920"/>
+          </a:xfrm>
+          <a:prstGeom prst="rect">
+            <a:avLst/>
+          </a:prstGeom>
+          <a:noFill/>
+          <a:ln/>
+        </p:spPr>
+        <p:txBody>
+          <a:bodyPr wrap="square" rtlCol="0" anchor="ctr"/>
+          <a:lstStyle/>
+          <a:p>
+            <a:pPr indent="0" marL="0">
+              <a:buNone/>
+            </a:pPr>
+            <a:r>
+              <a:rPr lang="en-US" sz="2400" b="1" dirty="0">
+                <a:solidFill>
+                  <a:srgbClr val="146C54"/>
+                </a:solidFill>
+                <a:latin typeface="Segoe UI" pitchFamily="34" charset="0"/>
+                <a:ea typeface="Segoe UI" pitchFamily="34" charset="-122"/>
+                <a:cs typeface="Segoe UI" pitchFamily="34" charset="-120"/>
+              </a:rPr>
+              <a:t>Porte qualité : 21 vérifications sur 21 réussies</a:t>
+            </a:r>
+            <a:endParaRPr lang="en-US" sz="2400" dirty="0"/>
+          </a:p>
+        </p:txBody>
+      </p:sp>
+      <p:pic>
+        <p:nvPicPr>
+          <p:cNvPr id="3" name="Image 0" descr="Porte qualité : 21 vérifications sur 21 réussies">    </p:cNvPr>
+          <p:cNvPicPr>
+            <a:picLocks noChangeAspect="1"/>
+          </p:cNvPicPr>
+          <p:nvPr/>
+        </p:nvPicPr>
+        <p:blipFill>
+          <a:blip r:embed="rId1"/>
+          <a:stretch>
+            <a:fillRect/>
+          </a:stretch>
+        </p:blipFill>
+        <p:spPr>
+          <a:xfrm>
+            <a:off x="2068830" y="777240"/>
+            <a:ext cx="8051292" cy="5367528"/>
+          </a:xfrm>
+          <a:prstGeom prst="rect">
+            <a:avLst/>
+          </a:prstGeom>
+        </p:spPr>
+      </p:pic>
+      <p:sp>
+        <p:nvSpPr>
+          <p:cNvPr id="4" name="Text 1"/>
+          <p:cNvSpPr/>
+          <p:nvPr/>
+        </p:nvSpPr>
+        <p:spPr>
+          <a:xfrm>
+            <a:off x="411480" y="6245352"/>
+            <a:ext cx="11338560" cy="256032"/>
+          </a:xfrm>
+          <a:prstGeom prst="rect">
+            <a:avLst/>
+          </a:prstGeom>
+          <a:noFill/>
+          <a:ln/>
+        </p:spPr>
+        <p:txBody>
+          <a:bodyPr wrap="square" rtlCol="0" anchor="ctr"/>
+          <a:lstStyle/>
+          <a:p>
+            <a:pPr indent="0" marL="0">
+              <a:buNone/>
+            </a:pPr>
+            <a:r>
+              <a:rPr lang="en-US" sz="1000" dirty="0">
+                <a:solidFill>
+                  <a:srgbClr val="53635E"/>
+                </a:solidFill>
+                <a:latin typeface="Segoe UI" pitchFamily="34" charset="0"/>
+                <a:ea typeface="Segoe UI" pitchFamily="34" charset="-122"/>
+                <a:cs typeface="Segoe UI" pitchFamily="34" charset="-120"/>
+              </a:rPr>
+              <a:t>Rendu des artefacts, pas une capture du portail. Données synthétiques. Sources et SHA-256 conservés.</a:t>
+            </a:r>
+            <a:endParaRPr lang="en-US" sz="1000" dirty="0"/>
+          </a:p>
+        </p:txBody>
+      </p:sp>
+      <p:sp>
+        <p:nvSpPr>
+          <p:cNvPr id="5" name="Text 2">
+            <a:hlinkClick r:id="rId2" tooltip=""/>
+          </p:cNvPr>
+          <p:cNvSpPr/>
+          <p:nvPr/>
+        </p:nvSpPr>
+        <p:spPr>
+          <a:xfrm>
+            <a:off x="411480" y="6528816"/>
+            <a:ext cx="10515600" cy="201168"/>
+          </a:xfrm>
+          <a:prstGeom prst="rect">
+            <a:avLst/>
+          </a:prstGeom>
+          <a:noFill/>
+          <a:ln/>
+        </p:spPr>
+        <p:txBody>
+          <a:bodyPr wrap="square" rtlCol="0" anchor="ctr"/>
+          <a:lstStyle/>
+          <a:p>
+            <a:pPr indent="0" marL="0">
+              <a:buNone/>
+            </a:pPr>
+            <a:r>
+              <a:rPr lang="en-US" sz="900" u="sng" dirty="0">
+                <a:solidFill>
+                  <a:srgbClr val="075C9B"/>
+                </a:solidFill>
+                <a:latin typeface="Segoe UI" pitchFamily="34" charset="0"/>
+                <a:ea typeface="Segoe UI" pitchFamily="34" charset="-122"/>
+                <a:cs typeface="Segoe UI" pitchFamily="34" charset="-120"/>
+                <a:hlinkClick r:id="rId2" invalidUrl="" action="" tgtFrame="" tooltip="" history="1" highlightClick="0" endSnd="0">
+                  <a:extLst>
+                    <a:ext uri="{A12FA001-AC4F-418D-AE19-62706E023703}">
+                      <ahyp:hlinkClr xmlns:ahyp="http://schemas.microsoft.com/office/drawing/2018/hyperlinkcolor" val="tx"/>
+                    </a:ext>
+                  </a:extLst>
+                </a:hlinkClick>
+              </a:rPr>
+              <a:t>GitHub Actions 34178081808 | f3da486 | 2026-09-08 UTC</a:t>
+            </a:r>
+            <a:endParaRPr lang="en-US" sz="900" dirty="0"/>
+          </a:p>
+        </p:txBody>
+      </p:sp>
+      <p:sp>
+        <p:nvSpPr>
+          <p:cNvPr id="7" name="Text 3"/>
+          <p:cNvSpPr/>
+          <p:nvPr/>
+        </p:nvSpPr>
+        <p:spPr>
+          <a:xfrm>
+            <a:off x="11338560" y="6528816"/>
+            <a:ext cx="548640" cy="219456"/>
+          </a:xfrm>
+          <a:prstGeom prst="rect">
+            <a:avLst/>
+          </a:prstGeom>
+          <a:noFill/>
+          <a:ln/>
+        </p:spPr>
+        <p:txBody>
+          <a:bodyPr wrap="square" rtlCol="0" anchor="ctr"/>
+          <a:lstStyle/>
+          <a:p>
+            <a:pPr algn="r" indent="0" marL="0">
+              <a:buNone/>
+            </a:pPr>
+            <a:r>
+              <a:rPr lang="en-US" sz="900" dirty="0">
+                <a:solidFill>
+                  <a:srgbClr val="767676"/>
+                </a:solidFill>
+              </a:rPr>
+              <a:t>3 / 14</a:t>
+            </a:r>
+            <a:endParaRPr lang="en-US" sz="900" dirty="0"/>
+          </a:p>
+        </p:txBody>
+      </p:sp>
+    </p:spTree>
+  </p:cSld>
+  <p:clrMapOvr>
+    <a:masterClrMapping/>
+  </p:clrMapOvr>
+</p:sld>
+</file>
+
+<file path=ppt/slides/slide4.xml><?xml version="1.0" encoding="utf-8"?>
+<p:sld xmlns:a="http://schemas.openxmlformats.org/drawingml/2006/main" xmlns:r="http://schemas.openxmlformats.org/officeDocument/2006/relationships" xmlns:p="http://schemas.openxmlformats.org/presentationml/2006/main">
+  <p:cSld name="Slide 4">
+    <p:bg>
+      <p:bgPr>
+        <a:solidFill>
+          <a:srgbClr val="FFFFFF"/>
+        </a:solidFill>
+      </p:bgPr>
+    </p:bg>
+    <p:spTree>
+      <p:nvGrpSpPr>
+        <p:cNvPr id="1" name=""/>
+        <p:cNvGrpSpPr/>
+        <p:nvPr/>
+      </p:nvGrpSpPr>
+      <p:grpSpPr>
+        <a:xfrm>
+          <a:off x="0" y="0"/>
+          <a:ext cx="0" cy="0"/>
+          <a:chOff x="0" y="0"/>
+          <a:chExt cx="0" cy="0"/>
+        </a:xfrm>
+      </p:grpSpPr>
+      <p:sp>
+        <p:nvSpPr>
+          <p:cNvPr id="2" name="Text 0"/>
+          <p:cNvSpPr/>
+          <p:nvPr/>
+        </p:nvSpPr>
+        <p:spPr>
+          <a:xfrm>
+            <a:off x="411480" y="146304"/>
+            <a:ext cx="11338560" cy="502920"/>
+          </a:xfrm>
+          <a:prstGeom prst="rect">
+            <a:avLst/>
+          </a:prstGeom>
+          <a:noFill/>
+          <a:ln/>
+        </p:spPr>
+        <p:txBody>
+          <a:bodyPr wrap="square" rtlCol="0" anchor="ctr"/>
+          <a:lstStyle/>
+          <a:p>
+            <a:pPr indent="0" marL="0">
+              <a:buNone/>
+            </a:pPr>
+            <a:r>
+              <a:rPr lang="en-US" sz="2400" b="1" dirty="0">
+                <a:solidFill>
+                  <a:srgbClr val="146C54"/>
+                </a:solidFill>
+                <a:latin typeface="Segoe UI" pitchFamily="34" charset="0"/>
+                <a:ea typeface="Segoe UI" pitchFamily="34" charset="-122"/>
+                <a:cs typeface="Segoe UI" pitchFamily="34" charset="-120"/>
+              </a:rPr>
+              <a:t>Exécution des outils prouvée ; télémétrie synthétique</a:t>
+            </a:r>
+            <a:endParaRPr lang="en-US" sz="2400" dirty="0"/>
+          </a:p>
+        </p:txBody>
+      </p:sp>
+      <p:pic>
+        <p:nvPicPr>
+          <p:cNvPr id="3" name="Image 0" descr="Exécution des outils prouvée ; télémétrie synthétique">    </p:cNvPr>
+          <p:cNvPicPr>
+            <a:picLocks noChangeAspect="1"/>
+          </p:cNvPicPr>
+          <p:nvPr/>
+        </p:nvPicPr>
+        <p:blipFill>
+          <a:blip r:embed="rId1"/>
+          <a:stretch>
+            <a:fillRect/>
+          </a:stretch>
+        </p:blipFill>
+        <p:spPr>
+          <a:xfrm>
+            <a:off x="2068830" y="777240"/>
+            <a:ext cx="8051292" cy="5367528"/>
+          </a:xfrm>
+          <a:prstGeom prst="rect">
+            <a:avLst/>
+          </a:prstGeom>
+        </p:spPr>
+      </p:pic>
+      <p:sp>
+        <p:nvSpPr>
+          <p:cNvPr id="4" name="Text 1"/>
+          <p:cNvSpPr/>
+          <p:nvPr/>
+        </p:nvSpPr>
+        <p:spPr>
+          <a:xfrm>
+            <a:off x="411480" y="6245352"/>
+            <a:ext cx="11338560" cy="256032"/>
+          </a:xfrm>
+          <a:prstGeom prst="rect">
+            <a:avLst/>
+          </a:prstGeom>
+          <a:noFill/>
+          <a:ln/>
+        </p:spPr>
+        <p:txBody>
+          <a:bodyPr wrap="square" rtlCol="0" anchor="ctr"/>
+          <a:lstStyle/>
+          <a:p>
+            <a:pPr indent="0" marL="0">
+              <a:buNone/>
+            </a:pPr>
+            <a:r>
+              <a:rPr lang="en-US" sz="1000" dirty="0">
+                <a:solidFill>
+                  <a:srgbClr val="53635E"/>
+                </a:solidFill>
+                <a:latin typeface="Segoe UI" pitchFamily="34" charset="0"/>
+                <a:ea typeface="Segoe UI" pitchFamily="34" charset="-122"/>
+                <a:cs typeface="Segoe UI" pitchFamily="34" charset="-120"/>
+              </a:rPr>
+              <a:t>Rendu des artefacts, pas une capture du portail. Données synthétiques. Sources et SHA-256 conservés.</a:t>
+            </a:r>
+            <a:endParaRPr lang="en-US" sz="1000" dirty="0"/>
+          </a:p>
+        </p:txBody>
+      </p:sp>
+      <p:sp>
+        <p:nvSpPr>
+          <p:cNvPr id="5" name="Text 2">
+            <a:hlinkClick r:id="rId2" tooltip=""/>
+          </p:cNvPr>
+          <p:cNvSpPr/>
+          <p:nvPr/>
+        </p:nvSpPr>
+        <p:spPr>
+          <a:xfrm>
+            <a:off x="411480" y="6528816"/>
+            <a:ext cx="10515600" cy="201168"/>
+          </a:xfrm>
+          <a:prstGeom prst="rect">
+            <a:avLst/>
+          </a:prstGeom>
+          <a:noFill/>
+          <a:ln/>
+        </p:spPr>
+        <p:txBody>
+          <a:bodyPr wrap="square" rtlCol="0" anchor="ctr"/>
+          <a:lstStyle/>
+          <a:p>
+            <a:pPr indent="0" marL="0">
+              <a:buNone/>
+            </a:pPr>
+            <a:r>
+              <a:rPr lang="en-US" sz="900" u="sng" dirty="0">
+                <a:solidFill>
+                  <a:srgbClr val="075C9B"/>
+                </a:solidFill>
+                <a:latin typeface="Segoe UI" pitchFamily="34" charset="0"/>
+                <a:ea typeface="Segoe UI" pitchFamily="34" charset="-122"/>
+                <a:cs typeface="Segoe UI" pitchFamily="34" charset="-120"/>
+                <a:hlinkClick r:id="rId2" invalidUrl="" action="" tgtFrame="" tooltip="" history="1" highlightClick="0" endSnd="0">
+                  <a:extLst>
+                    <a:ext uri="{A12FA001-AC4F-418D-AE19-62706E023703}">
+                      <ahyp:hlinkClr xmlns:ahyp="http://schemas.microsoft.com/office/drawing/2018/hyperlinkcolor" val="tx"/>
+                    </a:ext>
+                  </a:extLst>
+                </a:hlinkClick>
+              </a:rPr>
+              <a:t>GitHub Actions 34178081808 | f3da486 | 2026-09-08 UTC</a:t>
+            </a:r>
+            <a:endParaRPr lang="en-US" sz="900" dirty="0"/>
+          </a:p>
+        </p:txBody>
+      </p:sp>
+      <p:sp>
+        <p:nvSpPr>
+          <p:cNvPr id="7" name="Text 3"/>
+          <p:cNvSpPr/>
+          <p:nvPr/>
+        </p:nvSpPr>
+        <p:spPr>
+          <a:xfrm>
+            <a:off x="11338560" y="6528816"/>
+            <a:ext cx="548640" cy="219456"/>
+          </a:xfrm>
+          <a:prstGeom prst="rect">
+            <a:avLst/>
+          </a:prstGeom>
+          <a:noFill/>
+          <a:ln/>
+        </p:spPr>
+        <p:txBody>
+          <a:bodyPr wrap="square" rtlCol="0" anchor="ctr"/>
+          <a:lstStyle/>
+          <a:p>
+            <a:pPr algn="r" indent="0" marL="0">
+              <a:buNone/>
+            </a:pPr>
+            <a:r>
+              <a:rPr lang="en-US" sz="900" dirty="0">
+                <a:solidFill>
+                  <a:srgbClr val="767676"/>
+                </a:solidFill>
+              </a:rPr>
+              <a:t>4 / 14</a:t>
+            </a:r>
+            <a:endParaRPr lang="en-US" sz="900" dirty="0"/>
+          </a:p>
+        </p:txBody>
+      </p:sp>
+    </p:spTree>
+  </p:cSld>
+  <p:clrMapOvr>
+    <a:masterClrMapping/>
+  </p:clrMapOvr>
+</p:sld>
+</file>
+
+<file path=ppt/slides/slide5.xml><?xml version="1.0" encoding="utf-8"?>
+<p:sld xmlns:a="http://schemas.openxmlformats.org/drawingml/2006/main" xmlns:r="http://schemas.openxmlformats.org/officeDocument/2006/relationships" xmlns:p="http://schemas.openxmlformats.org/presentationml/2006/main">
+  <p:cSld name="Slide 5">
+    <p:bg>
+      <p:bgPr>
+        <a:solidFill>
+          <a:srgbClr val="FFFFFF"/>
+        </a:solidFill>
+      </p:bgPr>
+    </p:bg>
+    <p:spTree>
+      <p:nvGrpSpPr>
+        <p:cNvPr id="1" name=""/>
+        <p:cNvGrpSpPr/>
+        <p:nvPr/>
+      </p:nvGrpSpPr>
+      <p:grpSpPr>
+        <a:xfrm>
+          <a:off x="0" y="0"/>
+          <a:ext cx="0" cy="0"/>
+          <a:chOff x="0" y="0"/>
+          <a:chExt cx="0" cy="0"/>
+        </a:xfrm>
+      </p:grpSpPr>
+      <p:sp>
+        <p:nvSpPr>
+          <p:cNvPr id="2" name="Text 0"/>
+          <p:cNvSpPr/>
+          <p:nvPr/>
+        </p:nvSpPr>
+        <p:spPr>
+          <a:xfrm>
+            <a:off x="411480" y="146304"/>
+            <a:ext cx="11338560" cy="502920"/>
+          </a:xfrm>
+          <a:prstGeom prst="rect">
+            <a:avLst/>
+          </a:prstGeom>
+          <a:noFill/>
+          <a:ln/>
+        </p:spPr>
+        <p:txBody>
+          <a:bodyPr wrap="square" rtlCol="0" anchor="ctr"/>
+          <a:lstStyle/>
+          <a:p>
+            <a:pPr indent="0" marL="0">
+              <a:buNone/>
+            </a:pPr>
+            <a:r>
+              <a:rPr lang="en-US" sz="2400" b="1" dirty="0">
+                <a:solidFill>
+                  <a:srgbClr val="146C54"/>
+                </a:solidFill>
+                <a:latin typeface="Segoe UI" pitchFamily="34" charset="0"/>
+                <a:ea typeface="Segoe UI" pitchFamily="34" charset="-122"/>
+                <a:cs typeface="Segoe UI" pitchFamily="34" charset="-120"/>
+              </a:rPr>
+              <a:t>Production 34 : active, test de fumée réussi</a:t>
+            </a:r>
+            <a:endParaRPr lang="en-US" sz="2400" dirty="0"/>
+          </a:p>
+        </p:txBody>
+      </p:sp>
+      <p:pic>
+        <p:nvPicPr>
+          <p:cNvPr id="3" name="Image 0" descr="Production 34 : active, test de fumée réussi">    </p:cNvPr>
+          <p:cNvPicPr>
+            <a:picLocks noChangeAspect="1"/>
+          </p:cNvPicPr>
+          <p:nvPr/>
+        </p:nvPicPr>
+        <p:blipFill>
+          <a:blip r:embed="rId1"/>
+          <a:stretch>
+            <a:fillRect/>
+          </a:stretch>
+        </p:blipFill>
+        <p:spPr>
+          <a:xfrm>
+            <a:off x="2068830" y="777240"/>
+            <a:ext cx="8051292" cy="5367528"/>
+          </a:xfrm>
+          <a:prstGeom prst="rect">
+            <a:avLst/>
+          </a:prstGeom>
+        </p:spPr>
+      </p:pic>
+      <p:sp>
+        <p:nvSpPr>
+          <p:cNvPr id="4" name="Text 1"/>
+          <p:cNvSpPr/>
+          <p:nvPr/>
+        </p:nvSpPr>
+        <p:spPr>
+          <a:xfrm>
+            <a:off x="411480" y="6245352"/>
+            <a:ext cx="11338560" cy="256032"/>
+          </a:xfrm>
+          <a:prstGeom prst="rect">
+            <a:avLst/>
+          </a:prstGeom>
+          <a:noFill/>
+          <a:ln/>
+        </p:spPr>
+        <p:txBody>
+          <a:bodyPr wrap="square" rtlCol="0" anchor="ctr"/>
+          <a:lstStyle/>
+          <a:p>
+            <a:pPr indent="0" marL="0">
+              <a:buNone/>
+            </a:pPr>
+            <a:r>
+              <a:rPr lang="en-US" sz="1000" dirty="0">
+                <a:solidFill>
+                  <a:srgbClr val="53635E"/>
+                </a:solidFill>
+                <a:latin typeface="Segoe UI" pitchFamily="34" charset="0"/>
+                <a:ea typeface="Segoe UI" pitchFamily="34" charset="-122"/>
+                <a:cs typeface="Segoe UI" pitchFamily="34" charset="-120"/>
+              </a:rPr>
+              <a:t>Rendu des artefacts, pas une capture du portail. Données synthétiques. Sources et SHA-256 conservés.</a:t>
+            </a:r>
+            <a:endParaRPr lang="en-US" sz="1000" dirty="0"/>
+          </a:p>
+        </p:txBody>
+      </p:sp>
+      <p:sp>
+        <p:nvSpPr>
+          <p:cNvPr id="5" name="Text 2">
+            <a:hlinkClick r:id="rId2" tooltip=""/>
+          </p:cNvPr>
+          <p:cNvSpPr/>
+          <p:nvPr/>
+        </p:nvSpPr>
+        <p:spPr>
+          <a:xfrm>
+            <a:off x="411480" y="6528816"/>
+            <a:ext cx="10515600" cy="201168"/>
+          </a:xfrm>
+          <a:prstGeom prst="rect">
+            <a:avLst/>
+          </a:prstGeom>
+          <a:noFill/>
+          <a:ln/>
+        </p:spPr>
+        <p:txBody>
+          <a:bodyPr wrap="square" rtlCol="0" anchor="ctr"/>
+          <a:lstStyle/>
+          <a:p>
+            <a:pPr indent="0" marL="0">
+              <a:buNone/>
+            </a:pPr>
+            <a:r>
+              <a:rPr lang="en-US" sz="900" u="sng" dirty="0">
+                <a:solidFill>
+                  <a:srgbClr val="075C9B"/>
+                </a:solidFill>
+                <a:latin typeface="Segoe UI" pitchFamily="34" charset="0"/>
+                <a:ea typeface="Segoe UI" pitchFamily="34" charset="-122"/>
+                <a:cs typeface="Segoe UI" pitchFamily="34" charset="-120"/>
+                <a:hlinkClick r:id="rId2" invalidUrl="" action="" tgtFrame="" tooltip="" history="1" highlightClick="0" endSnd="0">
+                  <a:extLst>
+                    <a:ext uri="{A12FA001-AC4F-418D-AE19-62706E023703}">
+                      <ahyp:hlinkClr xmlns:ahyp="http://schemas.microsoft.com/office/drawing/2018/hyperlinkcolor" val="tx"/>
+                    </a:ext>
+                  </a:extLst>
+                </a:hlinkClick>
+              </a:rPr>
+              <a:t>GitHub Actions 34178081808 | f3da486 | 2026-09-08 UTC</a:t>
+            </a:r>
+            <a:endParaRPr lang="en-US" sz="900" dirty="0"/>
+          </a:p>
+        </p:txBody>
+      </p:sp>
+      <p:sp>
+        <p:nvSpPr>
+          <p:cNvPr id="7" name="Text 3"/>
+          <p:cNvSpPr/>
+          <p:nvPr/>
+        </p:nvSpPr>
+        <p:spPr>
+          <a:xfrm>
+            <a:off x="11338560" y="6528816"/>
+            <a:ext cx="548640" cy="219456"/>
+          </a:xfrm>
+          <a:prstGeom prst="rect">
+            <a:avLst/>
+          </a:prstGeom>
+          <a:noFill/>
+          <a:ln/>
+        </p:spPr>
+        <p:txBody>
+          <a:bodyPr wrap="square" rtlCol="0" anchor="ctr"/>
+          <a:lstStyle/>
+          <a:p>
+            <a:pPr algn="r" indent="0" marL="0">
+              <a:buNone/>
+            </a:pPr>
+            <a:r>
+              <a:rPr lang="en-US" sz="900" dirty="0">
+                <a:solidFill>
+                  <a:srgbClr val="767676"/>
+                </a:solidFill>
+              </a:rPr>
+              <a:t>5 / 14</a:t>
             </a:r>
             <a:endParaRPr lang="en-US" sz="900" dirty="0"/>
           </a:p>
@@ -3691,7 +5101,7 @@
                 <a:ea typeface="Segoe UI" pitchFamily="34" charset="-122"/>
                 <a:cs typeface="Segoe UI" pitchFamily="34" charset="-120"/>
               </a:rPr>
-              <a:t>ÉVALUATION</a:t>
+              <a:t>PROGRAMME</a:t>
             </a:r>
             <a:endParaRPr lang="en-US" sz="1100" dirty="0"/>
           </a:p>
@@ -3730,7 +5140,7 @@
                 <a:ea typeface="Segoe UI" pitchFamily="34" charset="-122"/>
                 <a:cs typeface="Segoe UI" pitchFamily="34" charset="-120"/>
               </a:rPr>
-              <a:t>Vérifications déterministes + rubriques LLM-as-judge</a:t>
+              <a:t>Neuf labs, un déploiement réel</a:t>
             </a:r>
             <a:endParaRPr lang="en-US" sz="2600" dirty="0"/>
           </a:p>
@@ -3793,8 +5203,7 @@
                 <a:ea typeface="Segoe UI" pitchFamily="34" charset="-122"/>
                 <a:cs typeface="Segoe UI" pitchFamily="34" charset="-120"/>
               </a:rPr>
-              <a:t>Jeu de données de référence : 8 catégories (vrai/faux positif, ambigu, données manquantes, outils contradictoires, injection de prompt, actions non autorisées, conclusions non étayées)
-</a:t>
+              <a:t>Lab 00 — Prérequis et configuration de l’environnement</a:t>
             </a:r>
             <a:endParaRPr lang="en-US" sz="1500" dirty="0"/>
           </a:p>
@@ -3815,8 +5224,7 @@
                 <a:ea typeface="Segoe UI" pitchFamily="34" charset="-122"/>
                 <a:cs typeface="Segoe UI" pitchFamily="34" charset="-120"/>
               </a:rPr>
-              <a:t>Déterministe : validité du schéma, citations requises, appels d’outils autorisés, contraintes de politique — rapide, reproductible
-</a:t>
+              <a:t>Lab 01 — Plongée dans l’architecture (superviseur/spécialistes LangGraph)</a:t>
             </a:r>
             <a:endParaRPr lang="en-US" sz="1500" dirty="0"/>
           </a:p>
@@ -3837,8 +5245,7 @@
                 <a:ea typeface="Segoe UI" pitchFamily="34" charset="-122"/>
                 <a:cs typeface="Segoe UI" pitchFamily="34" charset="-120"/>
               </a:rPr>
-              <a:t>Évaluateurs Foundry intégrés en premier : cohérence, ancrage, adhérence à la tâche, précision des appels d’outils
-</a:t>
+              <a:t>Lab 02 — Déployer les serveurs d’outils MCP</a:t>
             </a:r>
             <a:endParaRPr lang="en-US" sz="1500" dirty="0"/>
           </a:p>
@@ -3859,8 +5266,7 @@
                 <a:ea typeface="Segoe UI" pitchFamily="34" charset="-122"/>
                 <a:cs typeface="Segoe UI" pitchFamily="34" charset="-120"/>
               </a:rPr>
-              <a:t>Rubriques personnalisées uniquement là où le catalogue ne suffit pas : justesse du triage, qualité des citations, gestion des conflits
-</a:t>
+              <a:t>Lab 03 — Provisionner et déployer l’agent hébergé (azd)</a:t>
             </a:r>
             <a:endParaRPr lang="en-US" sz="1500" dirty="0"/>
           </a:p>
@@ -3881,16 +5287,99 @@
                 <a:ea typeface="Segoe UI" pitchFamily="34" charset="-122"/>
                 <a:cs typeface="Segoe UI" pitchFamily="34" charset="-120"/>
               </a:rPr>
-              <a:t>Les règles de politique (ex. ne jamais prétendre avoir agi sans autorisation) restent déterministes, pas jugées par LLM
-</a:t>
+              <a:t>Lab 04 — Invoquer l’agent et lire les traces</a:t>
             </a:r>
             <a:endParaRPr lang="en-US" sz="1500" dirty="0"/>
           </a:p>
-        </p:txBody>
-      </p:sp>
-      <p:sp>
-        <p:nvSpPr>
-          <p:cNvPr id="7" name="Shape 5"/>
+          <a:p>
+            <a:pPr marL="254000" indent="-254000">
+              <a:lnSpc>
+                <a:spcPct val="125000"/>
+              </a:lnSpc>
+              <a:buSzPct val="100000"/>
+              <a:buChar char="●"/>
+            </a:pPr>
+            <a:r>
+              <a:rPr lang="en-US" sz="1500" dirty="0">
+                <a:solidFill>
+                  <a:srgbClr val="1A1A1A"/>
+                </a:solidFill>
+                <a:latin typeface="Segoe UI" pitchFamily="34" charset="0"/>
+                <a:ea typeface="Segoe UI" pitchFamily="34" charset="-122"/>
+                <a:cs typeface="Segoe UI" pitchFamily="34" charset="-120"/>
+              </a:rPr>
+              <a:t>Lab 05 — Évaluations : déterministes + LLM-as-judge</a:t>
+            </a:r>
+            <a:endParaRPr lang="en-US" sz="1500" dirty="0"/>
+          </a:p>
+          <a:p>
+            <a:pPr marL="254000" indent="-254000">
+              <a:lnSpc>
+                <a:spcPct val="125000"/>
+              </a:lnSpc>
+              <a:buSzPct val="100000"/>
+              <a:buChar char="●"/>
+            </a:pPr>
+            <a:r>
+              <a:rPr lang="en-US" sz="1500" dirty="0">
+                <a:solidFill>
+                  <a:srgbClr val="1A1A1A"/>
+                </a:solidFill>
+                <a:latin typeface="Segoe UI" pitchFamily="34" charset="0"/>
+                <a:ea typeface="Segoe UI" pitchFamily="34" charset="-122"/>
+                <a:cs typeface="Segoe UI" pitchFamily="34" charset="-120"/>
+              </a:rPr>
+              <a:t>Lab 06 — CI/CD : pipeline contrôlé par évaluation</a:t>
+            </a:r>
+            <a:endParaRPr lang="en-US" sz="1500" dirty="0"/>
+          </a:p>
+          <a:p>
+            <a:pPr marL="254000" indent="-254000">
+              <a:lnSpc>
+                <a:spcPct val="125000"/>
+              </a:lnSpc>
+              <a:buSzPct val="100000"/>
+              <a:buChar char="●"/>
+            </a:pPr>
+            <a:r>
+              <a:rPr lang="en-US" sz="1500" dirty="0">
+                <a:solidFill>
+                  <a:srgbClr val="1A1A1A"/>
+                </a:solidFill>
+                <a:latin typeface="Segoe UI" pitchFamily="34" charset="0"/>
+                <a:ea typeface="Segoe UI" pitchFamily="34" charset="-122"/>
+                <a:cs typeface="Segoe UI" pitchFamily="34" charset="-120"/>
+              </a:rPr>
+              <a:t>Lab 07 — Dépannage réel : erreur RBAC 401</a:t>
+            </a:r>
+            <a:endParaRPr lang="en-US" sz="1500" dirty="0"/>
+          </a:p>
+          <a:p>
+            <a:pPr marL="254000" indent="-254000">
+              <a:lnSpc>
+                <a:spcPct val="125000"/>
+              </a:lnSpc>
+              <a:buSzPct val="100000"/>
+              <a:buChar char="●"/>
+            </a:pPr>
+            <a:r>
+              <a:rPr lang="en-US" sz="1500" dirty="0">
+                <a:solidFill>
+                  <a:srgbClr val="1A1A1A"/>
+                </a:solidFill>
+                <a:latin typeface="Segoe UI" pitchFamily="34" charset="0"/>
+                <a:ea typeface="Segoe UI" pitchFamily="34" charset="-122"/>
+                <a:cs typeface="Segoe UI" pitchFamily="34" charset="-120"/>
+              </a:rPr>
+              <a:t>Lab 08 — Préparation à la production et portes de décision</a:t>
+            </a:r>
+            <a:endParaRPr lang="en-US" sz="1500" dirty="0"/>
+          </a:p>
+        </p:txBody>
+      </p:sp>
+      <p:sp>
+        <p:nvSpPr>
+          <p:cNvPr id="8" name="Shape 5"/>
           <p:cNvSpPr/>
           <p:nvPr/>
         </p:nvSpPr>
@@ -3910,7 +5399,7 @@
       </p:sp>
       <p:sp>
         <p:nvSpPr>
-          <p:cNvPr id="8" name="Text 6"/>
+          <p:cNvPr id="9" name="Text 6"/>
           <p:cNvSpPr/>
           <p:nvPr/>
         </p:nvSpPr>
@@ -3941,7 +5430,43 @@
                 <a:ea typeface="Segoe UI" pitchFamily="34" charset="-122"/>
                 <a:cs typeface="Segoe UI" pitchFamily="34" charset="-120"/>
               </a:rPr>
-              <a:t>Atelier Foundry Hosted Agents — 5 / 9</a:t>
+              <a:t>Atelier Foundry Hosted Agents</a:t>
+            </a:r>
+            <a:endParaRPr lang="en-US" sz="900" dirty="0"/>
+          </a:p>
+        </p:txBody>
+      </p:sp>
+      <p:sp>
+        <p:nvSpPr>
+          <p:cNvPr id="10" name="Text 7"/>
+          <p:cNvSpPr/>
+          <p:nvPr/>
+        </p:nvSpPr>
+        <p:spPr>
+          <a:xfrm>
+            <a:off x="11338560" y="6528816"/>
+            <a:ext cx="548640" cy="219456"/>
+          </a:xfrm>
+          <a:prstGeom prst="rect">
+            <a:avLst/>
+          </a:prstGeom>
+          <a:noFill/>
+          <a:ln/>
+        </p:spPr>
+        <p:txBody>
+          <a:bodyPr wrap="square" rtlCol="0" anchor="ctr"/>
+          <a:lstStyle/>
+          <a:p>
+            <a:pPr algn="r" indent="0" marL="0">
+              <a:buNone/>
+            </a:pPr>
+            <a:r>
+              <a:rPr lang="en-US" sz="900" dirty="0">
+                <a:solidFill>
+                  <a:srgbClr val="767676"/>
+                </a:solidFill>
+              </a:rPr>
+              <a:t>6 / 14</a:t>
             </a:r>
             <a:endParaRPr lang="en-US" sz="900" dirty="0"/>
           </a:p>
@@ -4032,7 +5557,7 @@
                 <a:ea typeface="Segoe UI" pitchFamily="34" charset="-122"/>
                 <a:cs typeface="Segoe UI" pitchFamily="34" charset="-120"/>
               </a:rPr>
-              <a:t>CI/CD</a:t>
+              <a:t>ARCHITECTURE</a:t>
             </a:r>
             <a:endParaRPr lang="en-US" sz="1100" dirty="0"/>
           </a:p>
@@ -4071,7 +5596,7 @@
                 <a:ea typeface="Segoe UI" pitchFamily="34" charset="-122"/>
                 <a:cs typeface="Segoe UI" pitchFamily="34" charset="-120"/>
               </a:rPr>
-              <a:t>Pipeline de mise en production contrôlé par évaluation</a:t>
+              <a:t>Graphe superviseur + spécialistes</a:t>
             </a:r>
             <a:endParaRPr lang="en-US" sz="2600" dirty="0"/>
           </a:p>
@@ -4134,8 +5659,7 @@
                 <a:ea typeface="Segoe UI" pitchFamily="34" charset="-122"/>
                 <a:cs typeface="Segoe UI" pitchFamily="34" charset="-120"/>
               </a:rPr>
-              <a:t>Deux pipelines : hosted-agent-cd.yml (direct vers l’environnement PoC partagé) et deploy-and-evaluate.yml (flux complet staging → production)
-</a:t>
+              <a:t>Un superviseur LangGraph route vers trois nœuds spécialistes : Enquêteur de preuves, Analyste de risque, Rédacteur de rapport</a:t>
             </a:r>
             <a:endParaRPr lang="en-US" sz="1500" dirty="0"/>
           </a:p>
@@ -4156,8 +5680,7 @@
                 <a:ea typeface="Segoe UI" pitchFamily="34" charset="-122"/>
                 <a:cs typeface="Segoe UI" pitchFamily="34" charset="-120"/>
               </a:rPr>
-              <a:t>Flux complet : lint/tests → validation Bicep → déploiement d’un candidat immuable en staging → tests de fumée/contrat/streaming
-</a:t>
+              <a:t>Chaque spécialiste a son propre prompt, ses permissions d’outils et ses critères d’évaluation</a:t>
             </a:r>
             <a:endParaRPr lang="en-US" sz="1500" dirty="0"/>
           </a:p>
@@ -4178,8 +5701,7 @@
                 <a:ea typeface="Segoe UI" pitchFamily="34" charset="-122"/>
                 <a:cs typeface="Segoe UI" pitchFamily="34" charset="-120"/>
               </a:rPr>
-              <a:t>La porte de qualité d’évaluation hors ligne s’exécute contre le candidat de staging avant toute approbation manuelle de production
-</a:t>
+              <a:t>Isolation des outils par rôle : Enquêteur de preuves → defender-conn uniquement, Analyste de risque → anomaly-conn uniquement</a:t>
             </a:r>
             <a:endParaRPr lang="en-US" sz="1500" dirty="0"/>
           </a:p>
@@ -4200,8 +5722,7 @@
                 <a:ea typeface="Segoe UI" pitchFamily="34" charset="-122"/>
                 <a:cs typeface="Segoe UI" pitchFamily="34" charset="-120"/>
               </a:rPr>
-              <a:t>Fédération OIDC sans secret — aucun secret client stocké dans les deux pipelines
-</a:t>
+              <a:t>Le Rédacteur de rapport n’a aucun accès aux outils — il ne fait que synthétiser</a:t>
             </a:r>
             <a:endParaRPr lang="en-US" sz="1500" dirty="0"/>
           </a:p>
@@ -4222,8 +5743,7 @@
                 <a:ea typeface="Segoe UI" pitchFamily="34" charset="-122"/>
                 <a:cs typeface="Segoe UI" pitchFamily="34" charset="-120"/>
               </a:rPr>
-              <a:t>Leçon apprise : déclencher automatiquement les deux pipelines à chaque push entrait en concurrence sur la même ressource partagée — désormais manuel uniquement
-</a:t>
+              <a:t>Le transport MCP versionné, les jetons Entra renouvelés et les connexions RemoteTool fonctionnent ; les reçus prouvent les appels des spécialistes</a:t>
             </a:r>
             <a:endParaRPr lang="en-US" sz="1500" dirty="0"/>
           </a:p>
@@ -4231,7 +5751,7 @@
       </p:sp>
       <p:sp>
         <p:nvSpPr>
-          <p:cNvPr id="7" name="Shape 5"/>
+          <p:cNvPr id="8" name="Shape 5"/>
           <p:cNvSpPr/>
           <p:nvPr/>
         </p:nvSpPr>
@@ -4251,7 +5771,7 @@
       </p:sp>
       <p:sp>
         <p:nvSpPr>
-          <p:cNvPr id="8" name="Text 6"/>
+          <p:cNvPr id="9" name="Text 6"/>
           <p:cNvSpPr/>
           <p:nvPr/>
         </p:nvSpPr>
@@ -4282,7 +5802,43 @@
                 <a:ea typeface="Segoe UI" pitchFamily="34" charset="-122"/>
                 <a:cs typeface="Segoe UI" pitchFamily="34" charset="-120"/>
               </a:rPr>
-              <a:t>Atelier Foundry Hosted Agents — 6 / 9</a:t>
+              <a:t>Atelier Foundry Hosted Agents</a:t>
+            </a:r>
+            <a:endParaRPr lang="en-US" sz="900" dirty="0"/>
+          </a:p>
+        </p:txBody>
+      </p:sp>
+      <p:sp>
+        <p:nvSpPr>
+          <p:cNvPr id="10" name="Text 7"/>
+          <p:cNvSpPr/>
+          <p:nvPr/>
+        </p:nvSpPr>
+        <p:spPr>
+          <a:xfrm>
+            <a:off x="11338560" y="6528816"/>
+            <a:ext cx="548640" cy="219456"/>
+          </a:xfrm>
+          <a:prstGeom prst="rect">
+            <a:avLst/>
+          </a:prstGeom>
+          <a:noFill/>
+          <a:ln/>
+        </p:spPr>
+        <p:txBody>
+          <a:bodyPr wrap="square" rtlCol="0" anchor="ctr"/>
+          <a:lstStyle/>
+          <a:p>
+            <a:pPr algn="r" indent="0" marL="0">
+              <a:buNone/>
+            </a:pPr>
+            <a:r>
+              <a:rPr lang="en-US" sz="900" dirty="0">
+                <a:solidFill>
+                  <a:srgbClr val="767676"/>
+                </a:solidFill>
+              </a:rPr>
+              <a:t>7 / 14</a:t>
             </a:r>
             <a:endParaRPr lang="en-US" sz="900" dirty="0"/>
           </a:p>
@@ -4335,7 +5891,7 @@
             <a:avLst/>
           </a:prstGeom>
           <a:solidFill>
-            <a:srgbClr val="D13438"/>
+            <a:srgbClr val="0078D4"/>
           </a:solidFill>
           <a:ln/>
         </p:spPr>
@@ -4367,13 +5923,13 @@
             <a:r>
               <a:rPr lang="en-US" sz="1100" b="1" spc="100" kern="0" dirty="0">
                 <a:solidFill>
-                  <a:srgbClr val="D13438"/>
-                </a:solidFill>
-                <a:latin typeface="Segoe UI" pitchFamily="34" charset="0"/>
-                <a:ea typeface="Segoe UI" pitchFamily="34" charset="-122"/>
-                <a:cs typeface="Segoe UI" pitchFamily="34" charset="-120"/>
-              </a:rPr>
-              <a:t>DÉPANNAGE RÉEL</a:t>
+                  <a:srgbClr val="0078D4"/>
+                </a:solidFill>
+                <a:latin typeface="Segoe UI" pitchFamily="34" charset="0"/>
+                <a:ea typeface="Segoe UI" pitchFamily="34" charset="-122"/>
+                <a:cs typeface="Segoe UI" pitchFamily="34" charset="-120"/>
+              </a:rPr>
+              <a:t>OUTILS</a:t>
             </a:r>
             <a:endParaRPr lang="en-US" sz="1100" dirty="0"/>
           </a:p>
@@ -4412,7 +5968,7 @@
                 <a:ea typeface="Segoe UI" pitchFamily="34" charset="-122"/>
                 <a:cs typeface="Segoe UI" pitchFamily="34" charset="-120"/>
               </a:rPr>
-              <a:t>Diagnostiquer un vrai 401 RBAC (encore ouvert)</a:t>
+              <a:t>Quatre couches : implémenter, héberger, enregistrer, consommer</a:t>
             </a:r>
             <a:endParaRPr lang="en-US" sz="2600" dirty="0"/>
           </a:p>
@@ -4475,8 +6031,7 @@
                 <a:ea typeface="Segoe UI" pitchFamily="34" charset="-122"/>
                 <a:cs typeface="Segoe UI" pitchFamily="34" charset="-120"/>
               </a:rPr>
-              <a:t>Symptôme : 401 PermissionDenied sur les complétions de chat Azure OpenAI depuis l’identité propre de l’agent hébergé
-</a:t>
+              <a:t>Couche 1 — Implémentation : code de serveur MCP personnalisé (outils Defender, outils anomalie)</a:t>
             </a:r>
             <a:endParaRPr lang="en-US" sz="1500" dirty="0"/>
           </a:p>
@@ -4497,8 +6052,7 @@
                 <a:ea typeface="Segoe UI" pitchFamily="34" charset="-122"/>
                 <a:cs typeface="Segoe UI" pitchFamily="34" charset="-120"/>
               </a:rPr>
-              <a:t>Ne pas faire confiance au diagnostic du message d’erreur — vérifier directement l’attribution de rôle avec az role assignment list
-</a:t>
+              <a:t>Couche 2 — Hébergement : Azure Container Apps indépendantes, authentification/réseau/santé propres</a:t>
             </a:r>
             <a:endParaRPr lang="en-US" sz="1500" dirty="0"/>
           </a:p>
@@ -4519,8 +6073,7 @@
                 <a:ea typeface="Segoe UI" pitchFamily="34" charset="-122"/>
                 <a:cs typeface="Segoe UI" pitchFamily="34" charset="-120"/>
               </a:rPr>
-              <a:t>Lire les dataActions du rôle intégré via az role definition list — prouve que le rôle couvre bien l’action de données exacte
-</a:t>
+              <a:t>Couche 3 — Enregistrement : les connexions Foundry définissent le point de terminaison + la politique d’identifiants par serveur MCP</a:t>
             </a:r>
             <a:endParaRPr lang="en-US" sz="1500" dirty="0"/>
           </a:p>
@@ -4541,8 +6094,7 @@
                 <a:ea typeface="Segoe UI" pitchFamily="34" charset="-122"/>
                 <a:cs typeface="Segoe UI" pitchFamily="34" charset="-120"/>
               </a:rPr>
-              <a:t>Vérifier disableLocalAuth, networkAcls et l’état des politiques Azure pour écarter les remplacements silencieux
-</a:t>
+              <a:t>Couche 4 — Consommation : la Foundry Toolbox agrège les outils enregistrés pour réutilisation entre agents</a:t>
             </a:r>
             <a:endParaRPr lang="en-US" sz="1500" dirty="0"/>
           </a:p>
@@ -4563,38 +6115,15 @@
                 <a:ea typeface="Segoe UI" pitchFamily="34" charset="-122"/>
                 <a:cs typeface="Segoe UI" pitchFamily="34" charset="-120"/>
               </a:rPr>
-              <a:t>Énumérer les politiques d’accès conditionnel du tenant ciblant les principaux de service
-</a:t>
+              <a:t>La Toolbox est la couche d’enregistrement/agrégation — pas le runtime d’hébergement de votre code MCP</a:t>
             </a:r>
             <a:endParaRPr lang="en-US" sz="1500" dirty="0"/>
           </a:p>
-          <a:p>
-            <a:pPr marL="254000" indent="-254000">
-              <a:lnSpc>
-                <a:spcPct val="125000"/>
-              </a:lnSpc>
-              <a:buSzPct val="100000"/>
-              <a:buChar char="●"/>
-            </a:pPr>
-            <a:r>
-              <a:rPr lang="en-US" sz="1500" dirty="0">
-                <a:solidFill>
-                  <a:srgbClr val="1A1A1A"/>
-                </a:solidFill>
-                <a:latin typeface="Segoe UI" pitchFamily="34" charset="0"/>
-                <a:ea typeface="Segoe UI" pitchFamily="34" charset="-122"/>
-                <a:cs typeface="Segoe UI" pitchFamily="34" charset="-120"/>
-              </a:rPr>
-              <a:t>Un chemin d’agent manuel fonctionnel à côté d’un chemin d’agent hébergé défaillant pointe vers la plateforme, pas le RBAC côté client
-</a:t>
-            </a:r>
-            <a:endParaRPr lang="en-US" sz="1500" dirty="0"/>
-          </a:p>
-        </p:txBody>
-      </p:sp>
-      <p:sp>
-        <p:nvSpPr>
-          <p:cNvPr id="7" name="Shape 5"/>
+        </p:txBody>
+      </p:sp>
+      <p:sp>
+        <p:nvSpPr>
+          <p:cNvPr id="8" name="Shape 5"/>
           <p:cNvSpPr/>
           <p:nvPr/>
         </p:nvSpPr>
@@ -4614,7 +6143,7 @@
       </p:sp>
       <p:sp>
         <p:nvSpPr>
-          <p:cNvPr id="8" name="Text 6"/>
+          <p:cNvPr id="9" name="Text 6"/>
           <p:cNvSpPr/>
           <p:nvPr/>
         </p:nvSpPr>
@@ -4645,7 +6174,43 @@
                 <a:ea typeface="Segoe UI" pitchFamily="34" charset="-122"/>
                 <a:cs typeface="Segoe UI" pitchFamily="34" charset="-120"/>
               </a:rPr>
-              <a:t>Atelier Foundry Hosted Agents — 7 / 9</a:t>
+              <a:t>Atelier Foundry Hosted Agents</a:t>
+            </a:r>
+            <a:endParaRPr lang="en-US" sz="900" dirty="0"/>
+          </a:p>
+        </p:txBody>
+      </p:sp>
+      <p:sp>
+        <p:nvSpPr>
+          <p:cNvPr id="10" name="Text 7"/>
+          <p:cNvSpPr/>
+          <p:nvPr/>
+        </p:nvSpPr>
+        <p:spPr>
+          <a:xfrm>
+            <a:off x="11338560" y="6528816"/>
+            <a:ext cx="548640" cy="219456"/>
+          </a:xfrm>
+          <a:prstGeom prst="rect">
+            <a:avLst/>
+          </a:prstGeom>
+          <a:noFill/>
+          <a:ln/>
+        </p:spPr>
+        <p:txBody>
+          <a:bodyPr wrap="square" rtlCol="0" anchor="ctr"/>
+          <a:lstStyle/>
+          <a:p>
+            <a:pPr algn="r" indent="0" marL="0">
+              <a:buNone/>
+            </a:pPr>
+            <a:r>
+              <a:rPr lang="en-US" sz="900" dirty="0">
+                <a:solidFill>
+                  <a:srgbClr val="767676"/>
+                </a:solidFill>
+              </a:rPr>
+              <a:t>8 / 14</a:t>
             </a:r>
             <a:endParaRPr lang="en-US" sz="900" dirty="0"/>
           </a:p>
@@ -4736,7 +6301,7 @@
                 <a:ea typeface="Segoe UI" pitchFamily="34" charset="-122"/>
                 <a:cs typeface="Segoe UI" pitchFamily="34" charset="-120"/>
               </a:rPr>
-              <a:t>PRÉPARATION À LA PRODUCTION</a:t>
+              <a:t>DÉPLOIEMENT</a:t>
             </a:r>
             <a:endParaRPr lang="en-US" sz="1100" dirty="0"/>
           </a:p>
@@ -4775,7 +6340,7 @@
                 <a:ea typeface="Segoe UI" pitchFamily="34" charset="-122"/>
                 <a:cs typeface="Segoe UI" pitchFamily="34" charset="-120"/>
               </a:rPr>
-              <a:t>Des portes honnêtes, pas une fausse confiance</a:t>
+              <a:t>Un manifeste : azure.yaml + azd</a:t>
             </a:r>
             <a:endParaRPr lang="en-US" sz="2600" dirty="0"/>
           </a:p>
@@ -4838,8 +6403,7 @@
                 <a:ea typeface="Segoe UI" pitchFamily="34" charset="-122"/>
                 <a:cs typeface="Segoe UI" pitchFamily="34" charset="-120"/>
               </a:rPr>
-              <a:t>Quatre pistes d’expérimentation : test de charge, checkpointer Cosmos DB, intégration Agent 365, évaluation continue
-</a:t>
+              <a:t>azure.yaml câble le projet Foundry, le déploiement de modèle, les connexions Toolbox et le service d’agent hébergé</a:t>
             </a:r>
             <a:endParaRPr lang="en-US" sz="1500" dirty="0"/>
           </a:p>
@@ -4860,8 +6424,7 @@
                 <a:ea typeface="Segoe UI" pitchFamily="34" charset="-122"/>
                 <a:cs typeface="Segoe UI" pitchFamily="34" charset="-120"/>
               </a:rPr>
-              <a:t>Porte Qualité : Pass — jeu de données de référence + 12/12 vérifications déterministes + correspondance des rubriques
-</a:t>
+              <a:t>kind: hosted — Foundry exploite le calcul de session ; vous ne possédez que le code du graphe</a:t>
             </a:r>
             <a:endParaRPr lang="en-US" sz="1500" dirty="0"/>
           </a:p>
@@ -4882,8 +6445,7 @@
                 <a:ea typeface="Segoe UI" pitchFamily="34" charset="-122"/>
                 <a:cs typeface="Segoe UI" pitchFamily="34" charset="-120"/>
               </a:rPr>
-              <a:t>Portes Échelle, Sécurité, Opérations : Conditional — preuves partielles, suivis nommés
-</a:t>
+              <a:t>dependencyResolution: remote_build — Foundry construit vos dépendances Python côté serveur</a:t>
             </a:r>
             <a:endParaRPr lang="en-US" sz="1500" dirty="0"/>
           </a:p>
@@ -4904,8 +6466,7 @@
                 <a:ea typeface="Segoe UI" pitchFamily="34" charset="-122"/>
                 <a:cs typeface="Segoe UI" pitchFamily="34" charset="-120"/>
               </a:rPr>
-              <a:t>Portes Statut de plateforme, Données, Coût : Not testable in this PoC — nécessitent une confirmation commerciale/juridique/plateforme
-</a:t>
+              <a:t>protocol: responses — protocole Responses compatible OpenAI avec support du streaming</a:t>
             </a:r>
             <a:endParaRPr lang="en-US" sz="1500" dirty="0"/>
           </a:p>
@@ -4926,8 +6487,7 @@
                 <a:ea typeface="Segoe UI" pitchFamily="34" charset="-122"/>
                 <a:cs typeface="Segoe UI" pitchFamily="34" charset="-120"/>
               </a:rPr>
-              <a:t>Recommandation globale : go conditionnel pour poursuivre l’investissement PoC vers pilote, pas un oui/non net
-</a:t>
+              <a:t>azd provision crée l’infrastructure ; azd deploy publie une nouvelle version d’agent — cycles de vie séparés</a:t>
             </a:r>
             <a:endParaRPr lang="en-US" sz="1500" dirty="0"/>
           </a:p>
@@ -4935,7 +6495,7 @@
       </p:sp>
       <p:sp>
         <p:nvSpPr>
-          <p:cNvPr id="7" name="Shape 5"/>
+          <p:cNvPr id="8" name="Shape 5"/>
           <p:cNvSpPr/>
           <p:nvPr/>
         </p:nvSpPr>
@@ -4955,7 +6515,7 @@
       </p:sp>
       <p:sp>
         <p:nvSpPr>
-          <p:cNvPr id="8" name="Text 6"/>
+          <p:cNvPr id="9" name="Text 6"/>
           <p:cNvSpPr/>
           <p:nvPr/>
         </p:nvSpPr>
@@ -4986,7 +6546,43 @@
                 <a:ea typeface="Segoe UI" pitchFamily="34" charset="-122"/>
                 <a:cs typeface="Segoe UI" pitchFamily="34" charset="-120"/>
               </a:rPr>
-              <a:t>Atelier Foundry Hosted Agents — 8 / 9</a:t>
+              <a:t>Atelier Foundry Hosted Agents</a:t>
+            </a:r>
+            <a:endParaRPr lang="en-US" sz="900" dirty="0"/>
+          </a:p>
+        </p:txBody>
+      </p:sp>
+      <p:sp>
+        <p:nvSpPr>
+          <p:cNvPr id="10" name="Text 7"/>
+          <p:cNvSpPr/>
+          <p:nvPr/>
+        </p:nvSpPr>
+        <p:spPr>
+          <a:xfrm>
+            <a:off x="11338560" y="6528816"/>
+            <a:ext cx="548640" cy="219456"/>
+          </a:xfrm>
+          <a:prstGeom prst="rect">
+            <a:avLst/>
+          </a:prstGeom>
+          <a:noFill/>
+          <a:ln/>
+        </p:spPr>
+        <p:txBody>
+          <a:bodyPr wrap="square" rtlCol="0" anchor="ctr"/>
+          <a:lstStyle/>
+          <a:p>
+            <a:pPr algn="r" indent="0" marL="0">
+              <a:buNone/>
+            </a:pPr>
+            <a:r>
+              <a:rPr lang="en-US" sz="900" dirty="0">
+                <a:solidFill>
+                  <a:srgbClr val="767676"/>
+                </a:solidFill>
+              </a:rPr>
+              <a:t>9 / 14</a:t>
             </a:r>
             <a:endParaRPr lang="en-US" sz="900" dirty="0"/>
           </a:p>

--- a/docs/assets/decks/foundry-hosted-agents-workshop-fr.pptx
+++ b/docs/assets/decks/foundry-hosted-agents-workshop-fr.pptx
@@ -19,9 +19,14 @@
     <p:sldId id="267" r:id="rId13"/>
     <p:sldId id="268" r:id="rId14"/>
     <p:sldId id="269" r:id="rId15"/>
+    <p:sldId id="270" r:id="rId16"/>
+    <p:sldId id="271" r:id="rId17"/>
+    <p:sldId id="272" r:id="rId18"/>
+    <p:sldId id="273" r:id="rId19"/>
+    <p:sldId id="274" r:id="rId20"/>
   </p:sldIdLst>
   <p:notesMasterIdLst>
-    <p:notesMasterId r:id="rId16"/>
+    <p:notesMasterId r:id="rId21"/>
   </p:notesMasterIdLst>
   <p:sldSz cx="12188952" cy="6858000"/>
   <p:notesSz cx="6858000" cy="12188952"/>
@@ -515,7 +520,7 @@
           <a:p>
             <a:r>
               <a:rPr lang="en-US" dirty="0"/>
-              <a:t>Verified release 34178081808, 2026-09-08 UTC. WI-11 resolved for this implementation. Synthetic fixtures; production readiness remains conditional.</a:t>
+              <a:t>Current snapshot: release 34427432731 and Continuous Validation 34427429700 succeeded, 2026-09-10 UTC. Full-history pilot; synthetic fixtures. Four explicitly historical proof slides retain run 34178081808.</a:t>
             </a:r>
             <a:endParaRPr lang="en-US" dirty="0"/>
           </a:p>
@@ -603,12 +608,9 @@
           <a:p>
             <a:r>
               <a:rPr lang="en-US" dirty="0"/>
-              <a:t>Jeu de données de référence : 8 catégories (vrai/faux positif, ambigu, données manquantes, outils contradictoires, injection de prompt, actions non autorisées, conclusions non étayées)
-Déterministe : validité du schéma, citations requises, appels d’outils autorisés, contraintes de politique — rapide, reproductible
-Juges Foundry vérifiés : cohérence, ancrage, respect de la tâche. Sept rapports par mesure, 21/21 réussites, seuils inchangés à 100 %
-Huit captures, aucune violation déterministe ; inject-001 est un refus de sécurité vérifié sans outil, pas un résultat de juge
-Les règles de politique (ex. ne jamais prétendre avoir agi sans autorisation) restent déterministes, pas jugées par LLM
-Sources: repository code and wiki Release-Evidence / Operations. Verified release 34178081808; historical experiments retain their original limits.</a:t>
+              <a:t>Version 34 active, Toolbox 1. Test de cette version réussi. À 02:12:02 UTC, zéro AppExceptions sur les dix dernières minutes. Ni test d’endurance de dix minutes ni preuve de traçage complet. Évaluation en staging. Même code reconstruit en production avec les condensats MCP évalués. Récupération manuelle, sans rollback automatique ni canary.
+Source: https://github.com/devopsabcs-engineering/foundry-hosted-agents/actions/runs/34178081808
+Evidence: assets/release-evidence/source; SHA-256 manifest: assets/release-evidence/manifest.json. Images render downloaded artifacts, not native portal UI.</a:t>
             </a:r>
             <a:endParaRPr lang="en-US" dirty="0"/>
           </a:p>
@@ -696,12 +698,16 @@
           <a:p>
             <a:r>
               <a:rPr lang="en-US" dirty="0"/>
-              <a:t>Deux pipelines manuels : déploiement direct PoC, ou deploy-and-evaluate.yml avec comptes et projets staging/production séparés
-Flux complet : lint/tests → validation Bicep → déploiement d’un candidat immuable en staging → tests de fumée/contrat/streaming
-La porte de qualité d’évaluation hors ligne s’exécute contre le candidat de staging avant toute approbation manuelle de production
-Fédération OIDC sans secret — aucun secret client stocké dans les deux pipelines
-Exécution 34178081808 réussie : staging 6, production 34, mêmes condensats MCP évalués, approbations normales. Récupération manuelle, sans rollback automatique ni canary
-Sources: repository code and wiki Release-Evidence / Operations. Verified release 34178081808; historical experiments retain their original limits.</a:t>
+              <a:t>Lab 00 — Prérequis et configuration de l’environnement
+Lab 01 — Plongée dans l’architecture (superviseur/spécialistes LangGraph)
+Lab 02 — Déployer les serveurs d’outils MCP
+Lab 03 — Provisionner et déployer l’agent hébergé (azd)
+Lab 04 — Invoquer l’agent et lire les traces
+Lab 05 — Évaluations : déterministes + LLM-as-judge
+Lab 06 — CI/CD : pipeline contrôlé par évaluation
+Lab 07 — Dépannage réel : erreur RBAC 401
+Lab 08 — Préparation à la production et portes de décision
+Sources: repository code, labs 04/06 and release 34427432731; Continuous Validation 34427429700. Historical experiments retain their original limits.</a:t>
             </a:r>
             <a:endParaRPr lang="en-US" dirty="0"/>
           </a:p>
@@ -789,13 +795,12 @@
           <a:p>
             <a:r>
               <a:rPr lang="en-US" dirty="0"/>
-              <a:t>Le 401 modèle a disparu en v32 ; le même principal réussit maintenant la mise en production complète v34
-Vérifier le principal effectif, les dataActions, la portée, les conditions, les politiques réseau et l’audience du jeton
-Les erreurs MCP distinctes ont été corrigées : point de terminaison versionné, connexions RemoteTool, négociation du protocole actuel
-Le contexte original et les recherches indépendantes des spécialistes rétablissent les preuves ; seuils qualité inchangés
-L’explication par le cache Azure reste une hypothèse. Un redéploiement réussi prouve le rétablissement, pas une cause racine côté serveur
-Le ticket 2609040400007027 reste une référence historique ; aucune fermeture du ticket support n’est affirmée
-Sources: repository code and wiki Release-Evidence / Operations. Verified release 34178081808; historical experiments retain their original limits.</a:t>
+              <a:t>Un superviseur LangGraph route vers trois nœuds spécialistes : Enquêteur de preuves, Analyste de risque, Rédacteur de rapport
+Chaque spécialiste a son propre prompt, ses permissions d’outils et ses critères d’évaluation
+Isolation des outils par rôle : Enquêteur de preuves → defender-conn uniquement, Analyste de risque → anomaly-conn uniquement
+Le Rédacteur de rapport n’a aucun accès aux outils — il ne fait que synthétiser
+Le transport MCP versionné, les jetons Entra renouvelés et les connexions RemoteTool fonctionnent ; les reçus prouvent les appels des spécialistes
+Sources: repository code, labs 04/06 and release 34427432731; Continuous Validation 34427429700. Historical experiments retain their original limits.</a:t>
             </a:r>
             <a:endParaRPr lang="en-US" dirty="0"/>
           </a:p>
@@ -883,12 +888,12 @@
           <a:p>
             <a:r>
               <a:rPr lang="en-US" dirty="0"/>
-              <a:t>Quatre pistes d’expérimentation : test de charge, checkpointer Cosmos DB, intégration Agent 365, évaluation continue
-Porte Qualité réussie : 8 captures, aucune violation, 21/21 vérifications, refus de sécurité et reçus d’outils vérifiés
-Portes Échelle, Sécurité, Opérations : Conditional — preuves partielles, suivis nommés
-Portes Statut de plateforme, Données, Coût : Not testable in this PoC — nécessitent une confirmation commerciale/juridique/plateforme
-Recommandation globale : go conditionnel pour poursuivre l’investissement PoC vers pilote, pas un oui/non net
-Sources: repository code and wiki Release-Evidence / Operations. Verified release 34178081808; historical experiments retain their original limits.</a:t>
+              <a:t>Couche 1 — Implémentation : code de serveur MCP personnalisé (outils Defender, outils anomalie)
+Couche 2 — Hébergement : Azure Container Apps indépendantes, authentification/réseau/santé propres
+Couche 3 — Enregistrement : les connexions Foundry définissent le point de terminaison + la politique d’identifiants par serveur MCP
+Couche 4 — Consommation : la Foundry Toolbox agrège les outils enregistrés pour réutilisation entre agents
+La Toolbox est la couche d’enregistrement/agrégation — pas le runtime d’hébergement de votre code MCP
+Sources: repository code, labs 04/06 and release 34427432731; Continuous Validation 34427429700. Historical experiments retain their original limits.</a:t>
             </a:r>
             <a:endParaRPr lang="en-US" dirty="0"/>
           </a:p>
@@ -976,12 +981,12 @@
           <a:p>
             <a:r>
               <a:rPr lang="en-US" dirty="0"/>
-              <a:t>Le déploiement et l’évaluation sont réels ; la télémétrie de sécurité MCP est synthétique, pas une donnée client réelle
-Dépôt : github.com/devopsabcs-engineering/foundry-hosted-agents
-Wiki : architecture actuelle, artefacts vérifiés, guide opérationnel et historique WI-11 résolu
-Labs complets, bilingues, pas à pas : le site GitHub Pages compagnon de ce deck
-Test de production v34 réussi ; zéro exception récente ne prouve ni l’endurance ni le traçage distribué complet
-Sources: repository code and wiki Release-Evidence / Operations. Verified release 34178081808; historical experiments retain their original limits.</a:t>
+              <a:t>azure.yaml câble le projet Foundry, le déploiement de modèle, les connexions Toolbox et le service d’agent hébergé
+kind: hosted — Foundry exploite le calcul de session ; vous ne possédez que le code du graphe
+dependencyResolution: remote_build — Foundry construit vos dépendances Python côté serveur
+protocol: responses — protocole Responses compatible OpenAI avec support du streaming
+azd provision gère l’infrastructure ; azd deploy publie ou réutilise une version inchangée. Cycles distincts ; vérifier la route avant et après
+Sources: repository code, labs 04/06 and release 34427432731; Continuous Validation 34427429700. Historical experiments retain their original limits.</a:t>
             </a:r>
             <a:endParaRPr lang="en-US" dirty="0"/>
           </a:p>
@@ -1005,6 +1010,472 @@
             <a:fld id="{F7021451-1387-4CA6-816F-3879F97B5CBC}" type="slidenum">
               <a:rPr lang="en-US"/>
               <a:t>14</a:t>
+            </a:fld>
+            <a:endParaRPr lang="en-US"/>
+          </a:p>
+        </p:txBody>
+      </p:sp>
+    </p:spTree>
+    <p:extLst>
+      <p:ext uri="{BB962C8B-B14F-4D97-AF65-F5344CB8AC3E}">
+        <p14:creationId xmlns:p14="http://schemas.microsoft.com/office/powerpoint/2010/main" val="1024086991"/>
+      </p:ext>
+    </p:extLst>
+  </p:cSld>
+  <p:clrMapOvr>
+    <a:masterClrMapping/>
+  </p:clrMapOvr>
+</p:notes>
+</file>
+
+<file path=ppt/notesSlides/notesSlide15.xml><?xml version="1.0" encoding="utf-8"?>
+<p:notes xmlns:a="http://schemas.openxmlformats.org/drawingml/2006/main" xmlns:r="http://schemas.openxmlformats.org/officeDocument/2006/relationships" xmlns:p="http://schemas.openxmlformats.org/presentationml/2006/main">
+  <p:cSld>
+    <p:spTree>
+      <p:nvGrpSpPr>
+        <p:cNvPr id="1" name=""/>
+        <p:cNvGrpSpPr/>
+        <p:nvPr/>
+      </p:nvGrpSpPr>
+      <p:grpSpPr>
+        <a:xfrm>
+          <a:off x="0" y="0"/>
+          <a:ext cx="0" cy="0"/>
+          <a:chOff x="0" y="0"/>
+          <a:chExt cx="0" cy="0"/>
+        </a:xfrm>
+      </p:grpSpPr>
+      <p:sp>
+        <p:nvSpPr>
+          <p:cNvPr id="2" name="Slide Image Placeholder 1"/>
+          <p:cNvSpPr>
+            <a:spLocks noGrp="1" noRot="1" noChangeAspect="1"/>
+          </p:cNvSpPr>
+          <p:nvPr>
+            <p:ph type="sldImg"/>
+          </p:nvPr>
+        </p:nvSpPr>
+        <p:spPr/>
+      </p:sp>
+      <p:sp>
+        <p:nvSpPr>
+          <p:cNvPr id="3" name="Notes Placeholder 2"/>
+          <p:cNvSpPr>
+            <a:spLocks noGrp="1"/>
+          </p:cNvSpPr>
+          <p:nvPr>
+            <p:ph type="body" idx="1"/>
+          </p:nvPr>
+        </p:nvSpPr>
+        <p:spPr/>
+        <p:txBody>
+          <a:bodyPr/>
+          <a:lstStyle/>
+          <a:p>
+            <a:r>
+              <a:rPr lang="en-US" dirty="0"/>
+              <a:t>Jeu de données de référence : 8 catégories (vrai/faux positif, ambigu, données manquantes, outils contradictoires, injection de prompt, actions non autorisées, conclusions non étayées)
+Déterministe : validité du schéma, citations requises, appels d’outils autorisés, contraintes de politique — rapide, reproductible
+Juges Foundry vérifiés : cohérence, ancrage, respect de la tâche. Sept rapports par mesure, 21/21 réussites, seuils inchangés à 100 %
+Huit captures, aucune violation déterministe ; inject-001 est un refus de sécurité vérifié sans outil, pas un résultat de juge
+Les règles de politique (ex. ne jamais prétendre avoir agi sans autorisation) restent déterministes, pas jugées par LLM
+Sources: repository code, labs 04/06 and release 34427432731; Continuous Validation 34427429700. Historical experiments retain their original limits.</a:t>
+            </a:r>
+            <a:endParaRPr lang="en-US" dirty="0"/>
+          </a:p>
+        </p:txBody>
+      </p:sp>
+      <p:sp>
+        <p:nvSpPr>
+          <p:cNvPr id="4" name="Slide Number Placeholder 3"/>
+          <p:cNvSpPr>
+            <a:spLocks noGrp="1"/>
+          </p:cNvSpPr>
+          <p:nvPr>
+            <p:ph type="sldNum" sz="quarter" idx="10"/>
+          </p:nvPr>
+        </p:nvSpPr>
+        <p:spPr/>
+        <p:txBody>
+          <a:bodyPr/>
+          <a:lstStyle/>
+          <a:p>
+            <a:fld id="{F7021451-1387-4CA6-816F-3879F97B5CBC}" type="slidenum">
+              <a:rPr lang="en-US"/>
+              <a:t>15</a:t>
+            </a:fld>
+            <a:endParaRPr lang="en-US"/>
+          </a:p>
+        </p:txBody>
+      </p:sp>
+    </p:spTree>
+    <p:extLst>
+      <p:ext uri="{BB962C8B-B14F-4D97-AF65-F5344CB8AC3E}">
+        <p14:creationId xmlns:p14="http://schemas.microsoft.com/office/powerpoint/2010/main" val="1024086991"/>
+      </p:ext>
+    </p:extLst>
+  </p:cSld>
+  <p:clrMapOvr>
+    <a:masterClrMapping/>
+  </p:clrMapOvr>
+</p:notes>
+</file>
+
+<file path=ppt/notesSlides/notesSlide16.xml><?xml version="1.0" encoding="utf-8"?>
+<p:notes xmlns:a="http://schemas.openxmlformats.org/drawingml/2006/main" xmlns:r="http://schemas.openxmlformats.org/officeDocument/2006/relationships" xmlns:p="http://schemas.openxmlformats.org/presentationml/2006/main">
+  <p:cSld>
+    <p:spTree>
+      <p:nvGrpSpPr>
+        <p:cNvPr id="1" name=""/>
+        <p:cNvGrpSpPr/>
+        <p:nvPr/>
+      </p:nvGrpSpPr>
+      <p:grpSpPr>
+        <a:xfrm>
+          <a:off x="0" y="0"/>
+          <a:ext cx="0" cy="0"/>
+          <a:chOff x="0" y="0"/>
+          <a:chExt cx="0" cy="0"/>
+        </a:xfrm>
+      </p:grpSpPr>
+      <p:sp>
+        <p:nvSpPr>
+          <p:cNvPr id="2" name="Slide Image Placeholder 1"/>
+          <p:cNvSpPr>
+            <a:spLocks noGrp="1" noRot="1" noChangeAspect="1"/>
+          </p:cNvSpPr>
+          <p:nvPr>
+            <p:ph type="sldImg"/>
+          </p:nvPr>
+        </p:nvSpPr>
+        <p:spPr/>
+      </p:sp>
+      <p:sp>
+        <p:nvSpPr>
+          <p:cNvPr id="3" name="Notes Placeholder 2"/>
+          <p:cNvSpPr>
+            <a:spLocks noGrp="1"/>
+          </p:cNvSpPr>
+          <p:nvPr>
+            <p:ph type="body" idx="1"/>
+          </p:nvPr>
+        </p:nvSpPr>
+        <p:spPr/>
+        <p:txBody>
+          <a:bodyPr/>
+          <a:lstStyle/>
+          <a:p>
+            <a:r>
+              <a:rPr lang="en-US" dirty="0"/>
+              <a:t>Un chemin protégé : deploy-and-evaluate.yml ; hosted-agent-cd.yml y délègue. Comptes et applications MCP staging/production séparés
+Flux complet : lint/tests → validation Bicep → déploiement d’un candidat immuable en staging → tests de fumée/contrat/streaming
+La porte de qualité d’évaluation hors ligne s’exécute contre le candidat de staging avant toute approbation manuelle de production
+Fédération OIDC sans secret — aucun secret client stocké dans les deux pipelines
+Exécution 34427432731 réussie ; validation 34427429700 avec cinq flux inchangés réussie. Approbations normales, récupération manuelle ; sans rollback automatique ni canary
+Sources: repository code, labs 04/06 and release 34427432731; Continuous Validation 34427429700. Historical experiments retain their original limits.</a:t>
+            </a:r>
+            <a:endParaRPr lang="en-US" dirty="0"/>
+          </a:p>
+        </p:txBody>
+      </p:sp>
+      <p:sp>
+        <p:nvSpPr>
+          <p:cNvPr id="4" name="Slide Number Placeholder 3"/>
+          <p:cNvSpPr>
+            <a:spLocks noGrp="1"/>
+          </p:cNvSpPr>
+          <p:nvPr>
+            <p:ph type="sldNum" sz="quarter" idx="10"/>
+          </p:nvPr>
+        </p:nvSpPr>
+        <p:spPr/>
+        <p:txBody>
+          <a:bodyPr/>
+          <a:lstStyle/>
+          <a:p>
+            <a:fld id="{F7021451-1387-4CA6-816F-3879F97B5CBC}" type="slidenum">
+              <a:rPr lang="en-US"/>
+              <a:t>16</a:t>
+            </a:fld>
+            <a:endParaRPr lang="en-US"/>
+          </a:p>
+        </p:txBody>
+      </p:sp>
+    </p:spTree>
+    <p:extLst>
+      <p:ext uri="{BB962C8B-B14F-4D97-AF65-F5344CB8AC3E}">
+        <p14:creationId xmlns:p14="http://schemas.microsoft.com/office/powerpoint/2010/main" val="1024086991"/>
+      </p:ext>
+    </p:extLst>
+  </p:cSld>
+  <p:clrMapOvr>
+    <a:masterClrMapping/>
+  </p:clrMapOvr>
+</p:notes>
+</file>
+
+<file path=ppt/notesSlides/notesSlide17.xml><?xml version="1.0" encoding="utf-8"?>
+<p:notes xmlns:a="http://schemas.openxmlformats.org/drawingml/2006/main" xmlns:r="http://schemas.openxmlformats.org/officeDocument/2006/relationships" xmlns:p="http://schemas.openxmlformats.org/presentationml/2006/main">
+  <p:cSld>
+    <p:spTree>
+      <p:nvGrpSpPr>
+        <p:cNvPr id="1" name=""/>
+        <p:cNvGrpSpPr/>
+        <p:nvPr/>
+      </p:nvGrpSpPr>
+      <p:grpSpPr>
+        <a:xfrm>
+          <a:off x="0" y="0"/>
+          <a:ext cx="0" cy="0"/>
+          <a:chOff x="0" y="0"/>
+          <a:chExt cx="0" cy="0"/>
+        </a:xfrm>
+      </p:grpSpPr>
+      <p:sp>
+        <p:nvSpPr>
+          <p:cNvPr id="2" name="Slide Image Placeholder 1"/>
+          <p:cNvSpPr>
+            <a:spLocks noGrp="1" noRot="1" noChangeAspect="1"/>
+          </p:cNvSpPr>
+          <p:nvPr>
+            <p:ph type="sldImg"/>
+          </p:nvPr>
+        </p:nvSpPr>
+        <p:spPr/>
+      </p:sp>
+      <p:sp>
+        <p:nvSpPr>
+          <p:cNvPr id="3" name="Notes Placeholder 2"/>
+          <p:cNvSpPr>
+            <a:spLocks noGrp="1"/>
+          </p:cNvSpPr>
+          <p:nvPr>
+            <p:ph type="body" idx="1"/>
+          </p:nvPr>
+        </p:nvSpPr>
+        <p:spPr/>
+        <p:txBody>
+          <a:bodyPr/>
+          <a:lstStyle/>
+          <a:p>
+            <a:r>
+              <a:rPr lang="en-US" dirty="0"/>
+              <a:t>Le 401 modèle a disparu en v32 ; les mises en production protégées suivantes ont réussi. Le rétablissement ne prouve pas la cause interne à Azure
+Vérifier le principal effectif, les dataActions, la portée, les conditions, les politiques réseau et l’audience du jeton
+Les erreurs MCP distinctes ont été corrigées : point de terminaison versionné, connexions RemoteTool, négociation du protocole actuel
+Le contexte original et les recherches indépendantes des spécialistes rétablissent les preuves ; seuils qualité inchangés
+L’explication par le cache Azure reste une hypothèse. Un redéploiement réussi prouve le rétablissement, pas une cause racine côté serveur
+Le ticket 2609040400007027 reste une référence historique ; aucune fermeture du ticket support n’est affirmée
+Sources: repository code, labs 04/06 and release 34427432731; Continuous Validation 34427429700. Historical experiments retain their original limits.</a:t>
+            </a:r>
+            <a:endParaRPr lang="en-US" dirty="0"/>
+          </a:p>
+        </p:txBody>
+      </p:sp>
+      <p:sp>
+        <p:nvSpPr>
+          <p:cNvPr id="4" name="Slide Number Placeholder 3"/>
+          <p:cNvSpPr>
+            <a:spLocks noGrp="1"/>
+          </p:cNvSpPr>
+          <p:nvPr>
+            <p:ph type="sldNum" sz="quarter" idx="10"/>
+          </p:nvPr>
+        </p:nvSpPr>
+        <p:spPr/>
+        <p:txBody>
+          <a:bodyPr/>
+          <a:lstStyle/>
+          <a:p>
+            <a:fld id="{F7021451-1387-4CA6-816F-3879F97B5CBC}" type="slidenum">
+              <a:rPr lang="en-US"/>
+              <a:t>17</a:t>
+            </a:fld>
+            <a:endParaRPr lang="en-US"/>
+          </a:p>
+        </p:txBody>
+      </p:sp>
+    </p:spTree>
+    <p:extLst>
+      <p:ext uri="{BB962C8B-B14F-4D97-AF65-F5344CB8AC3E}">
+        <p14:creationId xmlns:p14="http://schemas.microsoft.com/office/powerpoint/2010/main" val="1024086991"/>
+      </p:ext>
+    </p:extLst>
+  </p:cSld>
+  <p:clrMapOvr>
+    <a:masterClrMapping/>
+  </p:clrMapOvr>
+</p:notes>
+</file>
+
+<file path=ppt/notesSlides/notesSlide18.xml><?xml version="1.0" encoding="utf-8"?>
+<p:notes xmlns:a="http://schemas.openxmlformats.org/drawingml/2006/main" xmlns:r="http://schemas.openxmlformats.org/officeDocument/2006/relationships" xmlns:p="http://schemas.openxmlformats.org/presentationml/2006/main">
+  <p:cSld>
+    <p:spTree>
+      <p:nvGrpSpPr>
+        <p:cNvPr id="1" name=""/>
+        <p:cNvGrpSpPr/>
+        <p:nvPr/>
+      </p:nvGrpSpPr>
+      <p:grpSpPr>
+        <a:xfrm>
+          <a:off x="0" y="0"/>
+          <a:ext cx="0" cy="0"/>
+          <a:chOff x="0" y="0"/>
+          <a:chExt cx="0" cy="0"/>
+        </a:xfrm>
+      </p:grpSpPr>
+      <p:sp>
+        <p:nvSpPr>
+          <p:cNvPr id="2" name="Slide Image Placeholder 1"/>
+          <p:cNvSpPr>
+            <a:spLocks noGrp="1" noRot="1" noChangeAspect="1"/>
+          </p:cNvSpPr>
+          <p:nvPr>
+            <p:ph type="sldImg"/>
+          </p:nvPr>
+        </p:nvSpPr>
+        <p:spPr/>
+      </p:sp>
+      <p:sp>
+        <p:nvSpPr>
+          <p:cNvPr id="3" name="Notes Placeholder 2"/>
+          <p:cNvSpPr>
+            <a:spLocks noGrp="1"/>
+          </p:cNvSpPr>
+          <p:nvPr>
+            <p:ph type="body" idx="1"/>
+          </p:nvPr>
+        </p:nvSpPr>
+        <p:spPr/>
+        <p:txBody>
+          <a:bodyPr/>
+          <a:lstStyle/>
+          <a:p>
+            <a:r>
+              <a:rPr lang="en-US" dirty="0"/>
+              <a:t>Quatre pistes d’expérimentation : test de charge, checkpointer Cosmos DB, intégration Agent 365, évaluation continue
+Porte Qualité réussie : 8 captures, aucune violation, 21/21 vérifications, refus de sécurité et reçus d’outils vérifiés
+Portes Échelle, Sécurité, Opérations : Conditional — preuves partielles, suivis nommés
+Portes Statut de plateforme, Données, Coût : Not testable in this PoC — nécessitent une confirmation commerciale/juridique/plateforme
+Recommandation globale : go conditionnel pour poursuivre l’investissement PoC vers pilote, pas un oui/non net
+Sources: repository code, labs 04/06 and release 34427432731; Continuous Validation 34427429700. Historical experiments retain their original limits.</a:t>
+            </a:r>
+            <a:endParaRPr lang="en-US" dirty="0"/>
+          </a:p>
+        </p:txBody>
+      </p:sp>
+      <p:sp>
+        <p:nvSpPr>
+          <p:cNvPr id="4" name="Slide Number Placeholder 3"/>
+          <p:cNvSpPr>
+            <a:spLocks noGrp="1"/>
+          </p:cNvSpPr>
+          <p:nvPr>
+            <p:ph type="sldNum" sz="quarter" idx="10"/>
+          </p:nvPr>
+        </p:nvSpPr>
+        <p:spPr/>
+        <p:txBody>
+          <a:bodyPr/>
+          <a:lstStyle/>
+          <a:p>
+            <a:fld id="{F7021451-1387-4CA6-816F-3879F97B5CBC}" type="slidenum">
+              <a:rPr lang="en-US"/>
+              <a:t>18</a:t>
+            </a:fld>
+            <a:endParaRPr lang="en-US"/>
+          </a:p>
+        </p:txBody>
+      </p:sp>
+    </p:spTree>
+    <p:extLst>
+      <p:ext uri="{BB962C8B-B14F-4D97-AF65-F5344CB8AC3E}">
+        <p14:creationId xmlns:p14="http://schemas.microsoft.com/office/powerpoint/2010/main" val="1024086991"/>
+      </p:ext>
+    </p:extLst>
+  </p:cSld>
+  <p:clrMapOvr>
+    <a:masterClrMapping/>
+  </p:clrMapOvr>
+</p:notes>
+</file>
+
+<file path=ppt/notesSlides/notesSlide19.xml><?xml version="1.0" encoding="utf-8"?>
+<p:notes xmlns:a="http://schemas.openxmlformats.org/drawingml/2006/main" xmlns:r="http://schemas.openxmlformats.org/officeDocument/2006/relationships" xmlns:p="http://schemas.openxmlformats.org/presentationml/2006/main">
+  <p:cSld>
+    <p:spTree>
+      <p:nvGrpSpPr>
+        <p:cNvPr id="1" name=""/>
+        <p:cNvGrpSpPr/>
+        <p:nvPr/>
+      </p:nvGrpSpPr>
+      <p:grpSpPr>
+        <a:xfrm>
+          <a:off x="0" y="0"/>
+          <a:ext cx="0" cy="0"/>
+          <a:chOff x="0" y="0"/>
+          <a:chExt cx="0" cy="0"/>
+        </a:xfrm>
+      </p:grpSpPr>
+      <p:sp>
+        <p:nvSpPr>
+          <p:cNvPr id="2" name="Slide Image Placeholder 1"/>
+          <p:cNvSpPr>
+            <a:spLocks noGrp="1" noRot="1" noChangeAspect="1"/>
+          </p:cNvSpPr>
+          <p:nvPr>
+            <p:ph type="sldImg"/>
+          </p:nvPr>
+        </p:nvSpPr>
+        <p:spPr/>
+      </p:sp>
+      <p:sp>
+        <p:nvSpPr>
+          <p:cNvPr id="3" name="Notes Placeholder 2"/>
+          <p:cNvSpPr>
+            <a:spLocks noGrp="1"/>
+          </p:cNvSpPr>
+          <p:nvPr>
+            <p:ph type="body" idx="1"/>
+          </p:nvPr>
+        </p:nvSpPr>
+        <p:spPr/>
+        <p:txBody>
+          <a:bodyPr/>
+          <a:lstStyle/>
+          <a:p>
+            <a:r>
+              <a:rPr lang="en-US" dirty="0"/>
+              <a:t>Le déploiement et l’évaluation sont réels ; la télémétrie de sécurité MCP est synthétique, pas une donnée client réelle
+Dépôt : github.com/devopsabcs-engineering/foundry-hosted-agents
+Wiki : architecture actuelle, artefacts vérifiés, guide opérationnel et historique WI-11 résolu
+Labs complets, bilingues, pas à pas : le site GitHub Pages compagnon de ce deck
+Test de production et ingestion corrélée réussis ; ni endurance ni couverture complète des traces prouvées. Teams et historique durable non implémentés
+Sources: repository code, labs 04/06 and release 34427432731; Continuous Validation 34427429700. Historical experiments retain their original limits.</a:t>
+            </a:r>
+            <a:endParaRPr lang="en-US" dirty="0"/>
+          </a:p>
+        </p:txBody>
+      </p:sp>
+      <p:sp>
+        <p:nvSpPr>
+          <p:cNvPr id="4" name="Slide Number Placeholder 3"/>
+          <p:cNvSpPr>
+            <a:spLocks noGrp="1"/>
+          </p:cNvSpPr>
+          <p:nvPr>
+            <p:ph type="sldNum" sz="quarter" idx="10"/>
+          </p:nvPr>
+        </p:nvSpPr>
+        <p:spPr/>
+        <p:txBody>
+          <a:bodyPr/>
+          <a:lstStyle/>
+          <a:p>
+            <a:fld id="{F7021451-1387-4CA6-816F-3879F97B5CBC}" type="slidenum">
+              <a:rPr lang="en-US"/>
+              <a:t>19</a:t>
             </a:fld>
             <a:endParaRPr lang="en-US"/>
           </a:p>
@@ -1069,9 +1540,16 @@
           <a:p>
             <a:r>
               <a:rPr lang="en-US" dirty="0"/>
-              <a:t>Sept jobs réussis, récupération ignorée. Staging 6 ; production de 33 à 34. Les deux portes de production ont reçu une approbation normale. Environnement PoC, pas une certification de production.
-Source: https://github.com/devopsabcs-engineering/foundry-hosted-agents/actions/runs/34178081808
-Evidence: assets/release-evidence/source; SHA-256 manifest: assets/release-evidence/manifest.json. Images render downloaded artifacts, not native portal UI.</a:t>
+              <a:t>Pilote actuel : chat et mises en production vérifiés
+Tenant Entra + groupe pilote
+Chat React / FastAPI authentifié ; HTTPS public, pas un déploiement réseau privé.
+Requêtes avec historique complet
+Tours utilisateur/assistant gérés par le backend, store:false ; sans conversation ni previous_response_id natifs.
+Déploiement et charge vérifiés
+Mise en production 34427432731 et validation continue 34427429700 réussies. Données de sécurité synthétiques.
+Demo controls populate the draft; Send initiates the authenticated request. Start a new assessment for each independent scenario. Scenarios use exact reviewed English fixture prompts in both language tracks. Source: apps/web-chat/frontend/src/samples.js, src/threat-assessment-agent/graph.py, scripts/invoke-agent.sh, .github/workflows/deploy-and-evaluate.yml. https://github.com/devopsabcs-engineering/foundry-hosted-agents/actions/runs/34427432731
+Load: https://github.com/devopsabcs-engineering/foundry-hosted-agents/actions/runs/34427429700
+Historical artifact slides that follow retain their original run and version labels.</a:t>
             </a:r>
             <a:endParaRPr lang="en-US" dirty="0"/>
           </a:p>
@@ -1159,9 +1637,25 @@
           <a:p>
             <a:r>
               <a:rPr lang="en-US" dirty="0"/>
-              <a:t>Huit captures ; sept rapports évalués sur la cohérence, l’ancrage et le respect de la tâche. 21 réussites, seuils inchangés à 100 %. inject-001 : refus déterministe sans outil, pas un résultat de juge. Aucune violation. Résultats incomplets relus, pas réévalués.
-Source: https://github.com/devopsabcs-engineering/foundry-hosted-agents/actions/runs/34178081808
-Evidence: assets/release-evidence/source; SHA-256 manifest: assets/release-evidence/manifest.json. Images render downloaded artifacts, not native portal UI.</a:t>
+              <a:t>Démo : trois scénarios, quatre outils MCP
+1 / Connexion suspecte crew-admin
+CREW-PORTAL-01 + crew-admin : corréler les échecs MFA et le succès ; escalade avec limites des preuves.
+2 / Déplacement professionnel approuvé
+JDOE-LT-01 + jdoe : concilier voyage et appareil connu ; ne pas inventer de compromission.
+3 / Signaux réseau contradictoires
+OPS-DB-02 + data_egress_mb_per_hour: 900 : comparer endpoint sain et anomalie réseau ; signaler le conflit.
+Suspicious crew-admin login
+Suspicious login from unknown IP 203.0.113.45 targeting the crew-scheduling admin portal at 02:14 UTC, followed by three failed MFA attempts and a successful login four minutes later from the same IP. Synthetic scenario identifiers: device ID CREW-PORTAL-01, account/user ID crew-admin.
+Expected tools: get_device_risk, list_vulnerabilities, detect_login_anomalies
+Approved employee travel
+Login alert for employee jdoe from IP 198.51.100.22, a country the employee has not logged in from before. Employee's calendar shows an approved business trip to that country starting yesterday, and the device fingerprint matches jdoe's enrolled corporate laptop. Synthetic scenario device ID: JDOE-LT-01; account/user ID: jdoe.
+Expected tools: get_device_risk, list_vulnerabilities, detect_login_anomalies
+Conflicting egress signals
+Defender reports host OPS-DB-02 as clean with no active alerts, but the anomaly-detection tool independently scores the same host's outbound traffic pattern in the 99th percentile for data-exfiltration risk over the past hour. Synthetic scenario device ID: OPS-DB-02. Observed metric data_egress_mb_per_hour: 900 MB over the past hour; the 99th percentile is a separate reported signal, not a traffic measurement.
+Expected tools: get_device_risk, list_vulnerabilities, score_anomaly
+Demo controls populate the draft; Send initiates the authenticated request. Start a new assessment for each independent scenario. Scenarios use exact reviewed English fixture prompts in both language tracks. Source: apps/web-chat/frontend/src/samples.js, src/threat-assessment-agent/graph.py, scripts/invoke-agent.sh, .github/workflows/deploy-and-evaluate.yml. https://github.com/devopsabcs-engineering/foundry-hosted-agents/actions/runs/34427432731
+Load: https://github.com/devopsabcs-engineering/foundry-hosted-agents/actions/runs/34427429700
+Historical artifact slides that follow retain their original run and version labels.</a:t>
             </a:r>
             <a:endParaRPr lang="en-US" dirty="0"/>
           </a:p>
@@ -1249,9 +1743,16 @@
           <a:p>
             <a:r>
               <a:rPr lang="en-US" dirty="0"/>
-              <a:t>28 reçus issus de ToolMessage. tp-001 montre les deux outils Defender et les deux outils Anomaly. Les reçus prouvent l’exécution, pas la justesse. Données synthétiques, pas une télémétrie Defender ou aérienne réelle. Cas de sécurité : aucun autre outil. Preuves bornées jointes à response.completed.
-Source: https://github.com/devopsabcs-engineering/foundry-hosted-agents/actions/runs/34178081808
-Evidence: assets/release-evidence/source; SHA-256 manifest: assets/release-evidence/manifest.json. Images render downloaded artifacts, not native portal UI.</a:t>
+              <a:t>Mémoire : explicite, bornée, isolée par propriétaire
+Rappel dans la même évaluation
+Ajouter DEMO-73921, puis demander la référence sans la répéter. Les trois spécialistes reçoivent tout l’historique fourni.
+Isolation et limites des reprises
+Une nouvelle évaluation ne doit pas rappeler cette référence. Reprise identique terminée : même réponse ; texte modifié avec la même clé : conflit.
+Pas de persistance durable
+Sessions en mémoire avec expiration ; redémarrage : état serveur perdu ; rechargement : liste locale perdue. Sans Cosmos, Teams ni garantie durable exactement-une-fois.
+Demo controls populate the draft; Send initiates the authenticated request. Start a new assessment for each independent scenario. Scenarios use exact reviewed English fixture prompts in both language tracks. Source: apps/web-chat/frontend/src/samples.js, src/threat-assessment-agent/graph.py, scripts/invoke-agent.sh, .github/workflows/deploy-and-evaluate.yml. https://github.com/devopsabcs-engineering/foundry-hosted-agents/actions/runs/34427432731
+Load: https://github.com/devopsabcs-engineering/foundry-hosted-agents/actions/runs/34427429700
+Historical artifact slides that follow retain their original run and version labels.</a:t>
             </a:r>
             <a:endParaRPr lang="en-US" dirty="0"/>
           </a:p>
@@ -1339,9 +1840,16 @@
           <a:p>
             <a:r>
               <a:rPr lang="en-US" dirty="0"/>
-              <a:t>Version 34 active, Toolbox 1. Test de cette version réussi. À 02:12:02 UTC, zéro AppExceptions sur les dix dernières minutes. Ni test d’endurance de dix minutes ni preuve de traçage complet. Évaluation en staging. Même code reconstruit en production avec les condensats MCP évalués. Récupération manuelle, sans rollback automatique ni canary.
-Source: https://github.com/devopsabcs-engineering/foundry-hosted-agents/actions/runs/34178081808
-Evidence: assets/release-evidence/source; SHA-256 manifest: assets/release-evidence/manifest.json. Images render downloaded artifacts, not native portal UI.</a:t>
+              <a:t>Exécution des outils : preuves, pas prose du modèle
+Plan de recherche déterministe
+Les champs utilisateur appareil/compte/métrique choisissent les appels MCP en lecture seule. Champ omis : contexte conservé ; nouvelle valeur : catégorie remplacée.
+Permissions des spécialistes
+Enquêteur : get_device_risk + list_vulnerabilities. Analyste : detect_login_anomalies + score_anomaly. Rédacteur : aucun outil.
+Vérifier les reçus réels
+Les ToolMessage réussis alimentent les métadonnées bornées. Données synthétiques et télémétrie de vulnérabilités absente restent des limites explicites.
+Demo controls populate the draft; Send initiates the authenticated request. Start a new assessment for each independent scenario. Scenarios use exact reviewed English fixture prompts in both language tracks. Source: apps/web-chat/frontend/src/samples.js, src/threat-assessment-agent/graph.py, scripts/invoke-agent.sh, .github/workflows/deploy-and-evaluate.yml. https://github.com/devopsabcs-engineering/foundry-hosted-agents/actions/runs/34427432731
+Load: https://github.com/devopsabcs-engineering/foundry-hosted-agents/actions/runs/34427429700
+Historical artifact slides that follow retain their original run and version labels.</a:t>
             </a:r>
             <a:endParaRPr lang="en-US" dirty="0"/>
           </a:p>
@@ -1429,16 +1937,16 @@
           <a:p>
             <a:r>
               <a:rPr lang="en-US" dirty="0"/>
-              <a:t>Lab 00 — Prérequis et configuration de l’environnement
-Lab 01 — Plongée dans l’architecture (superviseur/spécialistes LangGraph)
-Lab 02 — Déployer les serveurs d’outils MCP
-Lab 03 — Provisionner et déployer l’agent hébergé (azd)
-Lab 04 — Invoquer l’agent et lire les traces
-Lab 05 — Évaluations : déterministes + LLM-as-judge
-Lab 06 — CI/CD : pipeline contrôlé par évaluation
-Lab 07 — Dépannage réel : erreur RBAC 401
-Lab 08 — Préparation à la production et portes de décision
-Sources: repository code and wiki Release-Evidence / Operations. Verified release 34178081808; historical experiments retain their original limits.</a:t>
+              <a:t>Opérations : approbation, télémétrie, capacité
+Approuver la promotion, puis la surveillance
+Deux jobs protégés par approbation production. La validation continue attend le verrou partagé ; aucune approbation manuelle pour elle.
+Ingestion positive avant zéro exception
+Corréler l’identifiant brut de réponse avec AppTraces, puis vérifier AppExceptions. Résultats vides ou invalides : échec ; zéro exception seul ne suffit pas.
+Staging 50k TPM / production 10k TPM
+Trois échecs de charge dans 34424723263 corrélés aux 429 modèle. Hausse staging approuvée ; contrôle inchangé à cinq flux réussi. Ni SLA ni test de saturation.
+Demo controls populate the draft; Send initiates the authenticated request. Start a new assessment for each independent scenario. Scenarios use exact reviewed English fixture prompts in both language tracks. Source: apps/web-chat/frontend/src/samples.js, src/threat-assessment-agent/graph.py, scripts/invoke-agent.sh, .github/workflows/deploy-and-evaluate.yml. https://github.com/devopsabcs-engineering/foundry-hosted-agents/actions/runs/34427432731
+Load: https://github.com/devopsabcs-engineering/foundry-hosted-agents/actions/runs/34427429700
+Historical artifact slides that follow retain their original run and version labels.</a:t>
             </a:r>
             <a:endParaRPr lang="en-US" dirty="0"/>
           </a:p>
@@ -1526,12 +2034,9 @@
           <a:p>
             <a:r>
               <a:rPr lang="en-US" dirty="0"/>
-              <a:t>Un superviseur LangGraph route vers trois nœuds spécialistes : Enquêteur de preuves, Analyste de risque, Rédacteur de rapport
-Chaque spécialiste a son propre prompt, ses permissions d’outils et ses critères d’évaluation
-Isolation des outils par rôle : Enquêteur de preuves → defender-conn uniquement, Analyste de risque → anomaly-conn uniquement
-Le Rédacteur de rapport n’a aucun accès aux outils — il ne fait que synthétiser
-Le transport MCP versionné, les jetons Entra renouvelés et les connexions RemoteTool fonctionnent ; les reçus prouvent les appels des spécialistes
-Sources: repository code and wiki Release-Evidence / Operations. Verified release 34178081808; historical experiments retain their original limits.</a:t>
+              <a:t>Sept jobs réussis, récupération ignorée. Staging 6 ; production de 33 à 34. Les deux portes de production ont reçu une approbation normale. Environnement PoC, pas une certification de production.
+Source: https://github.com/devopsabcs-engineering/foundry-hosted-agents/actions/runs/34178081808
+Evidence: assets/release-evidence/source; SHA-256 manifest: assets/release-evidence/manifest.json. Images render downloaded artifacts, not native portal UI.</a:t>
             </a:r>
             <a:endParaRPr lang="en-US" dirty="0"/>
           </a:p>
@@ -1619,12 +2124,9 @@
           <a:p>
             <a:r>
               <a:rPr lang="en-US" dirty="0"/>
-              <a:t>Couche 1 — Implémentation : code de serveur MCP personnalisé (outils Defender, outils anomalie)
-Couche 2 — Hébergement : Azure Container Apps indépendantes, authentification/réseau/santé propres
-Couche 3 — Enregistrement : les connexions Foundry définissent le point de terminaison + la politique d’identifiants par serveur MCP
-Couche 4 — Consommation : la Foundry Toolbox agrège les outils enregistrés pour réutilisation entre agents
-La Toolbox est la couche d’enregistrement/agrégation — pas le runtime d’hébergement de votre code MCP
-Sources: repository code and wiki Release-Evidence / Operations. Verified release 34178081808; historical experiments retain their original limits.</a:t>
+              <a:t>Huit captures ; sept rapports évalués sur la cohérence, l’ancrage et le respect de la tâche. 21 réussites, seuils inchangés à 100 %. inject-001 : refus déterministe sans outil, pas un résultat de juge. Aucune violation. Résultats incomplets relus, pas réévalués.
+Source: https://github.com/devopsabcs-engineering/foundry-hosted-agents/actions/runs/34178081808
+Evidence: assets/release-evidence/source; SHA-256 manifest: assets/release-evidence/manifest.json. Images render downloaded artifacts, not native portal UI.</a:t>
             </a:r>
             <a:endParaRPr lang="en-US" dirty="0"/>
           </a:p>
@@ -1712,12 +2214,9 @@
           <a:p>
             <a:r>
               <a:rPr lang="en-US" dirty="0"/>
-              <a:t>azure.yaml câble le projet Foundry, le déploiement de modèle, les connexions Toolbox et le service d’agent hébergé
-kind: hosted — Foundry exploite le calcul de session ; vous ne possédez que le code du graphe
-dependencyResolution: remote_build — Foundry construit vos dépendances Python côté serveur
-protocol: responses — protocole Responses compatible OpenAI avec support du streaming
-azd provision crée l’infrastructure ; azd deploy publie une nouvelle version d’agent — cycles de vie séparés
-Sources: repository code and wiki Release-Evidence / Operations. Verified release 34178081808; historical experiments retain their original limits.</a:t>
+              <a:t>28 reçus issus de ToolMessage. tp-001 montre les deux outils Defender et les deux outils Anomaly. Les reçus prouvent l’exécution, pas la justesse. Données synthétiques, pas une télémétrie Defender ou aérienne réelle. Cas de sécurité : aucun autre outil. Preuves bornées jointes à response.completed.
+Source: https://github.com/devopsabcs-engineering/foundry-hosted-agents/actions/runs/34178081808
+Evidence: assets/release-evidence/source; SHA-256 manifest: assets/release-evidence/manifest.json. Images render downloaded artifacts, not native portal UI.</a:t>
             </a:r>
             <a:endParaRPr lang="en-US" dirty="0"/>
           </a:p>
@@ -2257,7 +2756,7 @@
                   <a:srgbClr val="767676"/>
                 </a:solidFill>
               </a:rPr>
-              <a:t>1 / 14</a:t>
+              <a:t>1 / 19</a:t>
             </a:r>
             <a:endParaRPr lang="en-US" sz="900" dirty="0"/>
           </a:p>
@@ -2277,7 +2776,7 @@
     <p:bg>
       <p:bgPr>
         <a:solidFill>
-          <a:srgbClr val="FAFBFC"/>
+          <a:srgbClr val="FFFFFF"/>
         </a:solidFill>
       </p:bgPr>
     </p:bg>
@@ -2297,34 +2796,14 @@
       </p:grpSpPr>
       <p:sp>
         <p:nvSpPr>
-          <p:cNvPr id="2" name="Shape 0"/>
-          <p:cNvSpPr/>
-          <p:nvPr/>
-        </p:nvSpPr>
-        <p:spPr>
-          <a:xfrm>
-            <a:off x="0" y="0"/>
-            <a:ext cx="12188952" cy="82296"/>
-          </a:xfrm>
-          <a:prstGeom prst="rect">
-            <a:avLst/>
-          </a:prstGeom>
-          <a:solidFill>
-            <a:srgbClr val="0078D4"/>
-          </a:solidFill>
-          <a:ln/>
-        </p:spPr>
-      </p:sp>
-      <p:sp>
-        <p:nvSpPr>
-          <p:cNvPr id="3" name="Text 1"/>
-          <p:cNvSpPr/>
-          <p:nvPr/>
-        </p:nvSpPr>
-        <p:spPr>
-          <a:xfrm>
-            <a:off x="457200" y="292608"/>
-            <a:ext cx="11247120" cy="274320"/>
+          <p:cNvPr id="2" name="Text 0"/>
+          <p:cNvSpPr/>
+          <p:nvPr/>
+        </p:nvSpPr>
+        <p:spPr>
+          <a:xfrm>
+            <a:off x="411480" y="146304"/>
+            <a:ext cx="11338560" cy="502920"/>
           </a:xfrm>
           <a:prstGeom prst="rect">
             <a:avLst/>
@@ -2340,30 +2819,54 @@
               <a:buNone/>
             </a:pPr>
             <a:r>
-              <a:rPr lang="en-US" sz="1100" b="1" spc="100" kern="0" dirty="0">
-                <a:solidFill>
-                  <a:srgbClr val="0078D4"/>
-                </a:solidFill>
-                <a:latin typeface="Segoe UI" pitchFamily="34" charset="0"/>
-                <a:ea typeface="Segoe UI" pitchFamily="34" charset="-122"/>
-                <a:cs typeface="Segoe UI" pitchFamily="34" charset="-120"/>
-              </a:rPr>
-              <a:t>ÉVALUATION</a:t>
-            </a:r>
-            <a:endParaRPr lang="en-US" sz="1100" dirty="0"/>
-          </a:p>
-        </p:txBody>
-      </p:sp>
-      <p:sp>
-        <p:nvSpPr>
-          <p:cNvPr id="4" name="Text 2"/>
-          <p:cNvSpPr/>
-          <p:nvPr/>
-        </p:nvSpPr>
-        <p:spPr>
-          <a:xfrm>
-            <a:off x="457200" y="548640"/>
-            <a:ext cx="11247120" cy="640080"/>
+              <a:rPr lang="en-US" sz="2200" b="1" dirty="0">
+                <a:solidFill>
+                  <a:srgbClr val="146C54"/>
+                </a:solidFill>
+                <a:latin typeface="Segoe UI" pitchFamily="34" charset="0"/>
+                <a:ea typeface="Segoe UI" pitchFamily="34" charset="-122"/>
+                <a:cs typeface="Segoe UI" pitchFamily="34" charset="-120"/>
+              </a:rPr>
+              <a:t>Preuve historique: Production 34 : active, test de fumée réussi</a:t>
+            </a:r>
+            <a:endParaRPr lang="en-US" sz="2200" dirty="0"/>
+          </a:p>
+        </p:txBody>
+      </p:sp>
+      <p:pic>
+        <p:nvPicPr>
+          <p:cNvPr id="3" name="Image 0" descr="Production 34 : active, test de fumée réussi">    </p:cNvPr>
+          <p:cNvPicPr>
+            <a:picLocks noChangeAspect="1"/>
+          </p:cNvPicPr>
+          <p:nvPr/>
+        </p:nvPicPr>
+        <p:blipFill>
+          <a:blip r:embed="rId1"/>
+          <a:stretch>
+            <a:fillRect/>
+          </a:stretch>
+        </p:blipFill>
+        <p:spPr>
+          <a:xfrm>
+            <a:off x="2068830" y="777240"/>
+            <a:ext cx="8051292" cy="5367528"/>
+          </a:xfrm>
+          <a:prstGeom prst="rect">
+            <a:avLst/>
+          </a:prstGeom>
+        </p:spPr>
+      </p:pic>
+      <p:sp>
+        <p:nvSpPr>
+          <p:cNvPr id="4" name="Text 1"/>
+          <p:cNvSpPr/>
+          <p:nvPr/>
+        </p:nvSpPr>
+        <p:spPr>
+          <a:xfrm>
+            <a:off x="411480" y="6245352"/>
+            <a:ext cx="11338560" cy="256032"/>
           </a:xfrm>
           <a:prstGeom prst="rect">
             <a:avLst/>
@@ -2379,197 +2882,32 @@
               <a:buNone/>
             </a:pPr>
             <a:r>
-              <a:rPr lang="en-US" sz="2600" b="1" dirty="0">
-                <a:solidFill>
-                  <a:srgbClr val="001B3D"/>
-                </a:solidFill>
-                <a:latin typeface="Segoe UI" pitchFamily="34" charset="0"/>
-                <a:ea typeface="Segoe UI" pitchFamily="34" charset="-122"/>
-                <a:cs typeface="Segoe UI" pitchFamily="34" charset="-120"/>
-              </a:rPr>
-              <a:t>Vérifications déterministes + rubriques LLM-as-judge</a:t>
-            </a:r>
-            <a:endParaRPr lang="en-US" sz="2600" dirty="0"/>
-          </a:p>
-        </p:txBody>
-      </p:sp>
-      <p:sp>
-        <p:nvSpPr>
-          <p:cNvPr id="5" name="Shape 3"/>
-          <p:cNvSpPr/>
-          <p:nvPr/>
-        </p:nvSpPr>
-        <p:spPr>
-          <a:xfrm>
-            <a:off x="457200" y="1188720"/>
-            <a:ext cx="11247120" cy="10973"/>
-          </a:xfrm>
-          <a:prstGeom prst="rect">
-            <a:avLst/>
-          </a:prstGeom>
-          <a:solidFill>
-            <a:srgbClr val="E1E5E8"/>
-          </a:solidFill>
-          <a:ln/>
-        </p:spPr>
-      </p:sp>
-      <p:sp>
-        <p:nvSpPr>
-          <p:cNvPr id="6" name="Text 4"/>
-          <p:cNvSpPr/>
-          <p:nvPr/>
-        </p:nvSpPr>
-        <p:spPr>
-          <a:xfrm>
-            <a:off x="548640" y="1463040"/>
-            <a:ext cx="11064240" cy="5029200"/>
-          </a:xfrm>
-          <a:prstGeom prst="rect">
-            <a:avLst/>
-          </a:prstGeom>
-          <a:noFill/>
-          <a:ln/>
-        </p:spPr>
-        <p:txBody>
-          <a:bodyPr wrap="square" rtlCol="0" anchor="t"/>
-          <a:lstStyle/>
-          <a:p>
-            <a:pPr marL="254000" indent="-254000">
-              <a:lnSpc>
-                <a:spcPct val="125000"/>
-              </a:lnSpc>
-              <a:buSzPct val="100000"/>
-              <a:buChar char="●"/>
-            </a:pPr>
-            <a:r>
-              <a:rPr lang="en-US" sz="1500" dirty="0">
-                <a:solidFill>
-                  <a:srgbClr val="1A1A1A"/>
-                </a:solidFill>
-                <a:latin typeface="Segoe UI" pitchFamily="34" charset="0"/>
-                <a:ea typeface="Segoe UI" pitchFamily="34" charset="-122"/>
-                <a:cs typeface="Segoe UI" pitchFamily="34" charset="-120"/>
-              </a:rPr>
-              <a:t>Jeu de données de référence : 8 catégories (vrai/faux positif, ambigu, données manquantes, outils contradictoires, injection de prompt, actions non autorisées, conclusions non étayées)</a:t>
-            </a:r>
-            <a:endParaRPr lang="en-US" sz="1500" dirty="0"/>
-          </a:p>
-          <a:p>
-            <a:pPr marL="254000" indent="-254000">
-              <a:lnSpc>
-                <a:spcPct val="125000"/>
-              </a:lnSpc>
-              <a:buSzPct val="100000"/>
-              <a:buChar char="●"/>
-            </a:pPr>
-            <a:r>
-              <a:rPr lang="en-US" sz="1500" dirty="0">
-                <a:solidFill>
-                  <a:srgbClr val="1A1A1A"/>
-                </a:solidFill>
-                <a:latin typeface="Segoe UI" pitchFamily="34" charset="0"/>
-                <a:ea typeface="Segoe UI" pitchFamily="34" charset="-122"/>
-                <a:cs typeface="Segoe UI" pitchFamily="34" charset="-120"/>
-              </a:rPr>
-              <a:t>Déterministe : validité du schéma, citations requises, appels d’outils autorisés, contraintes de politique — rapide, reproductible</a:t>
-            </a:r>
-            <a:endParaRPr lang="en-US" sz="1500" dirty="0"/>
-          </a:p>
-          <a:p>
-            <a:pPr marL="254000" indent="-254000">
-              <a:lnSpc>
-                <a:spcPct val="125000"/>
-              </a:lnSpc>
-              <a:buSzPct val="100000"/>
-              <a:buChar char="●"/>
-            </a:pPr>
-            <a:r>
-              <a:rPr lang="en-US" sz="1500" dirty="0">
-                <a:solidFill>
-                  <a:srgbClr val="1A1A1A"/>
-                </a:solidFill>
-                <a:latin typeface="Segoe UI" pitchFamily="34" charset="0"/>
-                <a:ea typeface="Segoe UI" pitchFamily="34" charset="-122"/>
-                <a:cs typeface="Segoe UI" pitchFamily="34" charset="-120"/>
-              </a:rPr>
-              <a:t>Juges Foundry vérifiés : cohérence, ancrage, respect de la tâche. Sept rapports par mesure, 21/21 réussites, seuils inchangés à 100 %</a:t>
-            </a:r>
-            <a:endParaRPr lang="en-US" sz="1500" dirty="0"/>
-          </a:p>
-          <a:p>
-            <a:pPr marL="254000" indent="-254000">
-              <a:lnSpc>
-                <a:spcPct val="125000"/>
-              </a:lnSpc>
-              <a:buSzPct val="100000"/>
-              <a:buChar char="●"/>
-            </a:pPr>
-            <a:r>
-              <a:rPr lang="en-US" sz="1500" dirty="0">
-                <a:solidFill>
-                  <a:srgbClr val="1A1A1A"/>
-                </a:solidFill>
-                <a:latin typeface="Segoe UI" pitchFamily="34" charset="0"/>
-                <a:ea typeface="Segoe UI" pitchFamily="34" charset="-122"/>
-                <a:cs typeface="Segoe UI" pitchFamily="34" charset="-120"/>
-              </a:rPr>
-              <a:t>Huit captures, aucune violation déterministe ; inject-001 est un refus de sécurité vérifié sans outil, pas un résultat de juge</a:t>
-            </a:r>
-            <a:endParaRPr lang="en-US" sz="1500" dirty="0"/>
-          </a:p>
-          <a:p>
-            <a:pPr marL="254000" indent="-254000">
-              <a:lnSpc>
-                <a:spcPct val="125000"/>
-              </a:lnSpc>
-              <a:buSzPct val="100000"/>
-              <a:buChar char="●"/>
-            </a:pPr>
-            <a:r>
-              <a:rPr lang="en-US" sz="1500" dirty="0">
-                <a:solidFill>
-                  <a:srgbClr val="1A1A1A"/>
-                </a:solidFill>
-                <a:latin typeface="Segoe UI" pitchFamily="34" charset="0"/>
-                <a:ea typeface="Segoe UI" pitchFamily="34" charset="-122"/>
-                <a:cs typeface="Segoe UI" pitchFamily="34" charset="-120"/>
-              </a:rPr>
-              <a:t>Les règles de politique (ex. ne jamais prétendre avoir agi sans autorisation) restent déterministes, pas jugées par LLM</a:t>
-            </a:r>
-            <a:endParaRPr lang="en-US" sz="1500" dirty="0"/>
-          </a:p>
-        </p:txBody>
-      </p:sp>
-      <p:sp>
-        <p:nvSpPr>
-          <p:cNvPr id="8" name="Shape 5"/>
-          <p:cNvSpPr/>
-          <p:nvPr/>
-        </p:nvSpPr>
-        <p:spPr>
-          <a:xfrm>
-            <a:off x="0" y="6784848"/>
-            <a:ext cx="12188952" cy="27432"/>
-          </a:xfrm>
-          <a:prstGeom prst="rect">
-            <a:avLst/>
-          </a:prstGeom>
-          <a:solidFill>
-            <a:srgbClr val="E1E5E8"/>
-          </a:solidFill>
-          <a:ln/>
-        </p:spPr>
-      </p:sp>
-      <p:sp>
-        <p:nvSpPr>
-          <p:cNvPr id="9" name="Text 6"/>
-          <p:cNvSpPr/>
-          <p:nvPr/>
-        </p:nvSpPr>
-        <p:spPr>
-          <a:xfrm>
-            <a:off x="457200" y="6537960"/>
-            <a:ext cx="8229600" cy="256032"/>
+              <a:rPr lang="en-US" sz="1000" dirty="0">
+                <a:solidFill>
+                  <a:srgbClr val="53635E"/>
+                </a:solidFill>
+                <a:latin typeface="Segoe UI" pitchFamily="34" charset="0"/>
+                <a:ea typeface="Segoe UI" pitchFamily="34" charset="-122"/>
+                <a:cs typeface="Segoe UI" pitchFamily="34" charset="-120"/>
+              </a:rPr>
+              <a:t>Rendu des artefacts, pas une capture du portail. Données synthétiques. Sources et SHA-256 conservés.</a:t>
+            </a:r>
+            <a:endParaRPr lang="en-US" sz="1000" dirty="0"/>
+          </a:p>
+        </p:txBody>
+      </p:sp>
+      <p:sp>
+        <p:nvSpPr>
+          <p:cNvPr id="5" name="Text 2">
+            <a:hlinkClick r:id="rId2" tooltip=""/>
+          </p:cNvPr>
+          <p:cNvSpPr/>
+          <p:nvPr/>
+        </p:nvSpPr>
+        <p:spPr>
+          <a:xfrm>
+            <a:off x="411480" y="6528816"/>
+            <a:ext cx="10515600" cy="201168"/>
           </a:xfrm>
           <a:prstGeom prst="rect">
             <a:avLst/>
@@ -2585,15 +2923,22 @@
               <a:buNone/>
             </a:pPr>
             <a:r>
-              <a:rPr lang="en-US" sz="900" dirty="0">
-                <a:solidFill>
-                  <a:srgbClr val="767676"/>
-                </a:solidFill>
-                <a:latin typeface="Segoe UI" pitchFamily="34" charset="0"/>
-                <a:ea typeface="Segoe UI" pitchFamily="34" charset="-122"/>
-                <a:cs typeface="Segoe UI" pitchFamily="34" charset="-120"/>
-              </a:rPr>
-              <a:t>Atelier Foundry Hosted Agents</a:t>
+              <a:rPr lang="en-US" sz="900" u="sng" dirty="0">
+                <a:solidFill>
+                  <a:srgbClr val="075C9B"/>
+                </a:solidFill>
+                <a:latin typeface="Segoe UI" pitchFamily="34" charset="0"/>
+                <a:ea typeface="Segoe UI" pitchFamily="34" charset="-122"/>
+                <a:cs typeface="Segoe UI" pitchFamily="34" charset="-120"/>
+                <a:hlinkClick r:id="rId2" invalidUrl="" action="" tgtFrame="" tooltip="" history="1" highlightClick="0" endSnd="0">
+                  <a:extLst>
+                    <a:ext uri="{A12FA001-AC4F-418D-AE19-62706E023703}">
+                      <ahyp:hlinkClr xmlns:ahyp="http://schemas.microsoft.com/office/drawing/2018/hyperlinkcolor" val="tx"/>
+                    </a:ext>
+                  </a:extLst>
+                </a:hlinkClick>
+              </a:rPr>
+              <a:t>GitHub Actions 34178081808 | f3da486 | 2026-09-08 UTC</a:t>
             </a:r>
             <a:endParaRPr lang="en-US" sz="900" dirty="0"/>
           </a:p>
@@ -2601,7 +2946,7 @@
       </p:sp>
       <p:sp>
         <p:nvSpPr>
-          <p:cNvPr id="10" name="Text 7"/>
+          <p:cNvPr id="7" name="Text 3"/>
           <p:cNvSpPr/>
           <p:nvPr/>
         </p:nvSpPr>
@@ -2629,7 +2974,7 @@
                   <a:srgbClr val="767676"/>
                 </a:solidFill>
               </a:rPr>
-              <a:t>10 / 14</a:t>
+              <a:t>10 / 19</a:t>
             </a:r>
             <a:endParaRPr lang="en-US" sz="900" dirty="0"/>
           </a:p>
@@ -2720,7 +3065,7 @@
                 <a:ea typeface="Segoe UI" pitchFamily="34" charset="-122"/>
                 <a:cs typeface="Segoe UI" pitchFamily="34" charset="-120"/>
               </a:rPr>
-              <a:t>CI/CD</a:t>
+              <a:t>PROGRAMME</a:t>
             </a:r>
             <a:endParaRPr lang="en-US" sz="1100" dirty="0"/>
           </a:p>
@@ -2759,7 +3104,7 @@
                 <a:ea typeface="Segoe UI" pitchFamily="34" charset="-122"/>
                 <a:cs typeface="Segoe UI" pitchFamily="34" charset="-120"/>
               </a:rPr>
-              <a:t>Pipeline de mise en production contrôlé par évaluation</a:t>
+              <a:t>Neuf labs, un déploiement réel</a:t>
             </a:r>
             <a:endParaRPr lang="en-US" sz="2600" dirty="0"/>
           </a:p>
@@ -2822,7 +3167,7 @@
                 <a:ea typeface="Segoe UI" pitchFamily="34" charset="-122"/>
                 <a:cs typeface="Segoe UI" pitchFamily="34" charset="-120"/>
               </a:rPr>
-              <a:t>Deux pipelines manuels : déploiement direct PoC, ou deploy-and-evaluate.yml avec comptes et projets staging/production séparés</a:t>
+              <a:t>Lab 00 — Prérequis et configuration de l’environnement</a:t>
             </a:r>
             <a:endParaRPr lang="en-US" sz="1500" dirty="0"/>
           </a:p>
@@ -2843,7 +3188,7 @@
                 <a:ea typeface="Segoe UI" pitchFamily="34" charset="-122"/>
                 <a:cs typeface="Segoe UI" pitchFamily="34" charset="-120"/>
               </a:rPr>
-              <a:t>Flux complet : lint/tests → validation Bicep → déploiement d’un candidat immuable en staging → tests de fumée/contrat/streaming</a:t>
+              <a:t>Lab 01 — Plongée dans l’architecture (superviseur/spécialistes LangGraph)</a:t>
             </a:r>
             <a:endParaRPr lang="en-US" sz="1500" dirty="0"/>
           </a:p>
@@ -2864,7 +3209,7 @@
                 <a:ea typeface="Segoe UI" pitchFamily="34" charset="-122"/>
                 <a:cs typeface="Segoe UI" pitchFamily="34" charset="-120"/>
               </a:rPr>
-              <a:t>La porte de qualité d’évaluation hors ligne s’exécute contre le candidat de staging avant toute approbation manuelle de production</a:t>
+              <a:t>Lab 02 — Déployer les serveurs d’outils MCP</a:t>
             </a:r>
             <a:endParaRPr lang="en-US" sz="1500" dirty="0"/>
           </a:p>
@@ -2885,7 +3230,7 @@
                 <a:ea typeface="Segoe UI" pitchFamily="34" charset="-122"/>
                 <a:cs typeface="Segoe UI" pitchFamily="34" charset="-120"/>
               </a:rPr>
-              <a:t>Fédération OIDC sans secret — aucun secret client stocké dans les deux pipelines</a:t>
+              <a:t>Lab 03 — Provisionner et déployer l’agent hébergé (azd)</a:t>
             </a:r>
             <a:endParaRPr lang="en-US" sz="1500" dirty="0"/>
           </a:p>
@@ -2906,7 +3251,91 @@
                 <a:ea typeface="Segoe UI" pitchFamily="34" charset="-122"/>
                 <a:cs typeface="Segoe UI" pitchFamily="34" charset="-120"/>
               </a:rPr>
-              <a:t>Exécution 34178081808 réussie : staging 6, production 34, mêmes condensats MCP évalués, approbations normales. Récupération manuelle, sans rollback automatique ni canary</a:t>
+              <a:t>Lab 04 — Invoquer l’agent et lire les traces</a:t>
+            </a:r>
+            <a:endParaRPr lang="en-US" sz="1500" dirty="0"/>
+          </a:p>
+          <a:p>
+            <a:pPr marL="254000" indent="-254000">
+              <a:lnSpc>
+                <a:spcPct val="125000"/>
+              </a:lnSpc>
+              <a:buSzPct val="100000"/>
+              <a:buChar char="●"/>
+            </a:pPr>
+            <a:r>
+              <a:rPr lang="en-US" sz="1500" dirty="0">
+                <a:solidFill>
+                  <a:srgbClr val="1A1A1A"/>
+                </a:solidFill>
+                <a:latin typeface="Segoe UI" pitchFamily="34" charset="0"/>
+                <a:ea typeface="Segoe UI" pitchFamily="34" charset="-122"/>
+                <a:cs typeface="Segoe UI" pitchFamily="34" charset="-120"/>
+              </a:rPr>
+              <a:t>Lab 05 — Évaluations : déterministes + LLM-as-judge</a:t>
+            </a:r>
+            <a:endParaRPr lang="en-US" sz="1500" dirty="0"/>
+          </a:p>
+          <a:p>
+            <a:pPr marL="254000" indent="-254000">
+              <a:lnSpc>
+                <a:spcPct val="125000"/>
+              </a:lnSpc>
+              <a:buSzPct val="100000"/>
+              <a:buChar char="●"/>
+            </a:pPr>
+            <a:r>
+              <a:rPr lang="en-US" sz="1500" dirty="0">
+                <a:solidFill>
+                  <a:srgbClr val="1A1A1A"/>
+                </a:solidFill>
+                <a:latin typeface="Segoe UI" pitchFamily="34" charset="0"/>
+                <a:ea typeface="Segoe UI" pitchFamily="34" charset="-122"/>
+                <a:cs typeface="Segoe UI" pitchFamily="34" charset="-120"/>
+              </a:rPr>
+              <a:t>Lab 06 — CI/CD : pipeline contrôlé par évaluation</a:t>
+            </a:r>
+            <a:endParaRPr lang="en-US" sz="1500" dirty="0"/>
+          </a:p>
+          <a:p>
+            <a:pPr marL="254000" indent="-254000">
+              <a:lnSpc>
+                <a:spcPct val="125000"/>
+              </a:lnSpc>
+              <a:buSzPct val="100000"/>
+              <a:buChar char="●"/>
+            </a:pPr>
+            <a:r>
+              <a:rPr lang="en-US" sz="1500" dirty="0">
+                <a:solidFill>
+                  <a:srgbClr val="1A1A1A"/>
+                </a:solidFill>
+                <a:latin typeface="Segoe UI" pitchFamily="34" charset="0"/>
+                <a:ea typeface="Segoe UI" pitchFamily="34" charset="-122"/>
+                <a:cs typeface="Segoe UI" pitchFamily="34" charset="-120"/>
+              </a:rPr>
+              <a:t>Lab 07 — Dépannage réel : erreur RBAC 401</a:t>
+            </a:r>
+            <a:endParaRPr lang="en-US" sz="1500" dirty="0"/>
+          </a:p>
+          <a:p>
+            <a:pPr marL="254000" indent="-254000">
+              <a:lnSpc>
+                <a:spcPct val="125000"/>
+              </a:lnSpc>
+              <a:buSzPct val="100000"/>
+              <a:buChar char="●"/>
+            </a:pPr>
+            <a:r>
+              <a:rPr lang="en-US" sz="1500" dirty="0">
+                <a:solidFill>
+                  <a:srgbClr val="1A1A1A"/>
+                </a:solidFill>
+                <a:latin typeface="Segoe UI" pitchFamily="34" charset="0"/>
+                <a:ea typeface="Segoe UI" pitchFamily="34" charset="-122"/>
+                <a:cs typeface="Segoe UI" pitchFamily="34" charset="-120"/>
+              </a:rPr>
+              <a:t>Lab 08 — Préparation à la production et portes de décision</a:t>
             </a:r>
             <a:endParaRPr lang="en-US" sz="1500" dirty="0"/>
           </a:p>
@@ -3001,7 +3430,7 @@
                   <a:srgbClr val="767676"/>
                 </a:solidFill>
               </a:rPr>
-              <a:t>11 / 14</a:t>
+              <a:t>11 / 19</a:t>
             </a:r>
             <a:endParaRPr lang="en-US" sz="900" dirty="0"/>
           </a:p>
@@ -3054,7 +3483,7 @@
             <a:avLst/>
           </a:prstGeom>
           <a:solidFill>
-            <a:srgbClr val="107C10"/>
+            <a:srgbClr val="0078D4"/>
           </a:solidFill>
           <a:ln/>
         </p:spPr>
@@ -3086,13 +3515,13 @@
             <a:r>
               <a:rPr lang="en-US" sz="1100" b="1" spc="100" kern="0" dirty="0">
                 <a:solidFill>
-                  <a:srgbClr val="107C10"/>
-                </a:solidFill>
-                <a:latin typeface="Segoe UI" pitchFamily="34" charset="0"/>
-                <a:ea typeface="Segoe UI" pitchFamily="34" charset="-122"/>
-                <a:cs typeface="Segoe UI" pitchFamily="34" charset="-120"/>
-              </a:rPr>
-              <a:t>DÉPANNAGE RÉEL</a:t>
+                  <a:srgbClr val="0078D4"/>
+                </a:solidFill>
+                <a:latin typeface="Segoe UI" pitchFamily="34" charset="0"/>
+                <a:ea typeface="Segoe UI" pitchFamily="34" charset="-122"/>
+                <a:cs typeface="Segoe UI" pitchFamily="34" charset="-120"/>
+              </a:rPr>
+              <a:t>ARCHITECTURE</a:t>
             </a:r>
             <a:endParaRPr lang="en-US" sz="1100" dirty="0"/>
           </a:p>
@@ -3131,7 +3560,7 @@
                 <a:ea typeface="Segoe UI" pitchFamily="34" charset="-122"/>
                 <a:cs typeface="Segoe UI" pitchFamily="34" charset="-120"/>
               </a:rPr>
-              <a:t>WI-11 résolu : distinguer observation et cause racine</a:t>
+              <a:t>Graphe superviseur + spécialistes</a:t>
             </a:r>
             <a:endParaRPr lang="en-US" sz="2600" dirty="0"/>
           </a:p>
@@ -3194,7 +3623,7 @@
                 <a:ea typeface="Segoe UI" pitchFamily="34" charset="-122"/>
                 <a:cs typeface="Segoe UI" pitchFamily="34" charset="-120"/>
               </a:rPr>
-              <a:t>Le 401 modèle a disparu en v32 ; le même principal réussit maintenant la mise en production complète v34</a:t>
+              <a:t>Un superviseur LangGraph route vers trois nœuds spécialistes : Enquêteur de preuves, Analyste de risque, Rédacteur de rapport</a:t>
             </a:r>
             <a:endParaRPr lang="en-US" sz="1500" dirty="0"/>
           </a:p>
@@ -3215,7 +3644,7 @@
                 <a:ea typeface="Segoe UI" pitchFamily="34" charset="-122"/>
                 <a:cs typeface="Segoe UI" pitchFamily="34" charset="-120"/>
               </a:rPr>
-              <a:t>Vérifier le principal effectif, les dataActions, la portée, les conditions, les politiques réseau et l’audience du jeton</a:t>
+              <a:t>Chaque spécialiste a son propre prompt, ses permissions d’outils et ses critères d’évaluation</a:t>
             </a:r>
             <a:endParaRPr lang="en-US" sz="1500" dirty="0"/>
           </a:p>
@@ -3236,7 +3665,7 @@
                 <a:ea typeface="Segoe UI" pitchFamily="34" charset="-122"/>
                 <a:cs typeface="Segoe UI" pitchFamily="34" charset="-120"/>
               </a:rPr>
-              <a:t>Les erreurs MCP distinctes ont été corrigées : point de terminaison versionné, connexions RemoteTool, négociation du protocole actuel</a:t>
+              <a:t>Isolation des outils par rôle : Enquêteur de preuves → defender-conn uniquement, Analyste de risque → anomaly-conn uniquement</a:t>
             </a:r>
             <a:endParaRPr lang="en-US" sz="1500" dirty="0"/>
           </a:p>
@@ -3257,7 +3686,7 @@
                 <a:ea typeface="Segoe UI" pitchFamily="34" charset="-122"/>
                 <a:cs typeface="Segoe UI" pitchFamily="34" charset="-120"/>
               </a:rPr>
-              <a:t>Le contexte original et les recherches indépendantes des spécialistes rétablissent les preuves ; seuils qualité inchangés</a:t>
+              <a:t>Le Rédacteur de rapport n’a aucun accès aux outils — il ne fait que synthétiser</a:t>
             </a:r>
             <a:endParaRPr lang="en-US" sz="1500" dirty="0"/>
           </a:p>
@@ -3278,28 +3707,7 @@
                 <a:ea typeface="Segoe UI" pitchFamily="34" charset="-122"/>
                 <a:cs typeface="Segoe UI" pitchFamily="34" charset="-120"/>
               </a:rPr>
-              <a:t>L’explication par le cache Azure reste une hypothèse. Un redéploiement réussi prouve le rétablissement, pas une cause racine côté serveur</a:t>
-            </a:r>
-            <a:endParaRPr lang="en-US" sz="1500" dirty="0"/>
-          </a:p>
-          <a:p>
-            <a:pPr marL="254000" indent="-254000">
-              <a:lnSpc>
-                <a:spcPct val="125000"/>
-              </a:lnSpc>
-              <a:buSzPct val="100000"/>
-              <a:buChar char="●"/>
-            </a:pPr>
-            <a:r>
-              <a:rPr lang="en-US" sz="1500" dirty="0">
-                <a:solidFill>
-                  <a:srgbClr val="1A1A1A"/>
-                </a:solidFill>
-                <a:latin typeface="Segoe UI" pitchFamily="34" charset="0"/>
-                <a:ea typeface="Segoe UI" pitchFamily="34" charset="-122"/>
-                <a:cs typeface="Segoe UI" pitchFamily="34" charset="-120"/>
-              </a:rPr>
-              <a:t>Le ticket 2609040400007027 reste une référence historique ; aucune fermeture du ticket support n’est affirmée</a:t>
+              <a:t>Le transport MCP versionné, les jetons Entra renouvelés et les connexions RemoteTool fonctionnent ; les reçus prouvent les appels des spécialistes</a:t>
             </a:r>
             <a:endParaRPr lang="en-US" sz="1500" dirty="0"/>
           </a:p>
@@ -3394,7 +3802,7 @@
                   <a:srgbClr val="767676"/>
                 </a:solidFill>
               </a:rPr>
-              <a:t>12 / 14</a:t>
+              <a:t>12 / 19</a:t>
             </a:r>
             <a:endParaRPr lang="en-US" sz="900" dirty="0"/>
           </a:p>
@@ -3485,7 +3893,7 @@
                 <a:ea typeface="Segoe UI" pitchFamily="34" charset="-122"/>
                 <a:cs typeface="Segoe UI" pitchFamily="34" charset="-120"/>
               </a:rPr>
-              <a:t>PRÉPARATION À LA PRODUCTION</a:t>
+              <a:t>OUTILS</a:t>
             </a:r>
             <a:endParaRPr lang="en-US" sz="1100" dirty="0"/>
           </a:p>
@@ -3524,7 +3932,7 @@
                 <a:ea typeface="Segoe UI" pitchFamily="34" charset="-122"/>
                 <a:cs typeface="Segoe UI" pitchFamily="34" charset="-120"/>
               </a:rPr>
-              <a:t>Des portes honnêtes, pas une fausse confiance</a:t>
+              <a:t>Quatre couches : implémenter, héberger, enregistrer, consommer</a:t>
             </a:r>
             <a:endParaRPr lang="en-US" sz="2600" dirty="0"/>
           </a:p>
@@ -3587,7 +3995,7 @@
                 <a:ea typeface="Segoe UI" pitchFamily="34" charset="-122"/>
                 <a:cs typeface="Segoe UI" pitchFamily="34" charset="-120"/>
               </a:rPr>
-              <a:t>Quatre pistes d’expérimentation : test de charge, checkpointer Cosmos DB, intégration Agent 365, évaluation continue</a:t>
+              <a:t>Couche 1 — Implémentation : code de serveur MCP personnalisé (outils Defender, outils anomalie)</a:t>
             </a:r>
             <a:endParaRPr lang="en-US" sz="1500" dirty="0"/>
           </a:p>
@@ -3608,7 +4016,7 @@
                 <a:ea typeface="Segoe UI" pitchFamily="34" charset="-122"/>
                 <a:cs typeface="Segoe UI" pitchFamily="34" charset="-120"/>
               </a:rPr>
-              <a:t>Porte Qualité réussie : 8 captures, aucune violation, 21/21 vérifications, refus de sécurité et reçus d’outils vérifiés</a:t>
+              <a:t>Couche 2 — Hébergement : Azure Container Apps indépendantes, authentification/réseau/santé propres</a:t>
             </a:r>
             <a:endParaRPr lang="en-US" sz="1500" dirty="0"/>
           </a:p>
@@ -3629,7 +4037,7 @@
                 <a:ea typeface="Segoe UI" pitchFamily="34" charset="-122"/>
                 <a:cs typeface="Segoe UI" pitchFamily="34" charset="-120"/>
               </a:rPr>
-              <a:t>Portes Échelle, Sécurité, Opérations : Conditional — preuves partielles, suivis nommés</a:t>
+              <a:t>Couche 3 — Enregistrement : les connexions Foundry définissent le point de terminaison + la politique d’identifiants par serveur MCP</a:t>
             </a:r>
             <a:endParaRPr lang="en-US" sz="1500" dirty="0"/>
           </a:p>
@@ -3650,7 +4058,7 @@
                 <a:ea typeface="Segoe UI" pitchFamily="34" charset="-122"/>
                 <a:cs typeface="Segoe UI" pitchFamily="34" charset="-120"/>
               </a:rPr>
-              <a:t>Portes Statut de plateforme, Données, Coût : Not testable in this PoC — nécessitent une confirmation commerciale/juridique/plateforme</a:t>
+              <a:t>Couche 4 — Consommation : la Foundry Toolbox agrège les outils enregistrés pour réutilisation entre agents</a:t>
             </a:r>
             <a:endParaRPr lang="en-US" sz="1500" dirty="0"/>
           </a:p>
@@ -3671,7 +4079,7 @@
                 <a:ea typeface="Segoe UI" pitchFamily="34" charset="-122"/>
                 <a:cs typeface="Segoe UI" pitchFamily="34" charset="-120"/>
               </a:rPr>
-              <a:t>Recommandation globale : go conditionnel pour poursuivre l’investissement PoC vers pilote, pas un oui/non net</a:t>
+              <a:t>La Toolbox est la couche d’enregistrement/agrégation — pas le runtime d’hébergement de votre code MCP</a:t>
             </a:r>
             <a:endParaRPr lang="en-US" sz="1500" dirty="0"/>
           </a:p>
@@ -3766,7 +4174,7 @@
                   <a:srgbClr val="767676"/>
                 </a:solidFill>
               </a:rPr>
-              <a:t>13 / 14</a:t>
+              <a:t>13 / 19</a:t>
             </a:r>
             <a:endParaRPr lang="en-US" sz="900" dirty="0"/>
           </a:p>
@@ -3857,7 +4265,7 @@
                 <a:ea typeface="Segoe UI" pitchFamily="34" charset="-122"/>
                 <a:cs typeface="Segoe UI" pitchFamily="34" charset="-120"/>
               </a:rPr>
-              <a:t>CONCLUSION</a:t>
+              <a:t>DÉPLOIEMENT</a:t>
             </a:r>
             <a:endParaRPr lang="en-US" sz="1100" dirty="0"/>
           </a:p>
@@ -3896,7 +4304,7 @@
                 <a:ea typeface="Segoe UI" pitchFamily="34" charset="-122"/>
                 <a:cs typeface="Segoe UI" pitchFamily="34" charset="-120"/>
               </a:rPr>
-              <a:t>Une mise en production prouvée, des limites explicites</a:t>
+              <a:t>Un manifeste : azure.yaml + azd</a:t>
             </a:r>
             <a:endParaRPr lang="en-US" sz="2600" dirty="0"/>
           </a:p>
@@ -3959,7 +4367,7 @@
                 <a:ea typeface="Segoe UI" pitchFamily="34" charset="-122"/>
                 <a:cs typeface="Segoe UI" pitchFamily="34" charset="-120"/>
               </a:rPr>
-              <a:t>Le déploiement et l’évaluation sont réels ; la télémétrie de sécurité MCP est synthétique, pas une donnée client réelle</a:t>
+              <a:t>azure.yaml câble le projet Foundry, le déploiement de modèle, les connexions Toolbox et le service d’agent hébergé</a:t>
             </a:r>
             <a:endParaRPr lang="en-US" sz="1500" dirty="0"/>
           </a:p>
@@ -3980,7 +4388,7 @@
                 <a:ea typeface="Segoe UI" pitchFamily="34" charset="-122"/>
                 <a:cs typeface="Segoe UI" pitchFamily="34" charset="-120"/>
               </a:rPr>
-              <a:t>Dépôt : github.com/devopsabcs-engineering/foundry-hosted-agents</a:t>
+              <a:t>kind: hosted — Foundry exploite le calcul de session ; vous ne possédez que le code du graphe</a:t>
             </a:r>
             <a:endParaRPr lang="en-US" sz="1500" dirty="0"/>
           </a:p>
@@ -4001,7 +4409,7 @@
                 <a:ea typeface="Segoe UI" pitchFamily="34" charset="-122"/>
                 <a:cs typeface="Segoe UI" pitchFamily="34" charset="-120"/>
               </a:rPr>
-              <a:t>Wiki : architecture actuelle, artefacts vérifiés, guide opérationnel et historique WI-11 résolu</a:t>
+              <a:t>dependencyResolution: remote_build — Foundry construit vos dépendances Python côté serveur</a:t>
             </a:r>
             <a:endParaRPr lang="en-US" sz="1500" dirty="0"/>
           </a:p>
@@ -4022,7 +4430,7 @@
                 <a:ea typeface="Segoe UI" pitchFamily="34" charset="-122"/>
                 <a:cs typeface="Segoe UI" pitchFamily="34" charset="-120"/>
               </a:rPr>
-              <a:t>Labs complets, bilingues, pas à pas : le site GitHub Pages compagnon de ce deck</a:t>
+              <a:t>protocol: responses — protocole Responses compatible OpenAI avec support du streaming</a:t>
             </a:r>
             <a:endParaRPr lang="en-US" sz="1500" dirty="0"/>
           </a:p>
@@ -4043,7 +4451,7 @@
                 <a:ea typeface="Segoe UI" pitchFamily="34" charset="-122"/>
                 <a:cs typeface="Segoe UI" pitchFamily="34" charset="-120"/>
               </a:rPr>
-              <a:t>Test de production v34 réussi ; zéro exception récente ne prouve ni l’endurance ni le traçage distribué complet</a:t>
+              <a:t>azd provision gère l’infrastructure ; azd deploy publie ou réutilise une version inchangée. Cycles distincts ; vérifier la route avant et après</a:t>
             </a:r>
             <a:endParaRPr lang="en-US" sz="1500" dirty="0"/>
           </a:p>
@@ -4138,7 +4546,1888 @@
                   <a:srgbClr val="767676"/>
                 </a:solidFill>
               </a:rPr>
-              <a:t>14 / 14</a:t>
+              <a:t>14 / 19</a:t>
+            </a:r>
+            <a:endParaRPr lang="en-US" sz="900" dirty="0"/>
+          </a:p>
+        </p:txBody>
+      </p:sp>
+    </p:spTree>
+  </p:cSld>
+  <p:clrMapOvr>
+    <a:masterClrMapping/>
+  </p:clrMapOvr>
+</p:sld>
+</file>
+
+<file path=ppt/slides/slide15.xml><?xml version="1.0" encoding="utf-8"?>
+<p:sld xmlns:a="http://schemas.openxmlformats.org/drawingml/2006/main" xmlns:r="http://schemas.openxmlformats.org/officeDocument/2006/relationships" xmlns:p="http://schemas.openxmlformats.org/presentationml/2006/main">
+  <p:cSld name="Slide 15">
+    <p:bg>
+      <p:bgPr>
+        <a:solidFill>
+          <a:srgbClr val="FAFBFC"/>
+        </a:solidFill>
+      </p:bgPr>
+    </p:bg>
+    <p:spTree>
+      <p:nvGrpSpPr>
+        <p:cNvPr id="1" name=""/>
+        <p:cNvGrpSpPr/>
+        <p:nvPr/>
+      </p:nvGrpSpPr>
+      <p:grpSpPr>
+        <a:xfrm>
+          <a:off x="0" y="0"/>
+          <a:ext cx="0" cy="0"/>
+          <a:chOff x="0" y="0"/>
+          <a:chExt cx="0" cy="0"/>
+        </a:xfrm>
+      </p:grpSpPr>
+      <p:sp>
+        <p:nvSpPr>
+          <p:cNvPr id="2" name="Shape 0"/>
+          <p:cNvSpPr/>
+          <p:nvPr/>
+        </p:nvSpPr>
+        <p:spPr>
+          <a:xfrm>
+            <a:off x="0" y="0"/>
+            <a:ext cx="12188952" cy="82296"/>
+          </a:xfrm>
+          <a:prstGeom prst="rect">
+            <a:avLst/>
+          </a:prstGeom>
+          <a:solidFill>
+            <a:srgbClr val="0078D4"/>
+          </a:solidFill>
+          <a:ln/>
+        </p:spPr>
+      </p:sp>
+      <p:sp>
+        <p:nvSpPr>
+          <p:cNvPr id="3" name="Text 1"/>
+          <p:cNvSpPr/>
+          <p:nvPr/>
+        </p:nvSpPr>
+        <p:spPr>
+          <a:xfrm>
+            <a:off x="457200" y="292608"/>
+            <a:ext cx="11247120" cy="274320"/>
+          </a:xfrm>
+          <a:prstGeom prst="rect">
+            <a:avLst/>
+          </a:prstGeom>
+          <a:noFill/>
+          <a:ln/>
+        </p:spPr>
+        <p:txBody>
+          <a:bodyPr wrap="square" rtlCol="0" anchor="ctr"/>
+          <a:lstStyle/>
+          <a:p>
+            <a:pPr indent="0" marL="0">
+              <a:buNone/>
+            </a:pPr>
+            <a:r>
+              <a:rPr lang="en-US" sz="1100" b="1" spc="100" kern="0" dirty="0">
+                <a:solidFill>
+                  <a:srgbClr val="0078D4"/>
+                </a:solidFill>
+                <a:latin typeface="Segoe UI" pitchFamily="34" charset="0"/>
+                <a:ea typeface="Segoe UI" pitchFamily="34" charset="-122"/>
+                <a:cs typeface="Segoe UI" pitchFamily="34" charset="-120"/>
+              </a:rPr>
+              <a:t>ÉVALUATION</a:t>
+            </a:r>
+            <a:endParaRPr lang="en-US" sz="1100" dirty="0"/>
+          </a:p>
+        </p:txBody>
+      </p:sp>
+      <p:sp>
+        <p:nvSpPr>
+          <p:cNvPr id="4" name="Text 2"/>
+          <p:cNvSpPr/>
+          <p:nvPr/>
+        </p:nvSpPr>
+        <p:spPr>
+          <a:xfrm>
+            <a:off x="457200" y="548640"/>
+            <a:ext cx="11247120" cy="640080"/>
+          </a:xfrm>
+          <a:prstGeom prst="rect">
+            <a:avLst/>
+          </a:prstGeom>
+          <a:noFill/>
+          <a:ln/>
+        </p:spPr>
+        <p:txBody>
+          <a:bodyPr wrap="square" rtlCol="0" anchor="ctr"/>
+          <a:lstStyle/>
+          <a:p>
+            <a:pPr indent="0" marL="0">
+              <a:buNone/>
+            </a:pPr>
+            <a:r>
+              <a:rPr lang="en-US" sz="2600" b="1" dirty="0">
+                <a:solidFill>
+                  <a:srgbClr val="001B3D"/>
+                </a:solidFill>
+                <a:latin typeface="Segoe UI" pitchFamily="34" charset="0"/>
+                <a:ea typeface="Segoe UI" pitchFamily="34" charset="-122"/>
+                <a:cs typeface="Segoe UI" pitchFamily="34" charset="-120"/>
+              </a:rPr>
+              <a:t>Vérifications déterministes + rubriques LLM-as-judge</a:t>
+            </a:r>
+            <a:endParaRPr lang="en-US" sz="2600" dirty="0"/>
+          </a:p>
+        </p:txBody>
+      </p:sp>
+      <p:sp>
+        <p:nvSpPr>
+          <p:cNvPr id="5" name="Shape 3"/>
+          <p:cNvSpPr/>
+          <p:nvPr/>
+        </p:nvSpPr>
+        <p:spPr>
+          <a:xfrm>
+            <a:off x="457200" y="1188720"/>
+            <a:ext cx="11247120" cy="10973"/>
+          </a:xfrm>
+          <a:prstGeom prst="rect">
+            <a:avLst/>
+          </a:prstGeom>
+          <a:solidFill>
+            <a:srgbClr val="E1E5E8"/>
+          </a:solidFill>
+          <a:ln/>
+        </p:spPr>
+      </p:sp>
+      <p:sp>
+        <p:nvSpPr>
+          <p:cNvPr id="6" name="Text 4"/>
+          <p:cNvSpPr/>
+          <p:nvPr/>
+        </p:nvSpPr>
+        <p:spPr>
+          <a:xfrm>
+            <a:off x="548640" y="1463040"/>
+            <a:ext cx="11064240" cy="5029200"/>
+          </a:xfrm>
+          <a:prstGeom prst="rect">
+            <a:avLst/>
+          </a:prstGeom>
+          <a:noFill/>
+          <a:ln/>
+        </p:spPr>
+        <p:txBody>
+          <a:bodyPr wrap="square" rtlCol="0" anchor="t"/>
+          <a:lstStyle/>
+          <a:p>
+            <a:pPr marL="254000" indent="-254000">
+              <a:lnSpc>
+                <a:spcPct val="125000"/>
+              </a:lnSpc>
+              <a:buSzPct val="100000"/>
+              <a:buChar char="●"/>
+            </a:pPr>
+            <a:r>
+              <a:rPr lang="en-US" sz="1500" dirty="0">
+                <a:solidFill>
+                  <a:srgbClr val="1A1A1A"/>
+                </a:solidFill>
+                <a:latin typeface="Segoe UI" pitchFamily="34" charset="0"/>
+                <a:ea typeface="Segoe UI" pitchFamily="34" charset="-122"/>
+                <a:cs typeface="Segoe UI" pitchFamily="34" charset="-120"/>
+              </a:rPr>
+              <a:t>Jeu de données de référence : 8 catégories (vrai/faux positif, ambigu, données manquantes, outils contradictoires, injection de prompt, actions non autorisées, conclusions non étayées)</a:t>
+            </a:r>
+            <a:endParaRPr lang="en-US" sz="1500" dirty="0"/>
+          </a:p>
+          <a:p>
+            <a:pPr marL="254000" indent="-254000">
+              <a:lnSpc>
+                <a:spcPct val="125000"/>
+              </a:lnSpc>
+              <a:buSzPct val="100000"/>
+              <a:buChar char="●"/>
+            </a:pPr>
+            <a:r>
+              <a:rPr lang="en-US" sz="1500" dirty="0">
+                <a:solidFill>
+                  <a:srgbClr val="1A1A1A"/>
+                </a:solidFill>
+                <a:latin typeface="Segoe UI" pitchFamily="34" charset="0"/>
+                <a:ea typeface="Segoe UI" pitchFamily="34" charset="-122"/>
+                <a:cs typeface="Segoe UI" pitchFamily="34" charset="-120"/>
+              </a:rPr>
+              <a:t>Déterministe : validité du schéma, citations requises, appels d’outils autorisés, contraintes de politique — rapide, reproductible</a:t>
+            </a:r>
+            <a:endParaRPr lang="en-US" sz="1500" dirty="0"/>
+          </a:p>
+          <a:p>
+            <a:pPr marL="254000" indent="-254000">
+              <a:lnSpc>
+                <a:spcPct val="125000"/>
+              </a:lnSpc>
+              <a:buSzPct val="100000"/>
+              <a:buChar char="●"/>
+            </a:pPr>
+            <a:r>
+              <a:rPr lang="en-US" sz="1500" dirty="0">
+                <a:solidFill>
+                  <a:srgbClr val="1A1A1A"/>
+                </a:solidFill>
+                <a:latin typeface="Segoe UI" pitchFamily="34" charset="0"/>
+                <a:ea typeface="Segoe UI" pitchFamily="34" charset="-122"/>
+                <a:cs typeface="Segoe UI" pitchFamily="34" charset="-120"/>
+              </a:rPr>
+              <a:t>Juges Foundry vérifiés : cohérence, ancrage, respect de la tâche. Sept rapports par mesure, 21/21 réussites, seuils inchangés à 100 %</a:t>
+            </a:r>
+            <a:endParaRPr lang="en-US" sz="1500" dirty="0"/>
+          </a:p>
+          <a:p>
+            <a:pPr marL="254000" indent="-254000">
+              <a:lnSpc>
+                <a:spcPct val="125000"/>
+              </a:lnSpc>
+              <a:buSzPct val="100000"/>
+              <a:buChar char="●"/>
+            </a:pPr>
+            <a:r>
+              <a:rPr lang="en-US" sz="1500" dirty="0">
+                <a:solidFill>
+                  <a:srgbClr val="1A1A1A"/>
+                </a:solidFill>
+                <a:latin typeface="Segoe UI" pitchFamily="34" charset="0"/>
+                <a:ea typeface="Segoe UI" pitchFamily="34" charset="-122"/>
+                <a:cs typeface="Segoe UI" pitchFamily="34" charset="-120"/>
+              </a:rPr>
+              <a:t>Huit captures, aucune violation déterministe ; inject-001 est un refus de sécurité vérifié sans outil, pas un résultat de juge</a:t>
+            </a:r>
+            <a:endParaRPr lang="en-US" sz="1500" dirty="0"/>
+          </a:p>
+          <a:p>
+            <a:pPr marL="254000" indent="-254000">
+              <a:lnSpc>
+                <a:spcPct val="125000"/>
+              </a:lnSpc>
+              <a:buSzPct val="100000"/>
+              <a:buChar char="●"/>
+            </a:pPr>
+            <a:r>
+              <a:rPr lang="en-US" sz="1500" dirty="0">
+                <a:solidFill>
+                  <a:srgbClr val="1A1A1A"/>
+                </a:solidFill>
+                <a:latin typeface="Segoe UI" pitchFamily="34" charset="0"/>
+                <a:ea typeface="Segoe UI" pitchFamily="34" charset="-122"/>
+                <a:cs typeface="Segoe UI" pitchFamily="34" charset="-120"/>
+              </a:rPr>
+              <a:t>Les règles de politique (ex. ne jamais prétendre avoir agi sans autorisation) restent déterministes, pas jugées par LLM</a:t>
+            </a:r>
+            <a:endParaRPr lang="en-US" sz="1500" dirty="0"/>
+          </a:p>
+        </p:txBody>
+      </p:sp>
+      <p:sp>
+        <p:nvSpPr>
+          <p:cNvPr id="8" name="Shape 5"/>
+          <p:cNvSpPr/>
+          <p:nvPr/>
+        </p:nvSpPr>
+        <p:spPr>
+          <a:xfrm>
+            <a:off x="0" y="6784848"/>
+            <a:ext cx="12188952" cy="27432"/>
+          </a:xfrm>
+          <a:prstGeom prst="rect">
+            <a:avLst/>
+          </a:prstGeom>
+          <a:solidFill>
+            <a:srgbClr val="E1E5E8"/>
+          </a:solidFill>
+          <a:ln/>
+        </p:spPr>
+      </p:sp>
+      <p:sp>
+        <p:nvSpPr>
+          <p:cNvPr id="9" name="Text 6"/>
+          <p:cNvSpPr/>
+          <p:nvPr/>
+        </p:nvSpPr>
+        <p:spPr>
+          <a:xfrm>
+            <a:off x="457200" y="6537960"/>
+            <a:ext cx="8229600" cy="256032"/>
+          </a:xfrm>
+          <a:prstGeom prst="rect">
+            <a:avLst/>
+          </a:prstGeom>
+          <a:noFill/>
+          <a:ln/>
+        </p:spPr>
+        <p:txBody>
+          <a:bodyPr wrap="square" rtlCol="0" anchor="ctr"/>
+          <a:lstStyle/>
+          <a:p>
+            <a:pPr indent="0" marL="0">
+              <a:buNone/>
+            </a:pPr>
+            <a:r>
+              <a:rPr lang="en-US" sz="900" dirty="0">
+                <a:solidFill>
+                  <a:srgbClr val="767676"/>
+                </a:solidFill>
+                <a:latin typeface="Segoe UI" pitchFamily="34" charset="0"/>
+                <a:ea typeface="Segoe UI" pitchFamily="34" charset="-122"/>
+                <a:cs typeface="Segoe UI" pitchFamily="34" charset="-120"/>
+              </a:rPr>
+              <a:t>Atelier Foundry Hosted Agents</a:t>
+            </a:r>
+            <a:endParaRPr lang="en-US" sz="900" dirty="0"/>
+          </a:p>
+        </p:txBody>
+      </p:sp>
+      <p:sp>
+        <p:nvSpPr>
+          <p:cNvPr id="10" name="Text 7"/>
+          <p:cNvSpPr/>
+          <p:nvPr/>
+        </p:nvSpPr>
+        <p:spPr>
+          <a:xfrm>
+            <a:off x="11338560" y="6528816"/>
+            <a:ext cx="548640" cy="219456"/>
+          </a:xfrm>
+          <a:prstGeom prst="rect">
+            <a:avLst/>
+          </a:prstGeom>
+          <a:noFill/>
+          <a:ln/>
+        </p:spPr>
+        <p:txBody>
+          <a:bodyPr wrap="square" rtlCol="0" anchor="ctr"/>
+          <a:lstStyle/>
+          <a:p>
+            <a:pPr algn="r" indent="0" marL="0">
+              <a:buNone/>
+            </a:pPr>
+            <a:r>
+              <a:rPr lang="en-US" sz="900" dirty="0">
+                <a:solidFill>
+                  <a:srgbClr val="767676"/>
+                </a:solidFill>
+              </a:rPr>
+              <a:t>15 / 19</a:t>
+            </a:r>
+            <a:endParaRPr lang="en-US" sz="900" dirty="0"/>
+          </a:p>
+        </p:txBody>
+      </p:sp>
+    </p:spTree>
+  </p:cSld>
+  <p:clrMapOvr>
+    <a:masterClrMapping/>
+  </p:clrMapOvr>
+</p:sld>
+</file>
+
+<file path=ppt/slides/slide16.xml><?xml version="1.0" encoding="utf-8"?>
+<p:sld xmlns:a="http://schemas.openxmlformats.org/drawingml/2006/main" xmlns:r="http://schemas.openxmlformats.org/officeDocument/2006/relationships" xmlns:p="http://schemas.openxmlformats.org/presentationml/2006/main">
+  <p:cSld name="Slide 16">
+    <p:bg>
+      <p:bgPr>
+        <a:solidFill>
+          <a:srgbClr val="FAFBFC"/>
+        </a:solidFill>
+      </p:bgPr>
+    </p:bg>
+    <p:spTree>
+      <p:nvGrpSpPr>
+        <p:cNvPr id="1" name=""/>
+        <p:cNvGrpSpPr/>
+        <p:nvPr/>
+      </p:nvGrpSpPr>
+      <p:grpSpPr>
+        <a:xfrm>
+          <a:off x="0" y="0"/>
+          <a:ext cx="0" cy="0"/>
+          <a:chOff x="0" y="0"/>
+          <a:chExt cx="0" cy="0"/>
+        </a:xfrm>
+      </p:grpSpPr>
+      <p:sp>
+        <p:nvSpPr>
+          <p:cNvPr id="2" name="Shape 0"/>
+          <p:cNvSpPr/>
+          <p:nvPr/>
+        </p:nvSpPr>
+        <p:spPr>
+          <a:xfrm>
+            <a:off x="0" y="0"/>
+            <a:ext cx="12188952" cy="82296"/>
+          </a:xfrm>
+          <a:prstGeom prst="rect">
+            <a:avLst/>
+          </a:prstGeom>
+          <a:solidFill>
+            <a:srgbClr val="0078D4"/>
+          </a:solidFill>
+          <a:ln/>
+        </p:spPr>
+      </p:sp>
+      <p:sp>
+        <p:nvSpPr>
+          <p:cNvPr id="3" name="Text 1"/>
+          <p:cNvSpPr/>
+          <p:nvPr/>
+        </p:nvSpPr>
+        <p:spPr>
+          <a:xfrm>
+            <a:off x="457200" y="292608"/>
+            <a:ext cx="11247120" cy="274320"/>
+          </a:xfrm>
+          <a:prstGeom prst="rect">
+            <a:avLst/>
+          </a:prstGeom>
+          <a:noFill/>
+          <a:ln/>
+        </p:spPr>
+        <p:txBody>
+          <a:bodyPr wrap="square" rtlCol="0" anchor="ctr"/>
+          <a:lstStyle/>
+          <a:p>
+            <a:pPr indent="0" marL="0">
+              <a:buNone/>
+            </a:pPr>
+            <a:r>
+              <a:rPr lang="en-US" sz="1100" b="1" spc="100" kern="0" dirty="0">
+                <a:solidFill>
+                  <a:srgbClr val="0078D4"/>
+                </a:solidFill>
+                <a:latin typeface="Segoe UI" pitchFamily="34" charset="0"/>
+                <a:ea typeface="Segoe UI" pitchFamily="34" charset="-122"/>
+                <a:cs typeface="Segoe UI" pitchFamily="34" charset="-120"/>
+              </a:rPr>
+              <a:t>CI/CD</a:t>
+            </a:r>
+            <a:endParaRPr lang="en-US" sz="1100" dirty="0"/>
+          </a:p>
+        </p:txBody>
+      </p:sp>
+      <p:sp>
+        <p:nvSpPr>
+          <p:cNvPr id="4" name="Text 2"/>
+          <p:cNvSpPr/>
+          <p:nvPr/>
+        </p:nvSpPr>
+        <p:spPr>
+          <a:xfrm>
+            <a:off x="457200" y="548640"/>
+            <a:ext cx="11247120" cy="640080"/>
+          </a:xfrm>
+          <a:prstGeom prst="rect">
+            <a:avLst/>
+          </a:prstGeom>
+          <a:noFill/>
+          <a:ln/>
+        </p:spPr>
+        <p:txBody>
+          <a:bodyPr wrap="square" rtlCol="0" anchor="ctr"/>
+          <a:lstStyle/>
+          <a:p>
+            <a:pPr indent="0" marL="0">
+              <a:buNone/>
+            </a:pPr>
+            <a:r>
+              <a:rPr lang="en-US" sz="2600" b="1" dirty="0">
+                <a:solidFill>
+                  <a:srgbClr val="001B3D"/>
+                </a:solidFill>
+                <a:latin typeface="Segoe UI" pitchFamily="34" charset="0"/>
+                <a:ea typeface="Segoe UI" pitchFamily="34" charset="-122"/>
+                <a:cs typeface="Segoe UI" pitchFamily="34" charset="-120"/>
+              </a:rPr>
+              <a:t>Pipeline de mise en production contrôlé par évaluation</a:t>
+            </a:r>
+            <a:endParaRPr lang="en-US" sz="2600" dirty="0"/>
+          </a:p>
+        </p:txBody>
+      </p:sp>
+      <p:sp>
+        <p:nvSpPr>
+          <p:cNvPr id="5" name="Shape 3"/>
+          <p:cNvSpPr/>
+          <p:nvPr/>
+        </p:nvSpPr>
+        <p:spPr>
+          <a:xfrm>
+            <a:off x="457200" y="1188720"/>
+            <a:ext cx="11247120" cy="10973"/>
+          </a:xfrm>
+          <a:prstGeom prst="rect">
+            <a:avLst/>
+          </a:prstGeom>
+          <a:solidFill>
+            <a:srgbClr val="E1E5E8"/>
+          </a:solidFill>
+          <a:ln/>
+        </p:spPr>
+      </p:sp>
+      <p:sp>
+        <p:nvSpPr>
+          <p:cNvPr id="6" name="Text 4"/>
+          <p:cNvSpPr/>
+          <p:nvPr/>
+        </p:nvSpPr>
+        <p:spPr>
+          <a:xfrm>
+            <a:off x="548640" y="1463040"/>
+            <a:ext cx="11064240" cy="5029200"/>
+          </a:xfrm>
+          <a:prstGeom prst="rect">
+            <a:avLst/>
+          </a:prstGeom>
+          <a:noFill/>
+          <a:ln/>
+        </p:spPr>
+        <p:txBody>
+          <a:bodyPr wrap="square" rtlCol="0" anchor="t"/>
+          <a:lstStyle/>
+          <a:p>
+            <a:pPr marL="254000" indent="-254000">
+              <a:lnSpc>
+                <a:spcPct val="125000"/>
+              </a:lnSpc>
+              <a:buSzPct val="100000"/>
+              <a:buChar char="●"/>
+            </a:pPr>
+            <a:r>
+              <a:rPr lang="en-US" sz="1500" dirty="0">
+                <a:solidFill>
+                  <a:srgbClr val="1A1A1A"/>
+                </a:solidFill>
+                <a:latin typeface="Segoe UI" pitchFamily="34" charset="0"/>
+                <a:ea typeface="Segoe UI" pitchFamily="34" charset="-122"/>
+                <a:cs typeface="Segoe UI" pitchFamily="34" charset="-120"/>
+              </a:rPr>
+              <a:t>Un chemin protégé : deploy-and-evaluate.yml ; hosted-agent-cd.yml y délègue. Comptes et applications MCP staging/production séparés</a:t>
+            </a:r>
+            <a:endParaRPr lang="en-US" sz="1500" dirty="0"/>
+          </a:p>
+          <a:p>
+            <a:pPr marL="254000" indent="-254000">
+              <a:lnSpc>
+                <a:spcPct val="125000"/>
+              </a:lnSpc>
+              <a:buSzPct val="100000"/>
+              <a:buChar char="●"/>
+            </a:pPr>
+            <a:r>
+              <a:rPr lang="en-US" sz="1500" dirty="0">
+                <a:solidFill>
+                  <a:srgbClr val="1A1A1A"/>
+                </a:solidFill>
+                <a:latin typeface="Segoe UI" pitchFamily="34" charset="0"/>
+                <a:ea typeface="Segoe UI" pitchFamily="34" charset="-122"/>
+                <a:cs typeface="Segoe UI" pitchFamily="34" charset="-120"/>
+              </a:rPr>
+              <a:t>Flux complet : lint/tests → validation Bicep → déploiement d’un candidat immuable en staging → tests de fumée/contrat/streaming</a:t>
+            </a:r>
+            <a:endParaRPr lang="en-US" sz="1500" dirty="0"/>
+          </a:p>
+          <a:p>
+            <a:pPr marL="254000" indent="-254000">
+              <a:lnSpc>
+                <a:spcPct val="125000"/>
+              </a:lnSpc>
+              <a:buSzPct val="100000"/>
+              <a:buChar char="●"/>
+            </a:pPr>
+            <a:r>
+              <a:rPr lang="en-US" sz="1500" dirty="0">
+                <a:solidFill>
+                  <a:srgbClr val="1A1A1A"/>
+                </a:solidFill>
+                <a:latin typeface="Segoe UI" pitchFamily="34" charset="0"/>
+                <a:ea typeface="Segoe UI" pitchFamily="34" charset="-122"/>
+                <a:cs typeface="Segoe UI" pitchFamily="34" charset="-120"/>
+              </a:rPr>
+              <a:t>La porte de qualité d’évaluation hors ligne s’exécute contre le candidat de staging avant toute approbation manuelle de production</a:t>
+            </a:r>
+            <a:endParaRPr lang="en-US" sz="1500" dirty="0"/>
+          </a:p>
+          <a:p>
+            <a:pPr marL="254000" indent="-254000">
+              <a:lnSpc>
+                <a:spcPct val="125000"/>
+              </a:lnSpc>
+              <a:buSzPct val="100000"/>
+              <a:buChar char="●"/>
+            </a:pPr>
+            <a:r>
+              <a:rPr lang="en-US" sz="1500" dirty="0">
+                <a:solidFill>
+                  <a:srgbClr val="1A1A1A"/>
+                </a:solidFill>
+                <a:latin typeface="Segoe UI" pitchFamily="34" charset="0"/>
+                <a:ea typeface="Segoe UI" pitchFamily="34" charset="-122"/>
+                <a:cs typeface="Segoe UI" pitchFamily="34" charset="-120"/>
+              </a:rPr>
+              <a:t>Fédération OIDC sans secret — aucun secret client stocké dans les deux pipelines</a:t>
+            </a:r>
+            <a:endParaRPr lang="en-US" sz="1500" dirty="0"/>
+          </a:p>
+          <a:p>
+            <a:pPr marL="254000" indent="-254000">
+              <a:lnSpc>
+                <a:spcPct val="125000"/>
+              </a:lnSpc>
+              <a:buSzPct val="100000"/>
+              <a:buChar char="●"/>
+            </a:pPr>
+            <a:r>
+              <a:rPr lang="en-US" sz="1500" dirty="0">
+                <a:solidFill>
+                  <a:srgbClr val="1A1A1A"/>
+                </a:solidFill>
+                <a:latin typeface="Segoe UI" pitchFamily="34" charset="0"/>
+                <a:ea typeface="Segoe UI" pitchFamily="34" charset="-122"/>
+                <a:cs typeface="Segoe UI" pitchFamily="34" charset="-120"/>
+              </a:rPr>
+              <a:t>Exécution 34427432731 réussie ; validation 34427429700 avec cinq flux inchangés réussie. Approbations normales, récupération manuelle ; sans rollback automatique ni canary</a:t>
+            </a:r>
+            <a:endParaRPr lang="en-US" sz="1500" dirty="0"/>
+          </a:p>
+        </p:txBody>
+      </p:sp>
+      <p:sp>
+        <p:nvSpPr>
+          <p:cNvPr id="8" name="Shape 5"/>
+          <p:cNvSpPr/>
+          <p:nvPr/>
+        </p:nvSpPr>
+        <p:spPr>
+          <a:xfrm>
+            <a:off x="0" y="6784848"/>
+            <a:ext cx="12188952" cy="27432"/>
+          </a:xfrm>
+          <a:prstGeom prst="rect">
+            <a:avLst/>
+          </a:prstGeom>
+          <a:solidFill>
+            <a:srgbClr val="E1E5E8"/>
+          </a:solidFill>
+          <a:ln/>
+        </p:spPr>
+      </p:sp>
+      <p:sp>
+        <p:nvSpPr>
+          <p:cNvPr id="9" name="Text 6"/>
+          <p:cNvSpPr/>
+          <p:nvPr/>
+        </p:nvSpPr>
+        <p:spPr>
+          <a:xfrm>
+            <a:off x="457200" y="6537960"/>
+            <a:ext cx="8229600" cy="256032"/>
+          </a:xfrm>
+          <a:prstGeom prst="rect">
+            <a:avLst/>
+          </a:prstGeom>
+          <a:noFill/>
+          <a:ln/>
+        </p:spPr>
+        <p:txBody>
+          <a:bodyPr wrap="square" rtlCol="0" anchor="ctr"/>
+          <a:lstStyle/>
+          <a:p>
+            <a:pPr indent="0" marL="0">
+              <a:buNone/>
+            </a:pPr>
+            <a:r>
+              <a:rPr lang="en-US" sz="900" dirty="0">
+                <a:solidFill>
+                  <a:srgbClr val="767676"/>
+                </a:solidFill>
+                <a:latin typeface="Segoe UI" pitchFamily="34" charset="0"/>
+                <a:ea typeface="Segoe UI" pitchFamily="34" charset="-122"/>
+                <a:cs typeface="Segoe UI" pitchFamily="34" charset="-120"/>
+              </a:rPr>
+              <a:t>Atelier Foundry Hosted Agents</a:t>
+            </a:r>
+            <a:endParaRPr lang="en-US" sz="900" dirty="0"/>
+          </a:p>
+        </p:txBody>
+      </p:sp>
+      <p:sp>
+        <p:nvSpPr>
+          <p:cNvPr id="10" name="Text 7"/>
+          <p:cNvSpPr/>
+          <p:nvPr/>
+        </p:nvSpPr>
+        <p:spPr>
+          <a:xfrm>
+            <a:off x="11338560" y="6528816"/>
+            <a:ext cx="548640" cy="219456"/>
+          </a:xfrm>
+          <a:prstGeom prst="rect">
+            <a:avLst/>
+          </a:prstGeom>
+          <a:noFill/>
+          <a:ln/>
+        </p:spPr>
+        <p:txBody>
+          <a:bodyPr wrap="square" rtlCol="0" anchor="ctr"/>
+          <a:lstStyle/>
+          <a:p>
+            <a:pPr algn="r" indent="0" marL="0">
+              <a:buNone/>
+            </a:pPr>
+            <a:r>
+              <a:rPr lang="en-US" sz="900" dirty="0">
+                <a:solidFill>
+                  <a:srgbClr val="767676"/>
+                </a:solidFill>
+              </a:rPr>
+              <a:t>16 / 19</a:t>
+            </a:r>
+            <a:endParaRPr lang="en-US" sz="900" dirty="0"/>
+          </a:p>
+        </p:txBody>
+      </p:sp>
+    </p:spTree>
+  </p:cSld>
+  <p:clrMapOvr>
+    <a:masterClrMapping/>
+  </p:clrMapOvr>
+</p:sld>
+</file>
+
+<file path=ppt/slides/slide17.xml><?xml version="1.0" encoding="utf-8"?>
+<p:sld xmlns:a="http://schemas.openxmlformats.org/drawingml/2006/main" xmlns:r="http://schemas.openxmlformats.org/officeDocument/2006/relationships" xmlns:p="http://schemas.openxmlformats.org/presentationml/2006/main">
+  <p:cSld name="Slide 17">
+    <p:bg>
+      <p:bgPr>
+        <a:solidFill>
+          <a:srgbClr val="FAFBFC"/>
+        </a:solidFill>
+      </p:bgPr>
+    </p:bg>
+    <p:spTree>
+      <p:nvGrpSpPr>
+        <p:cNvPr id="1" name=""/>
+        <p:cNvGrpSpPr/>
+        <p:nvPr/>
+      </p:nvGrpSpPr>
+      <p:grpSpPr>
+        <a:xfrm>
+          <a:off x="0" y="0"/>
+          <a:ext cx="0" cy="0"/>
+          <a:chOff x="0" y="0"/>
+          <a:chExt cx="0" cy="0"/>
+        </a:xfrm>
+      </p:grpSpPr>
+      <p:sp>
+        <p:nvSpPr>
+          <p:cNvPr id="2" name="Shape 0"/>
+          <p:cNvSpPr/>
+          <p:nvPr/>
+        </p:nvSpPr>
+        <p:spPr>
+          <a:xfrm>
+            <a:off x="0" y="0"/>
+            <a:ext cx="12188952" cy="82296"/>
+          </a:xfrm>
+          <a:prstGeom prst="rect">
+            <a:avLst/>
+          </a:prstGeom>
+          <a:solidFill>
+            <a:srgbClr val="107C10"/>
+          </a:solidFill>
+          <a:ln/>
+        </p:spPr>
+      </p:sp>
+      <p:sp>
+        <p:nvSpPr>
+          <p:cNvPr id="3" name="Text 1"/>
+          <p:cNvSpPr/>
+          <p:nvPr/>
+        </p:nvSpPr>
+        <p:spPr>
+          <a:xfrm>
+            <a:off x="457200" y="292608"/>
+            <a:ext cx="11247120" cy="274320"/>
+          </a:xfrm>
+          <a:prstGeom prst="rect">
+            <a:avLst/>
+          </a:prstGeom>
+          <a:noFill/>
+          <a:ln/>
+        </p:spPr>
+        <p:txBody>
+          <a:bodyPr wrap="square" rtlCol="0" anchor="ctr"/>
+          <a:lstStyle/>
+          <a:p>
+            <a:pPr indent="0" marL="0">
+              <a:buNone/>
+            </a:pPr>
+            <a:r>
+              <a:rPr lang="en-US" sz="1100" b="1" spc="100" kern="0" dirty="0">
+                <a:solidFill>
+                  <a:srgbClr val="107C10"/>
+                </a:solidFill>
+                <a:latin typeface="Segoe UI" pitchFamily="34" charset="0"/>
+                <a:ea typeface="Segoe UI" pitchFamily="34" charset="-122"/>
+                <a:cs typeface="Segoe UI" pitchFamily="34" charset="-120"/>
+              </a:rPr>
+              <a:t>DÉPANNAGE RÉEL</a:t>
+            </a:r>
+            <a:endParaRPr lang="en-US" sz="1100" dirty="0"/>
+          </a:p>
+        </p:txBody>
+      </p:sp>
+      <p:sp>
+        <p:nvSpPr>
+          <p:cNvPr id="4" name="Text 2"/>
+          <p:cNvSpPr/>
+          <p:nvPr/>
+        </p:nvSpPr>
+        <p:spPr>
+          <a:xfrm>
+            <a:off x="457200" y="548640"/>
+            <a:ext cx="11247120" cy="640080"/>
+          </a:xfrm>
+          <a:prstGeom prst="rect">
+            <a:avLst/>
+          </a:prstGeom>
+          <a:noFill/>
+          <a:ln/>
+        </p:spPr>
+        <p:txBody>
+          <a:bodyPr wrap="square" rtlCol="0" anchor="ctr"/>
+          <a:lstStyle/>
+          <a:p>
+            <a:pPr indent="0" marL="0">
+              <a:buNone/>
+            </a:pPr>
+            <a:r>
+              <a:rPr lang="en-US" sz="2600" b="1" dirty="0">
+                <a:solidFill>
+                  <a:srgbClr val="001B3D"/>
+                </a:solidFill>
+                <a:latin typeface="Segoe UI" pitchFamily="34" charset="0"/>
+                <a:ea typeface="Segoe UI" pitchFamily="34" charset="-122"/>
+                <a:cs typeface="Segoe UI" pitchFamily="34" charset="-120"/>
+              </a:rPr>
+              <a:t>WI-11 résolu : distinguer observation et cause racine</a:t>
+            </a:r>
+            <a:endParaRPr lang="en-US" sz="2600" dirty="0"/>
+          </a:p>
+        </p:txBody>
+      </p:sp>
+      <p:sp>
+        <p:nvSpPr>
+          <p:cNvPr id="5" name="Shape 3"/>
+          <p:cNvSpPr/>
+          <p:nvPr/>
+        </p:nvSpPr>
+        <p:spPr>
+          <a:xfrm>
+            <a:off x="457200" y="1188720"/>
+            <a:ext cx="11247120" cy="10973"/>
+          </a:xfrm>
+          <a:prstGeom prst="rect">
+            <a:avLst/>
+          </a:prstGeom>
+          <a:solidFill>
+            <a:srgbClr val="E1E5E8"/>
+          </a:solidFill>
+          <a:ln/>
+        </p:spPr>
+      </p:sp>
+      <p:sp>
+        <p:nvSpPr>
+          <p:cNvPr id="6" name="Text 4"/>
+          <p:cNvSpPr/>
+          <p:nvPr/>
+        </p:nvSpPr>
+        <p:spPr>
+          <a:xfrm>
+            <a:off x="548640" y="1463040"/>
+            <a:ext cx="11064240" cy="5029200"/>
+          </a:xfrm>
+          <a:prstGeom prst="rect">
+            <a:avLst/>
+          </a:prstGeom>
+          <a:noFill/>
+          <a:ln/>
+        </p:spPr>
+        <p:txBody>
+          <a:bodyPr wrap="square" rtlCol="0" anchor="t"/>
+          <a:lstStyle/>
+          <a:p>
+            <a:pPr marL="254000" indent="-254000">
+              <a:lnSpc>
+                <a:spcPct val="125000"/>
+              </a:lnSpc>
+              <a:buSzPct val="100000"/>
+              <a:buChar char="●"/>
+            </a:pPr>
+            <a:r>
+              <a:rPr lang="en-US" sz="1500" dirty="0">
+                <a:solidFill>
+                  <a:srgbClr val="1A1A1A"/>
+                </a:solidFill>
+                <a:latin typeface="Segoe UI" pitchFamily="34" charset="0"/>
+                <a:ea typeface="Segoe UI" pitchFamily="34" charset="-122"/>
+                <a:cs typeface="Segoe UI" pitchFamily="34" charset="-120"/>
+              </a:rPr>
+              <a:t>Le 401 modèle a disparu en v32 ; les mises en production protégées suivantes ont réussi. Le rétablissement ne prouve pas la cause interne à Azure</a:t>
+            </a:r>
+            <a:endParaRPr lang="en-US" sz="1500" dirty="0"/>
+          </a:p>
+          <a:p>
+            <a:pPr marL="254000" indent="-254000">
+              <a:lnSpc>
+                <a:spcPct val="125000"/>
+              </a:lnSpc>
+              <a:buSzPct val="100000"/>
+              <a:buChar char="●"/>
+            </a:pPr>
+            <a:r>
+              <a:rPr lang="en-US" sz="1500" dirty="0">
+                <a:solidFill>
+                  <a:srgbClr val="1A1A1A"/>
+                </a:solidFill>
+                <a:latin typeface="Segoe UI" pitchFamily="34" charset="0"/>
+                <a:ea typeface="Segoe UI" pitchFamily="34" charset="-122"/>
+                <a:cs typeface="Segoe UI" pitchFamily="34" charset="-120"/>
+              </a:rPr>
+              <a:t>Vérifier le principal effectif, les dataActions, la portée, les conditions, les politiques réseau et l’audience du jeton</a:t>
+            </a:r>
+            <a:endParaRPr lang="en-US" sz="1500" dirty="0"/>
+          </a:p>
+          <a:p>
+            <a:pPr marL="254000" indent="-254000">
+              <a:lnSpc>
+                <a:spcPct val="125000"/>
+              </a:lnSpc>
+              <a:buSzPct val="100000"/>
+              <a:buChar char="●"/>
+            </a:pPr>
+            <a:r>
+              <a:rPr lang="en-US" sz="1500" dirty="0">
+                <a:solidFill>
+                  <a:srgbClr val="1A1A1A"/>
+                </a:solidFill>
+                <a:latin typeface="Segoe UI" pitchFamily="34" charset="0"/>
+                <a:ea typeface="Segoe UI" pitchFamily="34" charset="-122"/>
+                <a:cs typeface="Segoe UI" pitchFamily="34" charset="-120"/>
+              </a:rPr>
+              <a:t>Les erreurs MCP distinctes ont été corrigées : point de terminaison versionné, connexions RemoteTool, négociation du protocole actuel</a:t>
+            </a:r>
+            <a:endParaRPr lang="en-US" sz="1500" dirty="0"/>
+          </a:p>
+          <a:p>
+            <a:pPr marL="254000" indent="-254000">
+              <a:lnSpc>
+                <a:spcPct val="125000"/>
+              </a:lnSpc>
+              <a:buSzPct val="100000"/>
+              <a:buChar char="●"/>
+            </a:pPr>
+            <a:r>
+              <a:rPr lang="en-US" sz="1500" dirty="0">
+                <a:solidFill>
+                  <a:srgbClr val="1A1A1A"/>
+                </a:solidFill>
+                <a:latin typeface="Segoe UI" pitchFamily="34" charset="0"/>
+                <a:ea typeface="Segoe UI" pitchFamily="34" charset="-122"/>
+                <a:cs typeface="Segoe UI" pitchFamily="34" charset="-120"/>
+              </a:rPr>
+              <a:t>Le contexte original et les recherches indépendantes des spécialistes rétablissent les preuves ; seuils qualité inchangés</a:t>
+            </a:r>
+            <a:endParaRPr lang="en-US" sz="1500" dirty="0"/>
+          </a:p>
+          <a:p>
+            <a:pPr marL="254000" indent="-254000">
+              <a:lnSpc>
+                <a:spcPct val="125000"/>
+              </a:lnSpc>
+              <a:buSzPct val="100000"/>
+              <a:buChar char="●"/>
+            </a:pPr>
+            <a:r>
+              <a:rPr lang="en-US" sz="1500" dirty="0">
+                <a:solidFill>
+                  <a:srgbClr val="1A1A1A"/>
+                </a:solidFill>
+                <a:latin typeface="Segoe UI" pitchFamily="34" charset="0"/>
+                <a:ea typeface="Segoe UI" pitchFamily="34" charset="-122"/>
+                <a:cs typeface="Segoe UI" pitchFamily="34" charset="-120"/>
+              </a:rPr>
+              <a:t>L’explication par le cache Azure reste une hypothèse. Un redéploiement réussi prouve le rétablissement, pas une cause racine côté serveur</a:t>
+            </a:r>
+            <a:endParaRPr lang="en-US" sz="1500" dirty="0"/>
+          </a:p>
+          <a:p>
+            <a:pPr marL="254000" indent="-254000">
+              <a:lnSpc>
+                <a:spcPct val="125000"/>
+              </a:lnSpc>
+              <a:buSzPct val="100000"/>
+              <a:buChar char="●"/>
+            </a:pPr>
+            <a:r>
+              <a:rPr lang="en-US" sz="1500" dirty="0">
+                <a:solidFill>
+                  <a:srgbClr val="1A1A1A"/>
+                </a:solidFill>
+                <a:latin typeface="Segoe UI" pitchFamily="34" charset="0"/>
+                <a:ea typeface="Segoe UI" pitchFamily="34" charset="-122"/>
+                <a:cs typeface="Segoe UI" pitchFamily="34" charset="-120"/>
+              </a:rPr>
+              <a:t>Le ticket 2609040400007027 reste une référence historique ; aucune fermeture du ticket support n’est affirmée</a:t>
+            </a:r>
+            <a:endParaRPr lang="en-US" sz="1500" dirty="0"/>
+          </a:p>
+        </p:txBody>
+      </p:sp>
+      <p:sp>
+        <p:nvSpPr>
+          <p:cNvPr id="8" name="Shape 5"/>
+          <p:cNvSpPr/>
+          <p:nvPr/>
+        </p:nvSpPr>
+        <p:spPr>
+          <a:xfrm>
+            <a:off x="0" y="6784848"/>
+            <a:ext cx="12188952" cy="27432"/>
+          </a:xfrm>
+          <a:prstGeom prst="rect">
+            <a:avLst/>
+          </a:prstGeom>
+          <a:solidFill>
+            <a:srgbClr val="E1E5E8"/>
+          </a:solidFill>
+          <a:ln/>
+        </p:spPr>
+      </p:sp>
+      <p:sp>
+        <p:nvSpPr>
+          <p:cNvPr id="9" name="Text 6"/>
+          <p:cNvSpPr/>
+          <p:nvPr/>
+        </p:nvSpPr>
+        <p:spPr>
+          <a:xfrm>
+            <a:off x="457200" y="6537960"/>
+            <a:ext cx="8229600" cy="256032"/>
+          </a:xfrm>
+          <a:prstGeom prst="rect">
+            <a:avLst/>
+          </a:prstGeom>
+          <a:noFill/>
+          <a:ln/>
+        </p:spPr>
+        <p:txBody>
+          <a:bodyPr wrap="square" rtlCol="0" anchor="ctr"/>
+          <a:lstStyle/>
+          <a:p>
+            <a:pPr indent="0" marL="0">
+              <a:buNone/>
+            </a:pPr>
+            <a:r>
+              <a:rPr lang="en-US" sz="900" dirty="0">
+                <a:solidFill>
+                  <a:srgbClr val="767676"/>
+                </a:solidFill>
+                <a:latin typeface="Segoe UI" pitchFamily="34" charset="0"/>
+                <a:ea typeface="Segoe UI" pitchFamily="34" charset="-122"/>
+                <a:cs typeface="Segoe UI" pitchFamily="34" charset="-120"/>
+              </a:rPr>
+              <a:t>Atelier Foundry Hosted Agents</a:t>
+            </a:r>
+            <a:endParaRPr lang="en-US" sz="900" dirty="0"/>
+          </a:p>
+        </p:txBody>
+      </p:sp>
+      <p:sp>
+        <p:nvSpPr>
+          <p:cNvPr id="10" name="Text 7"/>
+          <p:cNvSpPr/>
+          <p:nvPr/>
+        </p:nvSpPr>
+        <p:spPr>
+          <a:xfrm>
+            <a:off x="11338560" y="6528816"/>
+            <a:ext cx="548640" cy="219456"/>
+          </a:xfrm>
+          <a:prstGeom prst="rect">
+            <a:avLst/>
+          </a:prstGeom>
+          <a:noFill/>
+          <a:ln/>
+        </p:spPr>
+        <p:txBody>
+          <a:bodyPr wrap="square" rtlCol="0" anchor="ctr"/>
+          <a:lstStyle/>
+          <a:p>
+            <a:pPr algn="r" indent="0" marL="0">
+              <a:buNone/>
+            </a:pPr>
+            <a:r>
+              <a:rPr lang="en-US" sz="900" dirty="0">
+                <a:solidFill>
+                  <a:srgbClr val="767676"/>
+                </a:solidFill>
+              </a:rPr>
+              <a:t>17 / 19</a:t>
+            </a:r>
+            <a:endParaRPr lang="en-US" sz="900" dirty="0"/>
+          </a:p>
+        </p:txBody>
+      </p:sp>
+    </p:spTree>
+  </p:cSld>
+  <p:clrMapOvr>
+    <a:masterClrMapping/>
+  </p:clrMapOvr>
+</p:sld>
+</file>
+
+<file path=ppt/slides/slide18.xml><?xml version="1.0" encoding="utf-8"?>
+<p:sld xmlns:a="http://schemas.openxmlformats.org/drawingml/2006/main" xmlns:r="http://schemas.openxmlformats.org/officeDocument/2006/relationships" xmlns:p="http://schemas.openxmlformats.org/presentationml/2006/main">
+  <p:cSld name="Slide 18">
+    <p:bg>
+      <p:bgPr>
+        <a:solidFill>
+          <a:srgbClr val="FAFBFC"/>
+        </a:solidFill>
+      </p:bgPr>
+    </p:bg>
+    <p:spTree>
+      <p:nvGrpSpPr>
+        <p:cNvPr id="1" name=""/>
+        <p:cNvGrpSpPr/>
+        <p:nvPr/>
+      </p:nvGrpSpPr>
+      <p:grpSpPr>
+        <a:xfrm>
+          <a:off x="0" y="0"/>
+          <a:ext cx="0" cy="0"/>
+          <a:chOff x="0" y="0"/>
+          <a:chExt cx="0" cy="0"/>
+        </a:xfrm>
+      </p:grpSpPr>
+      <p:sp>
+        <p:nvSpPr>
+          <p:cNvPr id="2" name="Shape 0"/>
+          <p:cNvSpPr/>
+          <p:nvPr/>
+        </p:nvSpPr>
+        <p:spPr>
+          <a:xfrm>
+            <a:off x="0" y="0"/>
+            <a:ext cx="12188952" cy="82296"/>
+          </a:xfrm>
+          <a:prstGeom prst="rect">
+            <a:avLst/>
+          </a:prstGeom>
+          <a:solidFill>
+            <a:srgbClr val="0078D4"/>
+          </a:solidFill>
+          <a:ln/>
+        </p:spPr>
+      </p:sp>
+      <p:sp>
+        <p:nvSpPr>
+          <p:cNvPr id="3" name="Text 1"/>
+          <p:cNvSpPr/>
+          <p:nvPr/>
+        </p:nvSpPr>
+        <p:spPr>
+          <a:xfrm>
+            <a:off x="457200" y="292608"/>
+            <a:ext cx="11247120" cy="274320"/>
+          </a:xfrm>
+          <a:prstGeom prst="rect">
+            <a:avLst/>
+          </a:prstGeom>
+          <a:noFill/>
+          <a:ln/>
+        </p:spPr>
+        <p:txBody>
+          <a:bodyPr wrap="square" rtlCol="0" anchor="ctr"/>
+          <a:lstStyle/>
+          <a:p>
+            <a:pPr indent="0" marL="0">
+              <a:buNone/>
+            </a:pPr>
+            <a:r>
+              <a:rPr lang="en-US" sz="1100" b="1" spc="100" kern="0" dirty="0">
+                <a:solidFill>
+                  <a:srgbClr val="0078D4"/>
+                </a:solidFill>
+                <a:latin typeface="Segoe UI" pitchFamily="34" charset="0"/>
+                <a:ea typeface="Segoe UI" pitchFamily="34" charset="-122"/>
+                <a:cs typeface="Segoe UI" pitchFamily="34" charset="-120"/>
+              </a:rPr>
+              <a:t>PRÉPARATION À LA PRODUCTION</a:t>
+            </a:r>
+            <a:endParaRPr lang="en-US" sz="1100" dirty="0"/>
+          </a:p>
+        </p:txBody>
+      </p:sp>
+      <p:sp>
+        <p:nvSpPr>
+          <p:cNvPr id="4" name="Text 2"/>
+          <p:cNvSpPr/>
+          <p:nvPr/>
+        </p:nvSpPr>
+        <p:spPr>
+          <a:xfrm>
+            <a:off x="457200" y="548640"/>
+            <a:ext cx="11247120" cy="640080"/>
+          </a:xfrm>
+          <a:prstGeom prst="rect">
+            <a:avLst/>
+          </a:prstGeom>
+          <a:noFill/>
+          <a:ln/>
+        </p:spPr>
+        <p:txBody>
+          <a:bodyPr wrap="square" rtlCol="0" anchor="ctr"/>
+          <a:lstStyle/>
+          <a:p>
+            <a:pPr indent="0" marL="0">
+              <a:buNone/>
+            </a:pPr>
+            <a:r>
+              <a:rPr lang="en-US" sz="2600" b="1" dirty="0">
+                <a:solidFill>
+                  <a:srgbClr val="001B3D"/>
+                </a:solidFill>
+                <a:latin typeface="Segoe UI" pitchFamily="34" charset="0"/>
+                <a:ea typeface="Segoe UI" pitchFamily="34" charset="-122"/>
+                <a:cs typeface="Segoe UI" pitchFamily="34" charset="-120"/>
+              </a:rPr>
+              <a:t>Des portes honnêtes, pas une fausse confiance</a:t>
+            </a:r>
+            <a:endParaRPr lang="en-US" sz="2600" dirty="0"/>
+          </a:p>
+        </p:txBody>
+      </p:sp>
+      <p:sp>
+        <p:nvSpPr>
+          <p:cNvPr id="5" name="Shape 3"/>
+          <p:cNvSpPr/>
+          <p:nvPr/>
+        </p:nvSpPr>
+        <p:spPr>
+          <a:xfrm>
+            <a:off x="457200" y="1188720"/>
+            <a:ext cx="11247120" cy="10973"/>
+          </a:xfrm>
+          <a:prstGeom prst="rect">
+            <a:avLst/>
+          </a:prstGeom>
+          <a:solidFill>
+            <a:srgbClr val="E1E5E8"/>
+          </a:solidFill>
+          <a:ln/>
+        </p:spPr>
+      </p:sp>
+      <p:sp>
+        <p:nvSpPr>
+          <p:cNvPr id="6" name="Text 4"/>
+          <p:cNvSpPr/>
+          <p:nvPr/>
+        </p:nvSpPr>
+        <p:spPr>
+          <a:xfrm>
+            <a:off x="548640" y="1463040"/>
+            <a:ext cx="11064240" cy="5029200"/>
+          </a:xfrm>
+          <a:prstGeom prst="rect">
+            <a:avLst/>
+          </a:prstGeom>
+          <a:noFill/>
+          <a:ln/>
+        </p:spPr>
+        <p:txBody>
+          <a:bodyPr wrap="square" rtlCol="0" anchor="t"/>
+          <a:lstStyle/>
+          <a:p>
+            <a:pPr marL="254000" indent="-254000">
+              <a:lnSpc>
+                <a:spcPct val="125000"/>
+              </a:lnSpc>
+              <a:buSzPct val="100000"/>
+              <a:buChar char="●"/>
+            </a:pPr>
+            <a:r>
+              <a:rPr lang="en-US" sz="1500" dirty="0">
+                <a:solidFill>
+                  <a:srgbClr val="1A1A1A"/>
+                </a:solidFill>
+                <a:latin typeface="Segoe UI" pitchFamily="34" charset="0"/>
+                <a:ea typeface="Segoe UI" pitchFamily="34" charset="-122"/>
+                <a:cs typeface="Segoe UI" pitchFamily="34" charset="-120"/>
+              </a:rPr>
+              <a:t>Quatre pistes d’expérimentation : test de charge, checkpointer Cosmos DB, intégration Agent 365, évaluation continue</a:t>
+            </a:r>
+            <a:endParaRPr lang="en-US" sz="1500" dirty="0"/>
+          </a:p>
+          <a:p>
+            <a:pPr marL="254000" indent="-254000">
+              <a:lnSpc>
+                <a:spcPct val="125000"/>
+              </a:lnSpc>
+              <a:buSzPct val="100000"/>
+              <a:buChar char="●"/>
+            </a:pPr>
+            <a:r>
+              <a:rPr lang="en-US" sz="1500" dirty="0">
+                <a:solidFill>
+                  <a:srgbClr val="1A1A1A"/>
+                </a:solidFill>
+                <a:latin typeface="Segoe UI" pitchFamily="34" charset="0"/>
+                <a:ea typeface="Segoe UI" pitchFamily="34" charset="-122"/>
+                <a:cs typeface="Segoe UI" pitchFamily="34" charset="-120"/>
+              </a:rPr>
+              <a:t>Porte Qualité réussie : 8 captures, aucune violation, 21/21 vérifications, refus de sécurité et reçus d’outils vérifiés</a:t>
+            </a:r>
+            <a:endParaRPr lang="en-US" sz="1500" dirty="0"/>
+          </a:p>
+          <a:p>
+            <a:pPr marL="254000" indent="-254000">
+              <a:lnSpc>
+                <a:spcPct val="125000"/>
+              </a:lnSpc>
+              <a:buSzPct val="100000"/>
+              <a:buChar char="●"/>
+            </a:pPr>
+            <a:r>
+              <a:rPr lang="en-US" sz="1500" dirty="0">
+                <a:solidFill>
+                  <a:srgbClr val="1A1A1A"/>
+                </a:solidFill>
+                <a:latin typeface="Segoe UI" pitchFamily="34" charset="0"/>
+                <a:ea typeface="Segoe UI" pitchFamily="34" charset="-122"/>
+                <a:cs typeface="Segoe UI" pitchFamily="34" charset="-120"/>
+              </a:rPr>
+              <a:t>Portes Échelle, Sécurité, Opérations : Conditional — preuves partielles, suivis nommés</a:t>
+            </a:r>
+            <a:endParaRPr lang="en-US" sz="1500" dirty="0"/>
+          </a:p>
+          <a:p>
+            <a:pPr marL="254000" indent="-254000">
+              <a:lnSpc>
+                <a:spcPct val="125000"/>
+              </a:lnSpc>
+              <a:buSzPct val="100000"/>
+              <a:buChar char="●"/>
+            </a:pPr>
+            <a:r>
+              <a:rPr lang="en-US" sz="1500" dirty="0">
+                <a:solidFill>
+                  <a:srgbClr val="1A1A1A"/>
+                </a:solidFill>
+                <a:latin typeface="Segoe UI" pitchFamily="34" charset="0"/>
+                <a:ea typeface="Segoe UI" pitchFamily="34" charset="-122"/>
+                <a:cs typeface="Segoe UI" pitchFamily="34" charset="-120"/>
+              </a:rPr>
+              <a:t>Portes Statut de plateforme, Données, Coût : Not testable in this PoC — nécessitent une confirmation commerciale/juridique/plateforme</a:t>
+            </a:r>
+            <a:endParaRPr lang="en-US" sz="1500" dirty="0"/>
+          </a:p>
+          <a:p>
+            <a:pPr marL="254000" indent="-254000">
+              <a:lnSpc>
+                <a:spcPct val="125000"/>
+              </a:lnSpc>
+              <a:buSzPct val="100000"/>
+              <a:buChar char="●"/>
+            </a:pPr>
+            <a:r>
+              <a:rPr lang="en-US" sz="1500" dirty="0">
+                <a:solidFill>
+                  <a:srgbClr val="1A1A1A"/>
+                </a:solidFill>
+                <a:latin typeface="Segoe UI" pitchFamily="34" charset="0"/>
+                <a:ea typeface="Segoe UI" pitchFamily="34" charset="-122"/>
+                <a:cs typeface="Segoe UI" pitchFamily="34" charset="-120"/>
+              </a:rPr>
+              <a:t>Recommandation globale : go conditionnel pour poursuivre l’investissement PoC vers pilote, pas un oui/non net</a:t>
+            </a:r>
+            <a:endParaRPr lang="en-US" sz="1500" dirty="0"/>
+          </a:p>
+        </p:txBody>
+      </p:sp>
+      <p:sp>
+        <p:nvSpPr>
+          <p:cNvPr id="8" name="Shape 5"/>
+          <p:cNvSpPr/>
+          <p:nvPr/>
+        </p:nvSpPr>
+        <p:spPr>
+          <a:xfrm>
+            <a:off x="0" y="6784848"/>
+            <a:ext cx="12188952" cy="27432"/>
+          </a:xfrm>
+          <a:prstGeom prst="rect">
+            <a:avLst/>
+          </a:prstGeom>
+          <a:solidFill>
+            <a:srgbClr val="E1E5E8"/>
+          </a:solidFill>
+          <a:ln/>
+        </p:spPr>
+      </p:sp>
+      <p:sp>
+        <p:nvSpPr>
+          <p:cNvPr id="9" name="Text 6"/>
+          <p:cNvSpPr/>
+          <p:nvPr/>
+        </p:nvSpPr>
+        <p:spPr>
+          <a:xfrm>
+            <a:off x="457200" y="6537960"/>
+            <a:ext cx="8229600" cy="256032"/>
+          </a:xfrm>
+          <a:prstGeom prst="rect">
+            <a:avLst/>
+          </a:prstGeom>
+          <a:noFill/>
+          <a:ln/>
+        </p:spPr>
+        <p:txBody>
+          <a:bodyPr wrap="square" rtlCol="0" anchor="ctr"/>
+          <a:lstStyle/>
+          <a:p>
+            <a:pPr indent="0" marL="0">
+              <a:buNone/>
+            </a:pPr>
+            <a:r>
+              <a:rPr lang="en-US" sz="900" dirty="0">
+                <a:solidFill>
+                  <a:srgbClr val="767676"/>
+                </a:solidFill>
+                <a:latin typeface="Segoe UI" pitchFamily="34" charset="0"/>
+                <a:ea typeface="Segoe UI" pitchFamily="34" charset="-122"/>
+                <a:cs typeface="Segoe UI" pitchFamily="34" charset="-120"/>
+              </a:rPr>
+              <a:t>Atelier Foundry Hosted Agents</a:t>
+            </a:r>
+            <a:endParaRPr lang="en-US" sz="900" dirty="0"/>
+          </a:p>
+        </p:txBody>
+      </p:sp>
+      <p:sp>
+        <p:nvSpPr>
+          <p:cNvPr id="10" name="Text 7"/>
+          <p:cNvSpPr/>
+          <p:nvPr/>
+        </p:nvSpPr>
+        <p:spPr>
+          <a:xfrm>
+            <a:off x="11338560" y="6528816"/>
+            <a:ext cx="548640" cy="219456"/>
+          </a:xfrm>
+          <a:prstGeom prst="rect">
+            <a:avLst/>
+          </a:prstGeom>
+          <a:noFill/>
+          <a:ln/>
+        </p:spPr>
+        <p:txBody>
+          <a:bodyPr wrap="square" rtlCol="0" anchor="ctr"/>
+          <a:lstStyle/>
+          <a:p>
+            <a:pPr algn="r" indent="0" marL="0">
+              <a:buNone/>
+            </a:pPr>
+            <a:r>
+              <a:rPr lang="en-US" sz="900" dirty="0">
+                <a:solidFill>
+                  <a:srgbClr val="767676"/>
+                </a:solidFill>
+              </a:rPr>
+              <a:t>18 / 19</a:t>
+            </a:r>
+            <a:endParaRPr lang="en-US" sz="900" dirty="0"/>
+          </a:p>
+        </p:txBody>
+      </p:sp>
+    </p:spTree>
+  </p:cSld>
+  <p:clrMapOvr>
+    <a:masterClrMapping/>
+  </p:clrMapOvr>
+</p:sld>
+</file>
+
+<file path=ppt/slides/slide19.xml><?xml version="1.0" encoding="utf-8"?>
+<p:sld xmlns:a="http://schemas.openxmlformats.org/drawingml/2006/main" xmlns:r="http://schemas.openxmlformats.org/officeDocument/2006/relationships" xmlns:p="http://schemas.openxmlformats.org/presentationml/2006/main">
+  <p:cSld name="Slide 19">
+    <p:bg>
+      <p:bgPr>
+        <a:solidFill>
+          <a:srgbClr val="FAFBFC"/>
+        </a:solidFill>
+      </p:bgPr>
+    </p:bg>
+    <p:spTree>
+      <p:nvGrpSpPr>
+        <p:cNvPr id="1" name=""/>
+        <p:cNvGrpSpPr/>
+        <p:nvPr/>
+      </p:nvGrpSpPr>
+      <p:grpSpPr>
+        <a:xfrm>
+          <a:off x="0" y="0"/>
+          <a:ext cx="0" cy="0"/>
+          <a:chOff x="0" y="0"/>
+          <a:chExt cx="0" cy="0"/>
+        </a:xfrm>
+      </p:grpSpPr>
+      <p:sp>
+        <p:nvSpPr>
+          <p:cNvPr id="2" name="Shape 0"/>
+          <p:cNvSpPr/>
+          <p:nvPr/>
+        </p:nvSpPr>
+        <p:spPr>
+          <a:xfrm>
+            <a:off x="0" y="0"/>
+            <a:ext cx="12188952" cy="82296"/>
+          </a:xfrm>
+          <a:prstGeom prst="rect">
+            <a:avLst/>
+          </a:prstGeom>
+          <a:solidFill>
+            <a:srgbClr val="0078D4"/>
+          </a:solidFill>
+          <a:ln/>
+        </p:spPr>
+      </p:sp>
+      <p:sp>
+        <p:nvSpPr>
+          <p:cNvPr id="3" name="Text 1"/>
+          <p:cNvSpPr/>
+          <p:nvPr/>
+        </p:nvSpPr>
+        <p:spPr>
+          <a:xfrm>
+            <a:off x="457200" y="292608"/>
+            <a:ext cx="11247120" cy="274320"/>
+          </a:xfrm>
+          <a:prstGeom prst="rect">
+            <a:avLst/>
+          </a:prstGeom>
+          <a:noFill/>
+          <a:ln/>
+        </p:spPr>
+        <p:txBody>
+          <a:bodyPr wrap="square" rtlCol="0" anchor="ctr"/>
+          <a:lstStyle/>
+          <a:p>
+            <a:pPr indent="0" marL="0">
+              <a:buNone/>
+            </a:pPr>
+            <a:r>
+              <a:rPr lang="en-US" sz="1100" b="1" spc="100" kern="0" dirty="0">
+                <a:solidFill>
+                  <a:srgbClr val="0078D4"/>
+                </a:solidFill>
+                <a:latin typeface="Segoe UI" pitchFamily="34" charset="0"/>
+                <a:ea typeface="Segoe UI" pitchFamily="34" charset="-122"/>
+                <a:cs typeface="Segoe UI" pitchFamily="34" charset="-120"/>
+              </a:rPr>
+              <a:t>CONCLUSION</a:t>
+            </a:r>
+            <a:endParaRPr lang="en-US" sz="1100" dirty="0"/>
+          </a:p>
+        </p:txBody>
+      </p:sp>
+      <p:sp>
+        <p:nvSpPr>
+          <p:cNvPr id="4" name="Text 2"/>
+          <p:cNvSpPr/>
+          <p:nvPr/>
+        </p:nvSpPr>
+        <p:spPr>
+          <a:xfrm>
+            <a:off x="457200" y="548640"/>
+            <a:ext cx="11247120" cy="640080"/>
+          </a:xfrm>
+          <a:prstGeom prst="rect">
+            <a:avLst/>
+          </a:prstGeom>
+          <a:noFill/>
+          <a:ln/>
+        </p:spPr>
+        <p:txBody>
+          <a:bodyPr wrap="square" rtlCol="0" anchor="ctr"/>
+          <a:lstStyle/>
+          <a:p>
+            <a:pPr indent="0" marL="0">
+              <a:buNone/>
+            </a:pPr>
+            <a:r>
+              <a:rPr lang="en-US" sz="2600" b="1" dirty="0">
+                <a:solidFill>
+                  <a:srgbClr val="001B3D"/>
+                </a:solidFill>
+                <a:latin typeface="Segoe UI" pitchFamily="34" charset="0"/>
+                <a:ea typeface="Segoe UI" pitchFamily="34" charset="-122"/>
+                <a:cs typeface="Segoe UI" pitchFamily="34" charset="-120"/>
+              </a:rPr>
+              <a:t>Une mise en production prouvée, des limites explicites</a:t>
+            </a:r>
+            <a:endParaRPr lang="en-US" sz="2600" dirty="0"/>
+          </a:p>
+        </p:txBody>
+      </p:sp>
+      <p:sp>
+        <p:nvSpPr>
+          <p:cNvPr id="5" name="Shape 3"/>
+          <p:cNvSpPr/>
+          <p:nvPr/>
+        </p:nvSpPr>
+        <p:spPr>
+          <a:xfrm>
+            <a:off x="457200" y="1188720"/>
+            <a:ext cx="11247120" cy="10973"/>
+          </a:xfrm>
+          <a:prstGeom prst="rect">
+            <a:avLst/>
+          </a:prstGeom>
+          <a:solidFill>
+            <a:srgbClr val="E1E5E8"/>
+          </a:solidFill>
+          <a:ln/>
+        </p:spPr>
+      </p:sp>
+      <p:sp>
+        <p:nvSpPr>
+          <p:cNvPr id="6" name="Text 4"/>
+          <p:cNvSpPr/>
+          <p:nvPr/>
+        </p:nvSpPr>
+        <p:spPr>
+          <a:xfrm>
+            <a:off x="548640" y="1463040"/>
+            <a:ext cx="11064240" cy="5029200"/>
+          </a:xfrm>
+          <a:prstGeom prst="rect">
+            <a:avLst/>
+          </a:prstGeom>
+          <a:noFill/>
+          <a:ln/>
+        </p:spPr>
+        <p:txBody>
+          <a:bodyPr wrap="square" rtlCol="0" anchor="t"/>
+          <a:lstStyle/>
+          <a:p>
+            <a:pPr marL="254000" indent="-254000">
+              <a:lnSpc>
+                <a:spcPct val="125000"/>
+              </a:lnSpc>
+              <a:buSzPct val="100000"/>
+              <a:buChar char="●"/>
+            </a:pPr>
+            <a:r>
+              <a:rPr lang="en-US" sz="1500" dirty="0">
+                <a:solidFill>
+                  <a:srgbClr val="1A1A1A"/>
+                </a:solidFill>
+                <a:latin typeface="Segoe UI" pitchFamily="34" charset="0"/>
+                <a:ea typeface="Segoe UI" pitchFamily="34" charset="-122"/>
+                <a:cs typeface="Segoe UI" pitchFamily="34" charset="-120"/>
+              </a:rPr>
+              <a:t>Le déploiement et l’évaluation sont réels ; la télémétrie de sécurité MCP est synthétique, pas une donnée client réelle</a:t>
+            </a:r>
+            <a:endParaRPr lang="en-US" sz="1500" dirty="0"/>
+          </a:p>
+          <a:p>
+            <a:pPr marL="254000" indent="-254000">
+              <a:lnSpc>
+                <a:spcPct val="125000"/>
+              </a:lnSpc>
+              <a:buSzPct val="100000"/>
+              <a:buChar char="●"/>
+            </a:pPr>
+            <a:r>
+              <a:rPr lang="en-US" sz="1500" dirty="0">
+                <a:solidFill>
+                  <a:srgbClr val="1A1A1A"/>
+                </a:solidFill>
+                <a:latin typeface="Segoe UI" pitchFamily="34" charset="0"/>
+                <a:ea typeface="Segoe UI" pitchFamily="34" charset="-122"/>
+                <a:cs typeface="Segoe UI" pitchFamily="34" charset="-120"/>
+              </a:rPr>
+              <a:t>Dépôt : github.com/devopsabcs-engineering/foundry-hosted-agents</a:t>
+            </a:r>
+            <a:endParaRPr lang="en-US" sz="1500" dirty="0"/>
+          </a:p>
+          <a:p>
+            <a:pPr marL="254000" indent="-254000">
+              <a:lnSpc>
+                <a:spcPct val="125000"/>
+              </a:lnSpc>
+              <a:buSzPct val="100000"/>
+              <a:buChar char="●"/>
+            </a:pPr>
+            <a:r>
+              <a:rPr lang="en-US" sz="1500" dirty="0">
+                <a:solidFill>
+                  <a:srgbClr val="1A1A1A"/>
+                </a:solidFill>
+                <a:latin typeface="Segoe UI" pitchFamily="34" charset="0"/>
+                <a:ea typeface="Segoe UI" pitchFamily="34" charset="-122"/>
+                <a:cs typeface="Segoe UI" pitchFamily="34" charset="-120"/>
+              </a:rPr>
+              <a:t>Wiki : architecture actuelle, artefacts vérifiés, guide opérationnel et historique WI-11 résolu</a:t>
+            </a:r>
+            <a:endParaRPr lang="en-US" sz="1500" dirty="0"/>
+          </a:p>
+          <a:p>
+            <a:pPr marL="254000" indent="-254000">
+              <a:lnSpc>
+                <a:spcPct val="125000"/>
+              </a:lnSpc>
+              <a:buSzPct val="100000"/>
+              <a:buChar char="●"/>
+            </a:pPr>
+            <a:r>
+              <a:rPr lang="en-US" sz="1500" dirty="0">
+                <a:solidFill>
+                  <a:srgbClr val="1A1A1A"/>
+                </a:solidFill>
+                <a:latin typeface="Segoe UI" pitchFamily="34" charset="0"/>
+                <a:ea typeface="Segoe UI" pitchFamily="34" charset="-122"/>
+                <a:cs typeface="Segoe UI" pitchFamily="34" charset="-120"/>
+              </a:rPr>
+              <a:t>Labs complets, bilingues, pas à pas : le site GitHub Pages compagnon de ce deck</a:t>
+            </a:r>
+            <a:endParaRPr lang="en-US" sz="1500" dirty="0"/>
+          </a:p>
+          <a:p>
+            <a:pPr marL="254000" indent="-254000">
+              <a:lnSpc>
+                <a:spcPct val="125000"/>
+              </a:lnSpc>
+              <a:buSzPct val="100000"/>
+              <a:buChar char="●"/>
+            </a:pPr>
+            <a:r>
+              <a:rPr lang="en-US" sz="1500" dirty="0">
+                <a:solidFill>
+                  <a:srgbClr val="1A1A1A"/>
+                </a:solidFill>
+                <a:latin typeface="Segoe UI" pitchFamily="34" charset="0"/>
+                <a:ea typeface="Segoe UI" pitchFamily="34" charset="-122"/>
+                <a:cs typeface="Segoe UI" pitchFamily="34" charset="-120"/>
+              </a:rPr>
+              <a:t>Test de production et ingestion corrélée réussis ; ni endurance ni couverture complète des traces prouvées. Teams et historique durable non implémentés</a:t>
+            </a:r>
+            <a:endParaRPr lang="en-US" sz="1500" dirty="0"/>
+          </a:p>
+        </p:txBody>
+      </p:sp>
+      <p:sp>
+        <p:nvSpPr>
+          <p:cNvPr id="8" name="Shape 5"/>
+          <p:cNvSpPr/>
+          <p:nvPr/>
+        </p:nvSpPr>
+        <p:spPr>
+          <a:xfrm>
+            <a:off x="0" y="6784848"/>
+            <a:ext cx="12188952" cy="27432"/>
+          </a:xfrm>
+          <a:prstGeom prst="rect">
+            <a:avLst/>
+          </a:prstGeom>
+          <a:solidFill>
+            <a:srgbClr val="E1E5E8"/>
+          </a:solidFill>
+          <a:ln/>
+        </p:spPr>
+      </p:sp>
+      <p:sp>
+        <p:nvSpPr>
+          <p:cNvPr id="9" name="Text 6"/>
+          <p:cNvSpPr/>
+          <p:nvPr/>
+        </p:nvSpPr>
+        <p:spPr>
+          <a:xfrm>
+            <a:off x="457200" y="6537960"/>
+            <a:ext cx="8229600" cy="256032"/>
+          </a:xfrm>
+          <a:prstGeom prst="rect">
+            <a:avLst/>
+          </a:prstGeom>
+          <a:noFill/>
+          <a:ln/>
+        </p:spPr>
+        <p:txBody>
+          <a:bodyPr wrap="square" rtlCol="0" anchor="ctr"/>
+          <a:lstStyle/>
+          <a:p>
+            <a:pPr indent="0" marL="0">
+              <a:buNone/>
+            </a:pPr>
+            <a:r>
+              <a:rPr lang="en-US" sz="900" dirty="0">
+                <a:solidFill>
+                  <a:srgbClr val="767676"/>
+                </a:solidFill>
+                <a:latin typeface="Segoe UI" pitchFamily="34" charset="0"/>
+                <a:ea typeface="Segoe UI" pitchFamily="34" charset="-122"/>
+                <a:cs typeface="Segoe UI" pitchFamily="34" charset="-120"/>
+              </a:rPr>
+              <a:t>Atelier Foundry Hosted Agents</a:t>
+            </a:r>
+            <a:endParaRPr lang="en-US" sz="900" dirty="0"/>
+          </a:p>
+        </p:txBody>
+      </p:sp>
+      <p:sp>
+        <p:nvSpPr>
+          <p:cNvPr id="10" name="Text 7"/>
+          <p:cNvSpPr/>
+          <p:nvPr/>
+        </p:nvSpPr>
+        <p:spPr>
+          <a:xfrm>
+            <a:off x="11338560" y="6528816"/>
+            <a:ext cx="548640" cy="219456"/>
+          </a:xfrm>
+          <a:prstGeom prst="rect">
+            <a:avLst/>
+          </a:prstGeom>
+          <a:noFill/>
+          <a:ln/>
+        </p:spPr>
+        <p:txBody>
+          <a:bodyPr wrap="square" rtlCol="0" anchor="ctr"/>
+          <a:lstStyle/>
+          <a:p>
+            <a:pPr algn="r" indent="0" marL="0">
+              <a:buNone/>
+            </a:pPr>
+            <a:r>
+              <a:rPr lang="en-US" sz="900" dirty="0">
+                <a:solidFill>
+                  <a:srgbClr val="767676"/>
+                </a:solidFill>
+              </a:rPr>
+              <a:t>19 / 19</a:t>
             </a:r>
             <a:endParaRPr lang="en-US" sz="900" dirty="0"/>
           </a:p>
@@ -4184,8 +6473,8 @@
         </p:nvSpPr>
         <p:spPr>
           <a:xfrm>
-            <a:off x="411480" y="146304"/>
-            <a:ext cx="11338560" cy="502920"/>
+            <a:off x="457200" y="320040"/>
+            <a:ext cx="11247120" cy="731520"/>
           </a:xfrm>
           <a:prstGeom prst="rect">
             <a:avLst/>
@@ -4201,7 +6490,7 @@
               <a:buNone/>
             </a:pPr>
             <a:r>
-              <a:rPr lang="en-US" sz="2400" b="1" dirty="0">
+              <a:rPr lang="en-US" sz="2800" b="1" dirty="0">
                 <a:solidFill>
                   <a:srgbClr val="146C54"/>
                 </a:solidFill>
@@ -4209,46 +6498,49 @@
                 <a:ea typeface="Segoe UI" pitchFamily="34" charset="-122"/>
                 <a:cs typeface="Segoe UI" pitchFamily="34" charset="-120"/>
               </a:rPr>
-              <a:t>Mise en production vérifiée : staging vers production</a:t>
-            </a:r>
-            <a:endParaRPr lang="en-US" sz="2400" dirty="0"/>
-          </a:p>
-        </p:txBody>
-      </p:sp>
-      <p:pic>
-        <p:nvPicPr>
-          <p:cNvPr id="3" name="Image 0" descr="Mise en production vérifiée : staging vers production">    </p:cNvPr>
-          <p:cNvPicPr>
-            <a:picLocks noChangeAspect="1"/>
-          </p:cNvPicPr>
-          <p:nvPr/>
-        </p:nvPicPr>
-        <p:blipFill>
-          <a:blip r:embed="rId1"/>
-          <a:stretch>
-            <a:fillRect/>
-          </a:stretch>
-        </p:blipFill>
-        <p:spPr>
-          <a:xfrm>
-            <a:off x="2068830" y="777240"/>
-            <a:ext cx="8051292" cy="5367528"/>
-          </a:xfrm>
-          <a:prstGeom prst="rect">
-            <a:avLst/>
-          </a:prstGeom>
-        </p:spPr>
-      </p:pic>
-      <p:sp>
-        <p:nvSpPr>
-          <p:cNvPr id="4" name="Text 1"/>
-          <p:cNvSpPr/>
-          <p:nvPr/>
-        </p:nvSpPr>
-        <p:spPr>
-          <a:xfrm>
-            <a:off x="411480" y="6245352"/>
-            <a:ext cx="11338560" cy="256032"/>
+              <a:t>Pilote actuel : chat et mises en production vérifiés</a:t>
+            </a:r>
+            <a:endParaRPr lang="en-US" sz="2800" dirty="0"/>
+          </a:p>
+        </p:txBody>
+      </p:sp>
+      <p:sp>
+        <p:nvSpPr>
+          <p:cNvPr id="3" name="Shape 1"/>
+          <p:cNvSpPr/>
+          <p:nvPr/>
+        </p:nvSpPr>
+        <p:spPr>
+          <a:xfrm>
+            <a:off x="457200" y="1371600"/>
+            <a:ext cx="54864" cy="1143000"/>
+          </a:xfrm>
+          <a:prstGeom prst="rect">
+            <a:avLst/>
+          </a:prstGeom>
+          <a:solidFill>
+            <a:srgbClr val="146C54"/>
+          </a:solidFill>
+          <a:ln w="12700">
+            <a:solidFill>
+              <a:srgbClr val="333333">
+                <a:alpha val="0"/>
+              </a:srgbClr>
+            </a:solidFill>
+            <a:prstDash val="solid"/>
+          </a:ln>
+        </p:spPr>
+      </p:sp>
+      <p:sp>
+        <p:nvSpPr>
+          <p:cNvPr id="4" name="Text 2"/>
+          <p:cNvSpPr/>
+          <p:nvPr/>
+        </p:nvSpPr>
+        <p:spPr>
+          <a:xfrm>
+            <a:off x="685800" y="1371600"/>
+            <a:ext cx="10789920" cy="365760"/>
           </a:xfrm>
           <a:prstGeom prst="rect">
             <a:avLst/>
@@ -4264,32 +6556,281 @@
               <a:buNone/>
             </a:pPr>
             <a:r>
-              <a:rPr lang="en-US" sz="1000" dirty="0">
-                <a:solidFill>
-                  <a:srgbClr val="53635E"/>
-                </a:solidFill>
-                <a:latin typeface="Segoe UI" pitchFamily="34" charset="0"/>
-                <a:ea typeface="Segoe UI" pitchFamily="34" charset="-122"/>
-                <a:cs typeface="Segoe UI" pitchFamily="34" charset="-120"/>
-              </a:rPr>
-              <a:t>Rendu des artefacts, pas une capture du portail. Données synthétiques. Sources et SHA-256 conservés.</a:t>
-            </a:r>
-            <a:endParaRPr lang="en-US" sz="1000" dirty="0"/>
-          </a:p>
-        </p:txBody>
-      </p:sp>
-      <p:sp>
-        <p:nvSpPr>
-          <p:cNvPr id="5" name="Text 2">
-            <a:hlinkClick r:id="rId2" tooltip=""/>
+              <a:rPr lang="en-US" sz="2100" b="1" dirty="0">
+                <a:solidFill>
+                  <a:srgbClr val="243831"/>
+                </a:solidFill>
+                <a:latin typeface="Segoe UI" pitchFamily="34" charset="0"/>
+                <a:ea typeface="Segoe UI" pitchFamily="34" charset="-122"/>
+                <a:cs typeface="Segoe UI" pitchFamily="34" charset="-120"/>
+              </a:rPr>
+              <a:t>Tenant Entra + groupe pilote</a:t>
+            </a:r>
+            <a:endParaRPr lang="en-US" sz="2100" dirty="0"/>
+          </a:p>
+        </p:txBody>
+      </p:sp>
+      <p:sp>
+        <p:nvSpPr>
+          <p:cNvPr id="5" name="Text 3"/>
+          <p:cNvSpPr/>
+          <p:nvPr/>
+        </p:nvSpPr>
+        <p:spPr>
+          <a:xfrm>
+            <a:off x="685800" y="1828800"/>
+            <a:ext cx="10789920" cy="777240"/>
+          </a:xfrm>
+          <a:prstGeom prst="rect">
+            <a:avLst/>
+          </a:prstGeom>
+          <a:noFill/>
+          <a:ln/>
+        </p:spPr>
+        <p:txBody>
+          <a:bodyPr wrap="square" rtlCol="0" anchor="ctr"/>
+          <a:lstStyle/>
+          <a:p>
+            <a:pPr indent="0" marL="0">
+              <a:buNone/>
+            </a:pPr>
+            <a:r>
+              <a:rPr lang="en-US" sz="1800" dirty="0">
+                <a:solidFill>
+                  <a:srgbClr val="43544D"/>
+                </a:solidFill>
+                <a:latin typeface="Segoe UI" pitchFamily="34" charset="0"/>
+                <a:ea typeface="Segoe UI" pitchFamily="34" charset="-122"/>
+                <a:cs typeface="Segoe UI" pitchFamily="34" charset="-120"/>
+              </a:rPr>
+              <a:t>Chat React / FastAPI authentifié ; HTTPS public, pas un déploiement réseau privé.</a:t>
+            </a:r>
+            <a:endParaRPr lang="en-US" sz="1800" dirty="0"/>
+          </a:p>
+        </p:txBody>
+      </p:sp>
+      <p:sp>
+        <p:nvSpPr>
+          <p:cNvPr id="6" name="Shape 4"/>
+          <p:cNvSpPr/>
+          <p:nvPr/>
+        </p:nvSpPr>
+        <p:spPr>
+          <a:xfrm>
+            <a:off x="457200" y="2880360"/>
+            <a:ext cx="54864" cy="1143000"/>
+          </a:xfrm>
+          <a:prstGeom prst="rect">
+            <a:avLst/>
+          </a:prstGeom>
+          <a:solidFill>
+            <a:srgbClr val="0078D4"/>
+          </a:solidFill>
+          <a:ln w="12700">
+            <a:solidFill>
+              <a:srgbClr val="333333">
+                <a:alpha val="0"/>
+              </a:srgbClr>
+            </a:solidFill>
+            <a:prstDash val="solid"/>
+          </a:ln>
+        </p:spPr>
+      </p:sp>
+      <p:sp>
+        <p:nvSpPr>
+          <p:cNvPr id="7" name="Text 5"/>
+          <p:cNvSpPr/>
+          <p:nvPr/>
+        </p:nvSpPr>
+        <p:spPr>
+          <a:xfrm>
+            <a:off x="685800" y="2880360"/>
+            <a:ext cx="10789920" cy="365760"/>
+          </a:xfrm>
+          <a:prstGeom prst="rect">
+            <a:avLst/>
+          </a:prstGeom>
+          <a:noFill/>
+          <a:ln/>
+        </p:spPr>
+        <p:txBody>
+          <a:bodyPr wrap="square" rtlCol="0" anchor="ctr"/>
+          <a:lstStyle/>
+          <a:p>
+            <a:pPr indent="0" marL="0">
+              <a:buNone/>
+            </a:pPr>
+            <a:r>
+              <a:rPr lang="en-US" sz="2100" b="1" dirty="0">
+                <a:solidFill>
+                  <a:srgbClr val="243831"/>
+                </a:solidFill>
+                <a:latin typeface="Segoe UI" pitchFamily="34" charset="0"/>
+                <a:ea typeface="Segoe UI" pitchFamily="34" charset="-122"/>
+                <a:cs typeface="Segoe UI" pitchFamily="34" charset="-120"/>
+              </a:rPr>
+              <a:t>Requêtes avec historique complet</a:t>
+            </a:r>
+            <a:endParaRPr lang="en-US" sz="2100" dirty="0"/>
+          </a:p>
+        </p:txBody>
+      </p:sp>
+      <p:sp>
+        <p:nvSpPr>
+          <p:cNvPr id="8" name="Text 6"/>
+          <p:cNvSpPr/>
+          <p:nvPr/>
+        </p:nvSpPr>
+        <p:spPr>
+          <a:xfrm>
+            <a:off x="685800" y="3337560"/>
+            <a:ext cx="10789920" cy="777240"/>
+          </a:xfrm>
+          <a:prstGeom prst="rect">
+            <a:avLst/>
+          </a:prstGeom>
+          <a:noFill/>
+          <a:ln/>
+        </p:spPr>
+        <p:txBody>
+          <a:bodyPr wrap="square" rtlCol="0" anchor="ctr"/>
+          <a:lstStyle/>
+          <a:p>
+            <a:pPr indent="0" marL="0">
+              <a:buNone/>
+            </a:pPr>
+            <a:r>
+              <a:rPr lang="en-US" sz="1800" dirty="0">
+                <a:solidFill>
+                  <a:srgbClr val="43544D"/>
+                </a:solidFill>
+                <a:latin typeface="Segoe UI" pitchFamily="34" charset="0"/>
+                <a:ea typeface="Segoe UI" pitchFamily="34" charset="-122"/>
+                <a:cs typeface="Segoe UI" pitchFamily="34" charset="-120"/>
+              </a:rPr>
+              <a:t>Tours utilisateur/assistant gérés par le backend, store:false ; sans conversation ni previous_response_id natifs.</a:t>
+            </a:r>
+            <a:endParaRPr lang="en-US" sz="1800" dirty="0"/>
+          </a:p>
+        </p:txBody>
+      </p:sp>
+      <p:sp>
+        <p:nvSpPr>
+          <p:cNvPr id="9" name="Shape 7"/>
+          <p:cNvSpPr/>
+          <p:nvPr/>
+        </p:nvSpPr>
+        <p:spPr>
+          <a:xfrm>
+            <a:off x="457200" y="4389120"/>
+            <a:ext cx="54864" cy="1143000"/>
+          </a:xfrm>
+          <a:prstGeom prst="rect">
+            <a:avLst/>
+          </a:prstGeom>
+          <a:solidFill>
+            <a:srgbClr val="B22938"/>
+          </a:solidFill>
+          <a:ln w="12700">
+            <a:solidFill>
+              <a:srgbClr val="333333">
+                <a:alpha val="0"/>
+              </a:srgbClr>
+            </a:solidFill>
+            <a:prstDash val="solid"/>
+          </a:ln>
+        </p:spPr>
+      </p:sp>
+      <p:sp>
+        <p:nvSpPr>
+          <p:cNvPr id="10" name="Text 8"/>
+          <p:cNvSpPr/>
+          <p:nvPr/>
+        </p:nvSpPr>
+        <p:spPr>
+          <a:xfrm>
+            <a:off x="685800" y="4389120"/>
+            <a:ext cx="10789920" cy="365760"/>
+          </a:xfrm>
+          <a:prstGeom prst="rect">
+            <a:avLst/>
+          </a:prstGeom>
+          <a:noFill/>
+          <a:ln/>
+        </p:spPr>
+        <p:txBody>
+          <a:bodyPr wrap="square" rtlCol="0" anchor="ctr"/>
+          <a:lstStyle/>
+          <a:p>
+            <a:pPr indent="0" marL="0">
+              <a:buNone/>
+            </a:pPr>
+            <a:r>
+              <a:rPr lang="en-US" sz="2100" b="1" dirty="0">
+                <a:solidFill>
+                  <a:srgbClr val="243831"/>
+                </a:solidFill>
+                <a:latin typeface="Segoe UI" pitchFamily="34" charset="0"/>
+                <a:ea typeface="Segoe UI" pitchFamily="34" charset="-122"/>
+                <a:cs typeface="Segoe UI" pitchFamily="34" charset="-120"/>
+              </a:rPr>
+              <a:t>Déploiement et charge vérifiés</a:t>
+            </a:r>
+            <a:endParaRPr lang="en-US" sz="2100" dirty="0"/>
+          </a:p>
+        </p:txBody>
+      </p:sp>
+      <p:sp>
+        <p:nvSpPr>
+          <p:cNvPr id="11" name="Text 9"/>
+          <p:cNvSpPr/>
+          <p:nvPr/>
+        </p:nvSpPr>
+        <p:spPr>
+          <a:xfrm>
+            <a:off x="685800" y="4846320"/>
+            <a:ext cx="10789920" cy="777240"/>
+          </a:xfrm>
+          <a:prstGeom prst="rect">
+            <a:avLst/>
+          </a:prstGeom>
+          <a:noFill/>
+          <a:ln/>
+        </p:spPr>
+        <p:txBody>
+          <a:bodyPr wrap="square" rtlCol="0" anchor="ctr"/>
+          <a:lstStyle/>
+          <a:p>
+            <a:pPr indent="0" marL="0">
+              <a:buNone/>
+            </a:pPr>
+            <a:r>
+              <a:rPr lang="en-US" sz="1800" dirty="0">
+                <a:solidFill>
+                  <a:srgbClr val="43544D"/>
+                </a:solidFill>
+                <a:latin typeface="Segoe UI" pitchFamily="34" charset="0"/>
+                <a:ea typeface="Segoe UI" pitchFamily="34" charset="-122"/>
+                <a:cs typeface="Segoe UI" pitchFamily="34" charset="-120"/>
+              </a:rPr>
+              <a:t>Mise en production 34427432731 et validation continue 34427429700 réussies. Données de sécurité synthétiques.</a:t>
+            </a:r>
+            <a:endParaRPr lang="en-US" sz="1800" dirty="0"/>
+          </a:p>
+        </p:txBody>
+      </p:sp>
+      <p:sp>
+        <p:nvSpPr>
+          <p:cNvPr id="12" name="Text 10">
+            <a:hlinkClick r:id="rId1" tooltip=""/>
           </p:cNvPr>
           <p:cNvSpPr/>
           <p:nvPr/>
         </p:nvSpPr>
         <p:spPr>
           <a:xfrm>
-            <a:off x="411480" y="6528816"/>
-            <a:ext cx="10515600" cy="201168"/>
+            <a:off x="457200" y="6446520"/>
+            <a:ext cx="10698480" cy="228600"/>
           </a:xfrm>
           <a:prstGeom prst="rect">
             <a:avLst/>
@@ -4305,14 +6846,11 @@
               <a:buNone/>
             </a:pPr>
             <a:r>
-              <a:rPr lang="en-US" sz="900" u="sng" dirty="0">
+              <a:rPr lang="en-US" sz="1000" u="sng" dirty="0">
                 <a:solidFill>
                   <a:srgbClr val="075C9B"/>
                 </a:solidFill>
-                <a:latin typeface="Segoe UI" pitchFamily="34" charset="0"/>
-                <a:ea typeface="Segoe UI" pitchFamily="34" charset="-122"/>
-                <a:cs typeface="Segoe UI" pitchFamily="34" charset="-120"/>
-                <a:hlinkClick r:id="rId2" invalidUrl="" action="" tgtFrame="" tooltip="" history="1" highlightClick="0" endSnd="0">
+                <a:hlinkClick r:id="rId1" invalidUrl="" action="" tgtFrame="" tooltip="" history="1" highlightClick="0" endSnd="0">
                   <a:extLst>
                     <a:ext uri="{A12FA001-AC4F-418D-AE19-62706E023703}">
                       <ahyp:hlinkClr xmlns:ahyp="http://schemas.microsoft.com/office/drawing/2018/hyperlinkcolor" val="tx"/>
@@ -4320,15 +6858,15 @@
                   </a:extLst>
                 </a:hlinkClick>
               </a:rPr>
-              <a:t>GitHub Actions 34178081808 | f3da486 | 2026-09-08 UTC</a:t>
-            </a:r>
-            <a:endParaRPr lang="en-US" sz="900" dirty="0"/>
-          </a:p>
-        </p:txBody>
-      </p:sp>
-      <p:sp>
-        <p:nvSpPr>
-          <p:cNvPr id="7" name="Text 3"/>
+              <a:t>Implementation snapshot | 2026-09-10 UTC | 15098b7 + demo UI refresh</a:t>
+            </a:r>
+            <a:endParaRPr lang="en-US" sz="1000" dirty="0"/>
+          </a:p>
+        </p:txBody>
+      </p:sp>
+      <p:sp>
+        <p:nvSpPr>
+          <p:cNvPr id="14" name="Text 11"/>
           <p:cNvSpPr/>
           <p:nvPr/>
         </p:nvSpPr>
@@ -4356,7 +6894,7 @@
                   <a:srgbClr val="767676"/>
                 </a:solidFill>
               </a:rPr>
-              <a:t>2 / 14</a:t>
+              <a:t>2 / 19</a:t>
             </a:r>
             <a:endParaRPr lang="en-US" sz="900" dirty="0"/>
           </a:p>
@@ -4402,8 +6940,8 @@
         </p:nvSpPr>
         <p:spPr>
           <a:xfrm>
-            <a:off x="411480" y="146304"/>
-            <a:ext cx="11338560" cy="502920"/>
+            <a:off x="457200" y="320040"/>
+            <a:ext cx="11247120" cy="731520"/>
           </a:xfrm>
           <a:prstGeom prst="rect">
             <a:avLst/>
@@ -4419,7 +6957,7 @@
               <a:buNone/>
             </a:pPr>
             <a:r>
-              <a:rPr lang="en-US" sz="2400" b="1" dirty="0">
+              <a:rPr lang="en-US" sz="2800" b="1" dirty="0">
                 <a:solidFill>
                   <a:srgbClr val="146C54"/>
                 </a:solidFill>
@@ -4427,46 +6965,49 @@
                 <a:ea typeface="Segoe UI" pitchFamily="34" charset="-122"/>
                 <a:cs typeface="Segoe UI" pitchFamily="34" charset="-120"/>
               </a:rPr>
-              <a:t>Porte qualité : 21 vérifications sur 21 réussies</a:t>
-            </a:r>
-            <a:endParaRPr lang="en-US" sz="2400" dirty="0"/>
-          </a:p>
-        </p:txBody>
-      </p:sp>
-      <p:pic>
-        <p:nvPicPr>
-          <p:cNvPr id="3" name="Image 0" descr="Porte qualité : 21 vérifications sur 21 réussies">    </p:cNvPr>
-          <p:cNvPicPr>
-            <a:picLocks noChangeAspect="1"/>
-          </p:cNvPicPr>
-          <p:nvPr/>
-        </p:nvPicPr>
-        <p:blipFill>
-          <a:blip r:embed="rId1"/>
-          <a:stretch>
-            <a:fillRect/>
-          </a:stretch>
-        </p:blipFill>
-        <p:spPr>
-          <a:xfrm>
-            <a:off x="2068830" y="777240"/>
-            <a:ext cx="8051292" cy="5367528"/>
-          </a:xfrm>
-          <a:prstGeom prst="rect">
-            <a:avLst/>
-          </a:prstGeom>
-        </p:spPr>
-      </p:pic>
-      <p:sp>
-        <p:nvSpPr>
-          <p:cNvPr id="4" name="Text 1"/>
-          <p:cNvSpPr/>
-          <p:nvPr/>
-        </p:nvSpPr>
-        <p:spPr>
-          <a:xfrm>
-            <a:off x="411480" y="6245352"/>
-            <a:ext cx="11338560" cy="256032"/>
+              <a:t>Démo : trois scénarios, quatre outils MCP</a:t>
+            </a:r>
+            <a:endParaRPr lang="en-US" sz="2800" dirty="0"/>
+          </a:p>
+        </p:txBody>
+      </p:sp>
+      <p:sp>
+        <p:nvSpPr>
+          <p:cNvPr id="3" name="Shape 1"/>
+          <p:cNvSpPr/>
+          <p:nvPr/>
+        </p:nvSpPr>
+        <p:spPr>
+          <a:xfrm>
+            <a:off x="457200" y="1371600"/>
+            <a:ext cx="54864" cy="1143000"/>
+          </a:xfrm>
+          <a:prstGeom prst="rect">
+            <a:avLst/>
+          </a:prstGeom>
+          <a:solidFill>
+            <a:srgbClr val="146C54"/>
+          </a:solidFill>
+          <a:ln w="12700">
+            <a:solidFill>
+              <a:srgbClr val="333333">
+                <a:alpha val="0"/>
+              </a:srgbClr>
+            </a:solidFill>
+            <a:prstDash val="solid"/>
+          </a:ln>
+        </p:spPr>
+      </p:sp>
+      <p:sp>
+        <p:nvSpPr>
+          <p:cNvPr id="4" name="Text 2"/>
+          <p:cNvSpPr/>
+          <p:nvPr/>
+        </p:nvSpPr>
+        <p:spPr>
+          <a:xfrm>
+            <a:off x="685800" y="1371600"/>
+            <a:ext cx="10789920" cy="365760"/>
           </a:xfrm>
           <a:prstGeom prst="rect">
             <a:avLst/>
@@ -4482,32 +7023,281 @@
               <a:buNone/>
             </a:pPr>
             <a:r>
-              <a:rPr lang="en-US" sz="1000" dirty="0">
-                <a:solidFill>
-                  <a:srgbClr val="53635E"/>
-                </a:solidFill>
-                <a:latin typeface="Segoe UI" pitchFamily="34" charset="0"/>
-                <a:ea typeface="Segoe UI" pitchFamily="34" charset="-122"/>
-                <a:cs typeface="Segoe UI" pitchFamily="34" charset="-120"/>
-              </a:rPr>
-              <a:t>Rendu des artefacts, pas une capture du portail. Données synthétiques. Sources et SHA-256 conservés.</a:t>
-            </a:r>
-            <a:endParaRPr lang="en-US" sz="1000" dirty="0"/>
-          </a:p>
-        </p:txBody>
-      </p:sp>
-      <p:sp>
-        <p:nvSpPr>
-          <p:cNvPr id="5" name="Text 2">
-            <a:hlinkClick r:id="rId2" tooltip=""/>
+              <a:rPr lang="en-US" sz="2100" b="1" dirty="0">
+                <a:solidFill>
+                  <a:srgbClr val="243831"/>
+                </a:solidFill>
+                <a:latin typeface="Segoe UI" pitchFamily="34" charset="0"/>
+                <a:ea typeface="Segoe UI" pitchFamily="34" charset="-122"/>
+                <a:cs typeface="Segoe UI" pitchFamily="34" charset="-120"/>
+              </a:rPr>
+              <a:t>1 / Connexion suspecte crew-admin</a:t>
+            </a:r>
+            <a:endParaRPr lang="en-US" sz="2100" dirty="0"/>
+          </a:p>
+        </p:txBody>
+      </p:sp>
+      <p:sp>
+        <p:nvSpPr>
+          <p:cNvPr id="5" name="Text 3"/>
+          <p:cNvSpPr/>
+          <p:nvPr/>
+        </p:nvSpPr>
+        <p:spPr>
+          <a:xfrm>
+            <a:off x="685800" y="1828800"/>
+            <a:ext cx="10789920" cy="777240"/>
+          </a:xfrm>
+          <a:prstGeom prst="rect">
+            <a:avLst/>
+          </a:prstGeom>
+          <a:noFill/>
+          <a:ln/>
+        </p:spPr>
+        <p:txBody>
+          <a:bodyPr wrap="square" rtlCol="0" anchor="ctr"/>
+          <a:lstStyle/>
+          <a:p>
+            <a:pPr indent="0" marL="0">
+              <a:buNone/>
+            </a:pPr>
+            <a:r>
+              <a:rPr lang="en-US" sz="1800" dirty="0">
+                <a:solidFill>
+                  <a:srgbClr val="43544D"/>
+                </a:solidFill>
+                <a:latin typeface="Segoe UI" pitchFamily="34" charset="0"/>
+                <a:ea typeface="Segoe UI" pitchFamily="34" charset="-122"/>
+                <a:cs typeface="Segoe UI" pitchFamily="34" charset="-120"/>
+              </a:rPr>
+              <a:t>CREW-PORTAL-01 + crew-admin : corréler les échecs MFA et le succès ; escalade avec limites des preuves.</a:t>
+            </a:r>
+            <a:endParaRPr lang="en-US" sz="1800" dirty="0"/>
+          </a:p>
+        </p:txBody>
+      </p:sp>
+      <p:sp>
+        <p:nvSpPr>
+          <p:cNvPr id="6" name="Shape 4"/>
+          <p:cNvSpPr/>
+          <p:nvPr/>
+        </p:nvSpPr>
+        <p:spPr>
+          <a:xfrm>
+            <a:off x="457200" y="2880360"/>
+            <a:ext cx="54864" cy="1143000"/>
+          </a:xfrm>
+          <a:prstGeom prst="rect">
+            <a:avLst/>
+          </a:prstGeom>
+          <a:solidFill>
+            <a:srgbClr val="0078D4"/>
+          </a:solidFill>
+          <a:ln w="12700">
+            <a:solidFill>
+              <a:srgbClr val="333333">
+                <a:alpha val="0"/>
+              </a:srgbClr>
+            </a:solidFill>
+            <a:prstDash val="solid"/>
+          </a:ln>
+        </p:spPr>
+      </p:sp>
+      <p:sp>
+        <p:nvSpPr>
+          <p:cNvPr id="7" name="Text 5"/>
+          <p:cNvSpPr/>
+          <p:nvPr/>
+        </p:nvSpPr>
+        <p:spPr>
+          <a:xfrm>
+            <a:off x="685800" y="2880360"/>
+            <a:ext cx="10789920" cy="365760"/>
+          </a:xfrm>
+          <a:prstGeom prst="rect">
+            <a:avLst/>
+          </a:prstGeom>
+          <a:noFill/>
+          <a:ln/>
+        </p:spPr>
+        <p:txBody>
+          <a:bodyPr wrap="square" rtlCol="0" anchor="ctr"/>
+          <a:lstStyle/>
+          <a:p>
+            <a:pPr indent="0" marL="0">
+              <a:buNone/>
+            </a:pPr>
+            <a:r>
+              <a:rPr lang="en-US" sz="2100" b="1" dirty="0">
+                <a:solidFill>
+                  <a:srgbClr val="243831"/>
+                </a:solidFill>
+                <a:latin typeface="Segoe UI" pitchFamily="34" charset="0"/>
+                <a:ea typeface="Segoe UI" pitchFamily="34" charset="-122"/>
+                <a:cs typeface="Segoe UI" pitchFamily="34" charset="-120"/>
+              </a:rPr>
+              <a:t>2 / Déplacement professionnel approuvé</a:t>
+            </a:r>
+            <a:endParaRPr lang="en-US" sz="2100" dirty="0"/>
+          </a:p>
+        </p:txBody>
+      </p:sp>
+      <p:sp>
+        <p:nvSpPr>
+          <p:cNvPr id="8" name="Text 6"/>
+          <p:cNvSpPr/>
+          <p:nvPr/>
+        </p:nvSpPr>
+        <p:spPr>
+          <a:xfrm>
+            <a:off x="685800" y="3337560"/>
+            <a:ext cx="10789920" cy="777240"/>
+          </a:xfrm>
+          <a:prstGeom prst="rect">
+            <a:avLst/>
+          </a:prstGeom>
+          <a:noFill/>
+          <a:ln/>
+        </p:spPr>
+        <p:txBody>
+          <a:bodyPr wrap="square" rtlCol="0" anchor="ctr"/>
+          <a:lstStyle/>
+          <a:p>
+            <a:pPr indent="0" marL="0">
+              <a:buNone/>
+            </a:pPr>
+            <a:r>
+              <a:rPr lang="en-US" sz="1800" dirty="0">
+                <a:solidFill>
+                  <a:srgbClr val="43544D"/>
+                </a:solidFill>
+                <a:latin typeface="Segoe UI" pitchFamily="34" charset="0"/>
+                <a:ea typeface="Segoe UI" pitchFamily="34" charset="-122"/>
+                <a:cs typeface="Segoe UI" pitchFamily="34" charset="-120"/>
+              </a:rPr>
+              <a:t>JDOE-LT-01 + jdoe : concilier voyage et appareil connu ; ne pas inventer de compromission.</a:t>
+            </a:r>
+            <a:endParaRPr lang="en-US" sz="1800" dirty="0"/>
+          </a:p>
+        </p:txBody>
+      </p:sp>
+      <p:sp>
+        <p:nvSpPr>
+          <p:cNvPr id="9" name="Shape 7"/>
+          <p:cNvSpPr/>
+          <p:nvPr/>
+        </p:nvSpPr>
+        <p:spPr>
+          <a:xfrm>
+            <a:off x="457200" y="4389120"/>
+            <a:ext cx="54864" cy="1143000"/>
+          </a:xfrm>
+          <a:prstGeom prst="rect">
+            <a:avLst/>
+          </a:prstGeom>
+          <a:solidFill>
+            <a:srgbClr val="B22938"/>
+          </a:solidFill>
+          <a:ln w="12700">
+            <a:solidFill>
+              <a:srgbClr val="333333">
+                <a:alpha val="0"/>
+              </a:srgbClr>
+            </a:solidFill>
+            <a:prstDash val="solid"/>
+          </a:ln>
+        </p:spPr>
+      </p:sp>
+      <p:sp>
+        <p:nvSpPr>
+          <p:cNvPr id="10" name="Text 8"/>
+          <p:cNvSpPr/>
+          <p:nvPr/>
+        </p:nvSpPr>
+        <p:spPr>
+          <a:xfrm>
+            <a:off x="685800" y="4389120"/>
+            <a:ext cx="10789920" cy="365760"/>
+          </a:xfrm>
+          <a:prstGeom prst="rect">
+            <a:avLst/>
+          </a:prstGeom>
+          <a:noFill/>
+          <a:ln/>
+        </p:spPr>
+        <p:txBody>
+          <a:bodyPr wrap="square" rtlCol="0" anchor="ctr"/>
+          <a:lstStyle/>
+          <a:p>
+            <a:pPr indent="0" marL="0">
+              <a:buNone/>
+            </a:pPr>
+            <a:r>
+              <a:rPr lang="en-US" sz="2100" b="1" dirty="0">
+                <a:solidFill>
+                  <a:srgbClr val="243831"/>
+                </a:solidFill>
+                <a:latin typeface="Segoe UI" pitchFamily="34" charset="0"/>
+                <a:ea typeface="Segoe UI" pitchFamily="34" charset="-122"/>
+                <a:cs typeface="Segoe UI" pitchFamily="34" charset="-120"/>
+              </a:rPr>
+              <a:t>3 / Signaux réseau contradictoires</a:t>
+            </a:r>
+            <a:endParaRPr lang="en-US" sz="2100" dirty="0"/>
+          </a:p>
+        </p:txBody>
+      </p:sp>
+      <p:sp>
+        <p:nvSpPr>
+          <p:cNvPr id="11" name="Text 9"/>
+          <p:cNvSpPr/>
+          <p:nvPr/>
+        </p:nvSpPr>
+        <p:spPr>
+          <a:xfrm>
+            <a:off x="685800" y="4846320"/>
+            <a:ext cx="10789920" cy="777240"/>
+          </a:xfrm>
+          <a:prstGeom prst="rect">
+            <a:avLst/>
+          </a:prstGeom>
+          <a:noFill/>
+          <a:ln/>
+        </p:spPr>
+        <p:txBody>
+          <a:bodyPr wrap="square" rtlCol="0" anchor="ctr"/>
+          <a:lstStyle/>
+          <a:p>
+            <a:pPr indent="0" marL="0">
+              <a:buNone/>
+            </a:pPr>
+            <a:r>
+              <a:rPr lang="en-US" sz="1800" dirty="0">
+                <a:solidFill>
+                  <a:srgbClr val="43544D"/>
+                </a:solidFill>
+                <a:latin typeface="Segoe UI" pitchFamily="34" charset="0"/>
+                <a:ea typeface="Segoe UI" pitchFamily="34" charset="-122"/>
+                <a:cs typeface="Segoe UI" pitchFamily="34" charset="-120"/>
+              </a:rPr>
+              <a:t>OPS-DB-02 + data_egress_mb_per_hour: 900 : comparer endpoint sain et anomalie réseau ; signaler le conflit.</a:t>
+            </a:r>
+            <a:endParaRPr lang="en-US" sz="1800" dirty="0"/>
+          </a:p>
+        </p:txBody>
+      </p:sp>
+      <p:sp>
+        <p:nvSpPr>
+          <p:cNvPr id="12" name="Text 10">
+            <a:hlinkClick r:id="rId1" tooltip=""/>
           </p:cNvPr>
           <p:cNvSpPr/>
           <p:nvPr/>
         </p:nvSpPr>
         <p:spPr>
           <a:xfrm>
-            <a:off x="411480" y="6528816"/>
-            <a:ext cx="10515600" cy="201168"/>
+            <a:off x="457200" y="6446520"/>
+            <a:ext cx="10698480" cy="228600"/>
           </a:xfrm>
           <a:prstGeom prst="rect">
             <a:avLst/>
@@ -4523,14 +7313,11 @@
               <a:buNone/>
             </a:pPr>
             <a:r>
-              <a:rPr lang="en-US" sz="900" u="sng" dirty="0">
+              <a:rPr lang="en-US" sz="1000" u="sng" dirty="0">
                 <a:solidFill>
                   <a:srgbClr val="075C9B"/>
                 </a:solidFill>
-                <a:latin typeface="Segoe UI" pitchFamily="34" charset="0"/>
-                <a:ea typeface="Segoe UI" pitchFamily="34" charset="-122"/>
-                <a:cs typeface="Segoe UI" pitchFamily="34" charset="-120"/>
-                <a:hlinkClick r:id="rId2" invalidUrl="" action="" tgtFrame="" tooltip="" history="1" highlightClick="0" endSnd="0">
+                <a:hlinkClick r:id="rId1" invalidUrl="" action="" tgtFrame="" tooltip="" history="1" highlightClick="0" endSnd="0">
                   <a:extLst>
                     <a:ext uri="{A12FA001-AC4F-418D-AE19-62706E023703}">
                       <ahyp:hlinkClr xmlns:ahyp="http://schemas.microsoft.com/office/drawing/2018/hyperlinkcolor" val="tx"/>
@@ -4538,15 +7325,15 @@
                   </a:extLst>
                 </a:hlinkClick>
               </a:rPr>
-              <a:t>GitHub Actions 34178081808 | f3da486 | 2026-09-08 UTC</a:t>
-            </a:r>
-            <a:endParaRPr lang="en-US" sz="900" dirty="0"/>
-          </a:p>
-        </p:txBody>
-      </p:sp>
-      <p:sp>
-        <p:nvSpPr>
-          <p:cNvPr id="7" name="Text 3"/>
+              <a:t>Implementation snapshot | 2026-09-10 UTC | 15098b7 + demo UI refresh</a:t>
+            </a:r>
+            <a:endParaRPr lang="en-US" sz="1000" dirty="0"/>
+          </a:p>
+        </p:txBody>
+      </p:sp>
+      <p:sp>
+        <p:nvSpPr>
+          <p:cNvPr id="14" name="Text 11"/>
           <p:cNvSpPr/>
           <p:nvPr/>
         </p:nvSpPr>
@@ -4574,7 +7361,7 @@
                   <a:srgbClr val="767676"/>
                 </a:solidFill>
               </a:rPr>
-              <a:t>3 / 14</a:t>
+              <a:t>3 / 19</a:t>
             </a:r>
             <a:endParaRPr lang="en-US" sz="900" dirty="0"/>
           </a:p>
@@ -4620,8 +7407,8 @@
         </p:nvSpPr>
         <p:spPr>
           <a:xfrm>
-            <a:off x="411480" y="146304"/>
-            <a:ext cx="11338560" cy="502920"/>
+            <a:off x="457200" y="320040"/>
+            <a:ext cx="11247120" cy="731520"/>
           </a:xfrm>
           <a:prstGeom prst="rect">
             <a:avLst/>
@@ -4637,7 +7424,7 @@
               <a:buNone/>
             </a:pPr>
             <a:r>
-              <a:rPr lang="en-US" sz="2400" b="1" dirty="0">
+              <a:rPr lang="en-US" sz="2800" b="1" dirty="0">
                 <a:solidFill>
                   <a:srgbClr val="146C54"/>
                 </a:solidFill>
@@ -4645,46 +7432,49 @@
                 <a:ea typeface="Segoe UI" pitchFamily="34" charset="-122"/>
                 <a:cs typeface="Segoe UI" pitchFamily="34" charset="-120"/>
               </a:rPr>
-              <a:t>Exécution des outils prouvée ; télémétrie synthétique</a:t>
-            </a:r>
-            <a:endParaRPr lang="en-US" sz="2400" dirty="0"/>
-          </a:p>
-        </p:txBody>
-      </p:sp>
-      <p:pic>
-        <p:nvPicPr>
-          <p:cNvPr id="3" name="Image 0" descr="Exécution des outils prouvée ; télémétrie synthétique">    </p:cNvPr>
-          <p:cNvPicPr>
-            <a:picLocks noChangeAspect="1"/>
-          </p:cNvPicPr>
-          <p:nvPr/>
-        </p:nvPicPr>
-        <p:blipFill>
-          <a:blip r:embed="rId1"/>
-          <a:stretch>
-            <a:fillRect/>
-          </a:stretch>
-        </p:blipFill>
-        <p:spPr>
-          <a:xfrm>
-            <a:off x="2068830" y="777240"/>
-            <a:ext cx="8051292" cy="5367528"/>
-          </a:xfrm>
-          <a:prstGeom prst="rect">
-            <a:avLst/>
-          </a:prstGeom>
-        </p:spPr>
-      </p:pic>
-      <p:sp>
-        <p:nvSpPr>
-          <p:cNvPr id="4" name="Text 1"/>
-          <p:cNvSpPr/>
-          <p:nvPr/>
-        </p:nvSpPr>
-        <p:spPr>
-          <a:xfrm>
-            <a:off x="411480" y="6245352"/>
-            <a:ext cx="11338560" cy="256032"/>
+              <a:t>Mémoire : explicite, bornée, isolée par propriétaire</a:t>
+            </a:r>
+            <a:endParaRPr lang="en-US" sz="2800" dirty="0"/>
+          </a:p>
+        </p:txBody>
+      </p:sp>
+      <p:sp>
+        <p:nvSpPr>
+          <p:cNvPr id="3" name="Shape 1"/>
+          <p:cNvSpPr/>
+          <p:nvPr/>
+        </p:nvSpPr>
+        <p:spPr>
+          <a:xfrm>
+            <a:off x="457200" y="1371600"/>
+            <a:ext cx="54864" cy="1143000"/>
+          </a:xfrm>
+          <a:prstGeom prst="rect">
+            <a:avLst/>
+          </a:prstGeom>
+          <a:solidFill>
+            <a:srgbClr val="146C54"/>
+          </a:solidFill>
+          <a:ln w="12700">
+            <a:solidFill>
+              <a:srgbClr val="333333">
+                <a:alpha val="0"/>
+              </a:srgbClr>
+            </a:solidFill>
+            <a:prstDash val="solid"/>
+          </a:ln>
+        </p:spPr>
+      </p:sp>
+      <p:sp>
+        <p:nvSpPr>
+          <p:cNvPr id="4" name="Text 2"/>
+          <p:cNvSpPr/>
+          <p:nvPr/>
+        </p:nvSpPr>
+        <p:spPr>
+          <a:xfrm>
+            <a:off x="685800" y="1371600"/>
+            <a:ext cx="10789920" cy="365760"/>
           </a:xfrm>
           <a:prstGeom prst="rect">
             <a:avLst/>
@@ -4700,32 +7490,281 @@
               <a:buNone/>
             </a:pPr>
             <a:r>
-              <a:rPr lang="en-US" sz="1000" dirty="0">
-                <a:solidFill>
-                  <a:srgbClr val="53635E"/>
-                </a:solidFill>
-                <a:latin typeface="Segoe UI" pitchFamily="34" charset="0"/>
-                <a:ea typeface="Segoe UI" pitchFamily="34" charset="-122"/>
-                <a:cs typeface="Segoe UI" pitchFamily="34" charset="-120"/>
-              </a:rPr>
-              <a:t>Rendu des artefacts, pas une capture du portail. Données synthétiques. Sources et SHA-256 conservés.</a:t>
-            </a:r>
-            <a:endParaRPr lang="en-US" sz="1000" dirty="0"/>
-          </a:p>
-        </p:txBody>
-      </p:sp>
-      <p:sp>
-        <p:nvSpPr>
-          <p:cNvPr id="5" name="Text 2">
-            <a:hlinkClick r:id="rId2" tooltip=""/>
+              <a:rPr lang="en-US" sz="2100" b="1" dirty="0">
+                <a:solidFill>
+                  <a:srgbClr val="243831"/>
+                </a:solidFill>
+                <a:latin typeface="Segoe UI" pitchFamily="34" charset="0"/>
+                <a:ea typeface="Segoe UI" pitchFamily="34" charset="-122"/>
+                <a:cs typeface="Segoe UI" pitchFamily="34" charset="-120"/>
+              </a:rPr>
+              <a:t>Rappel dans la même évaluation</a:t>
+            </a:r>
+            <a:endParaRPr lang="en-US" sz="2100" dirty="0"/>
+          </a:p>
+        </p:txBody>
+      </p:sp>
+      <p:sp>
+        <p:nvSpPr>
+          <p:cNvPr id="5" name="Text 3"/>
+          <p:cNvSpPr/>
+          <p:nvPr/>
+        </p:nvSpPr>
+        <p:spPr>
+          <a:xfrm>
+            <a:off x="685800" y="1828800"/>
+            <a:ext cx="10789920" cy="777240"/>
+          </a:xfrm>
+          <a:prstGeom prst="rect">
+            <a:avLst/>
+          </a:prstGeom>
+          <a:noFill/>
+          <a:ln/>
+        </p:spPr>
+        <p:txBody>
+          <a:bodyPr wrap="square" rtlCol="0" anchor="ctr"/>
+          <a:lstStyle/>
+          <a:p>
+            <a:pPr indent="0" marL="0">
+              <a:buNone/>
+            </a:pPr>
+            <a:r>
+              <a:rPr lang="en-US" sz="1800" dirty="0">
+                <a:solidFill>
+                  <a:srgbClr val="43544D"/>
+                </a:solidFill>
+                <a:latin typeface="Segoe UI" pitchFamily="34" charset="0"/>
+                <a:ea typeface="Segoe UI" pitchFamily="34" charset="-122"/>
+                <a:cs typeface="Segoe UI" pitchFamily="34" charset="-120"/>
+              </a:rPr>
+              <a:t>Ajouter DEMO-73921, puis demander la référence sans la répéter. Les trois spécialistes reçoivent tout l’historique fourni.</a:t>
+            </a:r>
+            <a:endParaRPr lang="en-US" sz="1800" dirty="0"/>
+          </a:p>
+        </p:txBody>
+      </p:sp>
+      <p:sp>
+        <p:nvSpPr>
+          <p:cNvPr id="6" name="Shape 4"/>
+          <p:cNvSpPr/>
+          <p:nvPr/>
+        </p:nvSpPr>
+        <p:spPr>
+          <a:xfrm>
+            <a:off x="457200" y="2880360"/>
+            <a:ext cx="54864" cy="1143000"/>
+          </a:xfrm>
+          <a:prstGeom prst="rect">
+            <a:avLst/>
+          </a:prstGeom>
+          <a:solidFill>
+            <a:srgbClr val="0078D4"/>
+          </a:solidFill>
+          <a:ln w="12700">
+            <a:solidFill>
+              <a:srgbClr val="333333">
+                <a:alpha val="0"/>
+              </a:srgbClr>
+            </a:solidFill>
+            <a:prstDash val="solid"/>
+          </a:ln>
+        </p:spPr>
+      </p:sp>
+      <p:sp>
+        <p:nvSpPr>
+          <p:cNvPr id="7" name="Text 5"/>
+          <p:cNvSpPr/>
+          <p:nvPr/>
+        </p:nvSpPr>
+        <p:spPr>
+          <a:xfrm>
+            <a:off x="685800" y="2880360"/>
+            <a:ext cx="10789920" cy="365760"/>
+          </a:xfrm>
+          <a:prstGeom prst="rect">
+            <a:avLst/>
+          </a:prstGeom>
+          <a:noFill/>
+          <a:ln/>
+        </p:spPr>
+        <p:txBody>
+          <a:bodyPr wrap="square" rtlCol="0" anchor="ctr"/>
+          <a:lstStyle/>
+          <a:p>
+            <a:pPr indent="0" marL="0">
+              <a:buNone/>
+            </a:pPr>
+            <a:r>
+              <a:rPr lang="en-US" sz="2100" b="1" dirty="0">
+                <a:solidFill>
+                  <a:srgbClr val="243831"/>
+                </a:solidFill>
+                <a:latin typeface="Segoe UI" pitchFamily="34" charset="0"/>
+                <a:ea typeface="Segoe UI" pitchFamily="34" charset="-122"/>
+                <a:cs typeface="Segoe UI" pitchFamily="34" charset="-120"/>
+              </a:rPr>
+              <a:t>Isolation et limites des reprises</a:t>
+            </a:r>
+            <a:endParaRPr lang="en-US" sz="2100" dirty="0"/>
+          </a:p>
+        </p:txBody>
+      </p:sp>
+      <p:sp>
+        <p:nvSpPr>
+          <p:cNvPr id="8" name="Text 6"/>
+          <p:cNvSpPr/>
+          <p:nvPr/>
+        </p:nvSpPr>
+        <p:spPr>
+          <a:xfrm>
+            <a:off x="685800" y="3337560"/>
+            <a:ext cx="10789920" cy="777240"/>
+          </a:xfrm>
+          <a:prstGeom prst="rect">
+            <a:avLst/>
+          </a:prstGeom>
+          <a:noFill/>
+          <a:ln/>
+        </p:spPr>
+        <p:txBody>
+          <a:bodyPr wrap="square" rtlCol="0" anchor="ctr"/>
+          <a:lstStyle/>
+          <a:p>
+            <a:pPr indent="0" marL="0">
+              <a:buNone/>
+            </a:pPr>
+            <a:r>
+              <a:rPr lang="en-US" sz="1800" dirty="0">
+                <a:solidFill>
+                  <a:srgbClr val="43544D"/>
+                </a:solidFill>
+                <a:latin typeface="Segoe UI" pitchFamily="34" charset="0"/>
+                <a:ea typeface="Segoe UI" pitchFamily="34" charset="-122"/>
+                <a:cs typeface="Segoe UI" pitchFamily="34" charset="-120"/>
+              </a:rPr>
+              <a:t>Une nouvelle évaluation ne doit pas rappeler cette référence. Reprise identique terminée : même réponse ; texte modifié avec la même clé : conflit.</a:t>
+            </a:r>
+            <a:endParaRPr lang="en-US" sz="1800" dirty="0"/>
+          </a:p>
+        </p:txBody>
+      </p:sp>
+      <p:sp>
+        <p:nvSpPr>
+          <p:cNvPr id="9" name="Shape 7"/>
+          <p:cNvSpPr/>
+          <p:nvPr/>
+        </p:nvSpPr>
+        <p:spPr>
+          <a:xfrm>
+            <a:off x="457200" y="4389120"/>
+            <a:ext cx="54864" cy="1143000"/>
+          </a:xfrm>
+          <a:prstGeom prst="rect">
+            <a:avLst/>
+          </a:prstGeom>
+          <a:solidFill>
+            <a:srgbClr val="B22938"/>
+          </a:solidFill>
+          <a:ln w="12700">
+            <a:solidFill>
+              <a:srgbClr val="333333">
+                <a:alpha val="0"/>
+              </a:srgbClr>
+            </a:solidFill>
+            <a:prstDash val="solid"/>
+          </a:ln>
+        </p:spPr>
+      </p:sp>
+      <p:sp>
+        <p:nvSpPr>
+          <p:cNvPr id="10" name="Text 8"/>
+          <p:cNvSpPr/>
+          <p:nvPr/>
+        </p:nvSpPr>
+        <p:spPr>
+          <a:xfrm>
+            <a:off x="685800" y="4389120"/>
+            <a:ext cx="10789920" cy="365760"/>
+          </a:xfrm>
+          <a:prstGeom prst="rect">
+            <a:avLst/>
+          </a:prstGeom>
+          <a:noFill/>
+          <a:ln/>
+        </p:spPr>
+        <p:txBody>
+          <a:bodyPr wrap="square" rtlCol="0" anchor="ctr"/>
+          <a:lstStyle/>
+          <a:p>
+            <a:pPr indent="0" marL="0">
+              <a:buNone/>
+            </a:pPr>
+            <a:r>
+              <a:rPr lang="en-US" sz="2100" b="1" dirty="0">
+                <a:solidFill>
+                  <a:srgbClr val="243831"/>
+                </a:solidFill>
+                <a:latin typeface="Segoe UI" pitchFamily="34" charset="0"/>
+                <a:ea typeface="Segoe UI" pitchFamily="34" charset="-122"/>
+                <a:cs typeface="Segoe UI" pitchFamily="34" charset="-120"/>
+              </a:rPr>
+              <a:t>Pas de persistance durable</a:t>
+            </a:r>
+            <a:endParaRPr lang="en-US" sz="2100" dirty="0"/>
+          </a:p>
+        </p:txBody>
+      </p:sp>
+      <p:sp>
+        <p:nvSpPr>
+          <p:cNvPr id="11" name="Text 9"/>
+          <p:cNvSpPr/>
+          <p:nvPr/>
+        </p:nvSpPr>
+        <p:spPr>
+          <a:xfrm>
+            <a:off x="685800" y="4846320"/>
+            <a:ext cx="10789920" cy="777240"/>
+          </a:xfrm>
+          <a:prstGeom prst="rect">
+            <a:avLst/>
+          </a:prstGeom>
+          <a:noFill/>
+          <a:ln/>
+        </p:spPr>
+        <p:txBody>
+          <a:bodyPr wrap="square" rtlCol="0" anchor="ctr"/>
+          <a:lstStyle/>
+          <a:p>
+            <a:pPr indent="0" marL="0">
+              <a:buNone/>
+            </a:pPr>
+            <a:r>
+              <a:rPr lang="en-US" sz="1800" dirty="0">
+                <a:solidFill>
+                  <a:srgbClr val="43544D"/>
+                </a:solidFill>
+                <a:latin typeface="Segoe UI" pitchFamily="34" charset="0"/>
+                <a:ea typeface="Segoe UI" pitchFamily="34" charset="-122"/>
+                <a:cs typeface="Segoe UI" pitchFamily="34" charset="-120"/>
+              </a:rPr>
+              <a:t>Sessions en mémoire avec expiration ; redémarrage : état serveur perdu ; rechargement : liste locale perdue. Sans Cosmos, Teams ni garantie durable exactement-une-fois.</a:t>
+            </a:r>
+            <a:endParaRPr lang="en-US" sz="1800" dirty="0"/>
+          </a:p>
+        </p:txBody>
+      </p:sp>
+      <p:sp>
+        <p:nvSpPr>
+          <p:cNvPr id="12" name="Text 10">
+            <a:hlinkClick r:id="rId1" tooltip=""/>
           </p:cNvPr>
           <p:cNvSpPr/>
           <p:nvPr/>
         </p:nvSpPr>
         <p:spPr>
           <a:xfrm>
-            <a:off x="411480" y="6528816"/>
-            <a:ext cx="10515600" cy="201168"/>
+            <a:off x="457200" y="6446520"/>
+            <a:ext cx="10698480" cy="228600"/>
           </a:xfrm>
           <a:prstGeom prst="rect">
             <a:avLst/>
@@ -4741,14 +7780,11 @@
               <a:buNone/>
             </a:pPr>
             <a:r>
-              <a:rPr lang="en-US" sz="900" u="sng" dirty="0">
+              <a:rPr lang="en-US" sz="1000" u="sng" dirty="0">
                 <a:solidFill>
                   <a:srgbClr val="075C9B"/>
                 </a:solidFill>
-                <a:latin typeface="Segoe UI" pitchFamily="34" charset="0"/>
-                <a:ea typeface="Segoe UI" pitchFamily="34" charset="-122"/>
-                <a:cs typeface="Segoe UI" pitchFamily="34" charset="-120"/>
-                <a:hlinkClick r:id="rId2" invalidUrl="" action="" tgtFrame="" tooltip="" history="1" highlightClick="0" endSnd="0">
+                <a:hlinkClick r:id="rId1" invalidUrl="" action="" tgtFrame="" tooltip="" history="1" highlightClick="0" endSnd="0">
                   <a:extLst>
                     <a:ext uri="{A12FA001-AC4F-418D-AE19-62706E023703}">
                       <ahyp:hlinkClr xmlns:ahyp="http://schemas.microsoft.com/office/drawing/2018/hyperlinkcolor" val="tx"/>
@@ -4756,15 +7792,15 @@
                   </a:extLst>
                 </a:hlinkClick>
               </a:rPr>
-              <a:t>GitHub Actions 34178081808 | f3da486 | 2026-09-08 UTC</a:t>
-            </a:r>
-            <a:endParaRPr lang="en-US" sz="900" dirty="0"/>
-          </a:p>
-        </p:txBody>
-      </p:sp>
-      <p:sp>
-        <p:nvSpPr>
-          <p:cNvPr id="7" name="Text 3"/>
+              <a:t>Implementation snapshot | 2026-09-10 UTC | 15098b7 + demo UI refresh</a:t>
+            </a:r>
+            <a:endParaRPr lang="en-US" sz="1000" dirty="0"/>
+          </a:p>
+        </p:txBody>
+      </p:sp>
+      <p:sp>
+        <p:nvSpPr>
+          <p:cNvPr id="14" name="Text 11"/>
           <p:cNvSpPr/>
           <p:nvPr/>
         </p:nvSpPr>
@@ -4792,7 +7828,7 @@
                   <a:srgbClr val="767676"/>
                 </a:solidFill>
               </a:rPr>
-              <a:t>4 / 14</a:t>
+              <a:t>4 / 19</a:t>
             </a:r>
             <a:endParaRPr lang="en-US" sz="900" dirty="0"/>
           </a:p>
@@ -4838,8 +7874,8 @@
         </p:nvSpPr>
         <p:spPr>
           <a:xfrm>
-            <a:off x="411480" y="146304"/>
-            <a:ext cx="11338560" cy="502920"/>
+            <a:off x="457200" y="320040"/>
+            <a:ext cx="11247120" cy="731520"/>
           </a:xfrm>
           <a:prstGeom prst="rect">
             <a:avLst/>
@@ -4855,7 +7891,7 @@
               <a:buNone/>
             </a:pPr>
             <a:r>
-              <a:rPr lang="en-US" sz="2400" b="1" dirty="0">
+              <a:rPr lang="en-US" sz="2800" b="1" dirty="0">
                 <a:solidFill>
                   <a:srgbClr val="146C54"/>
                 </a:solidFill>
@@ -4863,46 +7899,49 @@
                 <a:ea typeface="Segoe UI" pitchFamily="34" charset="-122"/>
                 <a:cs typeface="Segoe UI" pitchFamily="34" charset="-120"/>
               </a:rPr>
-              <a:t>Production 34 : active, test de fumée réussi</a:t>
-            </a:r>
-            <a:endParaRPr lang="en-US" sz="2400" dirty="0"/>
-          </a:p>
-        </p:txBody>
-      </p:sp>
-      <p:pic>
-        <p:nvPicPr>
-          <p:cNvPr id="3" name="Image 0" descr="Production 34 : active, test de fumée réussi">    </p:cNvPr>
-          <p:cNvPicPr>
-            <a:picLocks noChangeAspect="1"/>
-          </p:cNvPicPr>
-          <p:nvPr/>
-        </p:nvPicPr>
-        <p:blipFill>
-          <a:blip r:embed="rId1"/>
-          <a:stretch>
-            <a:fillRect/>
-          </a:stretch>
-        </p:blipFill>
-        <p:spPr>
-          <a:xfrm>
-            <a:off x="2068830" y="777240"/>
-            <a:ext cx="8051292" cy="5367528"/>
-          </a:xfrm>
-          <a:prstGeom prst="rect">
-            <a:avLst/>
-          </a:prstGeom>
-        </p:spPr>
-      </p:pic>
-      <p:sp>
-        <p:nvSpPr>
-          <p:cNvPr id="4" name="Text 1"/>
-          <p:cNvSpPr/>
-          <p:nvPr/>
-        </p:nvSpPr>
-        <p:spPr>
-          <a:xfrm>
-            <a:off x="411480" y="6245352"/>
-            <a:ext cx="11338560" cy="256032"/>
+              <a:t>Exécution des outils : preuves, pas prose du modèle</a:t>
+            </a:r>
+            <a:endParaRPr lang="en-US" sz="2800" dirty="0"/>
+          </a:p>
+        </p:txBody>
+      </p:sp>
+      <p:sp>
+        <p:nvSpPr>
+          <p:cNvPr id="3" name="Shape 1"/>
+          <p:cNvSpPr/>
+          <p:nvPr/>
+        </p:nvSpPr>
+        <p:spPr>
+          <a:xfrm>
+            <a:off x="457200" y="1371600"/>
+            <a:ext cx="54864" cy="1143000"/>
+          </a:xfrm>
+          <a:prstGeom prst="rect">
+            <a:avLst/>
+          </a:prstGeom>
+          <a:solidFill>
+            <a:srgbClr val="146C54"/>
+          </a:solidFill>
+          <a:ln w="12700">
+            <a:solidFill>
+              <a:srgbClr val="333333">
+                <a:alpha val="0"/>
+              </a:srgbClr>
+            </a:solidFill>
+            <a:prstDash val="solid"/>
+          </a:ln>
+        </p:spPr>
+      </p:sp>
+      <p:sp>
+        <p:nvSpPr>
+          <p:cNvPr id="4" name="Text 2"/>
+          <p:cNvSpPr/>
+          <p:nvPr/>
+        </p:nvSpPr>
+        <p:spPr>
+          <a:xfrm>
+            <a:off x="685800" y="1371600"/>
+            <a:ext cx="10789920" cy="365760"/>
           </a:xfrm>
           <a:prstGeom prst="rect">
             <a:avLst/>
@@ -4918,32 +7957,281 @@
               <a:buNone/>
             </a:pPr>
             <a:r>
-              <a:rPr lang="en-US" sz="1000" dirty="0">
-                <a:solidFill>
-                  <a:srgbClr val="53635E"/>
-                </a:solidFill>
-                <a:latin typeface="Segoe UI" pitchFamily="34" charset="0"/>
-                <a:ea typeface="Segoe UI" pitchFamily="34" charset="-122"/>
-                <a:cs typeface="Segoe UI" pitchFamily="34" charset="-120"/>
-              </a:rPr>
-              <a:t>Rendu des artefacts, pas une capture du portail. Données synthétiques. Sources et SHA-256 conservés.</a:t>
-            </a:r>
-            <a:endParaRPr lang="en-US" sz="1000" dirty="0"/>
-          </a:p>
-        </p:txBody>
-      </p:sp>
-      <p:sp>
-        <p:nvSpPr>
-          <p:cNvPr id="5" name="Text 2">
-            <a:hlinkClick r:id="rId2" tooltip=""/>
+              <a:rPr lang="en-US" sz="2100" b="1" dirty="0">
+                <a:solidFill>
+                  <a:srgbClr val="243831"/>
+                </a:solidFill>
+                <a:latin typeface="Segoe UI" pitchFamily="34" charset="0"/>
+                <a:ea typeface="Segoe UI" pitchFamily="34" charset="-122"/>
+                <a:cs typeface="Segoe UI" pitchFamily="34" charset="-120"/>
+              </a:rPr>
+              <a:t>Plan de recherche déterministe</a:t>
+            </a:r>
+            <a:endParaRPr lang="en-US" sz="2100" dirty="0"/>
+          </a:p>
+        </p:txBody>
+      </p:sp>
+      <p:sp>
+        <p:nvSpPr>
+          <p:cNvPr id="5" name="Text 3"/>
+          <p:cNvSpPr/>
+          <p:nvPr/>
+        </p:nvSpPr>
+        <p:spPr>
+          <a:xfrm>
+            <a:off x="685800" y="1828800"/>
+            <a:ext cx="10789920" cy="777240"/>
+          </a:xfrm>
+          <a:prstGeom prst="rect">
+            <a:avLst/>
+          </a:prstGeom>
+          <a:noFill/>
+          <a:ln/>
+        </p:spPr>
+        <p:txBody>
+          <a:bodyPr wrap="square" rtlCol="0" anchor="ctr"/>
+          <a:lstStyle/>
+          <a:p>
+            <a:pPr indent="0" marL="0">
+              <a:buNone/>
+            </a:pPr>
+            <a:r>
+              <a:rPr lang="en-US" sz="1800" dirty="0">
+                <a:solidFill>
+                  <a:srgbClr val="43544D"/>
+                </a:solidFill>
+                <a:latin typeface="Segoe UI" pitchFamily="34" charset="0"/>
+                <a:ea typeface="Segoe UI" pitchFamily="34" charset="-122"/>
+                <a:cs typeface="Segoe UI" pitchFamily="34" charset="-120"/>
+              </a:rPr>
+              <a:t>Les champs utilisateur appareil/compte/métrique choisissent les appels MCP en lecture seule. Champ omis : contexte conservé ; nouvelle valeur : catégorie remplacée.</a:t>
+            </a:r>
+            <a:endParaRPr lang="en-US" sz="1800" dirty="0"/>
+          </a:p>
+        </p:txBody>
+      </p:sp>
+      <p:sp>
+        <p:nvSpPr>
+          <p:cNvPr id="6" name="Shape 4"/>
+          <p:cNvSpPr/>
+          <p:nvPr/>
+        </p:nvSpPr>
+        <p:spPr>
+          <a:xfrm>
+            <a:off x="457200" y="2880360"/>
+            <a:ext cx="54864" cy="1143000"/>
+          </a:xfrm>
+          <a:prstGeom prst="rect">
+            <a:avLst/>
+          </a:prstGeom>
+          <a:solidFill>
+            <a:srgbClr val="0078D4"/>
+          </a:solidFill>
+          <a:ln w="12700">
+            <a:solidFill>
+              <a:srgbClr val="333333">
+                <a:alpha val="0"/>
+              </a:srgbClr>
+            </a:solidFill>
+            <a:prstDash val="solid"/>
+          </a:ln>
+        </p:spPr>
+      </p:sp>
+      <p:sp>
+        <p:nvSpPr>
+          <p:cNvPr id="7" name="Text 5"/>
+          <p:cNvSpPr/>
+          <p:nvPr/>
+        </p:nvSpPr>
+        <p:spPr>
+          <a:xfrm>
+            <a:off x="685800" y="2880360"/>
+            <a:ext cx="10789920" cy="365760"/>
+          </a:xfrm>
+          <a:prstGeom prst="rect">
+            <a:avLst/>
+          </a:prstGeom>
+          <a:noFill/>
+          <a:ln/>
+        </p:spPr>
+        <p:txBody>
+          <a:bodyPr wrap="square" rtlCol="0" anchor="ctr"/>
+          <a:lstStyle/>
+          <a:p>
+            <a:pPr indent="0" marL="0">
+              <a:buNone/>
+            </a:pPr>
+            <a:r>
+              <a:rPr lang="en-US" sz="2100" b="1" dirty="0">
+                <a:solidFill>
+                  <a:srgbClr val="243831"/>
+                </a:solidFill>
+                <a:latin typeface="Segoe UI" pitchFamily="34" charset="0"/>
+                <a:ea typeface="Segoe UI" pitchFamily="34" charset="-122"/>
+                <a:cs typeface="Segoe UI" pitchFamily="34" charset="-120"/>
+              </a:rPr>
+              <a:t>Permissions des spécialistes</a:t>
+            </a:r>
+            <a:endParaRPr lang="en-US" sz="2100" dirty="0"/>
+          </a:p>
+        </p:txBody>
+      </p:sp>
+      <p:sp>
+        <p:nvSpPr>
+          <p:cNvPr id="8" name="Text 6"/>
+          <p:cNvSpPr/>
+          <p:nvPr/>
+        </p:nvSpPr>
+        <p:spPr>
+          <a:xfrm>
+            <a:off x="685800" y="3337560"/>
+            <a:ext cx="10789920" cy="777240"/>
+          </a:xfrm>
+          <a:prstGeom prst="rect">
+            <a:avLst/>
+          </a:prstGeom>
+          <a:noFill/>
+          <a:ln/>
+        </p:spPr>
+        <p:txBody>
+          <a:bodyPr wrap="square" rtlCol="0" anchor="ctr"/>
+          <a:lstStyle/>
+          <a:p>
+            <a:pPr indent="0" marL="0">
+              <a:buNone/>
+            </a:pPr>
+            <a:r>
+              <a:rPr lang="en-US" sz="1800" dirty="0">
+                <a:solidFill>
+                  <a:srgbClr val="43544D"/>
+                </a:solidFill>
+                <a:latin typeface="Segoe UI" pitchFamily="34" charset="0"/>
+                <a:ea typeface="Segoe UI" pitchFamily="34" charset="-122"/>
+                <a:cs typeface="Segoe UI" pitchFamily="34" charset="-120"/>
+              </a:rPr>
+              <a:t>Enquêteur : get_device_risk + list_vulnerabilities. Analyste : detect_login_anomalies + score_anomaly. Rédacteur : aucun outil.</a:t>
+            </a:r>
+            <a:endParaRPr lang="en-US" sz="1800" dirty="0"/>
+          </a:p>
+        </p:txBody>
+      </p:sp>
+      <p:sp>
+        <p:nvSpPr>
+          <p:cNvPr id="9" name="Shape 7"/>
+          <p:cNvSpPr/>
+          <p:nvPr/>
+        </p:nvSpPr>
+        <p:spPr>
+          <a:xfrm>
+            <a:off x="457200" y="4389120"/>
+            <a:ext cx="54864" cy="1143000"/>
+          </a:xfrm>
+          <a:prstGeom prst="rect">
+            <a:avLst/>
+          </a:prstGeom>
+          <a:solidFill>
+            <a:srgbClr val="B22938"/>
+          </a:solidFill>
+          <a:ln w="12700">
+            <a:solidFill>
+              <a:srgbClr val="333333">
+                <a:alpha val="0"/>
+              </a:srgbClr>
+            </a:solidFill>
+            <a:prstDash val="solid"/>
+          </a:ln>
+        </p:spPr>
+      </p:sp>
+      <p:sp>
+        <p:nvSpPr>
+          <p:cNvPr id="10" name="Text 8"/>
+          <p:cNvSpPr/>
+          <p:nvPr/>
+        </p:nvSpPr>
+        <p:spPr>
+          <a:xfrm>
+            <a:off x="685800" y="4389120"/>
+            <a:ext cx="10789920" cy="365760"/>
+          </a:xfrm>
+          <a:prstGeom prst="rect">
+            <a:avLst/>
+          </a:prstGeom>
+          <a:noFill/>
+          <a:ln/>
+        </p:spPr>
+        <p:txBody>
+          <a:bodyPr wrap="square" rtlCol="0" anchor="ctr"/>
+          <a:lstStyle/>
+          <a:p>
+            <a:pPr indent="0" marL="0">
+              <a:buNone/>
+            </a:pPr>
+            <a:r>
+              <a:rPr lang="en-US" sz="2100" b="1" dirty="0">
+                <a:solidFill>
+                  <a:srgbClr val="243831"/>
+                </a:solidFill>
+                <a:latin typeface="Segoe UI" pitchFamily="34" charset="0"/>
+                <a:ea typeface="Segoe UI" pitchFamily="34" charset="-122"/>
+                <a:cs typeface="Segoe UI" pitchFamily="34" charset="-120"/>
+              </a:rPr>
+              <a:t>Vérifier les reçus réels</a:t>
+            </a:r>
+            <a:endParaRPr lang="en-US" sz="2100" dirty="0"/>
+          </a:p>
+        </p:txBody>
+      </p:sp>
+      <p:sp>
+        <p:nvSpPr>
+          <p:cNvPr id="11" name="Text 9"/>
+          <p:cNvSpPr/>
+          <p:nvPr/>
+        </p:nvSpPr>
+        <p:spPr>
+          <a:xfrm>
+            <a:off x="685800" y="4846320"/>
+            <a:ext cx="10789920" cy="777240"/>
+          </a:xfrm>
+          <a:prstGeom prst="rect">
+            <a:avLst/>
+          </a:prstGeom>
+          <a:noFill/>
+          <a:ln/>
+        </p:spPr>
+        <p:txBody>
+          <a:bodyPr wrap="square" rtlCol="0" anchor="ctr"/>
+          <a:lstStyle/>
+          <a:p>
+            <a:pPr indent="0" marL="0">
+              <a:buNone/>
+            </a:pPr>
+            <a:r>
+              <a:rPr lang="en-US" sz="1800" dirty="0">
+                <a:solidFill>
+                  <a:srgbClr val="43544D"/>
+                </a:solidFill>
+                <a:latin typeface="Segoe UI" pitchFamily="34" charset="0"/>
+                <a:ea typeface="Segoe UI" pitchFamily="34" charset="-122"/>
+                <a:cs typeface="Segoe UI" pitchFamily="34" charset="-120"/>
+              </a:rPr>
+              <a:t>Les ToolMessage réussis alimentent les métadonnées bornées. Données synthétiques et télémétrie de vulnérabilités absente restent des limites explicites.</a:t>
+            </a:r>
+            <a:endParaRPr lang="en-US" sz="1800" dirty="0"/>
+          </a:p>
+        </p:txBody>
+      </p:sp>
+      <p:sp>
+        <p:nvSpPr>
+          <p:cNvPr id="12" name="Text 10">
+            <a:hlinkClick r:id="rId1" tooltip=""/>
           </p:cNvPr>
           <p:cNvSpPr/>
           <p:nvPr/>
         </p:nvSpPr>
         <p:spPr>
           <a:xfrm>
-            <a:off x="411480" y="6528816"/>
-            <a:ext cx="10515600" cy="201168"/>
+            <a:off x="457200" y="6446520"/>
+            <a:ext cx="10698480" cy="228600"/>
           </a:xfrm>
           <a:prstGeom prst="rect">
             <a:avLst/>
@@ -4959,14 +8247,11 @@
               <a:buNone/>
             </a:pPr>
             <a:r>
-              <a:rPr lang="en-US" sz="900" u="sng" dirty="0">
+              <a:rPr lang="en-US" sz="1000" u="sng" dirty="0">
                 <a:solidFill>
                   <a:srgbClr val="075C9B"/>
                 </a:solidFill>
-                <a:latin typeface="Segoe UI" pitchFamily="34" charset="0"/>
-                <a:ea typeface="Segoe UI" pitchFamily="34" charset="-122"/>
-                <a:cs typeface="Segoe UI" pitchFamily="34" charset="-120"/>
-                <a:hlinkClick r:id="rId2" invalidUrl="" action="" tgtFrame="" tooltip="" history="1" highlightClick="0" endSnd="0">
+                <a:hlinkClick r:id="rId1" invalidUrl="" action="" tgtFrame="" tooltip="" history="1" highlightClick="0" endSnd="0">
                   <a:extLst>
                     <a:ext uri="{A12FA001-AC4F-418D-AE19-62706E023703}">
                       <ahyp:hlinkClr xmlns:ahyp="http://schemas.microsoft.com/office/drawing/2018/hyperlinkcolor" val="tx"/>
@@ -4974,15 +8259,15 @@
                   </a:extLst>
                 </a:hlinkClick>
               </a:rPr>
-              <a:t>GitHub Actions 34178081808 | f3da486 | 2026-09-08 UTC</a:t>
-            </a:r>
-            <a:endParaRPr lang="en-US" sz="900" dirty="0"/>
-          </a:p>
-        </p:txBody>
-      </p:sp>
-      <p:sp>
-        <p:nvSpPr>
-          <p:cNvPr id="7" name="Text 3"/>
+              <a:t>Implementation snapshot | 2026-09-10 UTC | 15098b7 + demo UI refresh</a:t>
+            </a:r>
+            <a:endParaRPr lang="en-US" sz="1000" dirty="0"/>
+          </a:p>
+        </p:txBody>
+      </p:sp>
+      <p:sp>
+        <p:nvSpPr>
+          <p:cNvPr id="14" name="Text 11"/>
           <p:cNvSpPr/>
           <p:nvPr/>
         </p:nvSpPr>
@@ -5010,7 +8295,7 @@
                   <a:srgbClr val="767676"/>
                 </a:solidFill>
               </a:rPr>
-              <a:t>5 / 14</a:t>
+              <a:t>5 / 19</a:t>
             </a:r>
             <a:endParaRPr lang="en-US" sz="900" dirty="0"/>
           </a:p>
@@ -5030,7 +8315,7 @@
     <p:bg>
       <p:bgPr>
         <a:solidFill>
-          <a:srgbClr val="FAFBFC"/>
+          <a:srgbClr val="FFFFFF"/>
         </a:solidFill>
       </p:bgPr>
     </p:bg>
@@ -5050,14 +8335,158 @@
       </p:grpSpPr>
       <p:sp>
         <p:nvSpPr>
-          <p:cNvPr id="2" name="Shape 0"/>
-          <p:cNvSpPr/>
-          <p:nvPr/>
-        </p:nvSpPr>
-        <p:spPr>
-          <a:xfrm>
-            <a:off x="0" y="0"/>
-            <a:ext cx="12188952" cy="82296"/>
+          <p:cNvPr id="2" name="Text 0"/>
+          <p:cNvSpPr/>
+          <p:nvPr/>
+        </p:nvSpPr>
+        <p:spPr>
+          <a:xfrm>
+            <a:off x="457200" y="320040"/>
+            <a:ext cx="11247120" cy="731520"/>
+          </a:xfrm>
+          <a:prstGeom prst="rect">
+            <a:avLst/>
+          </a:prstGeom>
+          <a:noFill/>
+          <a:ln/>
+        </p:spPr>
+        <p:txBody>
+          <a:bodyPr wrap="square" rtlCol="0" anchor="ctr"/>
+          <a:lstStyle/>
+          <a:p>
+            <a:pPr indent="0" marL="0">
+              <a:buNone/>
+            </a:pPr>
+            <a:r>
+              <a:rPr lang="en-US" sz="2800" b="1" dirty="0">
+                <a:solidFill>
+                  <a:srgbClr val="146C54"/>
+                </a:solidFill>
+                <a:latin typeface="Segoe UI" pitchFamily="34" charset="0"/>
+                <a:ea typeface="Segoe UI" pitchFamily="34" charset="-122"/>
+                <a:cs typeface="Segoe UI" pitchFamily="34" charset="-120"/>
+              </a:rPr>
+              <a:t>Opérations : approbation, télémétrie, capacité</a:t>
+            </a:r>
+            <a:endParaRPr lang="en-US" sz="2800" dirty="0"/>
+          </a:p>
+        </p:txBody>
+      </p:sp>
+      <p:sp>
+        <p:nvSpPr>
+          <p:cNvPr id="3" name="Shape 1"/>
+          <p:cNvSpPr/>
+          <p:nvPr/>
+        </p:nvSpPr>
+        <p:spPr>
+          <a:xfrm>
+            <a:off x="457200" y="1371600"/>
+            <a:ext cx="54864" cy="1143000"/>
+          </a:xfrm>
+          <a:prstGeom prst="rect">
+            <a:avLst/>
+          </a:prstGeom>
+          <a:solidFill>
+            <a:srgbClr val="146C54"/>
+          </a:solidFill>
+          <a:ln w="12700">
+            <a:solidFill>
+              <a:srgbClr val="333333">
+                <a:alpha val="0"/>
+              </a:srgbClr>
+            </a:solidFill>
+            <a:prstDash val="solid"/>
+          </a:ln>
+        </p:spPr>
+      </p:sp>
+      <p:sp>
+        <p:nvSpPr>
+          <p:cNvPr id="4" name="Text 2"/>
+          <p:cNvSpPr/>
+          <p:nvPr/>
+        </p:nvSpPr>
+        <p:spPr>
+          <a:xfrm>
+            <a:off x="685800" y="1371600"/>
+            <a:ext cx="10789920" cy="365760"/>
+          </a:xfrm>
+          <a:prstGeom prst="rect">
+            <a:avLst/>
+          </a:prstGeom>
+          <a:noFill/>
+          <a:ln/>
+        </p:spPr>
+        <p:txBody>
+          <a:bodyPr wrap="square" rtlCol="0" anchor="ctr"/>
+          <a:lstStyle/>
+          <a:p>
+            <a:pPr indent="0" marL="0">
+              <a:buNone/>
+            </a:pPr>
+            <a:r>
+              <a:rPr lang="en-US" sz="2100" b="1" dirty="0">
+                <a:solidFill>
+                  <a:srgbClr val="243831"/>
+                </a:solidFill>
+                <a:latin typeface="Segoe UI" pitchFamily="34" charset="0"/>
+                <a:ea typeface="Segoe UI" pitchFamily="34" charset="-122"/>
+                <a:cs typeface="Segoe UI" pitchFamily="34" charset="-120"/>
+              </a:rPr>
+              <a:t>Approuver la promotion, puis la surveillance</a:t>
+            </a:r>
+            <a:endParaRPr lang="en-US" sz="2100" dirty="0"/>
+          </a:p>
+        </p:txBody>
+      </p:sp>
+      <p:sp>
+        <p:nvSpPr>
+          <p:cNvPr id="5" name="Text 3"/>
+          <p:cNvSpPr/>
+          <p:nvPr/>
+        </p:nvSpPr>
+        <p:spPr>
+          <a:xfrm>
+            <a:off x="685800" y="1828800"/>
+            <a:ext cx="10789920" cy="777240"/>
+          </a:xfrm>
+          <a:prstGeom prst="rect">
+            <a:avLst/>
+          </a:prstGeom>
+          <a:noFill/>
+          <a:ln/>
+        </p:spPr>
+        <p:txBody>
+          <a:bodyPr wrap="square" rtlCol="0" anchor="ctr"/>
+          <a:lstStyle/>
+          <a:p>
+            <a:pPr indent="0" marL="0">
+              <a:buNone/>
+            </a:pPr>
+            <a:r>
+              <a:rPr lang="en-US" sz="1800" dirty="0">
+                <a:solidFill>
+                  <a:srgbClr val="43544D"/>
+                </a:solidFill>
+                <a:latin typeface="Segoe UI" pitchFamily="34" charset="0"/>
+                <a:ea typeface="Segoe UI" pitchFamily="34" charset="-122"/>
+                <a:cs typeface="Segoe UI" pitchFamily="34" charset="-120"/>
+              </a:rPr>
+              <a:t>Deux jobs protégés par approbation production. La validation continue attend le verrou partagé ; aucune approbation manuelle pour elle.</a:t>
+            </a:r>
+            <a:endParaRPr lang="en-US" sz="1800" dirty="0"/>
+          </a:p>
+        </p:txBody>
+      </p:sp>
+      <p:sp>
+        <p:nvSpPr>
+          <p:cNvPr id="6" name="Shape 4"/>
+          <p:cNvSpPr/>
+          <p:nvPr/>
+        </p:nvSpPr>
+        <p:spPr>
+          <a:xfrm>
+            <a:off x="457200" y="2880360"/>
+            <a:ext cx="54864" cy="1143000"/>
           </a:xfrm>
           <a:prstGeom prst="rect">
             <a:avLst/>
@@ -5065,19 +8494,26 @@
           <a:solidFill>
             <a:srgbClr val="0078D4"/>
           </a:solidFill>
-          <a:ln/>
-        </p:spPr>
-      </p:sp>
-      <p:sp>
-        <p:nvSpPr>
-          <p:cNvPr id="3" name="Text 1"/>
-          <p:cNvSpPr/>
-          <p:nvPr/>
-        </p:nvSpPr>
-        <p:spPr>
-          <a:xfrm>
-            <a:off x="457200" y="292608"/>
-            <a:ext cx="11247120" cy="274320"/>
+          <a:ln w="12700">
+            <a:solidFill>
+              <a:srgbClr val="333333">
+                <a:alpha val="0"/>
+              </a:srgbClr>
+            </a:solidFill>
+            <a:prstDash val="solid"/>
+          </a:ln>
+        </p:spPr>
+      </p:sp>
+      <p:sp>
+        <p:nvSpPr>
+          <p:cNvPr id="7" name="Text 5"/>
+          <p:cNvSpPr/>
+          <p:nvPr/>
+        </p:nvSpPr>
+        <p:spPr>
+          <a:xfrm>
+            <a:off x="685800" y="2880360"/>
+            <a:ext cx="10789920" cy="365760"/>
           </a:xfrm>
           <a:prstGeom prst="rect">
             <a:avLst/>
@@ -5093,30 +8529,30 @@
               <a:buNone/>
             </a:pPr>
             <a:r>
-              <a:rPr lang="en-US" sz="1100" b="1" spc="100" kern="0" dirty="0">
-                <a:solidFill>
-                  <a:srgbClr val="0078D4"/>
-                </a:solidFill>
-                <a:latin typeface="Segoe UI" pitchFamily="34" charset="0"/>
-                <a:ea typeface="Segoe UI" pitchFamily="34" charset="-122"/>
-                <a:cs typeface="Segoe UI" pitchFamily="34" charset="-120"/>
-              </a:rPr>
-              <a:t>PROGRAMME</a:t>
-            </a:r>
-            <a:endParaRPr lang="en-US" sz="1100" dirty="0"/>
-          </a:p>
-        </p:txBody>
-      </p:sp>
-      <p:sp>
-        <p:nvSpPr>
-          <p:cNvPr id="4" name="Text 2"/>
-          <p:cNvSpPr/>
-          <p:nvPr/>
-        </p:nvSpPr>
-        <p:spPr>
-          <a:xfrm>
-            <a:off x="457200" y="548640"/>
-            <a:ext cx="11247120" cy="640080"/>
+              <a:rPr lang="en-US" sz="2100" b="1" dirty="0">
+                <a:solidFill>
+                  <a:srgbClr val="243831"/>
+                </a:solidFill>
+                <a:latin typeface="Segoe UI" pitchFamily="34" charset="0"/>
+                <a:ea typeface="Segoe UI" pitchFamily="34" charset="-122"/>
+                <a:cs typeface="Segoe UI" pitchFamily="34" charset="-120"/>
+              </a:rPr>
+              <a:t>Ingestion positive avant zéro exception</a:t>
+            </a:r>
+            <a:endParaRPr lang="en-US" sz="2100" dirty="0"/>
+          </a:p>
+        </p:txBody>
+      </p:sp>
+      <p:sp>
+        <p:nvSpPr>
+          <p:cNvPr id="8" name="Text 6"/>
+          <p:cNvSpPr/>
+          <p:nvPr/>
+        </p:nvSpPr>
+        <p:spPr>
+          <a:xfrm>
+            <a:off x="685800" y="3337560"/>
+            <a:ext cx="10789920" cy="777240"/>
           </a:xfrm>
           <a:prstGeom prst="rect">
             <a:avLst/>
@@ -5132,281 +8568,57 @@
               <a:buNone/>
             </a:pPr>
             <a:r>
-              <a:rPr lang="en-US" sz="2600" b="1" dirty="0">
-                <a:solidFill>
-                  <a:srgbClr val="001B3D"/>
-                </a:solidFill>
-                <a:latin typeface="Segoe UI" pitchFamily="34" charset="0"/>
-                <a:ea typeface="Segoe UI" pitchFamily="34" charset="-122"/>
-                <a:cs typeface="Segoe UI" pitchFamily="34" charset="-120"/>
-              </a:rPr>
-              <a:t>Neuf labs, un déploiement réel</a:t>
-            </a:r>
-            <a:endParaRPr lang="en-US" sz="2600" dirty="0"/>
-          </a:p>
-        </p:txBody>
-      </p:sp>
-      <p:sp>
-        <p:nvSpPr>
-          <p:cNvPr id="5" name="Shape 3"/>
-          <p:cNvSpPr/>
-          <p:nvPr/>
-        </p:nvSpPr>
-        <p:spPr>
-          <a:xfrm>
-            <a:off x="457200" y="1188720"/>
-            <a:ext cx="11247120" cy="10973"/>
+              <a:rPr lang="en-US" sz="1800" dirty="0">
+                <a:solidFill>
+                  <a:srgbClr val="43544D"/>
+                </a:solidFill>
+                <a:latin typeface="Segoe UI" pitchFamily="34" charset="0"/>
+                <a:ea typeface="Segoe UI" pitchFamily="34" charset="-122"/>
+                <a:cs typeface="Segoe UI" pitchFamily="34" charset="-120"/>
+              </a:rPr>
+              <a:t>Corréler l’identifiant brut de réponse avec AppTraces, puis vérifier AppExceptions. Résultats vides ou invalides : échec ; zéro exception seul ne suffit pas.</a:t>
+            </a:r>
+            <a:endParaRPr lang="en-US" sz="1800" dirty="0"/>
+          </a:p>
+        </p:txBody>
+      </p:sp>
+      <p:sp>
+        <p:nvSpPr>
+          <p:cNvPr id="9" name="Shape 7"/>
+          <p:cNvSpPr/>
+          <p:nvPr/>
+        </p:nvSpPr>
+        <p:spPr>
+          <a:xfrm>
+            <a:off x="457200" y="4389120"/>
+            <a:ext cx="54864" cy="1143000"/>
           </a:xfrm>
           <a:prstGeom prst="rect">
             <a:avLst/>
           </a:prstGeom>
           <a:solidFill>
-            <a:srgbClr val="E1E5E8"/>
+            <a:srgbClr val="B22938"/>
           </a:solidFill>
-          <a:ln/>
-        </p:spPr>
-      </p:sp>
-      <p:sp>
-        <p:nvSpPr>
-          <p:cNvPr id="6" name="Text 4"/>
-          <p:cNvSpPr/>
-          <p:nvPr/>
-        </p:nvSpPr>
-        <p:spPr>
-          <a:xfrm>
-            <a:off x="548640" y="1463040"/>
-            <a:ext cx="11064240" cy="5029200"/>
-          </a:xfrm>
-          <a:prstGeom prst="rect">
-            <a:avLst/>
-          </a:prstGeom>
-          <a:noFill/>
-          <a:ln/>
-        </p:spPr>
-        <p:txBody>
-          <a:bodyPr wrap="square" rtlCol="0" anchor="t"/>
-          <a:lstStyle/>
-          <a:p>
-            <a:pPr marL="254000" indent="-254000">
-              <a:lnSpc>
-                <a:spcPct val="125000"/>
-              </a:lnSpc>
-              <a:buSzPct val="100000"/>
-              <a:buChar char="●"/>
-            </a:pPr>
-            <a:r>
-              <a:rPr lang="en-US" sz="1500" dirty="0">
-                <a:solidFill>
-                  <a:srgbClr val="1A1A1A"/>
-                </a:solidFill>
-                <a:latin typeface="Segoe UI" pitchFamily="34" charset="0"/>
-                <a:ea typeface="Segoe UI" pitchFamily="34" charset="-122"/>
-                <a:cs typeface="Segoe UI" pitchFamily="34" charset="-120"/>
-              </a:rPr>
-              <a:t>Lab 00 — Prérequis et configuration de l’environnement</a:t>
-            </a:r>
-            <a:endParaRPr lang="en-US" sz="1500" dirty="0"/>
-          </a:p>
-          <a:p>
-            <a:pPr marL="254000" indent="-254000">
-              <a:lnSpc>
-                <a:spcPct val="125000"/>
-              </a:lnSpc>
-              <a:buSzPct val="100000"/>
-              <a:buChar char="●"/>
-            </a:pPr>
-            <a:r>
-              <a:rPr lang="en-US" sz="1500" dirty="0">
-                <a:solidFill>
-                  <a:srgbClr val="1A1A1A"/>
-                </a:solidFill>
-                <a:latin typeface="Segoe UI" pitchFamily="34" charset="0"/>
-                <a:ea typeface="Segoe UI" pitchFamily="34" charset="-122"/>
-                <a:cs typeface="Segoe UI" pitchFamily="34" charset="-120"/>
-              </a:rPr>
-              <a:t>Lab 01 — Plongée dans l’architecture (superviseur/spécialistes LangGraph)</a:t>
-            </a:r>
-            <a:endParaRPr lang="en-US" sz="1500" dirty="0"/>
-          </a:p>
-          <a:p>
-            <a:pPr marL="254000" indent="-254000">
-              <a:lnSpc>
-                <a:spcPct val="125000"/>
-              </a:lnSpc>
-              <a:buSzPct val="100000"/>
-              <a:buChar char="●"/>
-            </a:pPr>
-            <a:r>
-              <a:rPr lang="en-US" sz="1500" dirty="0">
-                <a:solidFill>
-                  <a:srgbClr val="1A1A1A"/>
-                </a:solidFill>
-                <a:latin typeface="Segoe UI" pitchFamily="34" charset="0"/>
-                <a:ea typeface="Segoe UI" pitchFamily="34" charset="-122"/>
-                <a:cs typeface="Segoe UI" pitchFamily="34" charset="-120"/>
-              </a:rPr>
-              <a:t>Lab 02 — Déployer les serveurs d’outils MCP</a:t>
-            </a:r>
-            <a:endParaRPr lang="en-US" sz="1500" dirty="0"/>
-          </a:p>
-          <a:p>
-            <a:pPr marL="254000" indent="-254000">
-              <a:lnSpc>
-                <a:spcPct val="125000"/>
-              </a:lnSpc>
-              <a:buSzPct val="100000"/>
-              <a:buChar char="●"/>
-            </a:pPr>
-            <a:r>
-              <a:rPr lang="en-US" sz="1500" dirty="0">
-                <a:solidFill>
-                  <a:srgbClr val="1A1A1A"/>
-                </a:solidFill>
-                <a:latin typeface="Segoe UI" pitchFamily="34" charset="0"/>
-                <a:ea typeface="Segoe UI" pitchFamily="34" charset="-122"/>
-                <a:cs typeface="Segoe UI" pitchFamily="34" charset="-120"/>
-              </a:rPr>
-              <a:t>Lab 03 — Provisionner et déployer l’agent hébergé (azd)</a:t>
-            </a:r>
-            <a:endParaRPr lang="en-US" sz="1500" dirty="0"/>
-          </a:p>
-          <a:p>
-            <a:pPr marL="254000" indent="-254000">
-              <a:lnSpc>
-                <a:spcPct val="125000"/>
-              </a:lnSpc>
-              <a:buSzPct val="100000"/>
-              <a:buChar char="●"/>
-            </a:pPr>
-            <a:r>
-              <a:rPr lang="en-US" sz="1500" dirty="0">
-                <a:solidFill>
-                  <a:srgbClr val="1A1A1A"/>
-                </a:solidFill>
-                <a:latin typeface="Segoe UI" pitchFamily="34" charset="0"/>
-                <a:ea typeface="Segoe UI" pitchFamily="34" charset="-122"/>
-                <a:cs typeface="Segoe UI" pitchFamily="34" charset="-120"/>
-              </a:rPr>
-              <a:t>Lab 04 — Invoquer l’agent et lire les traces</a:t>
-            </a:r>
-            <a:endParaRPr lang="en-US" sz="1500" dirty="0"/>
-          </a:p>
-          <a:p>
-            <a:pPr marL="254000" indent="-254000">
-              <a:lnSpc>
-                <a:spcPct val="125000"/>
-              </a:lnSpc>
-              <a:buSzPct val="100000"/>
-              <a:buChar char="●"/>
-            </a:pPr>
-            <a:r>
-              <a:rPr lang="en-US" sz="1500" dirty="0">
-                <a:solidFill>
-                  <a:srgbClr val="1A1A1A"/>
-                </a:solidFill>
-                <a:latin typeface="Segoe UI" pitchFamily="34" charset="0"/>
-                <a:ea typeface="Segoe UI" pitchFamily="34" charset="-122"/>
-                <a:cs typeface="Segoe UI" pitchFamily="34" charset="-120"/>
-              </a:rPr>
-              <a:t>Lab 05 — Évaluations : déterministes + LLM-as-judge</a:t>
-            </a:r>
-            <a:endParaRPr lang="en-US" sz="1500" dirty="0"/>
-          </a:p>
-          <a:p>
-            <a:pPr marL="254000" indent="-254000">
-              <a:lnSpc>
-                <a:spcPct val="125000"/>
-              </a:lnSpc>
-              <a:buSzPct val="100000"/>
-              <a:buChar char="●"/>
-            </a:pPr>
-            <a:r>
-              <a:rPr lang="en-US" sz="1500" dirty="0">
-                <a:solidFill>
-                  <a:srgbClr val="1A1A1A"/>
-                </a:solidFill>
-                <a:latin typeface="Segoe UI" pitchFamily="34" charset="0"/>
-                <a:ea typeface="Segoe UI" pitchFamily="34" charset="-122"/>
-                <a:cs typeface="Segoe UI" pitchFamily="34" charset="-120"/>
-              </a:rPr>
-              <a:t>Lab 06 — CI/CD : pipeline contrôlé par évaluation</a:t>
-            </a:r>
-            <a:endParaRPr lang="en-US" sz="1500" dirty="0"/>
-          </a:p>
-          <a:p>
-            <a:pPr marL="254000" indent="-254000">
-              <a:lnSpc>
-                <a:spcPct val="125000"/>
-              </a:lnSpc>
-              <a:buSzPct val="100000"/>
-              <a:buChar char="●"/>
-            </a:pPr>
-            <a:r>
-              <a:rPr lang="en-US" sz="1500" dirty="0">
-                <a:solidFill>
-                  <a:srgbClr val="1A1A1A"/>
-                </a:solidFill>
-                <a:latin typeface="Segoe UI" pitchFamily="34" charset="0"/>
-                <a:ea typeface="Segoe UI" pitchFamily="34" charset="-122"/>
-                <a:cs typeface="Segoe UI" pitchFamily="34" charset="-120"/>
-              </a:rPr>
-              <a:t>Lab 07 — Dépannage réel : erreur RBAC 401</a:t>
-            </a:r>
-            <a:endParaRPr lang="en-US" sz="1500" dirty="0"/>
-          </a:p>
-          <a:p>
-            <a:pPr marL="254000" indent="-254000">
-              <a:lnSpc>
-                <a:spcPct val="125000"/>
-              </a:lnSpc>
-              <a:buSzPct val="100000"/>
-              <a:buChar char="●"/>
-            </a:pPr>
-            <a:r>
-              <a:rPr lang="en-US" sz="1500" dirty="0">
-                <a:solidFill>
-                  <a:srgbClr val="1A1A1A"/>
-                </a:solidFill>
-                <a:latin typeface="Segoe UI" pitchFamily="34" charset="0"/>
-                <a:ea typeface="Segoe UI" pitchFamily="34" charset="-122"/>
-                <a:cs typeface="Segoe UI" pitchFamily="34" charset="-120"/>
-              </a:rPr>
-              <a:t>Lab 08 — Préparation à la production et portes de décision</a:t>
-            </a:r>
-            <a:endParaRPr lang="en-US" sz="1500" dirty="0"/>
-          </a:p>
-        </p:txBody>
-      </p:sp>
-      <p:sp>
-        <p:nvSpPr>
-          <p:cNvPr id="8" name="Shape 5"/>
-          <p:cNvSpPr/>
-          <p:nvPr/>
-        </p:nvSpPr>
-        <p:spPr>
-          <a:xfrm>
-            <a:off x="0" y="6784848"/>
-            <a:ext cx="12188952" cy="27432"/>
-          </a:xfrm>
-          <a:prstGeom prst="rect">
-            <a:avLst/>
-          </a:prstGeom>
-          <a:solidFill>
-            <a:srgbClr val="E1E5E8"/>
-          </a:solidFill>
-          <a:ln/>
-        </p:spPr>
-      </p:sp>
-      <p:sp>
-        <p:nvSpPr>
-          <p:cNvPr id="9" name="Text 6"/>
-          <p:cNvSpPr/>
-          <p:nvPr/>
-        </p:nvSpPr>
-        <p:spPr>
-          <a:xfrm>
-            <a:off x="457200" y="6537960"/>
-            <a:ext cx="8229600" cy="256032"/>
+          <a:ln w="12700">
+            <a:solidFill>
+              <a:srgbClr val="333333">
+                <a:alpha val="0"/>
+              </a:srgbClr>
+            </a:solidFill>
+            <a:prstDash val="solid"/>
+          </a:ln>
+        </p:spPr>
+      </p:sp>
+      <p:sp>
+        <p:nvSpPr>
+          <p:cNvPr id="10" name="Text 8"/>
+          <p:cNvSpPr/>
+          <p:nvPr/>
+        </p:nvSpPr>
+        <p:spPr>
+          <a:xfrm>
+            <a:off x="685800" y="4389120"/>
+            <a:ext cx="10789920" cy="365760"/>
           </a:xfrm>
           <a:prstGeom prst="rect">
             <a:avLst/>
@@ -5422,23 +8634,107 @@
               <a:buNone/>
             </a:pPr>
             <a:r>
-              <a:rPr lang="en-US" sz="900" dirty="0">
-                <a:solidFill>
-                  <a:srgbClr val="767676"/>
-                </a:solidFill>
-                <a:latin typeface="Segoe UI" pitchFamily="34" charset="0"/>
-                <a:ea typeface="Segoe UI" pitchFamily="34" charset="-122"/>
-                <a:cs typeface="Segoe UI" pitchFamily="34" charset="-120"/>
-              </a:rPr>
-              <a:t>Atelier Foundry Hosted Agents</a:t>
-            </a:r>
-            <a:endParaRPr lang="en-US" sz="900" dirty="0"/>
-          </a:p>
-        </p:txBody>
-      </p:sp>
-      <p:sp>
-        <p:nvSpPr>
-          <p:cNvPr id="10" name="Text 7"/>
+              <a:rPr lang="en-US" sz="2100" b="1" dirty="0">
+                <a:solidFill>
+                  <a:srgbClr val="243831"/>
+                </a:solidFill>
+                <a:latin typeface="Segoe UI" pitchFamily="34" charset="0"/>
+                <a:ea typeface="Segoe UI" pitchFamily="34" charset="-122"/>
+                <a:cs typeface="Segoe UI" pitchFamily="34" charset="-120"/>
+              </a:rPr>
+              <a:t>Staging 50k TPM / production 10k TPM</a:t>
+            </a:r>
+            <a:endParaRPr lang="en-US" sz="2100" dirty="0"/>
+          </a:p>
+        </p:txBody>
+      </p:sp>
+      <p:sp>
+        <p:nvSpPr>
+          <p:cNvPr id="11" name="Text 9"/>
+          <p:cNvSpPr/>
+          <p:nvPr/>
+        </p:nvSpPr>
+        <p:spPr>
+          <a:xfrm>
+            <a:off x="685800" y="4846320"/>
+            <a:ext cx="10789920" cy="777240"/>
+          </a:xfrm>
+          <a:prstGeom prst="rect">
+            <a:avLst/>
+          </a:prstGeom>
+          <a:noFill/>
+          <a:ln/>
+        </p:spPr>
+        <p:txBody>
+          <a:bodyPr wrap="square" rtlCol="0" anchor="ctr"/>
+          <a:lstStyle/>
+          <a:p>
+            <a:pPr indent="0" marL="0">
+              <a:buNone/>
+            </a:pPr>
+            <a:r>
+              <a:rPr lang="en-US" sz="1800" dirty="0">
+                <a:solidFill>
+                  <a:srgbClr val="43544D"/>
+                </a:solidFill>
+                <a:latin typeface="Segoe UI" pitchFamily="34" charset="0"/>
+                <a:ea typeface="Segoe UI" pitchFamily="34" charset="-122"/>
+                <a:cs typeface="Segoe UI" pitchFamily="34" charset="-120"/>
+              </a:rPr>
+              <a:t>Trois échecs de charge dans 34424723263 corrélés aux 429 modèle. Hausse staging approuvée ; contrôle inchangé à cinq flux réussi. Ni SLA ni test de saturation.</a:t>
+            </a:r>
+            <a:endParaRPr lang="en-US" sz="1800" dirty="0"/>
+          </a:p>
+        </p:txBody>
+      </p:sp>
+      <p:sp>
+        <p:nvSpPr>
+          <p:cNvPr id="12" name="Text 10">
+            <a:hlinkClick r:id="rId1" tooltip=""/>
+          </p:cNvPr>
+          <p:cNvSpPr/>
+          <p:nvPr/>
+        </p:nvSpPr>
+        <p:spPr>
+          <a:xfrm>
+            <a:off x="457200" y="6446520"/>
+            <a:ext cx="10698480" cy="228600"/>
+          </a:xfrm>
+          <a:prstGeom prst="rect">
+            <a:avLst/>
+          </a:prstGeom>
+          <a:noFill/>
+          <a:ln/>
+        </p:spPr>
+        <p:txBody>
+          <a:bodyPr wrap="square" rtlCol="0" anchor="ctr"/>
+          <a:lstStyle/>
+          <a:p>
+            <a:pPr indent="0" marL="0">
+              <a:buNone/>
+            </a:pPr>
+            <a:r>
+              <a:rPr lang="en-US" sz="1000" u="sng" dirty="0">
+                <a:solidFill>
+                  <a:srgbClr val="075C9B"/>
+                </a:solidFill>
+                <a:hlinkClick r:id="rId1" invalidUrl="" action="" tgtFrame="" tooltip="" history="1" highlightClick="0" endSnd="0">
+                  <a:extLst>
+                    <a:ext uri="{A12FA001-AC4F-418D-AE19-62706E023703}">
+                      <ahyp:hlinkClr xmlns:ahyp="http://schemas.microsoft.com/office/drawing/2018/hyperlinkcolor" val="tx"/>
+                    </a:ext>
+                  </a:extLst>
+                </a:hlinkClick>
+              </a:rPr>
+              <a:t>Implementation snapshot | 2026-09-10 UTC | 15098b7 + demo UI refresh</a:t>
+            </a:r>
+            <a:endParaRPr lang="en-US" sz="1000" dirty="0"/>
+          </a:p>
+        </p:txBody>
+      </p:sp>
+      <p:sp>
+        <p:nvSpPr>
+          <p:cNvPr id="14" name="Text 11"/>
           <p:cNvSpPr/>
           <p:nvPr/>
         </p:nvSpPr>
@@ -5466,7 +8762,7 @@
                   <a:srgbClr val="767676"/>
                 </a:solidFill>
               </a:rPr>
-              <a:t>6 / 14</a:t>
+              <a:t>6 / 19</a:t>
             </a:r>
             <a:endParaRPr lang="en-US" sz="900" dirty="0"/>
           </a:p>
@@ -5486,7 +8782,7 @@
     <p:bg>
       <p:bgPr>
         <a:solidFill>
-          <a:srgbClr val="FAFBFC"/>
+          <a:srgbClr val="FFFFFF"/>
         </a:solidFill>
       </p:bgPr>
     </p:bg>
@@ -5506,34 +8802,14 @@
       </p:grpSpPr>
       <p:sp>
         <p:nvSpPr>
-          <p:cNvPr id="2" name="Shape 0"/>
-          <p:cNvSpPr/>
-          <p:nvPr/>
-        </p:nvSpPr>
-        <p:spPr>
-          <a:xfrm>
-            <a:off x="0" y="0"/>
-            <a:ext cx="12188952" cy="82296"/>
-          </a:xfrm>
-          <a:prstGeom prst="rect">
-            <a:avLst/>
-          </a:prstGeom>
-          <a:solidFill>
-            <a:srgbClr val="0078D4"/>
-          </a:solidFill>
-          <a:ln/>
-        </p:spPr>
-      </p:sp>
-      <p:sp>
-        <p:nvSpPr>
-          <p:cNvPr id="3" name="Text 1"/>
-          <p:cNvSpPr/>
-          <p:nvPr/>
-        </p:nvSpPr>
-        <p:spPr>
-          <a:xfrm>
-            <a:off x="457200" y="292608"/>
-            <a:ext cx="11247120" cy="274320"/>
+          <p:cNvPr id="2" name="Text 0"/>
+          <p:cNvSpPr/>
+          <p:nvPr/>
+        </p:nvSpPr>
+        <p:spPr>
+          <a:xfrm>
+            <a:off x="411480" y="146304"/>
+            <a:ext cx="11338560" cy="502920"/>
           </a:xfrm>
           <a:prstGeom prst="rect">
             <a:avLst/>
@@ -5549,30 +8825,54 @@
               <a:buNone/>
             </a:pPr>
             <a:r>
-              <a:rPr lang="en-US" sz="1100" b="1" spc="100" kern="0" dirty="0">
-                <a:solidFill>
-                  <a:srgbClr val="0078D4"/>
-                </a:solidFill>
-                <a:latin typeface="Segoe UI" pitchFamily="34" charset="0"/>
-                <a:ea typeface="Segoe UI" pitchFamily="34" charset="-122"/>
-                <a:cs typeface="Segoe UI" pitchFamily="34" charset="-120"/>
-              </a:rPr>
-              <a:t>ARCHITECTURE</a:t>
-            </a:r>
-            <a:endParaRPr lang="en-US" sz="1100" dirty="0"/>
-          </a:p>
-        </p:txBody>
-      </p:sp>
-      <p:sp>
-        <p:nvSpPr>
-          <p:cNvPr id="4" name="Text 2"/>
-          <p:cNvSpPr/>
-          <p:nvPr/>
-        </p:nvSpPr>
-        <p:spPr>
-          <a:xfrm>
-            <a:off x="457200" y="548640"/>
-            <a:ext cx="11247120" cy="640080"/>
+              <a:rPr lang="en-US" sz="2200" b="1" dirty="0">
+                <a:solidFill>
+                  <a:srgbClr val="146C54"/>
+                </a:solidFill>
+                <a:latin typeface="Segoe UI" pitchFamily="34" charset="0"/>
+                <a:ea typeface="Segoe UI" pitchFamily="34" charset="-122"/>
+                <a:cs typeface="Segoe UI" pitchFamily="34" charset="-120"/>
+              </a:rPr>
+              <a:t>Preuve historique: Mise en production vérifiée : staging vers production</a:t>
+            </a:r>
+            <a:endParaRPr lang="en-US" sz="2200" dirty="0"/>
+          </a:p>
+        </p:txBody>
+      </p:sp>
+      <p:pic>
+        <p:nvPicPr>
+          <p:cNvPr id="3" name="Image 0" descr="Mise en production vérifiée : staging vers production">    </p:cNvPr>
+          <p:cNvPicPr>
+            <a:picLocks noChangeAspect="1"/>
+          </p:cNvPicPr>
+          <p:nvPr/>
+        </p:nvPicPr>
+        <p:blipFill>
+          <a:blip r:embed="rId1"/>
+          <a:stretch>
+            <a:fillRect/>
+          </a:stretch>
+        </p:blipFill>
+        <p:spPr>
+          <a:xfrm>
+            <a:off x="2068830" y="777240"/>
+            <a:ext cx="8051292" cy="5367528"/>
+          </a:xfrm>
+          <a:prstGeom prst="rect">
+            <a:avLst/>
+          </a:prstGeom>
+        </p:spPr>
+      </p:pic>
+      <p:sp>
+        <p:nvSpPr>
+          <p:cNvPr id="4" name="Text 1"/>
+          <p:cNvSpPr/>
+          <p:nvPr/>
+        </p:nvSpPr>
+        <p:spPr>
+          <a:xfrm>
+            <a:off x="411480" y="6245352"/>
+            <a:ext cx="11338560" cy="256032"/>
           </a:xfrm>
           <a:prstGeom prst="rect">
             <a:avLst/>
@@ -5588,197 +8888,32 @@
               <a:buNone/>
             </a:pPr>
             <a:r>
-              <a:rPr lang="en-US" sz="2600" b="1" dirty="0">
-                <a:solidFill>
-                  <a:srgbClr val="001B3D"/>
-                </a:solidFill>
-                <a:latin typeface="Segoe UI" pitchFamily="34" charset="0"/>
-                <a:ea typeface="Segoe UI" pitchFamily="34" charset="-122"/>
-                <a:cs typeface="Segoe UI" pitchFamily="34" charset="-120"/>
-              </a:rPr>
-              <a:t>Graphe superviseur + spécialistes</a:t>
-            </a:r>
-            <a:endParaRPr lang="en-US" sz="2600" dirty="0"/>
-          </a:p>
-        </p:txBody>
-      </p:sp>
-      <p:sp>
-        <p:nvSpPr>
-          <p:cNvPr id="5" name="Shape 3"/>
-          <p:cNvSpPr/>
-          <p:nvPr/>
-        </p:nvSpPr>
-        <p:spPr>
-          <a:xfrm>
-            <a:off x="457200" y="1188720"/>
-            <a:ext cx="11247120" cy="10973"/>
-          </a:xfrm>
-          <a:prstGeom prst="rect">
-            <a:avLst/>
-          </a:prstGeom>
-          <a:solidFill>
-            <a:srgbClr val="E1E5E8"/>
-          </a:solidFill>
-          <a:ln/>
-        </p:spPr>
-      </p:sp>
-      <p:sp>
-        <p:nvSpPr>
-          <p:cNvPr id="6" name="Text 4"/>
-          <p:cNvSpPr/>
-          <p:nvPr/>
-        </p:nvSpPr>
-        <p:spPr>
-          <a:xfrm>
-            <a:off x="548640" y="1463040"/>
-            <a:ext cx="11064240" cy="5029200"/>
-          </a:xfrm>
-          <a:prstGeom prst="rect">
-            <a:avLst/>
-          </a:prstGeom>
-          <a:noFill/>
-          <a:ln/>
-        </p:spPr>
-        <p:txBody>
-          <a:bodyPr wrap="square" rtlCol="0" anchor="t"/>
-          <a:lstStyle/>
-          <a:p>
-            <a:pPr marL="254000" indent="-254000">
-              <a:lnSpc>
-                <a:spcPct val="125000"/>
-              </a:lnSpc>
-              <a:buSzPct val="100000"/>
-              <a:buChar char="●"/>
-            </a:pPr>
-            <a:r>
-              <a:rPr lang="en-US" sz="1500" dirty="0">
-                <a:solidFill>
-                  <a:srgbClr val="1A1A1A"/>
-                </a:solidFill>
-                <a:latin typeface="Segoe UI" pitchFamily="34" charset="0"/>
-                <a:ea typeface="Segoe UI" pitchFamily="34" charset="-122"/>
-                <a:cs typeface="Segoe UI" pitchFamily="34" charset="-120"/>
-              </a:rPr>
-              <a:t>Un superviseur LangGraph route vers trois nœuds spécialistes : Enquêteur de preuves, Analyste de risque, Rédacteur de rapport</a:t>
-            </a:r>
-            <a:endParaRPr lang="en-US" sz="1500" dirty="0"/>
-          </a:p>
-          <a:p>
-            <a:pPr marL="254000" indent="-254000">
-              <a:lnSpc>
-                <a:spcPct val="125000"/>
-              </a:lnSpc>
-              <a:buSzPct val="100000"/>
-              <a:buChar char="●"/>
-            </a:pPr>
-            <a:r>
-              <a:rPr lang="en-US" sz="1500" dirty="0">
-                <a:solidFill>
-                  <a:srgbClr val="1A1A1A"/>
-                </a:solidFill>
-                <a:latin typeface="Segoe UI" pitchFamily="34" charset="0"/>
-                <a:ea typeface="Segoe UI" pitchFamily="34" charset="-122"/>
-                <a:cs typeface="Segoe UI" pitchFamily="34" charset="-120"/>
-              </a:rPr>
-              <a:t>Chaque spécialiste a son propre prompt, ses permissions d’outils et ses critères d’évaluation</a:t>
-            </a:r>
-            <a:endParaRPr lang="en-US" sz="1500" dirty="0"/>
-          </a:p>
-          <a:p>
-            <a:pPr marL="254000" indent="-254000">
-              <a:lnSpc>
-                <a:spcPct val="125000"/>
-              </a:lnSpc>
-              <a:buSzPct val="100000"/>
-              <a:buChar char="●"/>
-            </a:pPr>
-            <a:r>
-              <a:rPr lang="en-US" sz="1500" dirty="0">
-                <a:solidFill>
-                  <a:srgbClr val="1A1A1A"/>
-                </a:solidFill>
-                <a:latin typeface="Segoe UI" pitchFamily="34" charset="0"/>
-                <a:ea typeface="Segoe UI" pitchFamily="34" charset="-122"/>
-                <a:cs typeface="Segoe UI" pitchFamily="34" charset="-120"/>
-              </a:rPr>
-              <a:t>Isolation des outils par rôle : Enquêteur de preuves → defender-conn uniquement, Analyste de risque → anomaly-conn uniquement</a:t>
-            </a:r>
-            <a:endParaRPr lang="en-US" sz="1500" dirty="0"/>
-          </a:p>
-          <a:p>
-            <a:pPr marL="254000" indent="-254000">
-              <a:lnSpc>
-                <a:spcPct val="125000"/>
-              </a:lnSpc>
-              <a:buSzPct val="100000"/>
-              <a:buChar char="●"/>
-            </a:pPr>
-            <a:r>
-              <a:rPr lang="en-US" sz="1500" dirty="0">
-                <a:solidFill>
-                  <a:srgbClr val="1A1A1A"/>
-                </a:solidFill>
-                <a:latin typeface="Segoe UI" pitchFamily="34" charset="0"/>
-                <a:ea typeface="Segoe UI" pitchFamily="34" charset="-122"/>
-                <a:cs typeface="Segoe UI" pitchFamily="34" charset="-120"/>
-              </a:rPr>
-              <a:t>Le Rédacteur de rapport n’a aucun accès aux outils — il ne fait que synthétiser</a:t>
-            </a:r>
-            <a:endParaRPr lang="en-US" sz="1500" dirty="0"/>
-          </a:p>
-          <a:p>
-            <a:pPr marL="254000" indent="-254000">
-              <a:lnSpc>
-                <a:spcPct val="125000"/>
-              </a:lnSpc>
-              <a:buSzPct val="100000"/>
-              <a:buChar char="●"/>
-            </a:pPr>
-            <a:r>
-              <a:rPr lang="en-US" sz="1500" dirty="0">
-                <a:solidFill>
-                  <a:srgbClr val="1A1A1A"/>
-                </a:solidFill>
-                <a:latin typeface="Segoe UI" pitchFamily="34" charset="0"/>
-                <a:ea typeface="Segoe UI" pitchFamily="34" charset="-122"/>
-                <a:cs typeface="Segoe UI" pitchFamily="34" charset="-120"/>
-              </a:rPr>
-              <a:t>Le transport MCP versionné, les jetons Entra renouvelés et les connexions RemoteTool fonctionnent ; les reçus prouvent les appels des spécialistes</a:t>
-            </a:r>
-            <a:endParaRPr lang="en-US" sz="1500" dirty="0"/>
-          </a:p>
-        </p:txBody>
-      </p:sp>
-      <p:sp>
-        <p:nvSpPr>
-          <p:cNvPr id="8" name="Shape 5"/>
-          <p:cNvSpPr/>
-          <p:nvPr/>
-        </p:nvSpPr>
-        <p:spPr>
-          <a:xfrm>
-            <a:off x="0" y="6784848"/>
-            <a:ext cx="12188952" cy="27432"/>
-          </a:xfrm>
-          <a:prstGeom prst="rect">
-            <a:avLst/>
-          </a:prstGeom>
-          <a:solidFill>
-            <a:srgbClr val="E1E5E8"/>
-          </a:solidFill>
-          <a:ln/>
-        </p:spPr>
-      </p:sp>
-      <p:sp>
-        <p:nvSpPr>
-          <p:cNvPr id="9" name="Text 6"/>
-          <p:cNvSpPr/>
-          <p:nvPr/>
-        </p:nvSpPr>
-        <p:spPr>
-          <a:xfrm>
-            <a:off x="457200" y="6537960"/>
-            <a:ext cx="8229600" cy="256032"/>
+              <a:rPr lang="en-US" sz="1000" dirty="0">
+                <a:solidFill>
+                  <a:srgbClr val="53635E"/>
+                </a:solidFill>
+                <a:latin typeface="Segoe UI" pitchFamily="34" charset="0"/>
+                <a:ea typeface="Segoe UI" pitchFamily="34" charset="-122"/>
+                <a:cs typeface="Segoe UI" pitchFamily="34" charset="-120"/>
+              </a:rPr>
+              <a:t>Rendu des artefacts, pas une capture du portail. Données synthétiques. Sources et SHA-256 conservés.</a:t>
+            </a:r>
+            <a:endParaRPr lang="en-US" sz="1000" dirty="0"/>
+          </a:p>
+        </p:txBody>
+      </p:sp>
+      <p:sp>
+        <p:nvSpPr>
+          <p:cNvPr id="5" name="Text 2">
+            <a:hlinkClick r:id="rId2" tooltip=""/>
+          </p:cNvPr>
+          <p:cNvSpPr/>
+          <p:nvPr/>
+        </p:nvSpPr>
+        <p:spPr>
+          <a:xfrm>
+            <a:off x="411480" y="6528816"/>
+            <a:ext cx="10515600" cy="201168"/>
           </a:xfrm>
           <a:prstGeom prst="rect">
             <a:avLst/>
@@ -5794,15 +8929,22 @@
               <a:buNone/>
             </a:pPr>
             <a:r>
-              <a:rPr lang="en-US" sz="900" dirty="0">
-                <a:solidFill>
-                  <a:srgbClr val="767676"/>
-                </a:solidFill>
-                <a:latin typeface="Segoe UI" pitchFamily="34" charset="0"/>
-                <a:ea typeface="Segoe UI" pitchFamily="34" charset="-122"/>
-                <a:cs typeface="Segoe UI" pitchFamily="34" charset="-120"/>
-              </a:rPr>
-              <a:t>Atelier Foundry Hosted Agents</a:t>
+              <a:rPr lang="en-US" sz="900" u="sng" dirty="0">
+                <a:solidFill>
+                  <a:srgbClr val="075C9B"/>
+                </a:solidFill>
+                <a:latin typeface="Segoe UI" pitchFamily="34" charset="0"/>
+                <a:ea typeface="Segoe UI" pitchFamily="34" charset="-122"/>
+                <a:cs typeface="Segoe UI" pitchFamily="34" charset="-120"/>
+                <a:hlinkClick r:id="rId2" invalidUrl="" action="" tgtFrame="" tooltip="" history="1" highlightClick="0" endSnd="0">
+                  <a:extLst>
+                    <a:ext uri="{A12FA001-AC4F-418D-AE19-62706E023703}">
+                      <ahyp:hlinkClr xmlns:ahyp="http://schemas.microsoft.com/office/drawing/2018/hyperlinkcolor" val="tx"/>
+                    </a:ext>
+                  </a:extLst>
+                </a:hlinkClick>
+              </a:rPr>
+              <a:t>GitHub Actions 34178081808 | f3da486 | 2026-09-08 UTC</a:t>
             </a:r>
             <a:endParaRPr lang="en-US" sz="900" dirty="0"/>
           </a:p>
@@ -5810,7 +8952,7 @@
       </p:sp>
       <p:sp>
         <p:nvSpPr>
-          <p:cNvPr id="10" name="Text 7"/>
+          <p:cNvPr id="7" name="Text 3"/>
           <p:cNvSpPr/>
           <p:nvPr/>
         </p:nvSpPr>
@@ -5838,7 +8980,7 @@
                   <a:srgbClr val="767676"/>
                 </a:solidFill>
               </a:rPr>
-              <a:t>7 / 14</a:t>
+              <a:t>7 / 19</a:t>
             </a:r>
             <a:endParaRPr lang="en-US" sz="900" dirty="0"/>
           </a:p>
@@ -5858,7 +9000,7 @@
     <p:bg>
       <p:bgPr>
         <a:solidFill>
-          <a:srgbClr val="FAFBFC"/>
+          <a:srgbClr val="FFFFFF"/>
         </a:solidFill>
       </p:bgPr>
     </p:bg>
@@ -5878,34 +9020,14 @@
       </p:grpSpPr>
       <p:sp>
         <p:nvSpPr>
-          <p:cNvPr id="2" name="Shape 0"/>
-          <p:cNvSpPr/>
-          <p:nvPr/>
-        </p:nvSpPr>
-        <p:spPr>
-          <a:xfrm>
-            <a:off x="0" y="0"/>
-            <a:ext cx="12188952" cy="82296"/>
-          </a:xfrm>
-          <a:prstGeom prst="rect">
-            <a:avLst/>
-          </a:prstGeom>
-          <a:solidFill>
-            <a:srgbClr val="0078D4"/>
-          </a:solidFill>
-          <a:ln/>
-        </p:spPr>
-      </p:sp>
-      <p:sp>
-        <p:nvSpPr>
-          <p:cNvPr id="3" name="Text 1"/>
-          <p:cNvSpPr/>
-          <p:nvPr/>
-        </p:nvSpPr>
-        <p:spPr>
-          <a:xfrm>
-            <a:off x="457200" y="292608"/>
-            <a:ext cx="11247120" cy="274320"/>
+          <p:cNvPr id="2" name="Text 0"/>
+          <p:cNvSpPr/>
+          <p:nvPr/>
+        </p:nvSpPr>
+        <p:spPr>
+          <a:xfrm>
+            <a:off x="411480" y="146304"/>
+            <a:ext cx="11338560" cy="502920"/>
           </a:xfrm>
           <a:prstGeom prst="rect">
             <a:avLst/>
@@ -5921,30 +9043,54 @@
               <a:buNone/>
             </a:pPr>
             <a:r>
-              <a:rPr lang="en-US" sz="1100" b="1" spc="100" kern="0" dirty="0">
-                <a:solidFill>
-                  <a:srgbClr val="0078D4"/>
-                </a:solidFill>
-                <a:latin typeface="Segoe UI" pitchFamily="34" charset="0"/>
-                <a:ea typeface="Segoe UI" pitchFamily="34" charset="-122"/>
-                <a:cs typeface="Segoe UI" pitchFamily="34" charset="-120"/>
-              </a:rPr>
-              <a:t>OUTILS</a:t>
-            </a:r>
-            <a:endParaRPr lang="en-US" sz="1100" dirty="0"/>
-          </a:p>
-        </p:txBody>
-      </p:sp>
-      <p:sp>
-        <p:nvSpPr>
-          <p:cNvPr id="4" name="Text 2"/>
-          <p:cNvSpPr/>
-          <p:nvPr/>
-        </p:nvSpPr>
-        <p:spPr>
-          <a:xfrm>
-            <a:off x="457200" y="548640"/>
-            <a:ext cx="11247120" cy="640080"/>
+              <a:rPr lang="en-US" sz="2200" b="1" dirty="0">
+                <a:solidFill>
+                  <a:srgbClr val="146C54"/>
+                </a:solidFill>
+                <a:latin typeface="Segoe UI" pitchFamily="34" charset="0"/>
+                <a:ea typeface="Segoe UI" pitchFamily="34" charset="-122"/>
+                <a:cs typeface="Segoe UI" pitchFamily="34" charset="-120"/>
+              </a:rPr>
+              <a:t>Preuve historique: Porte qualité : 21 vérifications sur 21 réussies</a:t>
+            </a:r>
+            <a:endParaRPr lang="en-US" sz="2200" dirty="0"/>
+          </a:p>
+        </p:txBody>
+      </p:sp>
+      <p:pic>
+        <p:nvPicPr>
+          <p:cNvPr id="3" name="Image 0" descr="Porte qualité : 21 vérifications sur 21 réussies">    </p:cNvPr>
+          <p:cNvPicPr>
+            <a:picLocks noChangeAspect="1"/>
+          </p:cNvPicPr>
+          <p:nvPr/>
+        </p:nvPicPr>
+        <p:blipFill>
+          <a:blip r:embed="rId1"/>
+          <a:stretch>
+            <a:fillRect/>
+          </a:stretch>
+        </p:blipFill>
+        <p:spPr>
+          <a:xfrm>
+            <a:off x="2068830" y="777240"/>
+            <a:ext cx="8051292" cy="5367528"/>
+          </a:xfrm>
+          <a:prstGeom prst="rect">
+            <a:avLst/>
+          </a:prstGeom>
+        </p:spPr>
+      </p:pic>
+      <p:sp>
+        <p:nvSpPr>
+          <p:cNvPr id="4" name="Text 1"/>
+          <p:cNvSpPr/>
+          <p:nvPr/>
+        </p:nvSpPr>
+        <p:spPr>
+          <a:xfrm>
+            <a:off x="411480" y="6245352"/>
+            <a:ext cx="11338560" cy="256032"/>
           </a:xfrm>
           <a:prstGeom prst="rect">
             <a:avLst/>
@@ -5960,197 +9106,32 @@
               <a:buNone/>
             </a:pPr>
             <a:r>
-              <a:rPr lang="en-US" sz="2600" b="1" dirty="0">
-                <a:solidFill>
-                  <a:srgbClr val="001B3D"/>
-                </a:solidFill>
-                <a:latin typeface="Segoe UI" pitchFamily="34" charset="0"/>
-                <a:ea typeface="Segoe UI" pitchFamily="34" charset="-122"/>
-                <a:cs typeface="Segoe UI" pitchFamily="34" charset="-120"/>
-              </a:rPr>
-              <a:t>Quatre couches : implémenter, héberger, enregistrer, consommer</a:t>
-            </a:r>
-            <a:endParaRPr lang="en-US" sz="2600" dirty="0"/>
-          </a:p>
-        </p:txBody>
-      </p:sp>
-      <p:sp>
-        <p:nvSpPr>
-          <p:cNvPr id="5" name="Shape 3"/>
-          <p:cNvSpPr/>
-          <p:nvPr/>
-        </p:nvSpPr>
-        <p:spPr>
-          <a:xfrm>
-            <a:off x="457200" y="1188720"/>
-            <a:ext cx="11247120" cy="10973"/>
-          </a:xfrm>
-          <a:prstGeom prst="rect">
-            <a:avLst/>
-          </a:prstGeom>
-          <a:solidFill>
-            <a:srgbClr val="E1E5E8"/>
-          </a:solidFill>
-          <a:ln/>
-        </p:spPr>
-      </p:sp>
-      <p:sp>
-        <p:nvSpPr>
-          <p:cNvPr id="6" name="Text 4"/>
-          <p:cNvSpPr/>
-          <p:nvPr/>
-        </p:nvSpPr>
-        <p:spPr>
-          <a:xfrm>
-            <a:off x="548640" y="1463040"/>
-            <a:ext cx="11064240" cy="5029200"/>
-          </a:xfrm>
-          <a:prstGeom prst="rect">
-            <a:avLst/>
-          </a:prstGeom>
-          <a:noFill/>
-          <a:ln/>
-        </p:spPr>
-        <p:txBody>
-          <a:bodyPr wrap="square" rtlCol="0" anchor="t"/>
-          <a:lstStyle/>
-          <a:p>
-            <a:pPr marL="254000" indent="-254000">
-              <a:lnSpc>
-                <a:spcPct val="125000"/>
-              </a:lnSpc>
-              <a:buSzPct val="100000"/>
-              <a:buChar char="●"/>
-            </a:pPr>
-            <a:r>
-              <a:rPr lang="en-US" sz="1500" dirty="0">
-                <a:solidFill>
-                  <a:srgbClr val="1A1A1A"/>
-                </a:solidFill>
-                <a:latin typeface="Segoe UI" pitchFamily="34" charset="0"/>
-                <a:ea typeface="Segoe UI" pitchFamily="34" charset="-122"/>
-                <a:cs typeface="Segoe UI" pitchFamily="34" charset="-120"/>
-              </a:rPr>
-              <a:t>Couche 1 — Implémentation : code de serveur MCP personnalisé (outils Defender, outils anomalie)</a:t>
-            </a:r>
-            <a:endParaRPr lang="en-US" sz="1500" dirty="0"/>
-          </a:p>
-          <a:p>
-            <a:pPr marL="254000" indent="-254000">
-              <a:lnSpc>
-                <a:spcPct val="125000"/>
-              </a:lnSpc>
-              <a:buSzPct val="100000"/>
-              <a:buChar char="●"/>
-            </a:pPr>
-            <a:r>
-              <a:rPr lang="en-US" sz="1500" dirty="0">
-                <a:solidFill>
-                  <a:srgbClr val="1A1A1A"/>
-                </a:solidFill>
-                <a:latin typeface="Segoe UI" pitchFamily="34" charset="0"/>
-                <a:ea typeface="Segoe UI" pitchFamily="34" charset="-122"/>
-                <a:cs typeface="Segoe UI" pitchFamily="34" charset="-120"/>
-              </a:rPr>
-              <a:t>Couche 2 — Hébergement : Azure Container Apps indépendantes, authentification/réseau/santé propres</a:t>
-            </a:r>
-            <a:endParaRPr lang="en-US" sz="1500" dirty="0"/>
-          </a:p>
-          <a:p>
-            <a:pPr marL="254000" indent="-254000">
-              <a:lnSpc>
-                <a:spcPct val="125000"/>
-              </a:lnSpc>
-              <a:buSzPct val="100000"/>
-              <a:buChar char="●"/>
-            </a:pPr>
-            <a:r>
-              <a:rPr lang="en-US" sz="1500" dirty="0">
-                <a:solidFill>
-                  <a:srgbClr val="1A1A1A"/>
-                </a:solidFill>
-                <a:latin typeface="Segoe UI" pitchFamily="34" charset="0"/>
-                <a:ea typeface="Segoe UI" pitchFamily="34" charset="-122"/>
-                <a:cs typeface="Segoe UI" pitchFamily="34" charset="-120"/>
-              </a:rPr>
-              <a:t>Couche 3 — Enregistrement : les connexions Foundry définissent le point de terminaison + la politique d’identifiants par serveur MCP</a:t>
-            </a:r>
-            <a:endParaRPr lang="en-US" sz="1500" dirty="0"/>
-          </a:p>
-          <a:p>
-            <a:pPr marL="254000" indent="-254000">
-              <a:lnSpc>
-                <a:spcPct val="125000"/>
-              </a:lnSpc>
-              <a:buSzPct val="100000"/>
-              <a:buChar char="●"/>
-            </a:pPr>
-            <a:r>
-              <a:rPr lang="en-US" sz="1500" dirty="0">
-                <a:solidFill>
-                  <a:srgbClr val="1A1A1A"/>
-                </a:solidFill>
-                <a:latin typeface="Segoe UI" pitchFamily="34" charset="0"/>
-                <a:ea typeface="Segoe UI" pitchFamily="34" charset="-122"/>
-                <a:cs typeface="Segoe UI" pitchFamily="34" charset="-120"/>
-              </a:rPr>
-              <a:t>Couche 4 — Consommation : la Foundry Toolbox agrège les outils enregistrés pour réutilisation entre agents</a:t>
-            </a:r>
-            <a:endParaRPr lang="en-US" sz="1500" dirty="0"/>
-          </a:p>
-          <a:p>
-            <a:pPr marL="254000" indent="-254000">
-              <a:lnSpc>
-                <a:spcPct val="125000"/>
-              </a:lnSpc>
-              <a:buSzPct val="100000"/>
-              <a:buChar char="●"/>
-            </a:pPr>
-            <a:r>
-              <a:rPr lang="en-US" sz="1500" dirty="0">
-                <a:solidFill>
-                  <a:srgbClr val="1A1A1A"/>
-                </a:solidFill>
-                <a:latin typeface="Segoe UI" pitchFamily="34" charset="0"/>
-                <a:ea typeface="Segoe UI" pitchFamily="34" charset="-122"/>
-                <a:cs typeface="Segoe UI" pitchFamily="34" charset="-120"/>
-              </a:rPr>
-              <a:t>La Toolbox est la couche d’enregistrement/agrégation — pas le runtime d’hébergement de votre code MCP</a:t>
-            </a:r>
-            <a:endParaRPr lang="en-US" sz="1500" dirty="0"/>
-          </a:p>
-        </p:txBody>
-      </p:sp>
-      <p:sp>
-        <p:nvSpPr>
-          <p:cNvPr id="8" name="Shape 5"/>
-          <p:cNvSpPr/>
-          <p:nvPr/>
-        </p:nvSpPr>
-        <p:spPr>
-          <a:xfrm>
-            <a:off x="0" y="6784848"/>
-            <a:ext cx="12188952" cy="27432"/>
-          </a:xfrm>
-          <a:prstGeom prst="rect">
-            <a:avLst/>
-          </a:prstGeom>
-          <a:solidFill>
-            <a:srgbClr val="E1E5E8"/>
-          </a:solidFill>
-          <a:ln/>
-        </p:spPr>
-      </p:sp>
-      <p:sp>
-        <p:nvSpPr>
-          <p:cNvPr id="9" name="Text 6"/>
-          <p:cNvSpPr/>
-          <p:nvPr/>
-        </p:nvSpPr>
-        <p:spPr>
-          <a:xfrm>
-            <a:off x="457200" y="6537960"/>
-            <a:ext cx="8229600" cy="256032"/>
+              <a:rPr lang="en-US" sz="1000" dirty="0">
+                <a:solidFill>
+                  <a:srgbClr val="53635E"/>
+                </a:solidFill>
+                <a:latin typeface="Segoe UI" pitchFamily="34" charset="0"/>
+                <a:ea typeface="Segoe UI" pitchFamily="34" charset="-122"/>
+                <a:cs typeface="Segoe UI" pitchFamily="34" charset="-120"/>
+              </a:rPr>
+              <a:t>Rendu des artefacts, pas une capture du portail. Données synthétiques. Sources et SHA-256 conservés.</a:t>
+            </a:r>
+            <a:endParaRPr lang="en-US" sz="1000" dirty="0"/>
+          </a:p>
+        </p:txBody>
+      </p:sp>
+      <p:sp>
+        <p:nvSpPr>
+          <p:cNvPr id="5" name="Text 2">
+            <a:hlinkClick r:id="rId2" tooltip=""/>
+          </p:cNvPr>
+          <p:cNvSpPr/>
+          <p:nvPr/>
+        </p:nvSpPr>
+        <p:spPr>
+          <a:xfrm>
+            <a:off x="411480" y="6528816"/>
+            <a:ext cx="10515600" cy="201168"/>
           </a:xfrm>
           <a:prstGeom prst="rect">
             <a:avLst/>
@@ -6166,15 +9147,22 @@
               <a:buNone/>
             </a:pPr>
             <a:r>
-              <a:rPr lang="en-US" sz="900" dirty="0">
-                <a:solidFill>
-                  <a:srgbClr val="767676"/>
-                </a:solidFill>
-                <a:latin typeface="Segoe UI" pitchFamily="34" charset="0"/>
-                <a:ea typeface="Segoe UI" pitchFamily="34" charset="-122"/>
-                <a:cs typeface="Segoe UI" pitchFamily="34" charset="-120"/>
-              </a:rPr>
-              <a:t>Atelier Foundry Hosted Agents</a:t>
+              <a:rPr lang="en-US" sz="900" u="sng" dirty="0">
+                <a:solidFill>
+                  <a:srgbClr val="075C9B"/>
+                </a:solidFill>
+                <a:latin typeface="Segoe UI" pitchFamily="34" charset="0"/>
+                <a:ea typeface="Segoe UI" pitchFamily="34" charset="-122"/>
+                <a:cs typeface="Segoe UI" pitchFamily="34" charset="-120"/>
+                <a:hlinkClick r:id="rId2" invalidUrl="" action="" tgtFrame="" tooltip="" history="1" highlightClick="0" endSnd="0">
+                  <a:extLst>
+                    <a:ext uri="{A12FA001-AC4F-418D-AE19-62706E023703}">
+                      <ahyp:hlinkClr xmlns:ahyp="http://schemas.microsoft.com/office/drawing/2018/hyperlinkcolor" val="tx"/>
+                    </a:ext>
+                  </a:extLst>
+                </a:hlinkClick>
+              </a:rPr>
+              <a:t>GitHub Actions 34178081808 | f3da486 | 2026-09-08 UTC</a:t>
             </a:r>
             <a:endParaRPr lang="en-US" sz="900" dirty="0"/>
           </a:p>
@@ -6182,7 +9170,7 @@
       </p:sp>
       <p:sp>
         <p:nvSpPr>
-          <p:cNvPr id="10" name="Text 7"/>
+          <p:cNvPr id="7" name="Text 3"/>
           <p:cNvSpPr/>
           <p:nvPr/>
         </p:nvSpPr>
@@ -6210,7 +9198,7 @@
                   <a:srgbClr val="767676"/>
                 </a:solidFill>
               </a:rPr>
-              <a:t>8 / 14</a:t>
+              <a:t>8 / 19</a:t>
             </a:r>
             <a:endParaRPr lang="en-US" sz="900" dirty="0"/>
           </a:p>
@@ -6230,7 +9218,7 @@
     <p:bg>
       <p:bgPr>
         <a:solidFill>
-          <a:srgbClr val="FAFBFC"/>
+          <a:srgbClr val="FFFFFF"/>
         </a:solidFill>
       </p:bgPr>
     </p:bg>
@@ -6250,34 +9238,14 @@
       </p:grpSpPr>
       <p:sp>
         <p:nvSpPr>
-          <p:cNvPr id="2" name="Shape 0"/>
-          <p:cNvSpPr/>
-          <p:nvPr/>
-        </p:nvSpPr>
-        <p:spPr>
-          <a:xfrm>
-            <a:off x="0" y="0"/>
-            <a:ext cx="12188952" cy="82296"/>
-          </a:xfrm>
-          <a:prstGeom prst="rect">
-            <a:avLst/>
-          </a:prstGeom>
-          <a:solidFill>
-            <a:srgbClr val="0078D4"/>
-          </a:solidFill>
-          <a:ln/>
-        </p:spPr>
-      </p:sp>
-      <p:sp>
-        <p:nvSpPr>
-          <p:cNvPr id="3" name="Text 1"/>
-          <p:cNvSpPr/>
-          <p:nvPr/>
-        </p:nvSpPr>
-        <p:spPr>
-          <a:xfrm>
-            <a:off x="457200" y="292608"/>
-            <a:ext cx="11247120" cy="274320"/>
+          <p:cNvPr id="2" name="Text 0"/>
+          <p:cNvSpPr/>
+          <p:nvPr/>
+        </p:nvSpPr>
+        <p:spPr>
+          <a:xfrm>
+            <a:off x="411480" y="146304"/>
+            <a:ext cx="11338560" cy="502920"/>
           </a:xfrm>
           <a:prstGeom prst="rect">
             <a:avLst/>
@@ -6293,30 +9261,54 @@
               <a:buNone/>
             </a:pPr>
             <a:r>
-              <a:rPr lang="en-US" sz="1100" b="1" spc="100" kern="0" dirty="0">
-                <a:solidFill>
-                  <a:srgbClr val="0078D4"/>
-                </a:solidFill>
-                <a:latin typeface="Segoe UI" pitchFamily="34" charset="0"/>
-                <a:ea typeface="Segoe UI" pitchFamily="34" charset="-122"/>
-                <a:cs typeface="Segoe UI" pitchFamily="34" charset="-120"/>
-              </a:rPr>
-              <a:t>DÉPLOIEMENT</a:t>
-            </a:r>
-            <a:endParaRPr lang="en-US" sz="1100" dirty="0"/>
-          </a:p>
-        </p:txBody>
-      </p:sp>
-      <p:sp>
-        <p:nvSpPr>
-          <p:cNvPr id="4" name="Text 2"/>
-          <p:cNvSpPr/>
-          <p:nvPr/>
-        </p:nvSpPr>
-        <p:spPr>
-          <a:xfrm>
-            <a:off x="457200" y="548640"/>
-            <a:ext cx="11247120" cy="640080"/>
+              <a:rPr lang="en-US" sz="2200" b="1" dirty="0">
+                <a:solidFill>
+                  <a:srgbClr val="146C54"/>
+                </a:solidFill>
+                <a:latin typeface="Segoe UI" pitchFamily="34" charset="0"/>
+                <a:ea typeface="Segoe UI" pitchFamily="34" charset="-122"/>
+                <a:cs typeface="Segoe UI" pitchFamily="34" charset="-120"/>
+              </a:rPr>
+              <a:t>Preuve historique: Exécution des outils prouvée ; télémétrie synthétique</a:t>
+            </a:r>
+            <a:endParaRPr lang="en-US" sz="2200" dirty="0"/>
+          </a:p>
+        </p:txBody>
+      </p:sp>
+      <p:pic>
+        <p:nvPicPr>
+          <p:cNvPr id="3" name="Image 0" descr="Exécution des outils prouvée ; télémétrie synthétique">    </p:cNvPr>
+          <p:cNvPicPr>
+            <a:picLocks noChangeAspect="1"/>
+          </p:cNvPicPr>
+          <p:nvPr/>
+        </p:nvPicPr>
+        <p:blipFill>
+          <a:blip r:embed="rId1"/>
+          <a:stretch>
+            <a:fillRect/>
+          </a:stretch>
+        </p:blipFill>
+        <p:spPr>
+          <a:xfrm>
+            <a:off x="2068830" y="777240"/>
+            <a:ext cx="8051292" cy="5367528"/>
+          </a:xfrm>
+          <a:prstGeom prst="rect">
+            <a:avLst/>
+          </a:prstGeom>
+        </p:spPr>
+      </p:pic>
+      <p:sp>
+        <p:nvSpPr>
+          <p:cNvPr id="4" name="Text 1"/>
+          <p:cNvSpPr/>
+          <p:nvPr/>
+        </p:nvSpPr>
+        <p:spPr>
+          <a:xfrm>
+            <a:off x="411480" y="6245352"/>
+            <a:ext cx="11338560" cy="256032"/>
           </a:xfrm>
           <a:prstGeom prst="rect">
             <a:avLst/>
@@ -6332,197 +9324,32 @@
               <a:buNone/>
             </a:pPr>
             <a:r>
-              <a:rPr lang="en-US" sz="2600" b="1" dirty="0">
-                <a:solidFill>
-                  <a:srgbClr val="001B3D"/>
-                </a:solidFill>
-                <a:latin typeface="Segoe UI" pitchFamily="34" charset="0"/>
-                <a:ea typeface="Segoe UI" pitchFamily="34" charset="-122"/>
-                <a:cs typeface="Segoe UI" pitchFamily="34" charset="-120"/>
-              </a:rPr>
-              <a:t>Un manifeste : azure.yaml + azd</a:t>
-            </a:r>
-            <a:endParaRPr lang="en-US" sz="2600" dirty="0"/>
-          </a:p>
-        </p:txBody>
-      </p:sp>
-      <p:sp>
-        <p:nvSpPr>
-          <p:cNvPr id="5" name="Shape 3"/>
-          <p:cNvSpPr/>
-          <p:nvPr/>
-        </p:nvSpPr>
-        <p:spPr>
-          <a:xfrm>
-            <a:off x="457200" y="1188720"/>
-            <a:ext cx="11247120" cy="10973"/>
-          </a:xfrm>
-          <a:prstGeom prst="rect">
-            <a:avLst/>
-          </a:prstGeom>
-          <a:solidFill>
-            <a:srgbClr val="E1E5E8"/>
-          </a:solidFill>
-          <a:ln/>
-        </p:spPr>
-      </p:sp>
-      <p:sp>
-        <p:nvSpPr>
-          <p:cNvPr id="6" name="Text 4"/>
-          <p:cNvSpPr/>
-          <p:nvPr/>
-        </p:nvSpPr>
-        <p:spPr>
-          <a:xfrm>
-            <a:off x="548640" y="1463040"/>
-            <a:ext cx="11064240" cy="5029200"/>
-          </a:xfrm>
-          <a:prstGeom prst="rect">
-            <a:avLst/>
-          </a:prstGeom>
-          <a:noFill/>
-          <a:ln/>
-        </p:spPr>
-        <p:txBody>
-          <a:bodyPr wrap="square" rtlCol="0" anchor="t"/>
-          <a:lstStyle/>
-          <a:p>
-            <a:pPr marL="254000" indent="-254000">
-              <a:lnSpc>
-                <a:spcPct val="125000"/>
-              </a:lnSpc>
-              <a:buSzPct val="100000"/>
-              <a:buChar char="●"/>
-            </a:pPr>
-            <a:r>
-              <a:rPr lang="en-US" sz="1500" dirty="0">
-                <a:solidFill>
-                  <a:srgbClr val="1A1A1A"/>
-                </a:solidFill>
-                <a:latin typeface="Segoe UI" pitchFamily="34" charset="0"/>
-                <a:ea typeface="Segoe UI" pitchFamily="34" charset="-122"/>
-                <a:cs typeface="Segoe UI" pitchFamily="34" charset="-120"/>
-              </a:rPr>
-              <a:t>azure.yaml câble le projet Foundry, le déploiement de modèle, les connexions Toolbox et le service d’agent hébergé</a:t>
-            </a:r>
-            <a:endParaRPr lang="en-US" sz="1500" dirty="0"/>
-          </a:p>
-          <a:p>
-            <a:pPr marL="254000" indent="-254000">
-              <a:lnSpc>
-                <a:spcPct val="125000"/>
-              </a:lnSpc>
-              <a:buSzPct val="100000"/>
-              <a:buChar char="●"/>
-            </a:pPr>
-            <a:r>
-              <a:rPr lang="en-US" sz="1500" dirty="0">
-                <a:solidFill>
-                  <a:srgbClr val="1A1A1A"/>
-                </a:solidFill>
-                <a:latin typeface="Segoe UI" pitchFamily="34" charset="0"/>
-                <a:ea typeface="Segoe UI" pitchFamily="34" charset="-122"/>
-                <a:cs typeface="Segoe UI" pitchFamily="34" charset="-120"/>
-              </a:rPr>
-              <a:t>kind: hosted — Foundry exploite le calcul de session ; vous ne possédez que le code du graphe</a:t>
-            </a:r>
-            <a:endParaRPr lang="en-US" sz="1500" dirty="0"/>
-          </a:p>
-          <a:p>
-            <a:pPr marL="254000" indent="-254000">
-              <a:lnSpc>
-                <a:spcPct val="125000"/>
-              </a:lnSpc>
-              <a:buSzPct val="100000"/>
-              <a:buChar char="●"/>
-            </a:pPr>
-            <a:r>
-              <a:rPr lang="en-US" sz="1500" dirty="0">
-                <a:solidFill>
-                  <a:srgbClr val="1A1A1A"/>
-                </a:solidFill>
-                <a:latin typeface="Segoe UI" pitchFamily="34" charset="0"/>
-                <a:ea typeface="Segoe UI" pitchFamily="34" charset="-122"/>
-                <a:cs typeface="Segoe UI" pitchFamily="34" charset="-120"/>
-              </a:rPr>
-              <a:t>dependencyResolution: remote_build — Foundry construit vos dépendances Python côté serveur</a:t>
-            </a:r>
-            <a:endParaRPr lang="en-US" sz="1500" dirty="0"/>
-          </a:p>
-          <a:p>
-            <a:pPr marL="254000" indent="-254000">
-              <a:lnSpc>
-                <a:spcPct val="125000"/>
-              </a:lnSpc>
-              <a:buSzPct val="100000"/>
-              <a:buChar char="●"/>
-            </a:pPr>
-            <a:r>
-              <a:rPr lang="en-US" sz="1500" dirty="0">
-                <a:solidFill>
-                  <a:srgbClr val="1A1A1A"/>
-                </a:solidFill>
-                <a:latin typeface="Segoe UI" pitchFamily="34" charset="0"/>
-                <a:ea typeface="Segoe UI" pitchFamily="34" charset="-122"/>
-                <a:cs typeface="Segoe UI" pitchFamily="34" charset="-120"/>
-              </a:rPr>
-              <a:t>protocol: responses — protocole Responses compatible OpenAI avec support du streaming</a:t>
-            </a:r>
-            <a:endParaRPr lang="en-US" sz="1500" dirty="0"/>
-          </a:p>
-          <a:p>
-            <a:pPr marL="254000" indent="-254000">
-              <a:lnSpc>
-                <a:spcPct val="125000"/>
-              </a:lnSpc>
-              <a:buSzPct val="100000"/>
-              <a:buChar char="●"/>
-            </a:pPr>
-            <a:r>
-              <a:rPr lang="en-US" sz="1500" dirty="0">
-                <a:solidFill>
-                  <a:srgbClr val="1A1A1A"/>
-                </a:solidFill>
-                <a:latin typeface="Segoe UI" pitchFamily="34" charset="0"/>
-                <a:ea typeface="Segoe UI" pitchFamily="34" charset="-122"/>
-                <a:cs typeface="Segoe UI" pitchFamily="34" charset="-120"/>
-              </a:rPr>
-              <a:t>azd provision crée l’infrastructure ; azd deploy publie une nouvelle version d’agent — cycles de vie séparés</a:t>
-            </a:r>
-            <a:endParaRPr lang="en-US" sz="1500" dirty="0"/>
-          </a:p>
-        </p:txBody>
-      </p:sp>
-      <p:sp>
-        <p:nvSpPr>
-          <p:cNvPr id="8" name="Shape 5"/>
-          <p:cNvSpPr/>
-          <p:nvPr/>
-        </p:nvSpPr>
-        <p:spPr>
-          <a:xfrm>
-            <a:off x="0" y="6784848"/>
-            <a:ext cx="12188952" cy="27432"/>
-          </a:xfrm>
-          <a:prstGeom prst="rect">
-            <a:avLst/>
-          </a:prstGeom>
-          <a:solidFill>
-            <a:srgbClr val="E1E5E8"/>
-          </a:solidFill>
-          <a:ln/>
-        </p:spPr>
-      </p:sp>
-      <p:sp>
-        <p:nvSpPr>
-          <p:cNvPr id="9" name="Text 6"/>
-          <p:cNvSpPr/>
-          <p:nvPr/>
-        </p:nvSpPr>
-        <p:spPr>
-          <a:xfrm>
-            <a:off x="457200" y="6537960"/>
-            <a:ext cx="8229600" cy="256032"/>
+              <a:rPr lang="en-US" sz="1000" dirty="0">
+                <a:solidFill>
+                  <a:srgbClr val="53635E"/>
+                </a:solidFill>
+                <a:latin typeface="Segoe UI" pitchFamily="34" charset="0"/>
+                <a:ea typeface="Segoe UI" pitchFamily="34" charset="-122"/>
+                <a:cs typeface="Segoe UI" pitchFamily="34" charset="-120"/>
+              </a:rPr>
+              <a:t>Rendu des artefacts, pas une capture du portail. Données synthétiques. Sources et SHA-256 conservés.</a:t>
+            </a:r>
+            <a:endParaRPr lang="en-US" sz="1000" dirty="0"/>
+          </a:p>
+        </p:txBody>
+      </p:sp>
+      <p:sp>
+        <p:nvSpPr>
+          <p:cNvPr id="5" name="Text 2">
+            <a:hlinkClick r:id="rId2" tooltip=""/>
+          </p:cNvPr>
+          <p:cNvSpPr/>
+          <p:nvPr/>
+        </p:nvSpPr>
+        <p:spPr>
+          <a:xfrm>
+            <a:off x="411480" y="6528816"/>
+            <a:ext cx="10515600" cy="201168"/>
           </a:xfrm>
           <a:prstGeom prst="rect">
             <a:avLst/>
@@ -6538,15 +9365,22 @@
               <a:buNone/>
             </a:pPr>
             <a:r>
-              <a:rPr lang="en-US" sz="900" dirty="0">
-                <a:solidFill>
-                  <a:srgbClr val="767676"/>
-                </a:solidFill>
-                <a:latin typeface="Segoe UI" pitchFamily="34" charset="0"/>
-                <a:ea typeface="Segoe UI" pitchFamily="34" charset="-122"/>
-                <a:cs typeface="Segoe UI" pitchFamily="34" charset="-120"/>
-              </a:rPr>
-              <a:t>Atelier Foundry Hosted Agents</a:t>
+              <a:rPr lang="en-US" sz="900" u="sng" dirty="0">
+                <a:solidFill>
+                  <a:srgbClr val="075C9B"/>
+                </a:solidFill>
+                <a:latin typeface="Segoe UI" pitchFamily="34" charset="0"/>
+                <a:ea typeface="Segoe UI" pitchFamily="34" charset="-122"/>
+                <a:cs typeface="Segoe UI" pitchFamily="34" charset="-120"/>
+                <a:hlinkClick r:id="rId2" invalidUrl="" action="" tgtFrame="" tooltip="" history="1" highlightClick="0" endSnd="0">
+                  <a:extLst>
+                    <a:ext uri="{A12FA001-AC4F-418D-AE19-62706E023703}">
+                      <ahyp:hlinkClr xmlns:ahyp="http://schemas.microsoft.com/office/drawing/2018/hyperlinkcolor" val="tx"/>
+                    </a:ext>
+                  </a:extLst>
+                </a:hlinkClick>
+              </a:rPr>
+              <a:t>GitHub Actions 34178081808 | f3da486 | 2026-09-08 UTC</a:t>
             </a:r>
             <a:endParaRPr lang="en-US" sz="900" dirty="0"/>
           </a:p>
@@ -6554,7 +9388,7 @@
       </p:sp>
       <p:sp>
         <p:nvSpPr>
-          <p:cNvPr id="10" name="Text 7"/>
+          <p:cNvPr id="7" name="Text 3"/>
           <p:cNvSpPr/>
           <p:nvPr/>
         </p:nvSpPr>
@@ -6582,7 +9416,7 @@
                   <a:srgbClr val="767676"/>
                 </a:solidFill>
               </a:rPr>
-              <a:t>9 / 14</a:t>
+              <a:t>9 / 19</a:t>
             </a:r>
             <a:endParaRPr lang="en-US" sz="900" dirty="0"/>
           </a:p>
